--- a/Bases de Datos II/Clases/Clase 7 - Indices y particionamiento/Presentacion.pptx
+++ b/Bases de Datos II/Clases/Clase 7 - Indices y particionamiento/Presentacion.pptx
@@ -57,7 +57,6 @@
     <p:sldId id="305" r:id="rId57"/>
     <p:sldId id="306" r:id="rId58"/>
     <p:sldId id="307" r:id="rId59"/>
-    <p:sldId id="308" r:id="rId60"/>
   </p:sldIdLst>
   <p:sldSz cx="12191695" cy="6858000" type="screen4x3"/>
   <p:notesSz cx="6858000" cy="9144000"/>
@@ -624,7 +623,12 @@
           <a:lstStyle/>
           <a:p>
             <a:r>
-              <a:t>Sin esa consulta no hay evidencia del enrutamiento, solo un INSERT que no dio error, y la rubrica lo pide explicitamente.</a:t>
+              <a:t>Fuera de la lamina (habla de la practica, no del tema):</a:t>
+            </a:r>
+          </a:p>
+          <a:p>
+            <a:r>
+              <a:t>- Un aviso concreto: idx_cita_fecha no es ninguno de los cinco, el sufijo es _fecha_hora como la columna, y ese fue durante un tiempo el nombre que aparecia en el material; si alguien lo escribe asi pierde puntos por el nombre y no por el concepto.</a:t>
             </a:r>
           </a:p>
         </p:txBody>
@@ -694,12 +698,7 @@
           <a:lstStyle/>
           <a:p>
             <a:r>
-              <a:t>El script trae cinco bloques y el orden importa.</a:t>
-            </a:r>
-          </a:p>
-          <a:p>
-            <a:r>
-              <a:t>Lo que no se puede hacer es medir en una base de 20 filas: el plan no va a cambiar y el grupo se va a llevar la conclusion contraria.</a:t>
+              <a:t>Segundo, los CREATE INDEX.</a:t>
             </a:r>
           </a:p>
         </p:txBody>
@@ -769,22 +768,548 @@
           <a:lstStyle/>
           <a:p>
             <a:r>
-              <a:t>Ahi corre la demo, ahi se resuelve el taller y ahi se califica, asi que no hay razon para trabajar en otro sitio.</a:t>
-            </a:r>
-          </a:p>
-          <a:p>
-            <a:r>
-              <a:t>Lo que si se puede medir aqui: el cambio de Seq Scan a Index Scan, la eleccion entre dos indices que compiten, el efecto del orden de columnas con su DROP INDEX, el particionamiento declarativo completo y la poda en el plan, y el tamano de cada indice con pg_relation_size.</a:t>
-            </a:r>
-          </a:p>
-          <a:p>
-            <a:r>
-              <a:t>Lo que NO se puede medir, y hay que declararlo en el informe en vez de inventarlo: los tiempos con la memoria intermedia vacia, porque vaciarla exige privilegios de administrador; el tiempo de creacion de un indice sobre decenas de millones de filas; la fragmentacion despues de meses de escrituras; la degradacion medible de un INSERT con diez indices, que necesita una carga sostenida; y cualquier cosa que exija dos sesiones simultaneas, porque PGlite corre una sola, que es el tema de la Clase 10.</a:t>
-            </a:r>
-          </a:p>
-          <a:p>
-            <a:r>
-              <a:t>Esa lista de limites es la seccion 5 de la pregunta 5 y vale puntos: se pierde por omitirla, no por tenerla.</a:t>
+              <a:t>Fuera de la lamina (habla de la practica, no del tema):</a:t>
+            </a:r>
+          </a:p>
+          <a:p>
+            <a:r>
+              <a:t>- El enunciado ademas exige comentar CUAL de los dos indices sobre fecha_hora eligio el planeador para C1, y la rubrica descuenta si no se comenta: no basta pegar el plan, hay que leerlo.</a:t>
+            </a:r>
+          </a:p>
+        </p:txBody>
+      </p:sp>
+      <p:sp>
+        <p:nvSpPr>
+          <p:cNvPr id="4" name="Slide Number Placeholder 3"/>
+          <p:cNvSpPr>
+            <a:spLocks noGrp="1"/>
+          </p:cNvSpPr>
+          <p:nvPr>
+            <p:ph type="sldNum" idx="5" sz="quarter"/>
+          </p:nvPr>
+        </p:nvSpPr>
+        <p:spPr/>
+      </p:sp>
+    </p:spTree>
+  </p:cSld>
+  <p:clrMapOvr>
+    <a:masterClrMapping/>
+  </p:clrMapOvr>
+</p:notes>
+</file>
+
+<file path=ppt/notesSlides/notesSlide13.xml><?xml version="1.0" encoding="utf-8"?>
+<p:notes xmlns:a="http://schemas.openxmlformats.org/drawingml/2006/main" xmlns:p="http://schemas.openxmlformats.org/presentationml/2006/main" xmlns:r="http://schemas.openxmlformats.org/officeDocument/2006/relationships">
+  <p:cSld>
+    <p:spTree>
+      <p:nvGrpSpPr>
+        <p:cNvPr id="1" name=""/>
+        <p:cNvGrpSpPr/>
+        <p:nvPr/>
+      </p:nvGrpSpPr>
+      <p:grpSpPr>
+        <a:xfrm>
+          <a:off x="0" y="0"/>
+          <a:ext cx="0" cy="0"/>
+          <a:chOff x="0" y="0"/>
+          <a:chExt cx="0" cy="0"/>
+        </a:xfrm>
+      </p:grpSpPr>
+      <p:sp>
+        <p:nvSpPr>
+          <p:cNvPr id="2" name="Slide Image Placeholder 1"/>
+          <p:cNvSpPr>
+            <a:spLocks noGrp="1"/>
+          </p:cNvSpPr>
+          <p:nvPr>
+            <p:ph type="sldImg" idx="2"/>
+          </p:nvPr>
+        </p:nvSpPr>
+        <p:spPr/>
+      </p:sp>
+      <p:sp>
+        <p:nvSpPr>
+          <p:cNvPr id="3" name="Notes Placeholder 2"/>
+          <p:cNvSpPr>
+            <a:spLocks noGrp="1"/>
+          </p:cNvSpPr>
+          <p:nvPr>
+            <p:ph type="body" idx="3" sz="quarter"/>
+          </p:nvPr>
+        </p:nvSpPr>
+        <p:spPr/>
+        <p:txBody>
+          <a:bodyPr/>
+          <a:lstStyle/>
+          <a:p>
+            <a:r>
+              <a:t>La pregunta 2 no pide creer la regla del prefijo izquierdo, pide demostrarla, y el docente tiene que poder anticipar los tres resultados.</a:t>
+            </a:r>
+          </a:p>
+          <a:p>
+            <a:r>
+              <a:t>Eso es la regla del prefijo izquierdo vista en vivo, y es la unica manera de que no quede como una frase que se memoriza.</a:t>
+            </a:r>
+          </a:p>
+          <a:p>
+            <a:r>
+              <a:t>Un plan distinto bien leido vale mas que el plan esperado copiado.</a:t>
+            </a:r>
+          </a:p>
+        </p:txBody>
+      </p:sp>
+      <p:sp>
+        <p:nvSpPr>
+          <p:cNvPr id="4" name="Slide Number Placeholder 3"/>
+          <p:cNvSpPr>
+            <a:spLocks noGrp="1"/>
+          </p:cNvSpPr>
+          <p:nvPr>
+            <p:ph type="sldNum" idx="5" sz="quarter"/>
+          </p:nvPr>
+        </p:nvSpPr>
+        <p:spPr/>
+      </p:sp>
+    </p:spTree>
+  </p:cSld>
+  <p:clrMapOvr>
+    <a:masterClrMapping/>
+  </p:clrMapOvr>
+</p:notes>
+</file>
+
+<file path=ppt/notesSlides/notesSlide14.xml><?xml version="1.0" encoding="utf-8"?>
+<p:notes xmlns:a="http://schemas.openxmlformats.org/drawingml/2006/main" xmlns:p="http://schemas.openxmlformats.org/presentationml/2006/main" xmlns:r="http://schemas.openxmlformats.org/officeDocument/2006/relationships">
+  <p:cSld>
+    <p:spTree>
+      <p:nvGrpSpPr>
+        <p:cNvPr id="1" name=""/>
+        <p:cNvGrpSpPr/>
+        <p:nvPr/>
+      </p:nvGrpSpPr>
+      <p:grpSpPr>
+        <a:xfrm>
+          <a:off x="0" y="0"/>
+          <a:ext cx="0" cy="0"/>
+          <a:chOff x="0" y="0"/>
+          <a:chExt cx="0" cy="0"/>
+        </a:xfrm>
+      </p:grpSpPr>
+      <p:sp>
+        <p:nvSpPr>
+          <p:cNvPr id="2" name="Slide Image Placeholder 1"/>
+          <p:cNvSpPr>
+            <a:spLocks noGrp="1"/>
+          </p:cNvSpPr>
+          <p:nvPr>
+            <p:ph type="sldImg" idx="2"/>
+          </p:nvPr>
+        </p:nvSpPr>
+        <p:spPr/>
+      </p:sp>
+      <p:sp>
+        <p:nvSpPr>
+          <p:cNvPr id="3" name="Notes Placeholder 2"/>
+          <p:cNvSpPr>
+            <a:spLocks noGrp="1"/>
+          </p:cNvSpPr>
+          <p:nvPr>
+            <p:ph type="body" idx="3" sz="quarter"/>
+          </p:nvPr>
+        </p:nvSpPr>
+        <p:spPr/>
+        <p:txBody>
+          <a:bodyPr/>
+          <a:lstStyle/>
+          <a:p>
+            <a:r>
+              <a:t>Ahora la advertencia importante para el docente, porque es la que ha costado puntos: eso NO significa que hoy el particionamiento sea una idea conceptual que solo se cuenta.</a:t>
+            </a:r>
+          </a:p>
+          <a:p>
+            <a:r>
+              <a:t>Lo que si es cierto, y hay que decirlo en la misma frase, es que con 5.010 filas la ganancia de RENDIMIENTO no es apreciable: lo que se demuestra hoy es que el motor descarta particiones enteras antes de leer, y que archivar un ano se vuelve trivial.</a:t>
+            </a:r>
+          </a:p>
+        </p:txBody>
+      </p:sp>
+      <p:sp>
+        <p:nvSpPr>
+          <p:cNvPr id="4" name="Slide Number Placeholder 3"/>
+          <p:cNvSpPr>
+            <a:spLocks noGrp="1"/>
+          </p:cNvSpPr>
+          <p:nvPr>
+            <p:ph type="sldNum" idx="5" sz="quarter"/>
+          </p:nvPr>
+        </p:nvSpPr>
+        <p:spPr/>
+      </p:sp>
+    </p:spTree>
+  </p:cSld>
+  <p:clrMapOvr>
+    <a:masterClrMapping/>
+  </p:clrMapOvr>
+</p:notes>
+</file>
+
+<file path=ppt/notesSlides/notesSlide15.xml><?xml version="1.0" encoding="utf-8"?>
+<p:notes xmlns:a="http://schemas.openxmlformats.org/drawingml/2006/main" xmlns:p="http://schemas.openxmlformats.org/presentationml/2006/main" xmlns:r="http://schemas.openxmlformats.org/officeDocument/2006/relationships">
+  <p:cSld>
+    <p:spTree>
+      <p:nvGrpSpPr>
+        <p:cNvPr id="1" name=""/>
+        <p:cNvGrpSpPr/>
+        <p:nvPr/>
+      </p:nvGrpSpPr>
+      <p:grpSpPr>
+        <a:xfrm>
+          <a:off x="0" y="0"/>
+          <a:ext cx="0" cy="0"/>
+          <a:chOff x="0" y="0"/>
+          <a:chExt cx="0" cy="0"/>
+        </a:xfrm>
+      </p:grpSpPr>
+      <p:sp>
+        <p:nvSpPr>
+          <p:cNvPr id="2" name="Slide Image Placeholder 1"/>
+          <p:cNvSpPr>
+            <a:spLocks noGrp="1"/>
+          </p:cNvSpPr>
+          <p:nvPr>
+            <p:ph type="sldImg" idx="2"/>
+          </p:nvPr>
+        </p:nvSpPr>
+        <p:spPr/>
+      </p:sp>
+      <p:sp>
+        <p:nvSpPr>
+          <p:cNvPr id="3" name="Notes Placeholder 2"/>
+          <p:cNvSpPr>
+            <a:spLocks noGrp="1"/>
+          </p:cNvSpPr>
+          <p:nvPr>
+            <p:ph type="body" idx="3" sz="quarter"/>
+          </p:nvPr>
+        </p:nvSpPr>
+        <p:spPr/>
+        <p:txBody>
+          <a:bodyPr/>
+          <a:lstStyle/>
+          <a:p>
+            <a:r>
+              <a:t>Fuera de la lamina (habla de la practica, no del tema):</a:t>
+            </a:r>
+          </a:p>
+          <a:p>
+            <a:r>
+              <a:t>- Si el docente anuncia que hoy no se implementa, el estudiante llega al taller con una respuesta en prosa a una pregunta que pide SQL ejecutado.</a:t>
+            </a:r>
+          </a:p>
+        </p:txBody>
+      </p:sp>
+      <p:sp>
+        <p:nvSpPr>
+          <p:cNvPr id="4" name="Slide Number Placeholder 3"/>
+          <p:cNvSpPr>
+            <a:spLocks noGrp="1"/>
+          </p:cNvSpPr>
+          <p:nvPr>
+            <p:ph type="sldNum" idx="5" sz="quarter"/>
+          </p:nvPr>
+        </p:nvSpPr>
+        <p:spPr/>
+      </p:sp>
+    </p:spTree>
+  </p:cSld>
+  <p:clrMapOvr>
+    <a:masterClrMapping/>
+  </p:clrMapOvr>
+</p:notes>
+</file>
+
+<file path=ppt/notesSlides/notesSlide16.xml><?xml version="1.0" encoding="utf-8"?>
+<p:notes xmlns:a="http://schemas.openxmlformats.org/drawingml/2006/main" xmlns:p="http://schemas.openxmlformats.org/presentationml/2006/main" xmlns:r="http://schemas.openxmlformats.org/officeDocument/2006/relationships">
+  <p:cSld>
+    <p:spTree>
+      <p:nvGrpSpPr>
+        <p:cNvPr id="1" name=""/>
+        <p:cNvGrpSpPr/>
+        <p:nvPr/>
+      </p:nvGrpSpPr>
+      <p:grpSpPr>
+        <a:xfrm>
+          <a:off x="0" y="0"/>
+          <a:ext cx="0" cy="0"/>
+          <a:chOff x="0" y="0"/>
+          <a:chExt cx="0" cy="0"/>
+        </a:xfrm>
+      </p:grpSpPr>
+      <p:sp>
+        <p:nvSpPr>
+          <p:cNvPr id="2" name="Slide Image Placeholder 1"/>
+          <p:cNvSpPr>
+            <a:spLocks noGrp="1"/>
+          </p:cNvSpPr>
+          <p:nvPr>
+            <p:ph type="sldImg" idx="2"/>
+          </p:nvPr>
+        </p:nvSpPr>
+        <p:spPr/>
+      </p:sp>
+      <p:sp>
+        <p:nvSpPr>
+          <p:cNvPr id="3" name="Notes Placeholder 2"/>
+          <p:cNvSpPr>
+            <a:spLocks noGrp="1"/>
+          </p:cNvSpPr>
+          <p:nvPr>
+            <p:ph type="body" idx="3" sz="quarter"/>
+          </p:nvPr>
+        </p:nvSpPr>
+        <p:spPr/>
+        <p:txBody>
+          <a:bodyPr/>
+          <a:lstStyle/>
+          <a:p>
+            <a:r>
+              <a:t>Sin esa consulta no hay evidencia del enrutamiento, solo un INSERT que no dio error, y la rubrica lo pide explicitamente.</a:t>
+            </a:r>
+          </a:p>
+        </p:txBody>
+      </p:sp>
+      <p:sp>
+        <p:nvSpPr>
+          <p:cNvPr id="4" name="Slide Number Placeholder 3"/>
+          <p:cNvSpPr>
+            <a:spLocks noGrp="1"/>
+          </p:cNvSpPr>
+          <p:nvPr>
+            <p:ph type="sldNum" idx="5" sz="quarter"/>
+          </p:nvPr>
+        </p:nvSpPr>
+        <p:spPr/>
+      </p:sp>
+    </p:spTree>
+  </p:cSld>
+  <p:clrMapOvr>
+    <a:masterClrMapping/>
+  </p:clrMapOvr>
+</p:notes>
+</file>
+
+<file path=ppt/notesSlides/notesSlide17.xml><?xml version="1.0" encoding="utf-8"?>
+<p:notes xmlns:a="http://schemas.openxmlformats.org/drawingml/2006/main" xmlns:p="http://schemas.openxmlformats.org/presentationml/2006/main" xmlns:r="http://schemas.openxmlformats.org/officeDocument/2006/relationships">
+  <p:cSld>
+    <p:spTree>
+      <p:nvGrpSpPr>
+        <p:cNvPr id="1" name=""/>
+        <p:cNvGrpSpPr/>
+        <p:nvPr/>
+      </p:nvGrpSpPr>
+      <p:grpSpPr>
+        <a:xfrm>
+          <a:off x="0" y="0"/>
+          <a:ext cx="0" cy="0"/>
+          <a:chOff x="0" y="0"/>
+          <a:chExt cx="0" cy="0"/>
+        </a:xfrm>
+      </p:grpSpPr>
+      <p:sp>
+        <p:nvSpPr>
+          <p:cNvPr id="2" name="Slide Image Placeholder 1"/>
+          <p:cNvSpPr>
+            <a:spLocks noGrp="1"/>
+          </p:cNvSpPr>
+          <p:nvPr>
+            <p:ph type="sldImg" idx="2"/>
+          </p:nvPr>
+        </p:nvSpPr>
+        <p:spPr/>
+      </p:sp>
+      <p:sp>
+        <p:nvSpPr>
+          <p:cNvPr id="3" name="Notes Placeholder 2"/>
+          <p:cNvSpPr>
+            <a:spLocks noGrp="1"/>
+          </p:cNvSpPr>
+          <p:nvPr>
+            <p:ph type="body" idx="3" sz="quarter"/>
+          </p:nvPr>
+        </p:nvSpPr>
+        <p:spPr/>
+        <p:txBody>
+          <a:bodyPr/>
+          <a:lstStyle/>
+          <a:p>
+            <a:r>
+              <a:t>Fuera de la lamina (habla de la practica, no del tema):</a:t>
+            </a:r>
+          </a:p>
+          <a:p>
+            <a:r>
+              <a:t>- Segunda: la ganancia de rendimiento con 5.010 filas no es apreciable, y reconocerlo suma puntos en vez de restarlos, porque la alternativa es inventar una mejora que el plan no muestra.</a:t>
+            </a:r>
+          </a:p>
+          <a:p/>
+          <a:p>
+            <a:r>
+              <a:t>Un veredicto de particionamiento tiene tres exigencias distintas.</a:t>
+            </a:r>
+          </a:p>
+        </p:txBody>
+      </p:sp>
+      <p:sp>
+        <p:nvSpPr>
+          <p:cNvPr id="4" name="Slide Number Placeholder 3"/>
+          <p:cNvSpPr>
+            <a:spLocks noGrp="1"/>
+          </p:cNvSpPr>
+          <p:nvPr>
+            <p:ph type="sldNum" idx="5" sz="quarter"/>
+          </p:nvPr>
+        </p:nvSpPr>
+        <p:spPr/>
+      </p:sp>
+    </p:spTree>
+  </p:cSld>
+  <p:clrMapOvr>
+    <a:masterClrMapping/>
+  </p:clrMapOvr>
+</p:notes>
+</file>
+
+<file path=ppt/notesSlides/notesSlide18.xml><?xml version="1.0" encoding="utf-8"?>
+<p:notes xmlns:a="http://schemas.openxmlformats.org/drawingml/2006/main" xmlns:p="http://schemas.openxmlformats.org/presentationml/2006/main" xmlns:r="http://schemas.openxmlformats.org/officeDocument/2006/relationships">
+  <p:cSld>
+    <p:spTree>
+      <p:nvGrpSpPr>
+        <p:cNvPr id="1" name=""/>
+        <p:cNvGrpSpPr/>
+        <p:nvPr/>
+      </p:nvGrpSpPr>
+      <p:grpSpPr>
+        <a:xfrm>
+          <a:off x="0" y="0"/>
+          <a:ext cx="0" cy="0"/>
+          <a:chOff x="0" y="0"/>
+          <a:chExt cx="0" cy="0"/>
+        </a:xfrm>
+      </p:grpSpPr>
+      <p:sp>
+        <p:nvSpPr>
+          <p:cNvPr id="2" name="Slide Image Placeholder 1"/>
+          <p:cNvSpPr>
+            <a:spLocks noGrp="1"/>
+          </p:cNvSpPr>
+          <p:nvPr>
+            <p:ph type="sldImg" idx="2"/>
+          </p:nvPr>
+        </p:nvSpPr>
+        <p:spPr/>
+      </p:sp>
+      <p:sp>
+        <p:nvSpPr>
+          <p:cNvPr id="3" name="Notes Placeholder 2"/>
+          <p:cNvSpPr>
+            <a:spLocks noGrp="1"/>
+          </p:cNvSpPr>
+          <p:nvPr>
+            <p:ph type="body" idx="3" sz="quarter"/>
+          </p:nvPr>
+        </p:nvSpPr>
+        <p:spPr/>
+        <p:txBody>
+          <a:bodyPr/>
+          <a:lstStyle/>
+          <a:p>
+            <a:r>
+              <a:t>El script trae cinco bloques y el orden importa.</a:t>
+            </a:r>
+          </a:p>
+          <a:p>
+            <a:r>
+              <a:t>Lo que no se puede hacer es medir en una base de 20 filas: el plan no va a cambiar y el grupo se va a llevar la conclusion contraria.</a:t>
+            </a:r>
+          </a:p>
+        </p:txBody>
+      </p:sp>
+      <p:sp>
+        <p:nvSpPr>
+          <p:cNvPr id="4" name="Slide Number Placeholder 3"/>
+          <p:cNvSpPr>
+            <a:spLocks noGrp="1"/>
+          </p:cNvSpPr>
+          <p:nvPr>
+            <p:ph type="sldNum" idx="5" sz="quarter"/>
+          </p:nvPr>
+        </p:nvSpPr>
+        <p:spPr/>
+      </p:sp>
+    </p:spTree>
+  </p:cSld>
+  <p:clrMapOvr>
+    <a:masterClrMapping/>
+  </p:clrMapOvr>
+</p:notes>
+</file>
+
+<file path=ppt/notesSlides/notesSlide19.xml><?xml version="1.0" encoding="utf-8"?>
+<p:notes xmlns:a="http://schemas.openxmlformats.org/drawingml/2006/main" xmlns:p="http://schemas.openxmlformats.org/presentationml/2006/main" xmlns:r="http://schemas.openxmlformats.org/officeDocument/2006/relationships">
+  <p:cSld>
+    <p:spTree>
+      <p:nvGrpSpPr>
+        <p:cNvPr id="1" name=""/>
+        <p:cNvGrpSpPr/>
+        <p:nvPr/>
+      </p:nvGrpSpPr>
+      <p:grpSpPr>
+        <a:xfrm>
+          <a:off x="0" y="0"/>
+          <a:ext cx="0" cy="0"/>
+          <a:chOff x="0" y="0"/>
+          <a:chExt cx="0" cy="0"/>
+        </a:xfrm>
+      </p:grpSpPr>
+      <p:sp>
+        <p:nvSpPr>
+          <p:cNvPr id="2" name="Slide Image Placeholder 1"/>
+          <p:cNvSpPr>
+            <a:spLocks noGrp="1"/>
+          </p:cNvSpPr>
+          <p:nvPr>
+            <p:ph type="sldImg" idx="2"/>
+          </p:nvPr>
+        </p:nvSpPr>
+        <p:spPr/>
+      </p:sp>
+      <p:sp>
+        <p:nvSpPr>
+          <p:cNvPr id="3" name="Notes Placeholder 2"/>
+          <p:cNvSpPr>
+            <a:spLocks noGrp="1"/>
+          </p:cNvSpPr>
+          <p:nvPr>
+            <p:ph type="body" idx="3" sz="quarter"/>
+          </p:nvPr>
+        </p:nvSpPr>
+        <p:spPr/>
+        <p:txBody>
+          <a:bodyPr/>
+          <a:lstStyle/>
+          <a:p>
+            <a:r>
+              <a:t>Fuera de la lamina (habla de la practica, no del tema):</a:t>
+            </a:r>
+          </a:p>
+          <a:p>
+            <a:r>
+              <a:t>- Y la base de la pregunta 3 si reparte sus 5.010 citas entre los dos anos.</a:t>
+            </a:r>
+          </a:p>
+          <a:p>
+            <a:r>
+              <a:t>- Si el bloque 0 no alcanza el tiempo, la alternativa es abrir directamente la pregunta 1 de la clase, que ya trae la base sembrada, y correr los bloques 1 y 2 ahi.</a:t>
             </a:r>
           </a:p>
         </p:txBody>
@@ -889,6 +1414,502 @@
 </p:notes>
 </file>
 
+<file path=ppt/notesSlides/notesSlide20.xml><?xml version="1.0" encoding="utf-8"?>
+<p:notes xmlns:a="http://schemas.openxmlformats.org/drawingml/2006/main" xmlns:p="http://schemas.openxmlformats.org/presentationml/2006/main" xmlns:r="http://schemas.openxmlformats.org/officeDocument/2006/relationships">
+  <p:cSld>
+    <p:spTree>
+      <p:nvGrpSpPr>
+        <p:cNvPr id="1" name=""/>
+        <p:cNvGrpSpPr/>
+        <p:nvPr/>
+      </p:nvGrpSpPr>
+      <p:grpSpPr>
+        <a:xfrm>
+          <a:off x="0" y="0"/>
+          <a:ext cx="0" cy="0"/>
+          <a:chOff x="0" y="0"/>
+          <a:chExt cx="0" cy="0"/>
+        </a:xfrm>
+      </p:grpSpPr>
+      <p:sp>
+        <p:nvSpPr>
+          <p:cNvPr id="2" name="Slide Image Placeholder 1"/>
+          <p:cNvSpPr>
+            <a:spLocks noGrp="1"/>
+          </p:cNvSpPr>
+          <p:nvPr>
+            <p:ph type="sldImg" idx="2"/>
+          </p:nvPr>
+        </p:nvSpPr>
+        <p:spPr/>
+      </p:sp>
+      <p:sp>
+        <p:nvSpPr>
+          <p:cNvPr id="3" name="Notes Placeholder 2"/>
+          <p:cNvSpPr>
+            <a:spLocks noGrp="1"/>
+          </p:cNvSpPr>
+          <p:nvPr>
+            <p:ph type="body" idx="3" sz="quarter"/>
+          </p:nvPr>
+        </p:nvSpPr>
+        <p:spPr/>
+        <p:txBody>
+          <a:bodyPr/>
+          <a:lstStyle/>
+          <a:p>
+            <a:r>
+              <a:t>Fuera de la lamina (habla de la practica, no del tema):</a:t>
+            </a:r>
+          </a:p>
+          <a:p>
+            <a:r>
+              <a:t>- En particular DB Fiddle queda fuera, aunque tambien tenga PostgreSQL, por un motivo concreto: la base sembrada con las 30.010 citas no existe alli, y sin ella no se puede reproducir ni el cambio de plan ni las 91 filas que la rubrica menciona.</a:t>
+            </a:r>
+          </a:p>
+          <a:p>
+            <a:r>
+              <a:t>- Un alterno que cuesta puntos no es un alterno.</a:t>
+            </a:r>
+          </a:p>
+          <a:p>
+            <a:r>
+              <a:t>- Google Docs se usa para la tabla de justificacion de la pregunta 5, que es prosa y no SQL.</a:t>
+            </a:r>
+          </a:p>
+          <a:p/>
+          <a:p>
+            <a:r>
+              <a:t>Ahi corre la demo, ahi se resuelve el taller y ahi se califica, asi que no hay razon para trabajar en otro sitio.</a:t>
+            </a:r>
+          </a:p>
+          <a:p>
+            <a:r>
+              <a:t>Lo que si se puede medir aqui: el cambio de Seq Scan a Index Scan, la eleccion entre dos indices que compiten, el efecto del orden de columnas con su DROP INDEX, el particionamiento declarativo completo y la poda en el plan, y el tamano de cada indice con pg_relation_size.</a:t>
+            </a:r>
+          </a:p>
+          <a:p>
+            <a:r>
+              <a:t>Lo que NO se puede medir, y hay que declararlo en el informe en vez de inventarlo: los tiempos con la memoria intermedia vacia, porque vaciarla exige privilegios de administrador; el tiempo de creacion de un indice sobre decenas de millones de filas; la fragmentacion despues de meses de escrituras; la degradacion medible de un INSERT con diez indices, que necesita una carga sostenida; y cualquier cosa que exija dos sesiones simultaneas, porque PGlite corre una sola, que es el tema de la Clase 10.</a:t>
+            </a:r>
+          </a:p>
+          <a:p>
+            <a:r>
+              <a:t>Esa lista de limites es la seccion 5 de la pregunta 5 y vale puntos: se pierde por omitirla, no por tenerla.</a:t>
+            </a:r>
+          </a:p>
+        </p:txBody>
+      </p:sp>
+      <p:sp>
+        <p:nvSpPr>
+          <p:cNvPr id="4" name="Slide Number Placeholder 3"/>
+          <p:cNvSpPr>
+            <a:spLocks noGrp="1"/>
+          </p:cNvSpPr>
+          <p:nvPr>
+            <p:ph type="sldNum" idx="5" sz="quarter"/>
+          </p:nvPr>
+        </p:nvSpPr>
+        <p:spPr/>
+      </p:sp>
+    </p:spTree>
+  </p:cSld>
+  <p:clrMapOvr>
+    <a:masterClrMapping/>
+  </p:clrMapOvr>
+</p:notes>
+</file>
+
+<file path=ppt/notesSlides/notesSlide21.xml><?xml version="1.0" encoding="utf-8"?>
+<p:notes xmlns:a="http://schemas.openxmlformats.org/drawingml/2006/main" xmlns:p="http://schemas.openxmlformats.org/presentationml/2006/main" xmlns:r="http://schemas.openxmlformats.org/officeDocument/2006/relationships">
+  <p:cSld>
+    <p:spTree>
+      <p:nvGrpSpPr>
+        <p:cNvPr id="1" name=""/>
+        <p:cNvGrpSpPr/>
+        <p:nvPr/>
+      </p:nvGrpSpPr>
+      <p:grpSpPr>
+        <a:xfrm>
+          <a:off x="0" y="0"/>
+          <a:ext cx="0" cy="0"/>
+          <a:chOff x="0" y="0"/>
+          <a:chExt cx="0" cy="0"/>
+        </a:xfrm>
+      </p:grpSpPr>
+      <p:sp>
+        <p:nvSpPr>
+          <p:cNvPr id="2" name="Slide Image Placeholder 1"/>
+          <p:cNvSpPr>
+            <a:spLocks noGrp="1"/>
+          </p:cNvSpPr>
+          <p:nvPr>
+            <p:ph type="sldImg" idx="2"/>
+          </p:nvPr>
+        </p:nvSpPr>
+        <p:spPr/>
+      </p:sp>
+      <p:sp>
+        <p:nvSpPr>
+          <p:cNvPr id="3" name="Notes Placeholder 2"/>
+          <p:cNvSpPr>
+            <a:spLocks noGrp="1"/>
+          </p:cNvSpPr>
+          <p:nvPr>
+            <p:ph type="body" idx="3" sz="quarter"/>
+          </p:nvPr>
+        </p:nvSpPr>
+        <p:spPr/>
+        <p:txBody>
+          <a:bodyPr/>
+          <a:lstStyle/>
+          <a:p>
+            <a:r>
+              <a:t>Fuera de la lamina (habla de la practica, no del tema):</a:t>
+            </a:r>
+          </a:p>
+          <a:p>
+            <a:r>
+              <a:t>- Porque el archivado no tiene alternativa —DROP TABLE de una particion contra un DELETE de millones de filas— y porque son 20 puntos de la actividad, que se califican sobre SQL ejecutado y no sobre una explicacion.</a:t>
+            </a:r>
+          </a:p>
+        </p:txBody>
+      </p:sp>
+      <p:sp>
+        <p:nvSpPr>
+          <p:cNvPr id="4" name="Slide Number Placeholder 3"/>
+          <p:cNvSpPr>
+            <a:spLocks noGrp="1"/>
+          </p:cNvSpPr>
+          <p:nvPr>
+            <p:ph type="sldNum" idx="5" sz="quarter"/>
+          </p:nvPr>
+        </p:nvSpPr>
+        <p:spPr/>
+      </p:sp>
+    </p:spTree>
+  </p:cSld>
+  <p:clrMapOvr>
+    <a:masterClrMapping/>
+  </p:clrMapOvr>
+</p:notes>
+</file>
+
+<file path=ppt/notesSlides/notesSlide22.xml><?xml version="1.0" encoding="utf-8"?>
+<p:notes xmlns:a="http://schemas.openxmlformats.org/drawingml/2006/main" xmlns:p="http://schemas.openxmlformats.org/presentationml/2006/main" xmlns:r="http://schemas.openxmlformats.org/officeDocument/2006/relationships">
+  <p:cSld>
+    <p:spTree>
+      <p:nvGrpSpPr>
+        <p:cNvPr id="1" name=""/>
+        <p:cNvGrpSpPr/>
+        <p:nvPr/>
+      </p:nvGrpSpPr>
+      <p:grpSpPr>
+        <a:xfrm>
+          <a:off x="0" y="0"/>
+          <a:ext cx="0" cy="0"/>
+          <a:chOff x="0" y="0"/>
+          <a:chExt cx="0" cy="0"/>
+        </a:xfrm>
+      </p:grpSpPr>
+      <p:sp>
+        <p:nvSpPr>
+          <p:cNvPr id="2" name="Slide Image Placeholder 1"/>
+          <p:cNvSpPr>
+            <a:spLocks noGrp="1"/>
+          </p:cNvSpPr>
+          <p:nvPr>
+            <p:ph type="sldImg" idx="2"/>
+          </p:nvPr>
+        </p:nvSpPr>
+        <p:spPr/>
+      </p:sp>
+      <p:sp>
+        <p:nvSpPr>
+          <p:cNvPr id="3" name="Notes Placeholder 2"/>
+          <p:cNvSpPr>
+            <a:spLocks noGrp="1"/>
+          </p:cNvSpPr>
+          <p:nvPr>
+            <p:ph type="body" idx="3" sz="quarter"/>
+          </p:nvPr>
+        </p:nvSpPr>
+        <p:spPr/>
+        <p:txBody>
+          <a:bodyPr/>
+          <a:lstStyle/>
+          <a:p>
+            <a:r>
+              <a:t>Fuera de la lamina (habla de la practica, no del tema):</a:t>
+            </a:r>
+          </a:p>
+          <a:p>
+            <a:r>
+              <a:t>- Si todas las consultas del PI filtran por PROGRAMADA, entonces si sobra el completo, y decirlo asi en la columna de veredicto es la respuesta que la rubrica busca.</a:t>
+            </a:r>
+          </a:p>
+          <a:p>
+            <a:r>
+              <a:t>- No, porque hace falta la linea base con Seq Scan; sin el antes, el despues no demuestra nada, y es la primera cosa que la rubrica revisa.</a:t>
+            </a:r>
+          </a:p>
+        </p:txBody>
+      </p:sp>
+      <p:sp>
+        <p:nvSpPr>
+          <p:cNvPr id="4" name="Slide Number Placeholder 3"/>
+          <p:cNvSpPr>
+            <a:spLocks noGrp="1"/>
+          </p:cNvSpPr>
+          <p:nvPr>
+            <p:ph type="sldNum" idx="5" sz="quarter"/>
+          </p:nvPr>
+        </p:nvSpPr>
+        <p:spPr/>
+      </p:sp>
+    </p:spTree>
+  </p:cSld>
+  <p:clrMapOvr>
+    <a:masterClrMapping/>
+  </p:clrMapOvr>
+</p:notes>
+</file>
+
+<file path=ppt/notesSlides/notesSlide23.xml><?xml version="1.0" encoding="utf-8"?>
+<p:notes xmlns:a="http://schemas.openxmlformats.org/drawingml/2006/main" xmlns:p="http://schemas.openxmlformats.org/presentationml/2006/main" xmlns:r="http://schemas.openxmlformats.org/officeDocument/2006/relationships">
+  <p:cSld>
+    <p:spTree>
+      <p:nvGrpSpPr>
+        <p:cNvPr id="1" name=""/>
+        <p:cNvGrpSpPr/>
+        <p:nvPr/>
+      </p:nvGrpSpPr>
+      <p:grpSpPr>
+        <a:xfrm>
+          <a:off x="0" y="0"/>
+          <a:ext cx="0" cy="0"/>
+          <a:chOff x="0" y="0"/>
+          <a:chExt cx="0" cy="0"/>
+        </a:xfrm>
+      </p:grpSpPr>
+      <p:sp>
+        <p:nvSpPr>
+          <p:cNvPr id="2" name="Slide Image Placeholder 1"/>
+          <p:cNvSpPr>
+            <a:spLocks noGrp="1"/>
+          </p:cNvSpPr>
+          <p:nvPr>
+            <p:ph type="sldImg" idx="2"/>
+          </p:nvPr>
+        </p:nvSpPr>
+        <p:spPr/>
+      </p:sp>
+      <p:sp>
+        <p:nvSpPr>
+          <p:cNvPr id="3" name="Notes Placeholder 2"/>
+          <p:cNvSpPr>
+            <a:spLocks noGrp="1"/>
+          </p:cNvSpPr>
+          <p:nvPr>
+            <p:ph type="body" idx="3" sz="quarter"/>
+          </p:nvPr>
+        </p:nvSpPr>
+        <p:spPr/>
+        <p:txBody>
+          <a:bodyPr/>
+          <a:lstStyle/>
+          <a:p>
+            <a:r>
+              <a:t>Fuera de la lamina (habla de la practica, no del tema):</a:t>
+            </a:r>
+          </a:p>
+          <a:p>
+            <a:r>
+              <a:t>- El nombre se califica. La actividad dice «nombres exactos» y los compara letra por letra: `idx_cita_fecha_hora`, `idx_mascota_dueno`, `idx_cita_programada_fecha` en la pregunta 1, y `idx_cita_estado_fecha` + `idx_cita_fecha_estado` en la 2.</a:t>
+            </a:r>
+          </a:p>
+          <a:p>
+            <a:r>
+              <a:t>- Preguntas 1 y 2 de la clase — 50 de los 100 puntos — y los nombres son los que se escriben en la plantilla del entregable</a:t>
+            </a:r>
+          </a:p>
+        </p:txBody>
+      </p:sp>
+      <p:sp>
+        <p:nvSpPr>
+          <p:cNvPr id="4" name="Slide Number Placeholder 3"/>
+          <p:cNvSpPr>
+            <a:spLocks noGrp="1"/>
+          </p:cNvSpPr>
+          <p:nvPr>
+            <p:ph type="sldNum" idx="5" sz="quarter"/>
+          </p:nvPr>
+        </p:nvSpPr>
+        <p:spPr/>
+      </p:sp>
+    </p:spTree>
+  </p:cSld>
+  <p:clrMapOvr>
+    <a:masterClrMapping/>
+  </p:clrMapOvr>
+</p:notes>
+</file>
+
+<file path=ppt/notesSlides/notesSlide24.xml><?xml version="1.0" encoding="utf-8"?>
+<p:notes xmlns:a="http://schemas.openxmlformats.org/drawingml/2006/main" xmlns:p="http://schemas.openxmlformats.org/presentationml/2006/main" xmlns:r="http://schemas.openxmlformats.org/officeDocument/2006/relationships">
+  <p:cSld>
+    <p:spTree>
+      <p:nvGrpSpPr>
+        <p:cNvPr id="1" name=""/>
+        <p:cNvGrpSpPr/>
+        <p:nvPr/>
+      </p:nvGrpSpPr>
+      <p:grpSpPr>
+        <a:xfrm>
+          <a:off x="0" y="0"/>
+          <a:ext cx="0" cy="0"/>
+          <a:chOff x="0" y="0"/>
+          <a:chExt cx="0" cy="0"/>
+        </a:xfrm>
+      </p:grpSpPr>
+      <p:sp>
+        <p:nvSpPr>
+          <p:cNvPr id="2" name="Slide Image Placeholder 1"/>
+          <p:cNvSpPr>
+            <a:spLocks noGrp="1"/>
+          </p:cNvSpPr>
+          <p:nvPr>
+            <p:ph type="sldImg" idx="2"/>
+          </p:nvPr>
+        </p:nvSpPr>
+        <p:spPr/>
+      </p:sp>
+      <p:sp>
+        <p:nvSpPr>
+          <p:cNvPr id="3" name="Notes Placeholder 2"/>
+          <p:cNvSpPr>
+            <a:spLocks noGrp="1"/>
+          </p:cNvSpPr>
+          <p:nvPr>
+            <p:ph type="body" idx="3" sz="quarter"/>
+          </p:nvPr>
+        </p:nvSpPr>
+        <p:spPr/>
+        <p:txBody>
+          <a:bodyPr/>
+          <a:lstStyle/>
+          <a:p>
+            <a:r>
+              <a:t>Fuera de la lamina (habla de la practica, no del tema):</a:t>
+            </a:r>
+          </a:p>
+          <a:p>
+            <a:r>
+              <a:t>- Cual de los dos elige. Con `idx_cita_fecha_hora` y `idx_cita_programada_fecha` compitiendo por la misma consulta, el plan nombra al ganador: hay que leer el `Index Scan using ...` y escribir cual salio, porque la rubrica descuenta si no se comenta.</a:t>
+            </a:r>
+          </a:p>
+          <a:p>
+            <a:r>
+              <a:t>- La pregunta 1 lo exige por nombre y su rubrica descuenta si falta; la pregunta 4 lo vuelve a cobrar como afirmacion correcta</a:t>
+            </a:r>
+          </a:p>
+        </p:txBody>
+      </p:sp>
+      <p:sp>
+        <p:nvSpPr>
+          <p:cNvPr id="4" name="Slide Number Placeholder 3"/>
+          <p:cNvSpPr>
+            <a:spLocks noGrp="1"/>
+          </p:cNvSpPr>
+          <p:nvPr>
+            <p:ph type="sldNum" idx="5" sz="quarter"/>
+          </p:nvPr>
+        </p:nvSpPr>
+        <p:spPr/>
+      </p:sp>
+    </p:spTree>
+  </p:cSld>
+  <p:clrMapOvr>
+    <a:masterClrMapping/>
+  </p:clrMapOvr>
+</p:notes>
+</file>
+
+<file path=ppt/notesSlides/notesSlide25.xml><?xml version="1.0" encoding="utf-8"?>
+<p:notes xmlns:a="http://schemas.openxmlformats.org/drawingml/2006/main" xmlns:p="http://schemas.openxmlformats.org/presentationml/2006/main" xmlns:r="http://schemas.openxmlformats.org/officeDocument/2006/relationships">
+  <p:cSld>
+    <p:spTree>
+      <p:nvGrpSpPr>
+        <p:cNvPr id="1" name=""/>
+        <p:cNvGrpSpPr/>
+        <p:nvPr/>
+      </p:nvGrpSpPr>
+      <p:grpSpPr>
+        <a:xfrm>
+          <a:off x="0" y="0"/>
+          <a:ext cx="0" cy="0"/>
+          <a:chOff x="0" y="0"/>
+          <a:chExt cx="0" cy="0"/>
+        </a:xfrm>
+      </p:grpSpPr>
+      <p:sp>
+        <p:nvSpPr>
+          <p:cNvPr id="2" name="Slide Image Placeholder 1"/>
+          <p:cNvSpPr>
+            <a:spLocks noGrp="1"/>
+          </p:cNvSpPr>
+          <p:nvPr>
+            <p:ph type="sldImg" idx="2"/>
+          </p:nvPr>
+        </p:nvSpPr>
+        <p:spPr/>
+      </p:sp>
+      <p:sp>
+        <p:nvSpPr>
+          <p:cNvPr id="3" name="Notes Placeholder 2"/>
+          <p:cNvSpPr>
+            <a:spLocks noGrp="1"/>
+          </p:cNvSpPr>
+          <p:nvPr>
+            <p:ph type="body" idx="3" sz="quarter"/>
+          </p:nvPr>
+        </p:nvSpPr>
+        <p:spPr/>
+        <p:txBody>
+          <a:bodyPr/>
+          <a:lstStyle/>
+          <a:p>
+            <a:r>
+              <a:t>Fuera de la lamina (habla de la practica, no del tema):</a:t>
+            </a:r>
+          </a:p>
+          <a:p>
+            <a:r>
+              <a:t>- Es la pregunta 3 completa —20 de los 100 puntos— y el segundo parrafo de la pregunta 5: hoy se implementa, no se cuenta</a:t>
+            </a:r>
+          </a:p>
+        </p:txBody>
+      </p:sp>
+      <p:sp>
+        <p:nvSpPr>
+          <p:cNvPr id="4" name="Slide Number Placeholder 3"/>
+          <p:cNvSpPr>
+            <a:spLocks noGrp="1"/>
+          </p:cNvSpPr>
+          <p:nvPr>
+            <p:ph type="sldNum" idx="5" sz="quarter"/>
+          </p:nvPr>
+        </p:nvSpPr>
+        <p:spPr/>
+      </p:sp>
+    </p:spTree>
+  </p:cSld>
+  <p:clrMapOvr>
+    <a:masterClrMapping/>
+  </p:clrMapOvr>
+</p:notes>
+</file>
+
 <file path=ppt/notesSlides/notesSlide3.xml><?xml version="1.0" encoding="utf-8"?>
 <p:notes xmlns:a="http://schemas.openxmlformats.org/drawingml/2006/main" xmlns:p="http://schemas.openxmlformats.org/presentationml/2006/main" xmlns:r="http://schemas.openxmlformats.org/officeDocument/2006/relationships">
   <p:cSld>
@@ -934,12 +1955,12 @@
           <a:lstStyle/>
           <a:p>
             <a:r>
-              <a:t>De ahi la regla del prefijo mas a la izquierda: un indice sobre (estado, fecha_hora) resuelve una busqueda por estado, y una por estado junto con fecha_hora, pero NO resuelve eficientemente una busqueda solo por fecha_hora, igual que en el directorio no se pueden encontrar todas las personas llamadas Ana sin leerlo entero.</a:t>
-            </a:r>
-          </a:p>
-          <a:p>
-            <a:r>
-              <a:t>El corolario de diseno cabe en una linea, y es la que hay que dejar escrita en la pizarra: las columnas comparadas por igualdad van primero y la comparada por rango va al final, porque despues del primer rango el orden interno del indice deja de ser aprovechable.</a:t>
+              <a:t>Fuera de la lamina (habla de la practica, no del tema):</a:t>
+            </a:r>
+          </a:p>
+          <a:p>
+            <a:r>
+              <a:t>- El precio de indexar se paga en cada escritura y hay que cuantificarlo, porque es la mitad del veredicto que la pregunta 5 pide por escrito.</a:t>
             </a:r>
           </a:p>
         </p:txBody>
@@ -1009,7 +2030,12 @@
           <a:lstStyle/>
           <a:p>
             <a:r>
-              <a:t>Oracle no tiene INCLUDE y la columna se agrega al final de la clave.</a:t>
+              <a:t>Fuera de la lamina (habla de la practica, no del tema):</a:t>
+            </a:r>
+          </a:p>
+          <a:p>
+            <a:r>
+              <a:t>- En produccion eso se decide con datos: PostgreSQL expone pg_stat_user_indexes, donde idx_scan en cero significa que el indice nunca se uso; conviene mencionarlo aunque en una sesion de taller no de tiempo de acumular estadisticas de uso.</a:t>
             </a:r>
           </a:p>
         </p:txBody>
@@ -1079,17 +2105,12 @@
           <a:lstStyle/>
           <a:p>
             <a:r>
-              <a:t>Cinco, se violo el prefijo mas a la izquierda.</a:t>
-            </a:r>
-          </a:p>
-          <a:p>
-            <a:r>
-              <a:t>Seis, la condicion combina columnas de indices distintos con OR, caso en el que el motor arma una combinacion de mapas de bits o simplemente escanea.</a:t>
-            </a:r>
-          </a:p>
-          <a:p>
-            <a:r>
-              <a:t>Siete, el tipo de dato o la ordenacion no coincide con lo que el predicado compara.</a:t>
+              <a:t>De ahi la regla del prefijo mas a la izquierda: un indice sobre (estado, fecha_hora) resuelve una busqueda por estado, y una por estado junto con fecha_hora, pero NO resuelve eficientemente una busqueda solo por fecha_hora, igual que en el directorio no se pueden encontrar todas las personas llamadas Ana sin leerlo entero.</a:t>
+            </a:r>
+          </a:p>
+          <a:p>
+            <a:r>
+              <a:t>El corolario de diseno cabe en una linea, y es la que hay que dejar escrita en la pizarra: las columnas comparadas por igualdad van primero y la comparada por rango va al final, porque despues del primer rango el orden interno del indice deja de ser aprovechable.</a:t>
             </a:r>
           </a:p>
         </p:txBody>
@@ -1159,12 +2180,7 @@
           <a:lstStyle/>
           <a:p>
             <a:r>
-              <a:t>Aqui empieza la parte que se califica letra por letra, y conviene decirlo con esas palabras.</a:t>
-            </a:r>
-          </a:p>
-          <a:p>
-            <a:r>
-              <a:t>Dos hechos sobre claves evitan la mitad de los indices inutiles que se entregan en los proyectos.</a:t>
+              <a:t>Oracle no tiene INCLUDE y la columna se agrega al final de la clave.</a:t>
             </a:r>
           </a:p>
         </p:txBody>
@@ -1234,7 +2250,12 @@
           <a:lstStyle/>
           <a:p>
             <a:r>
-              <a:t>Segundo, los CREATE INDEX.</a:t>
+              <a:t>Fuera de la lamina (habla de la practica, no del tema):</a:t>
+            </a:r>
+          </a:p>
+          <a:p>
+            <a:r>
+              <a:t>- Esto NO se califica hoy, pero es la respuesta a la pregunta que va a salir cuando alguien vea Index Only Scan en su plan y no sepa si esta bien.</a:t>
             </a:r>
           </a:p>
         </p:txBody>
@@ -1304,17 +2325,17 @@
           <a:lstStyle/>
           <a:p>
             <a:r>
-              <a:t>La pregunta 2 no pide creer la regla del prefijo izquierdo, pide demostrarla, y el docente tiene que poder anticipar los tres resultados.</a:t>
-            </a:r>
-          </a:p>
-          <a:p>
-            <a:r>
-              <a:t>Eso es la regla del prefijo izquierdo vista en vivo, y es la unica manera de que no quede como una frase que se memoriza.</a:t>
-            </a:r>
-          </a:p>
-          <a:p>
-            <a:r>
-              <a:t>Un plan distinto bien leido vale mas que el plan esperado copiado.</a:t>
+              <a:t>Cinco, se violo el prefijo mas a la izquierda.</a:t>
+            </a:r>
+          </a:p>
+          <a:p>
+            <a:r>
+              <a:t>Seis, la condicion combina columnas de indices distintos con OR, caso en el que el motor arma una combinacion de mapas de bits o simplemente escanea.</a:t>
+            </a:r>
+          </a:p>
+          <a:p>
+            <a:r>
+              <a:t>Siete, el tipo de dato o la ordenacion no coincide con lo que el predicado compara.</a:t>
             </a:r>
           </a:p>
         </p:txBody>
@@ -1384,12 +2405,23 @@
           <a:lstStyle/>
           <a:p>
             <a:r>
-              <a:t>Ahora la advertencia importante para el docente, porque es la que ha costado puntos: eso NO significa que hoy el particionamiento sea una idea conceptual que solo se cuenta.</a:t>
-            </a:r>
-          </a:p>
-          <a:p>
-            <a:r>
-              <a:t>Lo que si es cierto, y hay que decirlo en la misma frase, es que con 5.010 filas la ganancia de RENDIMIENTO no es apreciable: lo que se demuestra hoy es que el motor descarta particiones enteras antes de leer, y que archivar un ano se vuelve trivial.</a:t>
+              <a:t>Fuera de la lamina (habla de la practica, no del tema):</a:t>
+            </a:r>
+          </a:p>
+          <a:p>
+            <a:r>
+              <a:t>- El nombre de cada indice importa, porque el plan de ejecucion imprime literalmente Index Scan using seguido del nombre y porque la tabla de justificacion de la pregunta 5 se llena con esos mismos nombres.</a:t>
+            </a:r>
+          </a:p>
+          <a:p/>
+          <a:p>
+            <a:r>
+              <a:t>Aqui empieza la parte que se califica letra por letra, y conviene decirlo con esas palabras.</a:t>
+            </a:r>
+          </a:p>
+          <a:p>
+            <a:r>
+              <a:t>Dos hechos sobre claves evitan la mitad de los indices inutiles que se entregan en los proyectos.</a:t>
             </a:r>
           </a:p>
         </p:txBody>
@@ -5003,22 +6035,6 @@
               <a:t>–   En espacio, no es raro que la suma de los indices supere el tamano de la tabla.</a:t>
             </a:r>
           </a:p>
-          <a:p>
-            <a:pPr>
-              <a:spcAft>
-                <a:spcPts val="800"/>
-              </a:spcAft>
-            </a:pPr>
-            <a:r>
-              <a:rPr sz="2000" b="0" i="0">
-                <a:solidFill>
-                  <a:srgbClr val="333333"/>
-                </a:solidFill>
-                <a:latin typeface="Calibri"/>
-              </a:rPr>
-              <a:t>–   Para el entregable la guia es concreta: dos a cuatro indices por tabla caliente ademas de los que ya trae la clave primaria, cada uno con su consulta escrita al lado</a:t>
-            </a:r>
-          </a:p>
         </p:txBody>
       </p:sp>
       <p:sp>
@@ -5236,6 +6252,22 @@
                 </a:solidFill>
                 <a:latin typeface="Calibri"/>
               </a:rPr>
+              <a:t>–   La guia es concreta: dos a cuatro indices por tabla caliente ademas de los que ya trae la clave primaria, cada uno con su consulta escrita al lado</a:t>
+            </a:r>
+          </a:p>
+          <a:p>
+            <a:pPr>
+              <a:spcAft>
+                <a:spcPts val="800"/>
+              </a:spcAft>
+            </a:pPr>
+            <a:r>
+              <a:rPr sz="2000" b="0" i="0">
+                <a:solidFill>
+                  <a:srgbClr val="333333"/>
+                </a:solidFill>
+                <a:latin typeface="Calibri"/>
+              </a:rPr>
               <a:t>–   Y la regla de descarte mas util que existe, si el estudiante no puede escribir la consulta que usa el indice, el indice se borra.</a:t>
             </a:r>
           </a:p>
@@ -5252,7 +6284,7 @@
                 </a:solidFill>
                 <a:latin typeface="Calibri"/>
               </a:rPr>
-              <a:t>–   En produccion eso se decide con datos: PostgreSQL expone pg_stat_user_indexes, donde idx_scan en cero significa que el indice nunca se uso; conviene mencionarlo aunque en una sesion de taller no de tiempo de acumular estadisticas de uso.</a:t>
+              <a:t>–   En produccion eso se decide con datos: PostgreSQL expone pg_stat_user_indexes, donde idx_scan en cero significa que el indice nunca se uso.</a:t>
             </a:r>
           </a:p>
         </p:txBody>
@@ -6043,22 +7075,6 @@
               <a:t>–   Asi que inmediatamente despues de una carga masiva el plan puede seguir mostrando Index Scan hasta que pase VACUUM, y eso no significa que el indice este mal disenado.</a:t>
             </a:r>
           </a:p>
-          <a:p>
-            <a:pPr>
-              <a:spcAft>
-                <a:spcPts val="800"/>
-              </a:spcAft>
-            </a:pPr>
-            <a:r>
-              <a:rPr sz="2000" b="0" i="0">
-                <a:solidFill>
-                  <a:srgbClr val="333333"/>
-                </a:solidFill>
-                <a:latin typeface="Calibri"/>
-              </a:rPr>
-              <a:t>–   Esto NO se califica hoy, pero es la respuesta a la pregunta que va a salir cuando alguien vea Index Only Scan en su plan y no sepa si esta bien.</a:t>
-            </a:r>
-          </a:p>
         </p:txBody>
       </p:sp>
       <p:sp>
@@ -7097,7 +8113,7 @@
                 </a:solidFill>
                 <a:latin typeface="Calibri"/>
               </a:rPr>
-              <a:t>Los cinco nombres que se califican, y la consulta que justifica cada uno (1/3)</a:t>
+              <a:t>Los cinco indices, y la consulta que justifica cada uno (1/2)</a:t>
             </a:r>
           </a:p>
         </p:txBody>
@@ -7136,7 +8152,7 @@
                 </a:solidFill>
                 <a:latin typeface="Calibri"/>
               </a:rPr>
-              <a:t>–   La actividad pide cinco indices con nombre EXACTO, porque el plan de ejecucion imprime literalmente Index Scan using seguido del nombre y porque la tabla de justificacion de la pregunta 5 se llena con esos mismos nombres.</a:t>
+              <a:t>–   El nombre de cada indice importa.</a:t>
             </a:r>
           </a:p>
           <a:p>
@@ -7152,7 +8168,7 @@
                 </a:solidFill>
                 <a:latin typeface="Calibri"/>
               </a:rPr>
-              <a:t>–   Los tres de la pregunta 1: idx_cita_fecha_hora sobre cita (fecha_hora), que atiende cualquier consulta por rango de fecha con o sin estado; idx_mascota_dueno sobre mascota (id_dueno)</a:t>
+              <a:t>–   Los tres de la medicion: idx_cita_fecha_hora sobre cita (fecha_hora), que atiende cualquier consulta por rango de fecha con o sin estado; idx_mascota_dueno sobre mascota (id_dueno)</a:t>
             </a:r>
           </a:p>
           <a:p>
@@ -7169,6 +8185,22 @@
                 <a:latin typeface="Calibri"/>
               </a:rPr>
               <a:t>–   Que atiende el historial de un dueno; y idx_cita_programada_fecha, el indice parcial sobre cita (fecha_hora) WHERE estado = 'PROGRAMADA', que atiende la agenda del dia de la recepcion.</a:t>
+            </a:r>
+          </a:p>
+          <a:p>
+            <a:pPr>
+              <a:spcAft>
+                <a:spcPts val="800"/>
+              </a:spcAft>
+            </a:pPr>
+            <a:r>
+              <a:rPr sz="2000" b="0" i="0">
+                <a:solidFill>
+                  <a:srgbClr val="333333"/>
+                </a:solidFill>
+                <a:latin typeface="Calibri"/>
+              </a:rPr>
+              <a:t>–   Los dos del experimento de orden: idx_cita_estado_fecha sobre cita (estado, fecha_hora) e idx_cita_fecha_estado sobre cita (fecha_hora, estado), las mismas dos columnas en orden inverso, creados a proposito para medir la diferencia.</a:t>
             </a:r>
           </a:p>
         </p:txBody>
@@ -7349,7 +8381,7 @@
                 </a:solidFill>
                 <a:latin typeface="Calibri"/>
               </a:rPr>
-              <a:t>Los cinco nombres que se califican, y la consulta que justifica cada uno (2/3)</a:t>
+              <a:t>Los cinco indices, y la consulta que justifica cada uno (2/2)</a:t>
             </a:r>
           </a:p>
         </p:txBody>
@@ -7388,7 +8420,7 @@
                 </a:solidFill>
                 <a:latin typeface="Calibri"/>
               </a:rPr>
-              <a:t>–   Los dos de la pregunta 2: idx_cita_estado_fecha sobre cita (estado, fecha_hora) e idx_cita_fecha_estado sobre cita (fecha_hora, estado), las mismas dos columnas en orden inverso, creados a proposito para medir la diferencia.</a:t>
+              <a:t>–   Un aviso concreto: idx_cita_fecha no es ninguno de los cinco, el sufijo es _fecha_hora como la columna, y ese fue durante un tiempo el nombre que aparecia en el material.</a:t>
             </a:r>
           </a:p>
           <a:p>
@@ -7404,7 +8436,7 @@
                 </a:solidFill>
                 <a:latin typeface="Calibri"/>
               </a:rPr>
-              <a:t>–   Un aviso concreto: idx_cita_fecha no es ninguno de los cinco, el sufijo es _fecha_hora como la columna, y ese fue durante un tiempo el nombre que aparecia en el material; si alguien lo escribe asi pierde puntos por el nombre y no por el concepto.</a:t>
+              <a:t>–   Primero: declarar PRIMARY KEY o UNIQUE crea automaticamente un indice unico para sostener la restriccion, asi que id_dueno, id_mascota e id_cita YA tienen indice y crear otro encima solo duplica espacio y trabajo de escritura.</a:t>
             </a:r>
           </a:p>
           <a:p>
@@ -7420,7 +8452,23 @@
                 </a:solidFill>
                 <a:latin typeface="Calibri"/>
               </a:rPr>
-              <a:t>–   Primero: declarar PRIMARY KEY o UNIQUE crea automaticamente un indice unico para sostener la restriccion, asi que id_dueno, id_mascota e id_cita YA tienen indice y crear otro encima solo duplica espacio y trabajo de escritura.</a:t>
+              <a:t>–   Segundo, menos conocido: declarar una FOREIGN KEY NO crea indice en ninguno de los dos motores. mascota.id_dueno apunta a dueno, pero del lado de mascota no hay nada ordenado</a:t>
+            </a:r>
+          </a:p>
+          <a:p>
+            <a:pPr>
+              <a:spcAft>
+                <a:spcPts val="800"/>
+              </a:spcAft>
+            </a:pPr>
+            <a:r>
+              <a:rPr sz="2000" b="0" i="0">
+                <a:solidFill>
+                  <a:srgbClr val="333333"/>
+                </a:solidFill>
+                <a:latin typeface="Calibri"/>
+              </a:rPr>
+              <a:t>–   Y por eso idx_mascota_dueno si es una adicion legitima; sin el, ademas, borrar un dueno obliga a recorrer mascota completa para verificar la integridad.</a:t>
             </a:r>
           </a:p>
         </p:txBody>
@@ -7683,7 +8731,7 @@
                 </a:solidFill>
                 <a:latin typeface="Calibri"/>
               </a:rPr>
-              <a:t>PostgreSQL en el navegador</a:t>
+              <a:t>PostgreSQL/PGlite</a:t>
             </a:r>
             <a:r>
               <a:rPr sz="2000" b="0" i="0">
@@ -7930,7 +8978,7 @@
                 </a:solidFill>
                 <a:latin typeface="Calibri"/>
               </a:rPr>
-              <a:t>Los cinco nombres que se califican, y la consulta que justifica cada uno (3/3)</a:t>
+              <a:t>La secuencia de medicion, y por que el ANALYZE del medio no es opcional (1/2)</a:t>
             </a:r>
           </a:p>
         </p:txBody>
@@ -7969,7 +9017,7 @@
                 </a:solidFill>
                 <a:latin typeface="Calibri"/>
               </a:rPr>
-              <a:t>–   Segundo, menos conocido: declarar una FOREIGN KEY NO crea indice en ninguno de los dos motores. mascota.id_dueno apunta a dueno, pero del lado de mascota no hay nada ordenado</a:t>
+              <a:t>–   La clase entera vive en una secuencia de cuatro pasos que hay que proyectar en ese orden, porque cambiarlo destruye la evidencia.</a:t>
             </a:r>
           </a:p>
           <a:p>
@@ -7985,7 +9033,39 @@
                 </a:solidFill>
                 <a:latin typeface="Calibri"/>
               </a:rPr>
-              <a:t>–   Y por eso idx_mascota_dueno si es una adicion legitima; sin el, ademas, borrar un dueno obliga a recorrer mascota completa para verificar la integridad.</a:t>
+              <a:t>–   Primero, EXPLAIN ANALYZE de las dos consultas frecuentes ANTES de crear nada: tiene que salir Seq Scan on cita y Seq Scan on mascota, y ese es el punto de comparacion.</a:t>
+            </a:r>
+          </a:p>
+          <a:p>
+            <a:pPr>
+              <a:spcAft>
+                <a:spcPts val="800"/>
+              </a:spcAft>
+            </a:pPr>
+            <a:r>
+              <a:rPr sz="2000" b="0" i="0">
+                <a:solidFill>
+                  <a:srgbClr val="333333"/>
+                </a:solidFill>
+                <a:latin typeface="Calibri"/>
+              </a:rPr>
+              <a:t>–   C1 es la agenda del dia, SELECT id_cita, fecha_hora, estado FROM cita WHERE fecha_hora &gt;= TIMESTAMP '2026-03-10 00:00:00' AND fecha_hora &lt; TIMESTAMP '2026-03-11 00:00:00' AND estado = 'PROGRAMADA', y devuelve 91 filas de las 150 citas que tiene ese dia</a:t>
+            </a:r>
+          </a:p>
+          <a:p>
+            <a:pPr>
+              <a:spcAft>
+                <a:spcPts val="800"/>
+              </a:spcAft>
+            </a:pPr>
+            <a:r>
+              <a:rPr sz="2000" b="0" i="0">
+                <a:solidFill>
+                  <a:srgbClr val="333333"/>
+                </a:solidFill>
+                <a:latin typeface="Calibri"/>
+              </a:rPr>
+              <a:t>–   Tercero, y este es el paso que se salta medio salon, ANALYZE cita; y ANALYZE mascota;: crear el indice NO actualiza las estadisticas, el planeador decide por costo estimado, y con numeros viejos puede ignorar un indice perfectamente bueno.</a:t>
             </a:r>
           </a:p>
         </p:txBody>
@@ -8166,7 +9246,7 @@
                 </a:solidFill>
                 <a:latin typeface="Calibri"/>
               </a:rPr>
-              <a:t>La secuencia de medicion, y por que el ANALYZE del medio no es opcional (1/2)</a:t>
+              <a:t>La secuencia de medicion, y por que el ANALYZE del medio no es opcional (2/2)</a:t>
             </a:r>
           </a:p>
         </p:txBody>
@@ -8205,7 +9285,7 @@
                 </a:solidFill>
                 <a:latin typeface="Calibri"/>
               </a:rPr>
-              <a:t>–   La clase entera vive en una secuencia de cuatro pasos que hay que proyectar en ese orden, porque cambiarlo destruye la evidencia.</a:t>
+              <a:t>–   La mitad de los avisos de «cree el indice y no me sirvio» de la clase son este paso omitido.</a:t>
             </a:r>
           </a:p>
           <a:p>
@@ -8221,7 +9301,7 @@
                 </a:solidFill>
                 <a:latin typeface="Calibri"/>
               </a:rPr>
-              <a:t>–   Primero, EXPLAIN ANALYZE de las dos consultas frecuentes ANTES de crear nada: tiene que salir Seq Scan on cita y Seq Scan on mascota, y ese es el punto de comparacion.</a:t>
+              <a:t>–   Cuarto, las MISMAS dos consultas otra vez, sin cambiar una coma: si se cambia una fecha o un id la comparacion deja de valer.</a:t>
             </a:r>
           </a:p>
           <a:p>
@@ -8237,7 +9317,7 @@
                 </a:solidFill>
                 <a:latin typeface="Calibri"/>
               </a:rPr>
-              <a:t>–   C1 es la agenda del dia, SELECT id_cita, fecha_hora, estado FROM cita WHERE fecha_hora &gt;= TIMESTAMP '2026-03-10 00:00:00' AND fecha_hora &lt; TIMESTAMP '2026-03-11 00:00:00' AND estado = 'PROGRAMADA', y devuelve 91 filas de las 150 citas que tiene ese dia</a:t>
+              <a:t>–   Y el cierre es la evidencia de que existen: ORDER BY tablename, indexname; la columna indexdef devuelve el CREATE INDEX completo, asi que ahi se ve tambien la clausula WHERE del indice parcial, que es lo que confirma que se creo parcial y no completo.</a:t>
             </a:r>
           </a:p>
           <a:p>
@@ -8253,7 +9333,7 @@
                 </a:solidFill>
                 <a:latin typeface="Calibri"/>
               </a:rPr>
-              <a:t>–   Tercero, y este es el paso que se salta medio salon, ANALYZE cita; y ANALYZE mascota;: crear el indice NO actualiza las estadisticas, el planeador decide por costo estimado, y con numeros viejos puede ignorar un indice perfectamente bueno.</a:t>
+              <a:t>–   El enunciado ademas exige comentar CUAL de los dos indices sobre fecha_hora eligio el planeador para C1.</a:t>
             </a:r>
           </a:p>
         </p:txBody>
@@ -8434,21 +9514,141 @@
                 </a:solidFill>
                 <a:latin typeface="Calibri"/>
               </a:rPr>
-              <a:t>La secuencia de medicion, y por que el ANALYZE del medio no es opcional (2/2)</a:t>
-            </a:r>
-          </a:p>
-        </p:txBody>
-      </p:sp>
-      <p:sp>
-        <p:nvSpPr>
-          <p:cNvPr id="5" name="TextBox 4"/>
+              <a:t>La secuencia de medicion, y por que el... — sintaxis</a:t>
+            </a:r>
+          </a:p>
+        </p:txBody>
+      </p:sp>
+      <p:sp>
+        <p:nvSpPr>
+          <p:cNvPr id="5" name="Rounded Rectangle 4"/>
+          <p:cNvSpPr/>
+          <p:nvPr/>
+        </p:nvSpPr>
+        <p:spPr>
+          <a:xfrm>
+            <a:off x="457200" y="1261872"/>
+            <a:ext cx="11277295" cy="5093208"/>
+          </a:xfrm>
+          <a:prstGeom prst="roundRect">
+            <a:avLst>
+              <a:gd name="adj" fmla="val 12000"/>
+            </a:avLst>
+          </a:prstGeom>
+          <a:solidFill>
+            <a:srgbClr val="1E2A38"/>
+          </a:solidFill>
+          <a:ln>
+            <a:noFill/>
+          </a:ln>
+        </p:spPr>
+        <p:style>
+          <a:lnRef idx="1">
+            <a:schemeClr val="accent1"/>
+          </a:lnRef>
+          <a:fillRef idx="3">
+            <a:schemeClr val="accent1"/>
+          </a:fillRef>
+          <a:effectRef idx="2">
+            <a:schemeClr val="accent1"/>
+          </a:effectRef>
+          <a:fontRef idx="minor">
+            <a:schemeClr val="lt1"/>
+          </a:fontRef>
+        </p:style>
+        <p:txBody>
+          <a:bodyPr rtlCol="0" anchor="ctr"/>
+          <a:lstStyle/>
+          <a:p>
+            <a:pPr algn="ctr"/>
+          </a:p>
+        </p:txBody>
+      </p:sp>
+      <p:sp>
+        <p:nvSpPr>
+          <p:cNvPr id="6" name="Rectangle 5"/>
+          <p:cNvSpPr/>
+          <p:nvPr/>
+        </p:nvSpPr>
+        <p:spPr>
+          <a:xfrm>
+            <a:off x="457200" y="1261872"/>
+            <a:ext cx="11277295" cy="320040"/>
+          </a:xfrm>
+          <a:prstGeom prst="rect">
+            <a:avLst/>
+          </a:prstGeom>
+          <a:solidFill>
+            <a:srgbClr val="095292"/>
+          </a:solidFill>
+          <a:ln>
+            <a:noFill/>
+          </a:ln>
+        </p:spPr>
+        <p:style>
+          <a:lnRef idx="1">
+            <a:schemeClr val="accent1"/>
+          </a:lnRef>
+          <a:fillRef idx="3">
+            <a:schemeClr val="accent1"/>
+          </a:fillRef>
+          <a:effectRef idx="2">
+            <a:schemeClr val="accent1"/>
+          </a:effectRef>
+          <a:fontRef idx="minor">
+            <a:schemeClr val="lt1"/>
+          </a:fontRef>
+        </p:style>
+        <p:txBody>
+          <a:bodyPr rtlCol="0" anchor="ctr"/>
+          <a:lstStyle/>
+          <a:p>
+            <a:pPr algn="ctr"/>
+          </a:p>
+        </p:txBody>
+      </p:sp>
+      <p:sp>
+        <p:nvSpPr>
+          <p:cNvPr id="7" name="TextBox 6"/>
           <p:cNvSpPr txBox="1"/>
           <p:nvPr/>
         </p:nvSpPr>
         <p:spPr>
           <a:xfrm>
-            <a:off x="457200" y="1170432"/>
-            <a:ext cx="11277295" cy="5230368"/>
+            <a:off x="685800" y="1307592"/>
+            <a:ext cx="10820095" cy="256032"/>
+          </a:xfrm>
+          <a:prstGeom prst="rect">
+            <a:avLst/>
+          </a:prstGeom>
+          <a:noFill/>
+        </p:spPr>
+        <p:txBody>
+          <a:bodyPr wrap="square" anchor="ctr"/>
+          <a:lstStyle/>
+          <a:p>
+            <a:r>
+              <a:rPr sz="1000" b="1" i="0">
+                <a:solidFill>
+                  <a:srgbClr val="269CCB"/>
+                </a:solidFill>
+                <a:latin typeface="Calibri"/>
+              </a:rPr>
+              <a:t>● ● ●</a:t>
+            </a:r>
+          </a:p>
+        </p:txBody>
+      </p:sp>
+      <p:sp>
+        <p:nvSpPr>
+          <p:cNvPr id="8" name="TextBox 7"/>
+          <p:cNvSpPr txBox="1"/>
+          <p:nvPr/>
+        </p:nvSpPr>
+        <p:spPr>
+          <a:xfrm>
+            <a:off x="777240" y="1719072"/>
+            <a:ext cx="10637215" cy="4453128"/>
           </a:xfrm>
           <a:prstGeom prst="rect">
             <a:avLst/>
@@ -8463,88 +9663,120 @@
           <a:p>
             <a:pPr>
               <a:spcAft>
-                <a:spcPts val="800"/>
-              </a:spcAft>
-            </a:pPr>
-            <a:r>
-              <a:rPr sz="2000" b="0" i="0">
-                <a:solidFill>
-                  <a:srgbClr val="333333"/>
-                </a:solidFill>
-                <a:latin typeface="Calibri"/>
-              </a:rPr>
-              <a:t>–   La mitad de los avisos de «cree el indice y no me sirvio» del taller son este paso omitido.</a:t>
-            </a:r>
-          </a:p>
-          <a:p>
-            <a:pPr>
-              <a:spcAft>
-                <a:spcPts val="800"/>
-              </a:spcAft>
-            </a:pPr>
-            <a:r>
-              <a:rPr sz="2000" b="0" i="0">
-                <a:solidFill>
-                  <a:srgbClr val="333333"/>
-                </a:solidFill>
-                <a:latin typeface="Calibri"/>
-              </a:rPr>
-              <a:t>–   Cuarto, las MISMAS dos consultas otra vez, sin cambiar una coma: si se cambia una fecha o un id la comparacion deja de valer.</a:t>
-            </a:r>
-          </a:p>
-          <a:p>
-            <a:pPr>
-              <a:spcAft>
-                <a:spcPts val="800"/>
-              </a:spcAft>
-            </a:pPr>
-            <a:r>
-              <a:rPr sz="2000" b="0" i="0">
-                <a:solidFill>
-                  <a:srgbClr val="333333"/>
-                </a:solidFill>
-                <a:latin typeface="Calibri"/>
-              </a:rPr>
-              <a:t>–   Y el cierre de la pregunta 1 es la evidencia de que existen: ORDER BY tablename, indexname</a:t>
-            </a:r>
-          </a:p>
-          <a:p>
-            <a:pPr>
-              <a:spcAft>
-                <a:spcPts val="800"/>
-              </a:spcAft>
-            </a:pPr>
-            <a:r>
-              <a:rPr sz="2000" b="0" i="0">
-                <a:solidFill>
-                  <a:srgbClr val="333333"/>
-                </a:solidFill>
-                <a:latin typeface="Calibri"/>
-              </a:rPr>
-              <a:t>–   La columna indexdef devuelve el CREATE INDEX completo, asi que ahi se ve tambien la clausula WHERE del indice parcial, que es lo que confirma que se creo parcial y no completo.</a:t>
-            </a:r>
-          </a:p>
-          <a:p>
-            <a:pPr>
-              <a:spcAft>
-                <a:spcPts val="800"/>
-              </a:spcAft>
-            </a:pPr>
-            <a:r>
-              <a:rPr sz="2000" b="0" i="0">
-                <a:solidFill>
-                  <a:srgbClr val="333333"/>
-                </a:solidFill>
-                <a:latin typeface="Calibri"/>
-              </a:rPr>
-              <a:t>–   El enunciado ademas exige comentar CUAL de los dos indices sobre fecha_hora eligio el planeador para C1, y la rubrica descuenta si no se comenta: no basta pegar el plan, hay que leerlo.</a:t>
-            </a:r>
-          </a:p>
-        </p:txBody>
-      </p:sp>
-      <p:sp>
-        <p:nvSpPr>
-          <p:cNvPr id="6" name="TextBox 5"/>
+                <a:spcPts val="400"/>
+              </a:spcAft>
+            </a:pPr>
+            <a:r>
+              <a:rPr sz="1400" b="0" i="0">
+                <a:solidFill>
+                  <a:srgbClr val="FFFFFF"/>
+                </a:solidFill>
+                <a:latin typeface="Calibri"/>
+              </a:rPr>
+              <a:t>SELECT id_mascota, nombre, especie</a:t>
+            </a:r>
+          </a:p>
+          <a:p>
+            <a:pPr>
+              <a:spcAft>
+                <a:spcPts val="400"/>
+              </a:spcAft>
+            </a:pPr>
+            <a:r>
+              <a:rPr sz="1400" b="0" i="0">
+                <a:solidFill>
+                  <a:srgbClr val="FFFFFF"/>
+                </a:solidFill>
+                <a:latin typeface="Calibri"/>
+              </a:rPr>
+              <a:t>FROM mascota</a:t>
+            </a:r>
+          </a:p>
+          <a:p>
+            <a:pPr>
+              <a:spcAft>
+                <a:spcPts val="400"/>
+              </a:spcAft>
+            </a:pPr>
+            <a:r>
+              <a:rPr sz="1400" b="0" i="0">
+                <a:solidFill>
+                  <a:srgbClr val="FFFFFF"/>
+                </a:solidFill>
+                <a:latin typeface="Calibri"/>
+              </a:rPr>
+              <a:t>WHERE id_dueno = 1234</a:t>
+            </a:r>
+          </a:p>
+          <a:p>
+            <a:pPr>
+              <a:spcAft>
+                <a:spcPts val="400"/>
+              </a:spcAft>
+            </a:pPr>
+            <a:r>
+              <a:rPr sz="1400" b="0" i="0">
+                <a:solidFill>
+                  <a:srgbClr val="FFFFFF"/>
+                </a:solidFill>
+                <a:latin typeface="Calibri"/>
+              </a:rPr>
+              <a:t/>
+            </a:r>
+          </a:p>
+          <a:p>
+            <a:pPr>
+              <a:spcAft>
+                <a:spcPts val="400"/>
+              </a:spcAft>
+            </a:pPr>
+            <a:r>
+              <a:rPr sz="1400" b="0" i="0">
+                <a:solidFill>
+                  <a:srgbClr val="FFFFFF"/>
+                </a:solidFill>
+                <a:latin typeface="Calibri"/>
+              </a:rPr>
+              <a:t>SELECT indexname, tablename, indexdef</a:t>
+            </a:r>
+          </a:p>
+          <a:p>
+            <a:pPr>
+              <a:spcAft>
+                <a:spcPts val="400"/>
+              </a:spcAft>
+            </a:pPr>
+            <a:r>
+              <a:rPr sz="1400" b="0" i="0">
+                <a:solidFill>
+                  <a:srgbClr val="FFFFFF"/>
+                </a:solidFill>
+                <a:latin typeface="Calibri"/>
+              </a:rPr>
+              <a:t>FROM pg_indexes</a:t>
+            </a:r>
+          </a:p>
+          <a:p>
+            <a:pPr>
+              <a:spcAft>
+                <a:spcPts val="400"/>
+              </a:spcAft>
+            </a:pPr>
+            <a:r>
+              <a:rPr sz="1400" b="0" i="0">
+                <a:solidFill>
+                  <a:srgbClr val="FFFFFF"/>
+                </a:solidFill>
+                <a:latin typeface="Calibri"/>
+              </a:rPr>
+              <a:t>WHERE tablename IN ('cita','mascota')</a:t>
+            </a:r>
+          </a:p>
+        </p:txBody>
+      </p:sp>
+      <p:sp>
+        <p:nvSpPr>
+          <p:cNvPr id="9" name="TextBox 8"/>
           <p:cNvSpPr txBox="1"/>
           <p:nvPr/>
         </p:nvSpPr>
@@ -8718,141 +9950,21 @@
                 </a:solidFill>
                 <a:latin typeface="Calibri"/>
               </a:rPr>
-              <a:t>La secuencia de medicion, y por que el... — sintaxis</a:t>
-            </a:r>
-          </a:p>
-        </p:txBody>
-      </p:sp>
-      <p:sp>
-        <p:nvSpPr>
-          <p:cNvPr id="5" name="Rounded Rectangle 4"/>
-          <p:cNvSpPr/>
-          <p:nvPr/>
-        </p:nvSpPr>
-        <p:spPr>
-          <a:xfrm>
-            <a:off x="457200" y="1261872"/>
-            <a:ext cx="11277295" cy="5093208"/>
-          </a:xfrm>
-          <a:prstGeom prst="roundRect">
-            <a:avLst>
-              <a:gd name="adj" fmla="val 12000"/>
-            </a:avLst>
-          </a:prstGeom>
-          <a:solidFill>
-            <a:srgbClr val="1E2A38"/>
-          </a:solidFill>
-          <a:ln>
-            <a:noFill/>
-          </a:ln>
-        </p:spPr>
-        <p:style>
-          <a:lnRef idx="1">
-            <a:schemeClr val="accent1"/>
-          </a:lnRef>
-          <a:fillRef idx="3">
-            <a:schemeClr val="accent1"/>
-          </a:fillRef>
-          <a:effectRef idx="2">
-            <a:schemeClr val="accent1"/>
-          </a:effectRef>
-          <a:fontRef idx="minor">
-            <a:schemeClr val="lt1"/>
-          </a:fontRef>
-        </p:style>
-        <p:txBody>
-          <a:bodyPr rtlCol="0" anchor="ctr"/>
-          <a:lstStyle/>
-          <a:p>
-            <a:pPr algn="ctr"/>
-          </a:p>
-        </p:txBody>
-      </p:sp>
-      <p:sp>
-        <p:nvSpPr>
-          <p:cNvPr id="6" name="Rectangle 5"/>
-          <p:cNvSpPr/>
-          <p:nvPr/>
-        </p:nvSpPr>
-        <p:spPr>
-          <a:xfrm>
-            <a:off x="457200" y="1261872"/>
-            <a:ext cx="11277295" cy="320040"/>
-          </a:xfrm>
-          <a:prstGeom prst="rect">
-            <a:avLst/>
-          </a:prstGeom>
-          <a:solidFill>
-            <a:srgbClr val="095292"/>
-          </a:solidFill>
-          <a:ln>
-            <a:noFill/>
-          </a:ln>
-        </p:spPr>
-        <p:style>
-          <a:lnRef idx="1">
-            <a:schemeClr val="accent1"/>
-          </a:lnRef>
-          <a:fillRef idx="3">
-            <a:schemeClr val="accent1"/>
-          </a:fillRef>
-          <a:effectRef idx="2">
-            <a:schemeClr val="accent1"/>
-          </a:effectRef>
-          <a:fontRef idx="minor">
-            <a:schemeClr val="lt1"/>
-          </a:fontRef>
-        </p:style>
-        <p:txBody>
-          <a:bodyPr rtlCol="0" anchor="ctr"/>
-          <a:lstStyle/>
-          <a:p>
-            <a:pPr algn="ctr"/>
-          </a:p>
-        </p:txBody>
-      </p:sp>
-      <p:sp>
-        <p:nvSpPr>
-          <p:cNvPr id="7" name="TextBox 6"/>
+              <a:t>El experimento del orden de columnas, paso a paso (1/2)</a:t>
+            </a:r>
+          </a:p>
+        </p:txBody>
+      </p:sp>
+      <p:sp>
+        <p:nvSpPr>
+          <p:cNvPr id="5" name="TextBox 4"/>
           <p:cNvSpPr txBox="1"/>
           <p:nvPr/>
         </p:nvSpPr>
         <p:spPr>
           <a:xfrm>
-            <a:off x="685800" y="1307592"/>
-            <a:ext cx="10820095" cy="256032"/>
-          </a:xfrm>
-          <a:prstGeom prst="rect">
-            <a:avLst/>
-          </a:prstGeom>
-          <a:noFill/>
-        </p:spPr>
-        <p:txBody>
-          <a:bodyPr wrap="square" anchor="ctr"/>
-          <a:lstStyle/>
-          <a:p>
-            <a:r>
-              <a:rPr sz="1000" b="1" i="0">
-                <a:solidFill>
-                  <a:srgbClr val="269CCB"/>
-                </a:solidFill>
-                <a:latin typeface="Calibri"/>
-              </a:rPr>
-              <a:t>● ● ●</a:t>
-            </a:r>
-          </a:p>
-        </p:txBody>
-      </p:sp>
-      <p:sp>
-        <p:nvSpPr>
-          <p:cNvPr id="8" name="TextBox 7"/>
-          <p:cNvSpPr txBox="1"/>
-          <p:nvPr/>
-        </p:nvSpPr>
-        <p:spPr>
-          <a:xfrm>
-            <a:off x="777240" y="1719072"/>
-            <a:ext cx="10637215" cy="4453128"/>
+            <a:off x="457200" y="1170432"/>
+            <a:ext cx="11277295" cy="5230368"/>
           </a:xfrm>
           <a:prstGeom prst="rect">
             <a:avLst/>
@@ -8867,120 +9979,72 @@
           <a:p>
             <a:pPr>
               <a:spcAft>
-                <a:spcPts val="400"/>
-              </a:spcAft>
-            </a:pPr>
-            <a:r>
-              <a:rPr sz="1400" b="0" i="0">
-                <a:solidFill>
-                  <a:srgbClr val="FFFFFF"/>
-                </a:solidFill>
-                <a:latin typeface="Calibri"/>
-              </a:rPr>
-              <a:t>SELECT id_mascota, nombre, especie</a:t>
-            </a:r>
-          </a:p>
-          <a:p>
-            <a:pPr>
-              <a:spcAft>
-                <a:spcPts val="400"/>
-              </a:spcAft>
-            </a:pPr>
-            <a:r>
-              <a:rPr sz="1400" b="0" i="0">
-                <a:solidFill>
-                  <a:srgbClr val="FFFFFF"/>
-                </a:solidFill>
-                <a:latin typeface="Calibri"/>
-              </a:rPr>
-              <a:t>FROM mascota</a:t>
-            </a:r>
-          </a:p>
-          <a:p>
-            <a:pPr>
-              <a:spcAft>
-                <a:spcPts val="400"/>
-              </a:spcAft>
-            </a:pPr>
-            <a:r>
-              <a:rPr sz="1400" b="0" i="0">
-                <a:solidFill>
-                  <a:srgbClr val="FFFFFF"/>
-                </a:solidFill>
-                <a:latin typeface="Calibri"/>
-              </a:rPr>
-              <a:t>WHERE id_dueno = 1234</a:t>
-            </a:r>
-          </a:p>
-          <a:p>
-            <a:pPr>
-              <a:spcAft>
-                <a:spcPts val="400"/>
-              </a:spcAft>
-            </a:pPr>
-            <a:r>
-              <a:rPr sz="1400" b="0" i="0">
-                <a:solidFill>
-                  <a:srgbClr val="FFFFFF"/>
-                </a:solidFill>
-                <a:latin typeface="Calibri"/>
-              </a:rPr>
-              <a:t/>
-            </a:r>
-          </a:p>
-          <a:p>
-            <a:pPr>
-              <a:spcAft>
-                <a:spcPts val="400"/>
-              </a:spcAft>
-            </a:pPr>
-            <a:r>
-              <a:rPr sz="1400" b="0" i="0">
-                <a:solidFill>
-                  <a:srgbClr val="FFFFFF"/>
-                </a:solidFill>
-                <a:latin typeface="Calibri"/>
-              </a:rPr>
-              <a:t>SELECT indexname, tablename, indexdef</a:t>
-            </a:r>
-          </a:p>
-          <a:p>
-            <a:pPr>
-              <a:spcAft>
-                <a:spcPts val="400"/>
-              </a:spcAft>
-            </a:pPr>
-            <a:r>
-              <a:rPr sz="1400" b="0" i="0">
-                <a:solidFill>
-                  <a:srgbClr val="FFFFFF"/>
-                </a:solidFill>
-                <a:latin typeface="Calibri"/>
-              </a:rPr>
-              <a:t>FROM pg_indexes</a:t>
-            </a:r>
-          </a:p>
-          <a:p>
-            <a:pPr>
-              <a:spcAft>
-                <a:spcPts val="400"/>
-              </a:spcAft>
-            </a:pPr>
-            <a:r>
-              <a:rPr sz="1400" b="0" i="0">
-                <a:solidFill>
-                  <a:srgbClr val="FFFFFF"/>
-                </a:solidFill>
-                <a:latin typeface="Calibri"/>
-              </a:rPr>
-              <a:t>WHERE tablename IN ('cita','mascota')</a:t>
-            </a:r>
-          </a:p>
-        </p:txBody>
-      </p:sp>
-      <p:sp>
-        <p:nvSpPr>
-          <p:cNvPr id="9" name="TextBox 8"/>
+                <a:spcPts val="800"/>
+              </a:spcAft>
+            </a:pPr>
+            <a:r>
+              <a:rPr sz="2000" b="0" i="0">
+                <a:solidFill>
+                  <a:srgbClr val="333333"/>
+                </a:solidFill>
+                <a:latin typeface="Calibri"/>
+              </a:rPr>
+              <a:t>–   Se crean los dos compuestos, se corre ANALYZE cita, y se miden tres consultas.</a:t>
+            </a:r>
+          </a:p>
+          <a:p>
+            <a:pPr>
+              <a:spcAft>
+                <a:spcPts val="800"/>
+              </a:spcAft>
+            </a:pPr>
+            <a:r>
+              <a:rPr sz="2000" b="0" i="0">
+                <a:solidFill>
+                  <a:srgbClr val="333333"/>
+                </a:solidFill>
+                <a:latin typeface="Calibri"/>
+              </a:rPr>
+              <a:t>–   Q1 filtra por estado con igualdad y por fecha_hora con rango: favorece a idx_cita_estado_fecha, porque la columna de igualdad es la lider y el rango queda al final.</a:t>
+            </a:r>
+          </a:p>
+          <a:p>
+            <a:pPr>
+              <a:spcAft>
+                <a:spcPts val="800"/>
+              </a:spcAft>
+            </a:pPr>
+            <a:r>
+              <a:rPr sz="2000" b="0" i="0">
+                <a:solidFill>
+                  <a:srgbClr val="333333"/>
+                </a:solidFill>
+                <a:latin typeface="Calibri"/>
+              </a:rPr>
+              <a:t>–   Q2 filtra solo por rango de fecha_hora: favorece a idx_cita_fecha_estado, porque ahi fecha_hora si es la lider.</a:t>
+            </a:r>
+          </a:p>
+          <a:p>
+            <a:pPr>
+              <a:spcAft>
+                <a:spcPts val="800"/>
+              </a:spcAft>
+            </a:pPr>
+            <a:r>
+              <a:rPr sz="2000" b="0" i="0">
+                <a:solidFill>
+                  <a:srgbClr val="333333"/>
+                </a:solidFill>
+                <a:latin typeface="Calibri"/>
+              </a:rPr>
+              <a:t>–   Q3 filtra solo por estado, sin fecha: idx_cita_fecha_estado no le sirve, porque su columna lider no aparece en el WHERE, y con CANCELADA siendo apenas 2.728 de 30.010 filas el motor puede elegir idx_cita_estado_fecha o resolver por conteo.</a:t>
+            </a:r>
+          </a:p>
+        </p:txBody>
+      </p:sp>
+      <p:sp>
+        <p:nvSpPr>
+          <p:cNvPr id="6" name="TextBox 5"/>
           <p:cNvSpPr txBox="1"/>
           <p:nvPr/>
         </p:nvSpPr>
@@ -9154,7 +10218,7 @@
                 </a:solidFill>
                 <a:latin typeface="Calibri"/>
               </a:rPr>
-              <a:t>El experimento del orden de columnas, paso a paso (1/2)</a:t>
+              <a:t>El experimento del orden de columnas, paso a paso (2/2)</a:t>
             </a:r>
           </a:p>
         </p:txBody>
@@ -9193,7 +10257,7 @@
                 </a:solidFill>
                 <a:latin typeface="Calibri"/>
               </a:rPr>
-              <a:t>–   Se crean los dos compuestos, se corre ANALYZE cita, y se miden tres consultas.</a:t>
+              <a:t>–   Despues viene la parte que convierte la observacion en experimento: se hace DROP INDEX idx_cita_fecha_estado y se vuelve a medir Q2.</a:t>
             </a:r>
           </a:p>
           <a:p>
@@ -9209,7 +10273,7 @@
                 </a:solidFill>
                 <a:latin typeface="Calibri"/>
               </a:rPr>
-              <a:t>–   Q1 filtra por estado con igualdad y por fecha_hora con rango: favorece a idx_cita_estado_fecha, porque la columna de igualdad es la lider y el rango queda al final.</a:t>
+              <a:t>–   El plan cae en idx_cita_fecha_hora, que tambien tiene fecha_hora como lider, o vuelve al recorrido completo, pero NO se pasa a idx_cita_estado_fecha.</a:t>
             </a:r>
           </a:p>
           <a:p>
@@ -9225,23 +10289,7 @@
                 </a:solidFill>
                 <a:latin typeface="Calibri"/>
               </a:rPr>
-              <a:t>–   Q2 filtra solo por rango de fecha_hora: favorece a idx_cita_fecha_estado, porque ahi fecha_hora si es la lider.</a:t>
-            </a:r>
-          </a:p>
-          <a:p>
-            <a:pPr>
-              <a:spcAft>
-                <a:spcPts val="800"/>
-              </a:spcAft>
-            </a:pPr>
-            <a:r>
-              <a:rPr sz="2000" b="0" i="0">
-                <a:solidFill>
-                  <a:srgbClr val="333333"/>
-                </a:solidFill>
-                <a:latin typeface="Calibri"/>
-              </a:rPr>
-              <a:t>–   Q3 filtra solo por estado, sin fecha: idx_cita_fecha_estado no le sirve, porque su columna lider no aparece en el WHERE, y con CANCELADA siendo apenas 2.728 de 30.010 filas el motor puede elegir idx_cita_estado_fecha o resolver por conteo.</a:t>
+              <a:t>–   Un matiz honesto: el planeador decide por costo y puede sorprender, sobre todo entre dos indices que compiten de cerca; la instruccion al grupo es reportar lo que VIO en su plan, no lo que decia la diapositiva, y explicar la eleccion.</a:t>
             </a:r>
           </a:p>
         </p:txBody>
@@ -9422,7 +10470,7 @@
                 </a:solidFill>
                 <a:latin typeface="Calibri"/>
               </a:rPr>
-              <a:t>El experimento del orden de columnas, paso a paso (2/2)</a:t>
+              <a:t>El indice parcial: que indexa, cuanto ahorra y cuando gana (1/3)</a:t>
             </a:r>
           </a:p>
         </p:txBody>
@@ -9461,7 +10509,7 @@
                 </a:solidFill>
                 <a:latin typeface="Calibri"/>
               </a:rPr>
-              <a:t>–   Despues viene la parte que convierte la observacion en experimento: se hace DROP INDEX idx_cita_fecha_estado y se vuelve a medir Q2.</a:t>
+              <a:t>–   Un indice parcial es el que solo contiene las filas que cumplen una condicion, y la sintaxis es WHERE estado = 'PROGRAMADA'.</a:t>
             </a:r>
           </a:p>
           <a:p>
@@ -9477,7 +10525,7 @@
                 </a:solidFill>
                 <a:latin typeface="Calibri"/>
               </a:rPr>
-              <a:t>–   El plan cae en idx_cita_fecha_hora, que tambien tiene fecha_hora como lider, o vuelve al recorrido completo, pero NO se pasa a idx_cita_estado_fecha.</a:t>
+              <a:t>–   Lo primero que hay que aclarar, porque es donde se confunde todo el mundo: ese WHERE no es el de la consulta, es parte de la DEFINICION del indice y decide que filas entran en el arbol.</a:t>
             </a:r>
           </a:p>
           <a:p>
@@ -9493,7 +10541,23 @@
                 </a:solidFill>
                 <a:latin typeface="Calibri"/>
               </a:rPr>
-              <a:t>–   Un matiz honesto: el planeador decide por costo y puede sorprender, sobre todo entre dos indices que compiten de cerca; la instruccion al grupo es reportar lo que VIO en su plan, no lo que decia la diapositiva, y explicar la eleccion.</a:t>
+              <a:t>–   Con los datos de hoy el ahorro se puede decir con numeros exactos: de las 30.010 citas, 18.187 estan PROGRAMADA, el 61 %; el indice completo indexa 30.010 entradas y el parcial 18.187, cuatro de cada diez menos.</a:t>
+            </a:r>
+          </a:p>
+          <a:p>
+            <a:pPr>
+              <a:spcAft>
+                <a:spcPts val="800"/>
+              </a:spcAft>
+            </a:pPr>
+            <a:r>
+              <a:rPr sz="2000" b="0" i="0">
+                <a:solidFill>
+                  <a:srgbClr val="333333"/>
+                </a:solidFill>
+                <a:latin typeface="Calibri"/>
+              </a:rPr>
+              <a:t>–   Menos entradas es menos disco, menos memoria intermedia ocupada y menos trabajo en cada escritura de una cita que no este programada.</a:t>
             </a:r>
           </a:p>
         </p:txBody>
@@ -9674,7 +10738,7 @@
                 </a:solidFill>
                 <a:latin typeface="Calibri"/>
               </a:rPr>
-              <a:t>El indice parcial: que indexa, cuanto ahorra y cuando gana (1/3)</a:t>
+              <a:t>El indice parcial: que indexa, cuanto ahorra y cuando gana (2/3)</a:t>
             </a:r>
           </a:p>
         </p:txBody>
@@ -9713,7 +10777,7 @@
                 </a:solidFill>
                 <a:latin typeface="Calibri"/>
               </a:rPr>
-              <a:t>–   Un indice parcial es el que solo contiene las filas que cumplen una condicion, y la sintaxis es WHERE estado = 'PROGRAMADA'.</a:t>
+              <a:t>–   La condicion para que el planeador lo use es estricta: tiene que poder demostrar que la consulta trae la misma condicion del indice.</a:t>
             </a:r>
           </a:p>
           <a:p>
@@ -9729,7 +10793,7 @@
                 </a:solidFill>
                 <a:latin typeface="Calibri"/>
               </a:rPr>
-              <a:t>–   Lo primero que hay que aclarar, porque es donde se confunde todo el mundo: ese WHERE no es el de la consulta, es parte de la DEFINICION del indice y decide que filas entran en el arbol.</a:t>
+              <a:t>–   WHERE estado = 'PROGRAMADA' AND fecha_hora &gt;=... si lo aprovecha; la misma consulta sin el filtro de estado no, porque el indice no contiene las filas atendidas ni las canceladas y el motor no puede arriesgarse a devolver un resultado incompleto.</a:t>
             </a:r>
           </a:p>
           <a:p>
@@ -9745,7 +10809,7 @@
                 </a:solidFill>
                 <a:latin typeface="Calibri"/>
               </a:rPr>
-              <a:t>–   Con los datos de hoy el ahorro se puede decir con numeros exactos: de las 30.010 citas, 18.187 estan PROGRAMADA, el 61 %; el indice completo indexa 30.010 entradas y el parcial 18.187, cuatro de cada diez menos.</a:t>
+              <a:t>–   El caso de VetCare que lo justifica hay que nombrarlo: la agenda del dia de la recepcion SIEMPRE filtra por PROGRAMADA, porque nadie abre esa pantalla para ver las citas que ya se atendieron.</a:t>
             </a:r>
           </a:p>
           <a:p>
@@ -9761,7 +10825,7 @@
                 </a:solidFill>
                 <a:latin typeface="Calibri"/>
               </a:rPr>
-              <a:t>–   Menos entradas es menos disco, menos memoria intermedia ocupada y menos trabajo en cada escritura de una cita que no este programada.</a:t>
+              <a:t>–   Cuando el filtro es parte del caso de uso y no del capricho de una consulta, el parcial es la respuesta correcta.</a:t>
             </a:r>
           </a:p>
         </p:txBody>
@@ -9942,7 +11006,7 @@
                 </a:solidFill>
                 <a:latin typeface="Calibri"/>
               </a:rPr>
-              <a:t>El indice parcial: que indexa, cuanto ahorra y cuando gana (2/3)</a:t>
+              <a:t>El indice parcial: que indexa, cuanto ahorra y cuando gana (3/3)</a:t>
             </a:r>
           </a:p>
         </p:txBody>
@@ -9981,7 +11045,7 @@
                 </a:solidFill>
                 <a:latin typeface="Calibri"/>
               </a:rPr>
-              <a:t>–   La condicion para que el planeador lo use es estricta: tiene que poder demostrar que la consulta trae la misma condicion del indice.</a:t>
+              <a:t>–   Y en C1 los dos indices sobre fecha_hora compiten: se espera que gane el parcial</a:t>
             </a:r>
           </a:p>
           <a:p>
@@ -9997,7 +11061,7 @@
                 </a:solidFill>
                 <a:latin typeface="Calibri"/>
               </a:rPr>
-              <a:t>–   WHERE estado = 'PROGRAMADA' AND fecha_hora &gt;=... si lo aprovecha; la misma consulta sin el filtro de estado no, porque el indice no contiene las filas atendidas ni las canceladas y el motor no puede arriesgarse a devolver un resultado incompleto.</a:t>
+              <a:t>–   Porque recorre 91 entradas y ya sabe que todas cumplen el estado, mientras el completo recorreria las 150 del dia y tendria que descartar 59 despues de ir a la tabla a leer el estado.</a:t>
             </a:r>
           </a:p>
           <a:p>
@@ -10013,23 +11077,7 @@
                 </a:solidFill>
                 <a:latin typeface="Calibri"/>
               </a:rPr>
-              <a:t>–   El caso de VetCare que lo justifica hay que nombrarlo: la agenda del dia de la recepcion SIEMPRE filtra por PROGRAMADA, porque nadie abre esa pantalla para ver las citas que ya se atendieron.</a:t>
-            </a:r>
-          </a:p>
-          <a:p>
-            <a:pPr>
-              <a:spcAft>
-                <a:spcPts val="800"/>
-              </a:spcAft>
-            </a:pPr>
-            <a:r>
-              <a:rPr sz="2000" b="0" i="0">
-                <a:solidFill>
-                  <a:srgbClr val="333333"/>
-                </a:solidFill>
-                <a:latin typeface="Calibri"/>
-              </a:rPr>
-              <a:t>–   Cuando el filtro es parte del caso de uso y no del capricho de una consulta, el parcial es la respuesta correcta.</a:t>
+              <a:t>–   La diferencia de costo es pequena con este volumen, asi que si en la corrida gana el completo la respuesta correcta sigue siendo la que reporta lo que se vio.</a:t>
             </a:r>
           </a:p>
         </p:txBody>
@@ -10210,21 +11258,141 @@
                 </a:solidFill>
                 <a:latin typeface="Calibri"/>
               </a:rPr>
-              <a:t>El indice parcial: que indexa, cuanto ahorra y cuando gana (3/3)</a:t>
-            </a:r>
-          </a:p>
-        </p:txBody>
-      </p:sp>
-      <p:sp>
-        <p:nvSpPr>
-          <p:cNvPr id="5" name="TextBox 4"/>
+              <a:t>El indice parcial: que indexa, cuanto ahorra... — sintaxis</a:t>
+            </a:r>
+          </a:p>
+        </p:txBody>
+      </p:sp>
+      <p:sp>
+        <p:nvSpPr>
+          <p:cNvPr id="5" name="Rounded Rectangle 4"/>
+          <p:cNvSpPr/>
+          <p:nvPr/>
+        </p:nvSpPr>
+        <p:spPr>
+          <a:xfrm>
+            <a:off x="457200" y="1261872"/>
+            <a:ext cx="11277295" cy="5093208"/>
+          </a:xfrm>
+          <a:prstGeom prst="roundRect">
+            <a:avLst>
+              <a:gd name="adj" fmla="val 12000"/>
+            </a:avLst>
+          </a:prstGeom>
+          <a:solidFill>
+            <a:srgbClr val="1E2A38"/>
+          </a:solidFill>
+          <a:ln>
+            <a:noFill/>
+          </a:ln>
+        </p:spPr>
+        <p:style>
+          <a:lnRef idx="1">
+            <a:schemeClr val="accent1"/>
+          </a:lnRef>
+          <a:fillRef idx="3">
+            <a:schemeClr val="accent1"/>
+          </a:fillRef>
+          <a:effectRef idx="2">
+            <a:schemeClr val="accent1"/>
+          </a:effectRef>
+          <a:fontRef idx="minor">
+            <a:schemeClr val="lt1"/>
+          </a:fontRef>
+        </p:style>
+        <p:txBody>
+          <a:bodyPr rtlCol="0" anchor="ctr"/>
+          <a:lstStyle/>
+          <a:p>
+            <a:pPr algn="ctr"/>
+          </a:p>
+        </p:txBody>
+      </p:sp>
+      <p:sp>
+        <p:nvSpPr>
+          <p:cNvPr id="6" name="Rectangle 5"/>
+          <p:cNvSpPr/>
+          <p:nvPr/>
+        </p:nvSpPr>
+        <p:spPr>
+          <a:xfrm>
+            <a:off x="457200" y="1261872"/>
+            <a:ext cx="11277295" cy="320040"/>
+          </a:xfrm>
+          <a:prstGeom prst="rect">
+            <a:avLst/>
+          </a:prstGeom>
+          <a:solidFill>
+            <a:srgbClr val="095292"/>
+          </a:solidFill>
+          <a:ln>
+            <a:noFill/>
+          </a:ln>
+        </p:spPr>
+        <p:style>
+          <a:lnRef idx="1">
+            <a:schemeClr val="accent1"/>
+          </a:lnRef>
+          <a:fillRef idx="3">
+            <a:schemeClr val="accent1"/>
+          </a:fillRef>
+          <a:effectRef idx="2">
+            <a:schemeClr val="accent1"/>
+          </a:effectRef>
+          <a:fontRef idx="minor">
+            <a:schemeClr val="lt1"/>
+          </a:fontRef>
+        </p:style>
+        <p:txBody>
+          <a:bodyPr rtlCol="0" anchor="ctr"/>
+          <a:lstStyle/>
+          <a:p>
+            <a:pPr algn="ctr"/>
+          </a:p>
+        </p:txBody>
+      </p:sp>
+      <p:sp>
+        <p:nvSpPr>
+          <p:cNvPr id="7" name="TextBox 6"/>
           <p:cNvSpPr txBox="1"/>
           <p:nvPr/>
         </p:nvSpPr>
         <p:spPr>
           <a:xfrm>
-            <a:off x="457200" y="1170432"/>
-            <a:ext cx="11277295" cy="5230368"/>
+            <a:off x="685800" y="1307592"/>
+            <a:ext cx="10820095" cy="256032"/>
+          </a:xfrm>
+          <a:prstGeom prst="rect">
+            <a:avLst/>
+          </a:prstGeom>
+          <a:noFill/>
+        </p:spPr>
+        <p:txBody>
+          <a:bodyPr wrap="square" anchor="ctr"/>
+          <a:lstStyle/>
+          <a:p>
+            <a:r>
+              <a:rPr sz="1000" b="1" i="0">
+                <a:solidFill>
+                  <a:srgbClr val="269CCB"/>
+                </a:solidFill>
+                <a:latin typeface="Calibri"/>
+              </a:rPr>
+              <a:t>● ● ●</a:t>
+            </a:r>
+          </a:p>
+        </p:txBody>
+      </p:sp>
+      <p:sp>
+        <p:nvSpPr>
+          <p:cNvPr id="8" name="TextBox 7"/>
+          <p:cNvSpPr txBox="1"/>
+          <p:nvPr/>
+        </p:nvSpPr>
+        <p:spPr>
+          <a:xfrm>
+            <a:off x="777240" y="1719072"/>
+            <a:ext cx="10637215" cy="4453128"/>
           </a:xfrm>
           <a:prstGeom prst="rect">
             <a:avLst/>
@@ -10239,56 +11407,24 @@
           <a:p>
             <a:pPr>
               <a:spcAft>
-                <a:spcPts val="800"/>
-              </a:spcAft>
-            </a:pPr>
-            <a:r>
-              <a:rPr sz="2000" b="0" i="0">
-                <a:solidFill>
-                  <a:srgbClr val="333333"/>
-                </a:solidFill>
-                <a:latin typeface="Calibri"/>
-              </a:rPr>
-              <a:t>–   Y en C1 los dos indices sobre fecha_hora compiten: se espera que gane el parcial</a:t>
-            </a:r>
-          </a:p>
-          <a:p>
-            <a:pPr>
-              <a:spcAft>
-                <a:spcPts val="800"/>
-              </a:spcAft>
-            </a:pPr>
-            <a:r>
-              <a:rPr sz="2000" b="0" i="0">
-                <a:solidFill>
-                  <a:srgbClr val="333333"/>
-                </a:solidFill>
-                <a:latin typeface="Calibri"/>
-              </a:rPr>
-              <a:t>–   Porque recorre 91 entradas y ya sabe que todas cumplen el estado, mientras el completo recorreria las 150 del dia y tendria que descartar 59 despues de ir a la tabla a leer el estado.</a:t>
-            </a:r>
-          </a:p>
-          <a:p>
-            <a:pPr>
-              <a:spcAft>
-                <a:spcPts val="800"/>
-              </a:spcAft>
-            </a:pPr>
-            <a:r>
-              <a:rPr sz="2000" b="0" i="0">
-                <a:solidFill>
-                  <a:srgbClr val="333333"/>
-                </a:solidFill>
-                <a:latin typeface="Calibri"/>
-              </a:rPr>
-              <a:t>–   La diferencia de costo es pequena con este volumen, asi que si en la corrida gana el completo la respuesta correcta sigue siendo la que reporta lo que se vio.</a:t>
-            </a:r>
-          </a:p>
-        </p:txBody>
-      </p:sp>
-      <p:sp>
-        <p:nvSpPr>
-          <p:cNvPr id="6" name="TextBox 5"/>
+                <a:spcPts val="400"/>
+              </a:spcAft>
+            </a:pPr>
+            <a:r>
+              <a:rPr sz="1400" b="0" i="0">
+                <a:solidFill>
+                  <a:srgbClr val="FFFFFF"/>
+                </a:solidFill>
+                <a:latin typeface="Calibri"/>
+              </a:rPr>
+              <a:t>CREATE INDEX idx_cita_programada_fecha ON cita (fecha_hora)</a:t>
+            </a:r>
+          </a:p>
+        </p:txBody>
+      </p:sp>
+      <p:sp>
+        <p:nvSpPr>
+          <p:cNvPr id="9" name="TextBox 8"/>
           <p:cNvSpPr txBox="1"/>
           <p:nvPr/>
         </p:nvSpPr>
@@ -10462,141 +11598,21 @@
                 </a:solidFill>
                 <a:latin typeface="Calibri"/>
               </a:rPr>
-              <a:t>El indice parcial: que indexa, cuanto ahorra... — sintaxis</a:t>
-            </a:r>
-          </a:p>
-        </p:txBody>
-      </p:sp>
-      <p:sp>
-        <p:nvSpPr>
-          <p:cNvPr id="5" name="Rounded Rectangle 4"/>
-          <p:cNvSpPr/>
-          <p:nvPr/>
-        </p:nvSpPr>
-        <p:spPr>
-          <a:xfrm>
-            <a:off x="457200" y="1261872"/>
-            <a:ext cx="11277295" cy="5093208"/>
-          </a:xfrm>
-          <a:prstGeom prst="roundRect">
-            <a:avLst>
-              <a:gd name="adj" fmla="val 12000"/>
-            </a:avLst>
-          </a:prstGeom>
-          <a:solidFill>
-            <a:srgbClr val="1E2A38"/>
-          </a:solidFill>
-          <a:ln>
-            <a:noFill/>
-          </a:ln>
-        </p:spPr>
-        <p:style>
-          <a:lnRef idx="1">
-            <a:schemeClr val="accent1"/>
-          </a:lnRef>
-          <a:fillRef idx="3">
-            <a:schemeClr val="accent1"/>
-          </a:fillRef>
-          <a:effectRef idx="2">
-            <a:schemeClr val="accent1"/>
-          </a:effectRef>
-          <a:fontRef idx="minor">
-            <a:schemeClr val="lt1"/>
-          </a:fontRef>
-        </p:style>
-        <p:txBody>
-          <a:bodyPr rtlCol="0" anchor="ctr"/>
-          <a:lstStyle/>
-          <a:p>
-            <a:pPr algn="ctr"/>
-          </a:p>
-        </p:txBody>
-      </p:sp>
-      <p:sp>
-        <p:nvSpPr>
-          <p:cNvPr id="6" name="Rectangle 5"/>
-          <p:cNvSpPr/>
-          <p:nvPr/>
-        </p:nvSpPr>
-        <p:spPr>
-          <a:xfrm>
-            <a:off x="457200" y="1261872"/>
-            <a:ext cx="11277295" cy="320040"/>
-          </a:xfrm>
-          <a:prstGeom prst="rect">
-            <a:avLst/>
-          </a:prstGeom>
-          <a:solidFill>
-            <a:srgbClr val="095292"/>
-          </a:solidFill>
-          <a:ln>
-            <a:noFill/>
-          </a:ln>
-        </p:spPr>
-        <p:style>
-          <a:lnRef idx="1">
-            <a:schemeClr val="accent1"/>
-          </a:lnRef>
-          <a:fillRef idx="3">
-            <a:schemeClr val="accent1"/>
-          </a:fillRef>
-          <a:effectRef idx="2">
-            <a:schemeClr val="accent1"/>
-          </a:effectRef>
-          <a:fontRef idx="minor">
-            <a:schemeClr val="lt1"/>
-          </a:fontRef>
-        </p:style>
-        <p:txBody>
-          <a:bodyPr rtlCol="0" anchor="ctr"/>
-          <a:lstStyle/>
-          <a:p>
-            <a:pPr algn="ctr"/>
-          </a:p>
-        </p:txBody>
-      </p:sp>
-      <p:sp>
-        <p:nvSpPr>
-          <p:cNvPr id="7" name="TextBox 6"/>
+              <a:t>Particionar: que es, y por que hoy si se implementa (1/2)</a:t>
+            </a:r>
+          </a:p>
+        </p:txBody>
+      </p:sp>
+      <p:sp>
+        <p:nvSpPr>
+          <p:cNvPr id="5" name="TextBox 4"/>
           <p:cNvSpPr txBox="1"/>
           <p:nvPr/>
         </p:nvSpPr>
         <p:spPr>
           <a:xfrm>
-            <a:off x="685800" y="1307592"/>
-            <a:ext cx="10820095" cy="256032"/>
-          </a:xfrm>
-          <a:prstGeom prst="rect">
-            <a:avLst/>
-          </a:prstGeom>
-          <a:noFill/>
-        </p:spPr>
-        <p:txBody>
-          <a:bodyPr wrap="square" anchor="ctr"/>
-          <a:lstStyle/>
-          <a:p>
-            <a:r>
-              <a:rPr sz="1000" b="1" i="0">
-                <a:solidFill>
-                  <a:srgbClr val="269CCB"/>
-                </a:solidFill>
-                <a:latin typeface="Calibri"/>
-              </a:rPr>
-              <a:t>● ● ●</a:t>
-            </a:r>
-          </a:p>
-        </p:txBody>
-      </p:sp>
-      <p:sp>
-        <p:nvSpPr>
-          <p:cNvPr id="8" name="TextBox 7"/>
-          <p:cNvSpPr txBox="1"/>
-          <p:nvPr/>
-        </p:nvSpPr>
-        <p:spPr>
-          <a:xfrm>
-            <a:off x="777240" y="1719072"/>
-            <a:ext cx="10637215" cy="4453128"/>
+            <a:off x="457200" y="1170432"/>
+            <a:ext cx="11277295" cy="5230368"/>
           </a:xfrm>
           <a:prstGeom prst="rect">
             <a:avLst/>
@@ -10611,24 +11627,72 @@
           <a:p>
             <a:pPr>
               <a:spcAft>
-                <a:spcPts val="400"/>
-              </a:spcAft>
-            </a:pPr>
-            <a:r>
-              <a:rPr sz="1400" b="0" i="0">
-                <a:solidFill>
-                  <a:srgbClr val="FFFFFF"/>
-                </a:solidFill>
-                <a:latin typeface="Calibri"/>
-              </a:rPr>
-              <a:t>CREATE INDEX idx_cita_programada_fecha ON cita (fecha_hora)</a:t>
-            </a:r>
-          </a:p>
-        </p:txBody>
-      </p:sp>
-      <p:sp>
-        <p:nvSpPr>
-          <p:cNvPr id="9" name="TextBox 8"/>
+                <a:spcPts val="800"/>
+              </a:spcAft>
+            </a:pPr>
+            <a:r>
+              <a:rPr sz="2000" b="0" i="0">
+                <a:solidFill>
+                  <a:srgbClr val="333333"/>
+                </a:solidFill>
+                <a:latin typeface="Calibri"/>
+              </a:rPr>
+              <a:t>–   Particionar es dividir una sola tabla logica en fragmentos fisicos llamados particiones, segun una clave, de modo que el motor descarte de entrada las que no pueden contener lo buscado; ese descarte se llama poda de particiones o partition pruning.</a:t>
+            </a:r>
+          </a:p>
+          <a:p>
+            <a:pPr>
+              <a:spcAft>
+                <a:spcPts val="800"/>
+              </a:spcAft>
+            </a:pPr>
+            <a:r>
+              <a:rPr sz="2000" b="0" i="0">
+                <a:solidFill>
+                  <a:srgbClr val="333333"/>
+                </a:solidFill>
+                <a:latin typeface="Calibri"/>
+              </a:rPr>
+              <a:t>–   La forma mas frecuente es por rango de fechas: una particion por ano, de manera que una consulta de 2026 lee unicamente la particion de 2026 y el plan lo muestra.</a:t>
+            </a:r>
+          </a:p>
+          <a:p>
+            <a:pPr>
+              <a:spcAft>
+                <a:spcPts val="800"/>
+              </a:spcAft>
+            </a:pPr>
+            <a:r>
+              <a:rPr sz="2000" b="0" i="0">
+                <a:solidFill>
+                  <a:srgbClr val="333333"/>
+                </a:solidFill>
+                <a:latin typeface="Calibri"/>
+              </a:rPr>
+              <a:t>–   La frase que lo separa del tema anterior es corta: el indice ordena, la particion separa.</a:t>
+            </a:r>
+          </a:p>
+          <a:p>
+            <a:pPr>
+              <a:spcAft>
+                <a:spcPts val="800"/>
+              </a:spcAft>
+            </a:pPr>
+            <a:r>
+              <a:rPr sz="2000" b="0" i="0">
+                <a:solidFill>
+                  <a:srgbClr val="333333"/>
+                </a:solidFill>
+                <a:latin typeface="Calibri"/>
+              </a:rPr>
+              <a:t>–   El umbral en el que empieza a pagar en produccion es alto y hay que decirlo con numeros para que nadie lo use de adorno: como convencion de oficio se piensa en particionar por encima de unas decenas de millones de filas o de tablas de decenas de gigabytes</a:t>
+            </a:r>
+          </a:p>
+        </p:txBody>
+      </p:sp>
+      <p:sp>
+        <p:nvSpPr>
+          <p:cNvPr id="6" name="TextBox 5"/>
           <p:cNvSpPr txBox="1"/>
           <p:nvPr/>
         </p:nvSpPr>
@@ -11654,7 +12718,7 @@
                 </a:solidFill>
                 <a:latin typeface="Calibri"/>
               </a:rPr>
-              <a:t>Particionar: que es, y por que hoy si se implementa (1/2)</a:t>
+              <a:t>Particionar: que es, y por que hoy si se implementa (2/2)</a:t>
             </a:r>
           </a:p>
         </p:txBody>
@@ -11693,7 +12757,7 @@
                 </a:solidFill>
                 <a:latin typeface="Calibri"/>
               </a:rPr>
-              <a:t>–   Particionar es dividir una sola tabla logica en fragmentos fisicos llamados particiones, segun una clave, de modo que el motor descarte de entrada las que no pueden contener lo buscado; ese descarte se llama poda de particiones o partition pruning.</a:t>
+              <a:t>–   Y por debajo de eso un indice sobre fecha_hora hace el mismo trabajo con mucho menos mantenimiento.</a:t>
             </a:r>
           </a:p>
           <a:p>
@@ -11709,7 +12773,7 @@
                 </a:solidFill>
                 <a:latin typeface="Calibri"/>
               </a:rPr>
-              <a:t>–   La forma mas frecuente es por rango de fechas: una particion por ano, de manera que una consulta de 2026 lee unicamente la particion de 2026 y el plan lo muestra.</a:t>
+              <a:t>–   El particionamiento se implementa completo —DDL, dos particiones, migracion de las citas, prueba de enrutamiento y prueba de poda— sobre una base de 5.010 citas repartidas entre 2025 y 2026.</a:t>
             </a:r>
           </a:p>
           <a:p>
@@ -11725,23 +12789,7 @@
                 </a:solidFill>
                 <a:latin typeface="Calibri"/>
               </a:rPr>
-              <a:t>–   La frase que lo separa del tema anterior es corta: el indice ordena, la particion separa.</a:t>
-            </a:r>
-          </a:p>
-          <a:p>
-            <a:pPr>
-              <a:spcAft>
-                <a:spcPts val="800"/>
-              </a:spcAft>
-            </a:pPr>
-            <a:r>
-              <a:rPr sz="2000" b="0" i="0">
-                <a:solidFill>
-                  <a:srgbClr val="333333"/>
-                </a:solidFill>
-                <a:latin typeface="Calibri"/>
-              </a:rPr>
-              <a:t>–   El umbral en el que empieza a pagar en produccion es alto y hay que decirlo con numeros para que nadie lo use de adorno: como convencion de oficio se piensa en particionar por encima de unas decenas de millones de filas o de tablas de decenas de gigabytes</a:t>
+              <a:t>–   Si el docente anuncia que hoy no se implementa.</a:t>
             </a:r>
           </a:p>
         </p:txBody>
@@ -11922,7 +12970,7 @@
                 </a:solidFill>
                 <a:latin typeface="Calibri"/>
               </a:rPr>
-              <a:t>Particionar: que es, y por que hoy si se implementa (2/2)</a:t>
+              <a:t>El DDL de la particion, con sus dos trampas (1/2)</a:t>
             </a:r>
           </a:p>
         </p:txBody>
@@ -11961,7 +13009,7 @@
                 </a:solidFill>
                 <a:latin typeface="Calibri"/>
               </a:rPr>
-              <a:t>–   Y por debajo de eso un indice sobre fecha_hora hace el mismo trabajo con mucho menos mantenimiento.</a:t>
+              <a:t>–   El DDL son tres sentencias y dos trampas.</a:t>
             </a:r>
           </a:p>
           <a:p>
@@ -11977,7 +13025,7 @@
                 </a:solidFill>
                 <a:latin typeface="Calibri"/>
               </a:rPr>
-              <a:t>–   La pregunta 3 del taller vale 20 de los 100 puntos y se implementa completa —DDL, dos particiones, migracion de las citas, prueba de enrutamiento y prueba de poda— sobre una base de 5.010 citas repartidas entre 2025 y 2026.</a:t>
+              <a:t>–   La primera sentencia declara la tabla particionada: PARTITION BY RANGE (fecha_hora)</a:t>
             </a:r>
           </a:p>
           <a:p>
@@ -11993,7 +13041,55 @@
                 </a:solidFill>
                 <a:latin typeface="Calibri"/>
               </a:rPr>
-              <a:t>–   Si el docente anuncia que hoy no se implementa, el estudiante llega al taller con una respuesta en prosa a una pregunta que pide SQL ejecutado.</a:t>
+              <a:t>–   Las otras dos crean las particiones: TO (TIMESTAMP '2026-01-01'); y su gemela de 2026.</a:t>
+            </a:r>
+          </a:p>
+          <a:p>
+            <a:pPr>
+              <a:spcAft>
+                <a:spcPts val="800"/>
+              </a:spcAft>
+            </a:pPr>
+            <a:r>
+              <a:rPr sz="2000" b="0" i="0">
+                <a:solidFill>
+                  <a:srgbClr val="333333"/>
+                </a:solidFill>
+                <a:latin typeface="Calibri"/>
+              </a:rPr>
+              <a:t>–   Primera trampa, la que cuesta la pregunta: en una tabla particionada la clave primaria DEBE incluir la columna de particion, asi que PRIMARY KEY (id_cita, fecha_hora) y no PRIMARY KEY (id_cita) a secas.</a:t>
+            </a:r>
+          </a:p>
+          <a:p>
+            <a:pPr>
+              <a:spcAft>
+                <a:spcPts val="800"/>
+              </a:spcAft>
+            </a:pPr>
+            <a:r>
+              <a:rPr sz="2000" b="0" i="0">
+                <a:solidFill>
+                  <a:srgbClr val="333333"/>
+                </a:solidFill>
+                <a:latin typeface="Calibri"/>
+              </a:rPr>
+              <a:t>–   Esto no es una rareza de MySQL, es la regla de PostgreSQL, y el mensaje de error del motor no dice «te falta la columna de particion» con esas palabras, asi que el estudiante que lo intenta se queda mirando un error que no entiende.</a:t>
+            </a:r>
+          </a:p>
+          <a:p>
+            <a:pPr>
+              <a:spcAft>
+                <a:spcPts val="800"/>
+              </a:spcAft>
+            </a:pPr>
+            <a:r>
+              <a:rPr sz="2000" b="0" i="0">
+                <a:solidFill>
+                  <a:srgbClr val="333333"/>
+                </a:solidFill>
+                <a:latin typeface="Calibri"/>
+              </a:rPr>
+              <a:t>–   Segunda trampa, mas silenciosa: el rango es cerrado por abajo y abierto por arriba, de modo que el TO de una particion es exactamente el FROM de la siguiente y nunca se solapan</a:t>
             </a:r>
           </a:p>
         </p:txBody>
@@ -12174,7 +13270,7 @@
                 </a:solidFill>
                 <a:latin typeface="Calibri"/>
               </a:rPr>
-              <a:t>El DDL de la particion, con sus dos trampas (1/2)</a:t>
+              <a:t>El DDL de la particion, con sus dos trampas (2/2)</a:t>
             </a:r>
           </a:p>
         </p:txBody>
@@ -12213,7 +13309,7 @@
                 </a:solidFill>
                 <a:latin typeface="Calibri"/>
               </a:rPr>
-              <a:t>–   El DDL son tres sentencias y dos trampas.</a:t>
+              <a:t>–   Quien escriba TO (TIMESTAMP '2025-12-31') se queda sin sitio donde poner las citas del 31 de diciembre y el INSERT falla con un error de que no se encontro particion.</a:t>
             </a:r>
           </a:p>
           <a:p>
@@ -12229,7 +13325,7 @@
                 </a:solidFill>
                 <a:latin typeface="Calibri"/>
               </a:rPr>
-              <a:t>–   La primera sentencia declara la tabla particionada: PARTITION BY RANGE (fecha_hora)</a:t>
+              <a:t>–   Despues del DDL viene la migracion,, y la prueba de que el reparto ocurrio:, MIN(fecha_hora), MAX(fecha_hora) tableoid es una columna de sistema que dice en que tabla FISICA vive cada fila y::regclass la traduce a nombre.</a:t>
             </a:r>
           </a:p>
           <a:p>
@@ -12245,55 +13341,7 @@
                 </a:solidFill>
                 <a:latin typeface="Calibri"/>
               </a:rPr>
-              <a:t>–   Las otras dos crean las particiones: TO (TIMESTAMP '2026-01-01'); y su gemela de 2026.</a:t>
-            </a:r>
-          </a:p>
-          <a:p>
-            <a:pPr>
-              <a:spcAft>
-                <a:spcPts val="800"/>
-              </a:spcAft>
-            </a:pPr>
-            <a:r>
-              <a:rPr sz="2000" b="0" i="0">
-                <a:solidFill>
-                  <a:srgbClr val="333333"/>
-                </a:solidFill>
-                <a:latin typeface="Calibri"/>
-              </a:rPr>
-              <a:t>–   Primera trampa, la que cuesta la pregunta: en una tabla particionada la clave primaria DEBE incluir la columna de particion, asi que PRIMARY KEY (id_cita, fecha_hora) y no PRIMARY KEY (id_cita) a secas.</a:t>
-            </a:r>
-          </a:p>
-          <a:p>
-            <a:pPr>
-              <a:spcAft>
-                <a:spcPts val="800"/>
-              </a:spcAft>
-            </a:pPr>
-            <a:r>
-              <a:rPr sz="2000" b="0" i="0">
-                <a:solidFill>
-                  <a:srgbClr val="333333"/>
-                </a:solidFill>
-                <a:latin typeface="Calibri"/>
-              </a:rPr>
-              <a:t>–   Esto no es una rareza de MySQL, es la regla de PostgreSQL, y el mensaje de error del motor no dice «te falta la columna de particion» con esas palabras, asi que el estudiante que lo intenta se queda mirando un error que no entiende.</a:t>
-            </a:r>
-          </a:p>
-          <a:p>
-            <a:pPr>
-              <a:spcAft>
-                <a:spcPts val="800"/>
-              </a:spcAft>
-            </a:pPr>
-            <a:r>
-              <a:rPr sz="2000" b="0" i="0">
-                <a:solidFill>
-                  <a:srgbClr val="333333"/>
-                </a:solidFill>
-                <a:latin typeface="Calibri"/>
-              </a:rPr>
-              <a:t>–   Segunda trampa, mas silenciosa: el rango es cerrado por abajo y abierto por arriba, de modo que el TO de una particion es exactamente el FROM de la siguiente y nunca se solapan</a:t>
+              <a:t>–   La poda se comprueba con EXPLAIN ANALYZE de una consulta acotada a 2026: en el plan debe aparecer SOLO cita_hist_2026.</a:t>
             </a:r>
           </a:p>
         </p:txBody>
@@ -12474,21 +13522,141 @@
                 </a:solidFill>
                 <a:latin typeface="Calibri"/>
               </a:rPr>
-              <a:t>El DDL de la particion, con sus dos trampas (2/2)</a:t>
-            </a:r>
-          </a:p>
-        </p:txBody>
-      </p:sp>
-      <p:sp>
-        <p:nvSpPr>
-          <p:cNvPr id="5" name="TextBox 4"/>
+              <a:t>El DDL de la particion, con sus dos trampas — sintaxis</a:t>
+            </a:r>
+          </a:p>
+        </p:txBody>
+      </p:sp>
+      <p:sp>
+        <p:nvSpPr>
+          <p:cNvPr id="5" name="Rounded Rectangle 4"/>
+          <p:cNvSpPr/>
+          <p:nvPr/>
+        </p:nvSpPr>
+        <p:spPr>
+          <a:xfrm>
+            <a:off x="457200" y="1261872"/>
+            <a:ext cx="11277295" cy="5093208"/>
+          </a:xfrm>
+          <a:prstGeom prst="roundRect">
+            <a:avLst>
+              <a:gd name="adj" fmla="val 12000"/>
+            </a:avLst>
+          </a:prstGeom>
+          <a:solidFill>
+            <a:srgbClr val="1E2A38"/>
+          </a:solidFill>
+          <a:ln>
+            <a:noFill/>
+          </a:ln>
+        </p:spPr>
+        <p:style>
+          <a:lnRef idx="1">
+            <a:schemeClr val="accent1"/>
+          </a:lnRef>
+          <a:fillRef idx="3">
+            <a:schemeClr val="accent1"/>
+          </a:fillRef>
+          <a:effectRef idx="2">
+            <a:schemeClr val="accent1"/>
+          </a:effectRef>
+          <a:fontRef idx="minor">
+            <a:schemeClr val="lt1"/>
+          </a:fontRef>
+        </p:style>
+        <p:txBody>
+          <a:bodyPr rtlCol="0" anchor="ctr"/>
+          <a:lstStyle/>
+          <a:p>
+            <a:pPr algn="ctr"/>
+          </a:p>
+        </p:txBody>
+      </p:sp>
+      <p:sp>
+        <p:nvSpPr>
+          <p:cNvPr id="6" name="Rectangle 5"/>
+          <p:cNvSpPr/>
+          <p:nvPr/>
+        </p:nvSpPr>
+        <p:spPr>
+          <a:xfrm>
+            <a:off x="457200" y="1261872"/>
+            <a:ext cx="11277295" cy="320040"/>
+          </a:xfrm>
+          <a:prstGeom prst="rect">
+            <a:avLst/>
+          </a:prstGeom>
+          <a:solidFill>
+            <a:srgbClr val="095292"/>
+          </a:solidFill>
+          <a:ln>
+            <a:noFill/>
+          </a:ln>
+        </p:spPr>
+        <p:style>
+          <a:lnRef idx="1">
+            <a:schemeClr val="accent1"/>
+          </a:lnRef>
+          <a:fillRef idx="3">
+            <a:schemeClr val="accent1"/>
+          </a:fillRef>
+          <a:effectRef idx="2">
+            <a:schemeClr val="accent1"/>
+          </a:effectRef>
+          <a:fontRef idx="minor">
+            <a:schemeClr val="lt1"/>
+          </a:fontRef>
+        </p:style>
+        <p:txBody>
+          <a:bodyPr rtlCol="0" anchor="ctr"/>
+          <a:lstStyle/>
+          <a:p>
+            <a:pPr algn="ctr"/>
+          </a:p>
+        </p:txBody>
+      </p:sp>
+      <p:sp>
+        <p:nvSpPr>
+          <p:cNvPr id="7" name="TextBox 6"/>
           <p:cNvSpPr txBox="1"/>
           <p:nvPr/>
         </p:nvSpPr>
         <p:spPr>
           <a:xfrm>
-            <a:off x="457200" y="1170432"/>
-            <a:ext cx="11277295" cy="5230368"/>
+            <a:off x="685800" y="1307592"/>
+            <a:ext cx="10820095" cy="256032"/>
+          </a:xfrm>
+          <a:prstGeom prst="rect">
+            <a:avLst/>
+          </a:prstGeom>
+          <a:noFill/>
+        </p:spPr>
+        <p:txBody>
+          <a:bodyPr wrap="square" anchor="ctr"/>
+          <a:lstStyle/>
+          <a:p>
+            <a:r>
+              <a:rPr sz="1000" b="1" i="0">
+                <a:solidFill>
+                  <a:srgbClr val="269CCB"/>
+                </a:solidFill>
+                <a:latin typeface="Calibri"/>
+              </a:rPr>
+              <a:t>● ● ●</a:t>
+            </a:r>
+          </a:p>
+        </p:txBody>
+      </p:sp>
+      <p:sp>
+        <p:nvSpPr>
+          <p:cNvPr id="8" name="TextBox 7"/>
+          <p:cNvSpPr txBox="1"/>
+          <p:nvPr/>
+        </p:nvSpPr>
+        <p:spPr>
+          <a:xfrm>
+            <a:off x="777240" y="1719072"/>
+            <a:ext cx="5181447" cy="4453128"/>
           </a:xfrm>
           <a:prstGeom prst="rect">
             <a:avLst/>
@@ -12503,56 +13671,351 @@
           <a:p>
             <a:pPr>
               <a:spcAft>
-                <a:spcPts val="800"/>
-              </a:spcAft>
-            </a:pPr>
-            <a:r>
-              <a:rPr sz="2000" b="0" i="0">
-                <a:solidFill>
-                  <a:srgbClr val="333333"/>
-                </a:solidFill>
-                <a:latin typeface="Calibri"/>
-              </a:rPr>
-              <a:t>–   Quien escriba TO (TIMESTAMP '2025-12-31') se queda sin sitio donde poner las citas del 31 de diciembre y el INSERT falla con un error de que no se encontro particion.</a:t>
-            </a:r>
-          </a:p>
-          <a:p>
-            <a:pPr>
-              <a:spcAft>
-                <a:spcPts val="800"/>
-              </a:spcAft>
-            </a:pPr>
-            <a:r>
-              <a:rPr sz="2000" b="0" i="0">
-                <a:solidFill>
-                  <a:srgbClr val="333333"/>
-                </a:solidFill>
-                <a:latin typeface="Calibri"/>
-              </a:rPr>
-              <a:t>–   Despues del DDL viene la migracion,, y la prueba de que el reparto ocurrio:, MIN(fecha_hora), MAX(fecha_hora) tableoid es una columna de sistema que dice en que tabla FISICA vive cada fila y::regclass la traduce a nombre.</a:t>
-            </a:r>
-          </a:p>
-          <a:p>
-            <a:pPr>
-              <a:spcAft>
-                <a:spcPts val="800"/>
-              </a:spcAft>
-            </a:pPr>
-            <a:r>
-              <a:rPr sz="2000" b="0" i="0">
-                <a:solidFill>
-                  <a:srgbClr val="333333"/>
-                </a:solidFill>
-                <a:latin typeface="Calibri"/>
-              </a:rPr>
-              <a:t>–   La poda se comprueba con EXPLAIN ANALYZE de una consulta acotada a 2026: en el plan debe aparecer SOLO cita_hist_2026.</a:t>
-            </a:r>
-          </a:p>
-        </p:txBody>
-      </p:sp>
-      <p:sp>
-        <p:nvSpPr>
-          <p:cNvPr id="6" name="TextBox 5"/>
+                <a:spcPts val="400"/>
+              </a:spcAft>
+            </a:pPr>
+            <a:r>
+              <a:rPr sz="1400" b="0" i="0">
+                <a:solidFill>
+                  <a:srgbClr val="FFFFFF"/>
+                </a:solidFill>
+                <a:latin typeface="Calibri"/>
+              </a:rPr>
+              <a:t>CREATE TABLE cita_hist (</a:t>
+            </a:r>
+          </a:p>
+          <a:p>
+            <a:pPr>
+              <a:spcAft>
+                <a:spcPts val="400"/>
+              </a:spcAft>
+            </a:pPr>
+            <a:r>
+              <a:rPr sz="1400" b="0" i="0">
+                <a:solidFill>
+                  <a:srgbClr val="FFFFFF"/>
+                </a:solidFill>
+                <a:latin typeface="Calibri"/>
+              </a:rPr>
+              <a:t>  id_cita INT,</a:t>
+            </a:r>
+          </a:p>
+          <a:p>
+            <a:pPr>
+              <a:spcAft>
+                <a:spcPts val="400"/>
+              </a:spcAft>
+            </a:pPr>
+            <a:r>
+              <a:rPr sz="1400" b="0" i="0">
+                <a:solidFill>
+                  <a:srgbClr val="FFFFFF"/>
+                </a:solidFill>
+                <a:latin typeface="Calibri"/>
+              </a:rPr>
+              <a:t>  id_mascota INT,</a:t>
+            </a:r>
+          </a:p>
+          <a:p>
+            <a:pPr>
+              <a:spcAft>
+                <a:spcPts val="400"/>
+              </a:spcAft>
+            </a:pPr>
+            <a:r>
+              <a:rPr sz="1400" b="0" i="0">
+                <a:solidFill>
+                  <a:srgbClr val="FFFFFF"/>
+                </a:solidFill>
+                <a:latin typeface="Calibri"/>
+              </a:rPr>
+              <a:t>  id_veterinario INT,</a:t>
+            </a:r>
+          </a:p>
+          <a:p>
+            <a:pPr>
+              <a:spcAft>
+                <a:spcPts val="400"/>
+              </a:spcAft>
+            </a:pPr>
+            <a:r>
+              <a:rPr sz="1400" b="0" i="0">
+                <a:solidFill>
+                  <a:srgbClr val="FFFFFF"/>
+                </a:solidFill>
+                <a:latin typeface="Calibri"/>
+              </a:rPr>
+              <a:t>  fecha_hora TIMESTAMP NOT NULL,</a:t>
+            </a:r>
+          </a:p>
+          <a:p>
+            <a:pPr>
+              <a:spcAft>
+                <a:spcPts val="400"/>
+              </a:spcAft>
+            </a:pPr>
+            <a:r>
+              <a:rPr sz="1400" b="0" i="0">
+                <a:solidFill>
+                  <a:srgbClr val="FFFFFF"/>
+                </a:solidFill>
+                <a:latin typeface="Calibri"/>
+              </a:rPr>
+              <a:t>  estado TEXT,</a:t>
+            </a:r>
+          </a:p>
+          <a:p>
+            <a:pPr>
+              <a:spcAft>
+                <a:spcPts val="400"/>
+              </a:spcAft>
+            </a:pPr>
+            <a:r>
+              <a:rPr sz="1400" b="0" i="0">
+                <a:solidFill>
+                  <a:srgbClr val="FFFFFF"/>
+                </a:solidFill>
+                <a:latin typeface="Calibri"/>
+              </a:rPr>
+              <a:t>  PRIMARY KEY (id_cita, fecha_hora)</a:t>
+            </a:r>
+          </a:p>
+          <a:p>
+            <a:pPr>
+              <a:spcAft>
+                <a:spcPts val="400"/>
+              </a:spcAft>
+            </a:pPr>
+            <a:r>
+              <a:rPr sz="1400" b="0" i="0">
+                <a:solidFill>
+                  <a:srgbClr val="FFFFFF"/>
+                </a:solidFill>
+                <a:latin typeface="Calibri"/>
+              </a:rPr>
+              <a:t>);</a:t>
+            </a:r>
+          </a:p>
+          <a:p>
+            <a:pPr>
+              <a:spcAft>
+                <a:spcPts val="400"/>
+              </a:spcAft>
+            </a:pPr>
+            <a:r>
+              <a:rPr sz="1400" b="0" i="0">
+                <a:solidFill>
+                  <a:srgbClr val="FFFFFF"/>
+                </a:solidFill>
+                <a:latin typeface="Calibri"/>
+              </a:rPr>
+              <a:t/>
+            </a:r>
+          </a:p>
+          <a:p>
+            <a:pPr>
+              <a:spcAft>
+                <a:spcPts val="400"/>
+              </a:spcAft>
+            </a:pPr>
+            <a:r>
+              <a:rPr sz="1400" b="0" i="0">
+                <a:solidFill>
+                  <a:srgbClr val="FFFFFF"/>
+                </a:solidFill>
+                <a:latin typeface="Calibri"/>
+              </a:rPr>
+              <a:t>CREATE TABLE cita_hist_2025 PARTITION OF cita_hist FOR</a:t>
+            </a:r>
+          </a:p>
+        </p:txBody>
+      </p:sp>
+      <p:sp>
+        <p:nvSpPr>
+          <p:cNvPr id="9" name="TextBox 8"/>
+          <p:cNvSpPr txBox="1"/>
+          <p:nvPr/>
+        </p:nvSpPr>
+        <p:spPr>
+          <a:xfrm>
+            <a:off x="6233007" y="1719072"/>
+            <a:ext cx="5181447" cy="4453128"/>
+          </a:xfrm>
+          <a:prstGeom prst="rect">
+            <a:avLst/>
+          </a:prstGeom>
+          <a:noFill/>
+        </p:spPr>
+        <p:txBody>
+          <a:bodyPr wrap="square">
+            <a:spAutoFit/>
+          </a:bodyPr>
+          <a:lstStyle/>
+          <a:p>
+            <a:pPr>
+              <a:spcAft>
+                <a:spcPts val="400"/>
+              </a:spcAft>
+            </a:pPr>
+            <a:r>
+              <a:rPr sz="1400" b="0" i="0">
+                <a:solidFill>
+                  <a:srgbClr val="FFFFFF"/>
+                </a:solidFill>
+                <a:latin typeface="Calibri"/>
+              </a:rPr>
+              <a:t>VALUES FROM (TIMESTAMP '2025-01-01')</a:t>
+            </a:r>
+          </a:p>
+          <a:p>
+            <a:pPr>
+              <a:spcAft>
+                <a:spcPts val="400"/>
+              </a:spcAft>
+            </a:pPr>
+            <a:r>
+              <a:rPr sz="1400" b="0" i="0">
+                <a:solidFill>
+                  <a:srgbClr val="FFFFFF"/>
+                </a:solidFill>
+                <a:latin typeface="Calibri"/>
+              </a:rPr>
+              <a:t/>
+            </a:r>
+          </a:p>
+          <a:p>
+            <a:pPr>
+              <a:spcAft>
+                <a:spcPts val="400"/>
+              </a:spcAft>
+            </a:pPr>
+            <a:r>
+              <a:rPr sz="1400" b="0" i="0">
+                <a:solidFill>
+                  <a:srgbClr val="FFFFFF"/>
+                </a:solidFill>
+                <a:latin typeface="Calibri"/>
+              </a:rPr>
+              <a:t>INSERT INTO cita_hist SELECT id_cita, id_mascota, id_veterinario, fecha_hora, estado</a:t>
+            </a:r>
+          </a:p>
+          <a:p>
+            <a:pPr>
+              <a:spcAft>
+                <a:spcPts val="400"/>
+              </a:spcAft>
+            </a:pPr>
+            <a:r>
+              <a:rPr sz="1400" b="0" i="0">
+                <a:solidFill>
+                  <a:srgbClr val="FFFFFF"/>
+                </a:solidFill>
+                <a:latin typeface="Calibri"/>
+              </a:rPr>
+              <a:t>FROM cita</a:t>
+            </a:r>
+          </a:p>
+          <a:p>
+            <a:pPr>
+              <a:spcAft>
+                <a:spcPts val="400"/>
+              </a:spcAft>
+            </a:pPr>
+            <a:r>
+              <a:rPr sz="1400" b="0" i="0">
+                <a:solidFill>
+                  <a:srgbClr val="FFFFFF"/>
+                </a:solidFill>
+                <a:latin typeface="Calibri"/>
+              </a:rPr>
+              <a:t/>
+            </a:r>
+          </a:p>
+          <a:p>
+            <a:pPr>
+              <a:spcAft>
+                <a:spcPts val="400"/>
+              </a:spcAft>
+            </a:pPr>
+            <a:r>
+              <a:rPr sz="1400" b="0" i="0">
+                <a:solidFill>
+                  <a:srgbClr val="FFFFFF"/>
+                </a:solidFill>
+                <a:latin typeface="Calibri"/>
+              </a:rPr>
+              <a:t>SELECT tableoid::regclass AS particion, COUNT(*)</a:t>
+            </a:r>
+          </a:p>
+          <a:p>
+            <a:pPr>
+              <a:spcAft>
+                <a:spcPts val="400"/>
+              </a:spcAft>
+            </a:pPr>
+            <a:r>
+              <a:rPr sz="1400" b="0" i="0">
+                <a:solidFill>
+                  <a:srgbClr val="FFFFFF"/>
+                </a:solidFill>
+                <a:latin typeface="Calibri"/>
+              </a:rPr>
+              <a:t/>
+            </a:r>
+          </a:p>
+          <a:p>
+            <a:pPr>
+              <a:spcAft>
+                <a:spcPts val="400"/>
+              </a:spcAft>
+            </a:pPr>
+            <a:r>
+              <a:rPr sz="1400" b="0" i="0">
+                <a:solidFill>
+                  <a:srgbClr val="FFFFFF"/>
+                </a:solidFill>
+                <a:latin typeface="Calibri"/>
+              </a:rPr>
+              <a:t>FROM cita_hist</a:t>
+            </a:r>
+          </a:p>
+          <a:p>
+            <a:pPr>
+              <a:spcAft>
+                <a:spcPts val="400"/>
+              </a:spcAft>
+            </a:pPr>
+            <a:r>
+              <a:rPr sz="1400" b="0" i="0">
+                <a:solidFill>
+                  <a:srgbClr val="FFFFFF"/>
+                </a:solidFill>
+                <a:latin typeface="Calibri"/>
+              </a:rPr>
+              <a:t>GROUP BY 1</a:t>
+            </a:r>
+          </a:p>
+          <a:p>
+            <a:pPr>
+              <a:spcAft>
+                <a:spcPts val="400"/>
+              </a:spcAft>
+            </a:pPr>
+            <a:r>
+              <a:rPr sz="1400" b="0" i="0">
+                <a:solidFill>
+                  <a:srgbClr val="FFFFFF"/>
+                </a:solidFill>
+                <a:latin typeface="Calibri"/>
+              </a:rPr>
+              <a:t>ORDER BY 1</a:t>
+            </a:r>
+          </a:p>
+        </p:txBody>
+      </p:sp>
+      <p:sp>
+        <p:nvSpPr>
+          <p:cNvPr id="10" name="TextBox 9"/>
           <p:cNvSpPr txBox="1"/>
           <p:nvPr/>
         </p:nvSpPr>
@@ -12726,141 +14189,21 @@
                 </a:solidFill>
                 <a:latin typeface="Calibri"/>
               </a:rPr>
-              <a:t>El DDL de la particion, con sus dos trampas — sintaxis</a:t>
-            </a:r>
-          </a:p>
-        </p:txBody>
-      </p:sp>
-      <p:sp>
-        <p:nvSpPr>
-          <p:cNvPr id="5" name="Rounded Rectangle 4"/>
-          <p:cNvSpPr/>
-          <p:nvPr/>
-        </p:nvSpPr>
-        <p:spPr>
-          <a:xfrm>
-            <a:off x="457200" y="1261872"/>
-            <a:ext cx="11277295" cy="5093208"/>
-          </a:xfrm>
-          <a:prstGeom prst="roundRect">
-            <a:avLst>
-              <a:gd name="adj" fmla="val 12000"/>
-            </a:avLst>
-          </a:prstGeom>
-          <a:solidFill>
-            <a:srgbClr val="1E2A38"/>
-          </a:solidFill>
-          <a:ln>
-            <a:noFill/>
-          </a:ln>
-        </p:spPr>
-        <p:style>
-          <a:lnRef idx="1">
-            <a:schemeClr val="accent1"/>
-          </a:lnRef>
-          <a:fillRef idx="3">
-            <a:schemeClr val="accent1"/>
-          </a:fillRef>
-          <a:effectRef idx="2">
-            <a:schemeClr val="accent1"/>
-          </a:effectRef>
-          <a:fontRef idx="minor">
-            <a:schemeClr val="lt1"/>
-          </a:fontRef>
-        </p:style>
-        <p:txBody>
-          <a:bodyPr rtlCol="0" anchor="ctr"/>
-          <a:lstStyle/>
-          <a:p>
-            <a:pPr algn="ctr"/>
-          </a:p>
-        </p:txBody>
-      </p:sp>
-      <p:sp>
-        <p:nvSpPr>
-          <p:cNvPr id="6" name="Rectangle 5"/>
-          <p:cNvSpPr/>
-          <p:nvPr/>
-        </p:nvSpPr>
-        <p:spPr>
-          <a:xfrm>
-            <a:off x="457200" y="1261872"/>
-            <a:ext cx="11277295" cy="320040"/>
-          </a:xfrm>
-          <a:prstGeom prst="rect">
-            <a:avLst/>
-          </a:prstGeom>
-          <a:solidFill>
-            <a:srgbClr val="095292"/>
-          </a:solidFill>
-          <a:ln>
-            <a:noFill/>
-          </a:ln>
-        </p:spPr>
-        <p:style>
-          <a:lnRef idx="1">
-            <a:schemeClr val="accent1"/>
-          </a:lnRef>
-          <a:fillRef idx="3">
-            <a:schemeClr val="accent1"/>
-          </a:fillRef>
-          <a:effectRef idx="2">
-            <a:schemeClr val="accent1"/>
-          </a:effectRef>
-          <a:fontRef idx="minor">
-            <a:schemeClr val="lt1"/>
-          </a:fontRef>
-        </p:style>
-        <p:txBody>
-          <a:bodyPr rtlCol="0" anchor="ctr"/>
-          <a:lstStyle/>
-          <a:p>
-            <a:pPr algn="ctr"/>
-          </a:p>
-        </p:txBody>
-      </p:sp>
-      <p:sp>
-        <p:nvSpPr>
-          <p:cNvPr id="7" name="TextBox 6"/>
+              <a:t>El veredicto de particionamiento (1/3)</a:t>
+            </a:r>
+          </a:p>
+        </p:txBody>
+      </p:sp>
+      <p:sp>
+        <p:nvSpPr>
+          <p:cNvPr id="5" name="TextBox 4"/>
           <p:cNvSpPr txBox="1"/>
           <p:nvPr/>
         </p:nvSpPr>
         <p:spPr>
           <a:xfrm>
-            <a:off x="685800" y="1307592"/>
-            <a:ext cx="10820095" cy="256032"/>
-          </a:xfrm>
-          <a:prstGeom prst="rect">
-            <a:avLst/>
-          </a:prstGeom>
-          <a:noFill/>
-        </p:spPr>
-        <p:txBody>
-          <a:bodyPr wrap="square" anchor="ctr"/>
-          <a:lstStyle/>
-          <a:p>
-            <a:r>
-              <a:rPr sz="1000" b="1" i="0">
-                <a:solidFill>
-                  <a:srgbClr val="269CCB"/>
-                </a:solidFill>
-                <a:latin typeface="Calibri"/>
-              </a:rPr>
-              <a:t>● ● ●</a:t>
-            </a:r>
-          </a:p>
-        </p:txBody>
-      </p:sp>
-      <p:sp>
-        <p:nvSpPr>
-          <p:cNvPr id="8" name="TextBox 7"/>
-          <p:cNvSpPr txBox="1"/>
-          <p:nvPr/>
-        </p:nvSpPr>
-        <p:spPr>
-          <a:xfrm>
-            <a:off x="777240" y="1719072"/>
-            <a:ext cx="5181447" cy="4453128"/>
+            <a:off x="457200" y="1170432"/>
+            <a:ext cx="11277295" cy="5230368"/>
           </a:xfrm>
           <a:prstGeom prst="rect">
             <a:avLst/>
@@ -12875,351 +14218,72 @@
           <a:p>
             <a:pPr>
               <a:spcAft>
-                <a:spcPts val="400"/>
-              </a:spcAft>
-            </a:pPr>
-            <a:r>
-              <a:rPr sz="1400" b="0" i="0">
-                <a:solidFill>
-                  <a:srgbClr val="FFFFFF"/>
-                </a:solidFill>
-                <a:latin typeface="Calibri"/>
-              </a:rPr>
-              <a:t>CREATE TABLE cita_hist (</a:t>
-            </a:r>
-          </a:p>
-          <a:p>
-            <a:pPr>
-              <a:spcAft>
-                <a:spcPts val="400"/>
-              </a:spcAft>
-            </a:pPr>
-            <a:r>
-              <a:rPr sz="1400" b="0" i="0">
-                <a:solidFill>
-                  <a:srgbClr val="FFFFFF"/>
-                </a:solidFill>
-                <a:latin typeface="Calibri"/>
-              </a:rPr>
-              <a:t>  id_cita INT,</a:t>
-            </a:r>
-          </a:p>
-          <a:p>
-            <a:pPr>
-              <a:spcAft>
-                <a:spcPts val="400"/>
-              </a:spcAft>
-            </a:pPr>
-            <a:r>
-              <a:rPr sz="1400" b="0" i="0">
-                <a:solidFill>
-                  <a:srgbClr val="FFFFFF"/>
-                </a:solidFill>
-                <a:latin typeface="Calibri"/>
-              </a:rPr>
-              <a:t>  id_mascota INT,</a:t>
-            </a:r>
-          </a:p>
-          <a:p>
-            <a:pPr>
-              <a:spcAft>
-                <a:spcPts val="400"/>
-              </a:spcAft>
-            </a:pPr>
-            <a:r>
-              <a:rPr sz="1400" b="0" i="0">
-                <a:solidFill>
-                  <a:srgbClr val="FFFFFF"/>
-                </a:solidFill>
-                <a:latin typeface="Calibri"/>
-              </a:rPr>
-              <a:t>  id_veterinario INT,</a:t>
-            </a:r>
-          </a:p>
-          <a:p>
-            <a:pPr>
-              <a:spcAft>
-                <a:spcPts val="400"/>
-              </a:spcAft>
-            </a:pPr>
-            <a:r>
-              <a:rPr sz="1400" b="0" i="0">
-                <a:solidFill>
-                  <a:srgbClr val="FFFFFF"/>
-                </a:solidFill>
-                <a:latin typeface="Calibri"/>
-              </a:rPr>
-              <a:t>  fecha_hora TIMESTAMP NOT NULL,</a:t>
-            </a:r>
-          </a:p>
-          <a:p>
-            <a:pPr>
-              <a:spcAft>
-                <a:spcPts val="400"/>
-              </a:spcAft>
-            </a:pPr>
-            <a:r>
-              <a:rPr sz="1400" b="0" i="0">
-                <a:solidFill>
-                  <a:srgbClr val="FFFFFF"/>
-                </a:solidFill>
-                <a:latin typeface="Calibri"/>
-              </a:rPr>
-              <a:t>  estado TEXT,</a:t>
-            </a:r>
-          </a:p>
-          <a:p>
-            <a:pPr>
-              <a:spcAft>
-                <a:spcPts val="400"/>
-              </a:spcAft>
-            </a:pPr>
-            <a:r>
-              <a:rPr sz="1400" b="0" i="0">
-                <a:solidFill>
-                  <a:srgbClr val="FFFFFF"/>
-                </a:solidFill>
-                <a:latin typeface="Calibri"/>
-              </a:rPr>
-              <a:t>  PRIMARY KEY (id_cita, fecha_hora)</a:t>
-            </a:r>
-          </a:p>
-          <a:p>
-            <a:pPr>
-              <a:spcAft>
-                <a:spcPts val="400"/>
-              </a:spcAft>
-            </a:pPr>
-            <a:r>
-              <a:rPr sz="1400" b="0" i="0">
-                <a:solidFill>
-                  <a:srgbClr val="FFFFFF"/>
-                </a:solidFill>
-                <a:latin typeface="Calibri"/>
-              </a:rPr>
-              <a:t>);</a:t>
-            </a:r>
-          </a:p>
-          <a:p>
-            <a:pPr>
-              <a:spcAft>
-                <a:spcPts val="400"/>
-              </a:spcAft>
-            </a:pPr>
-            <a:r>
-              <a:rPr sz="1400" b="0" i="0">
-                <a:solidFill>
-                  <a:srgbClr val="FFFFFF"/>
-                </a:solidFill>
-                <a:latin typeface="Calibri"/>
-              </a:rPr>
-              <a:t/>
-            </a:r>
-          </a:p>
-          <a:p>
-            <a:pPr>
-              <a:spcAft>
-                <a:spcPts val="400"/>
-              </a:spcAft>
-            </a:pPr>
-            <a:r>
-              <a:rPr sz="1400" b="0" i="0">
-                <a:solidFill>
-                  <a:srgbClr val="FFFFFF"/>
-                </a:solidFill>
-                <a:latin typeface="Calibri"/>
-              </a:rPr>
-              <a:t>CREATE TABLE cita_hist_2025 PARTITION OF cita_hist FOR</a:t>
-            </a:r>
-          </a:p>
-        </p:txBody>
-      </p:sp>
-      <p:sp>
-        <p:nvSpPr>
-          <p:cNvPr id="9" name="TextBox 8"/>
-          <p:cNvSpPr txBox="1"/>
-          <p:nvPr/>
-        </p:nvSpPr>
-        <p:spPr>
-          <a:xfrm>
-            <a:off x="6233007" y="1719072"/>
-            <a:ext cx="5181447" cy="4453128"/>
-          </a:xfrm>
-          <a:prstGeom prst="rect">
-            <a:avLst/>
-          </a:prstGeom>
-          <a:noFill/>
-        </p:spPr>
-        <p:txBody>
-          <a:bodyPr wrap="square">
-            <a:spAutoFit/>
-          </a:bodyPr>
-          <a:lstStyle/>
-          <a:p>
-            <a:pPr>
-              <a:spcAft>
-                <a:spcPts val="400"/>
-              </a:spcAft>
-            </a:pPr>
-            <a:r>
-              <a:rPr sz="1400" b="0" i="0">
-                <a:solidFill>
-                  <a:srgbClr val="FFFFFF"/>
-                </a:solidFill>
-                <a:latin typeface="Calibri"/>
-              </a:rPr>
-              <a:t>VALUES FROM (TIMESTAMP '2025-01-01')</a:t>
-            </a:r>
-          </a:p>
-          <a:p>
-            <a:pPr>
-              <a:spcAft>
-                <a:spcPts val="400"/>
-              </a:spcAft>
-            </a:pPr>
-            <a:r>
-              <a:rPr sz="1400" b="0" i="0">
-                <a:solidFill>
-                  <a:srgbClr val="FFFFFF"/>
-                </a:solidFill>
-                <a:latin typeface="Calibri"/>
-              </a:rPr>
-              <a:t/>
-            </a:r>
-          </a:p>
-          <a:p>
-            <a:pPr>
-              <a:spcAft>
-                <a:spcPts val="400"/>
-              </a:spcAft>
-            </a:pPr>
-            <a:r>
-              <a:rPr sz="1400" b="0" i="0">
-                <a:solidFill>
-                  <a:srgbClr val="FFFFFF"/>
-                </a:solidFill>
-                <a:latin typeface="Calibri"/>
-              </a:rPr>
-              <a:t>INSERT INTO cita_hist SELECT id_cita, id_mascota, id_veterinario, fecha_hora, estado</a:t>
-            </a:r>
-          </a:p>
-          <a:p>
-            <a:pPr>
-              <a:spcAft>
-                <a:spcPts val="400"/>
-              </a:spcAft>
-            </a:pPr>
-            <a:r>
-              <a:rPr sz="1400" b="0" i="0">
-                <a:solidFill>
-                  <a:srgbClr val="FFFFFF"/>
-                </a:solidFill>
-                <a:latin typeface="Calibri"/>
-              </a:rPr>
-              <a:t>FROM cita</a:t>
-            </a:r>
-          </a:p>
-          <a:p>
-            <a:pPr>
-              <a:spcAft>
-                <a:spcPts val="400"/>
-              </a:spcAft>
-            </a:pPr>
-            <a:r>
-              <a:rPr sz="1400" b="0" i="0">
-                <a:solidFill>
-                  <a:srgbClr val="FFFFFF"/>
-                </a:solidFill>
-                <a:latin typeface="Calibri"/>
-              </a:rPr>
-              <a:t/>
-            </a:r>
-          </a:p>
-          <a:p>
-            <a:pPr>
-              <a:spcAft>
-                <a:spcPts val="400"/>
-              </a:spcAft>
-            </a:pPr>
-            <a:r>
-              <a:rPr sz="1400" b="0" i="0">
-                <a:solidFill>
-                  <a:srgbClr val="FFFFFF"/>
-                </a:solidFill>
-                <a:latin typeface="Calibri"/>
-              </a:rPr>
-              <a:t>SELECT tableoid::regclass AS particion, COUNT(*)</a:t>
-            </a:r>
-          </a:p>
-          <a:p>
-            <a:pPr>
-              <a:spcAft>
-                <a:spcPts val="400"/>
-              </a:spcAft>
-            </a:pPr>
-            <a:r>
-              <a:rPr sz="1400" b="0" i="0">
-                <a:solidFill>
-                  <a:srgbClr val="FFFFFF"/>
-                </a:solidFill>
-                <a:latin typeface="Calibri"/>
-              </a:rPr>
-              <a:t/>
-            </a:r>
-          </a:p>
-          <a:p>
-            <a:pPr>
-              <a:spcAft>
-                <a:spcPts val="400"/>
-              </a:spcAft>
-            </a:pPr>
-            <a:r>
-              <a:rPr sz="1400" b="0" i="0">
-                <a:solidFill>
-                  <a:srgbClr val="FFFFFF"/>
-                </a:solidFill>
-                <a:latin typeface="Calibri"/>
-              </a:rPr>
-              <a:t>FROM cita_hist</a:t>
-            </a:r>
-          </a:p>
-          <a:p>
-            <a:pPr>
-              <a:spcAft>
-                <a:spcPts val="400"/>
-              </a:spcAft>
-            </a:pPr>
-            <a:r>
-              <a:rPr sz="1400" b="0" i="0">
-                <a:solidFill>
-                  <a:srgbClr val="FFFFFF"/>
-                </a:solidFill>
-                <a:latin typeface="Calibri"/>
-              </a:rPr>
-              <a:t>GROUP BY 1</a:t>
-            </a:r>
-          </a:p>
-          <a:p>
-            <a:pPr>
-              <a:spcAft>
-                <a:spcPts val="400"/>
-              </a:spcAft>
-            </a:pPr>
-            <a:r>
-              <a:rPr sz="1400" b="0" i="0">
-                <a:solidFill>
-                  <a:srgbClr val="FFFFFF"/>
-                </a:solidFill>
-                <a:latin typeface="Calibri"/>
-              </a:rPr>
-              <a:t>ORDER BY 1</a:t>
-            </a:r>
-          </a:p>
-        </p:txBody>
-      </p:sp>
-      <p:sp>
-        <p:nvSpPr>
-          <p:cNvPr id="10" name="TextBox 9"/>
+                <a:spcPts val="800"/>
+              </a:spcAft>
+            </a:pPr>
+            <a:r>
+              <a:rPr sz="2000" b="0" i="0">
+                <a:solidFill>
+                  <a:srgbClr val="333333"/>
+                </a:solidFill>
+                <a:latin typeface="Calibri"/>
+              </a:rPr>
+              <a:t>–   Primera: el volumen que espera Huellitas, con numeros propios del estudiante, del estilo tantas citas por dia por tantos dias de operacion al ano por tantos anos de historia.</a:t>
+            </a:r>
+          </a:p>
+          <a:p>
+            <a:pPr>
+              <a:spcAft>
+                <a:spcPts val="800"/>
+              </a:spcAft>
+            </a:pPr>
+            <a:r>
+              <a:rPr sz="2000" b="0" i="0">
+                <a:solidFill>
+                  <a:srgbClr val="333333"/>
+                </a:solidFill>
+                <a:latin typeface="Calibri"/>
+              </a:rPr>
+              <a:t>–   Un dato de referencia para calibrar: 40 citas diarias durante 300 dias son 12.000 citas al ano</a:t>
+            </a:r>
+          </a:p>
+          <a:p>
+            <a:pPr>
+              <a:spcAft>
+                <a:spcPts val="800"/>
+              </a:spcAft>
+            </a:pPr>
+            <a:r>
+              <a:rPr sz="2000" b="0" i="0">
+                <a:solidFill>
+                  <a:srgbClr val="333333"/>
+                </a:solidFill>
+                <a:latin typeface="Calibri"/>
+              </a:rPr>
+              <a:t>–   Y a cinco anos son 60.000; eso esta tres ordenes de magnitud por debajo del umbral de particionamiento, asi que el veredicto honesto para VetCare es que NO se particiona, y decirlo con el numero al lado vale mas que decir que si por quedar bien.</a:t>
+            </a:r>
+          </a:p>
+          <a:p>
+            <a:pPr>
+              <a:spcAft>
+                <a:spcPts val="800"/>
+              </a:spcAft>
+            </a:pPr>
+            <a:r>
+              <a:rPr sz="2000" b="0" i="0">
+                <a:solidFill>
+                  <a:srgbClr val="333333"/>
+                </a:solidFill>
+                <a:latin typeface="Calibri"/>
+              </a:rPr>
+              <a:t>–   Segunda: la ganancia de rendimiento con 5.010 filas no es apreciable.</a:t>
+            </a:r>
+          </a:p>
+        </p:txBody>
+      </p:sp>
+      <p:sp>
+        <p:nvSpPr>
+          <p:cNvPr id="6" name="TextBox 5"/>
           <p:cNvSpPr txBox="1"/>
           <p:nvPr/>
         </p:nvSpPr>
@@ -13393,7 +14457,7 @@
                 </a:solidFill>
                 <a:latin typeface="Calibri"/>
               </a:rPr>
-              <a:t>El veredicto de particionamiento que pide la pregunta 5 (1/3)</a:t>
+              <a:t>El veredicto de particionamiento (2/3)</a:t>
             </a:r>
           </a:p>
         </p:txBody>
@@ -13432,7 +14496,7 @@
                 </a:solidFill>
                 <a:latin typeface="Calibri"/>
               </a:rPr>
-              <a:t>–   El segundo parrafo de la pregunta 5 pide un veredicto, y tiene tres exigencias que se califican por separado; conviene dictarlas.</a:t>
+              <a:t>–   Tercera: lo que si quedo comprobado, que son dos cosas concretas, la poda de particiones en el plan y la facilidad de archivado.</a:t>
             </a:r>
           </a:p>
           <a:p>
@@ -13448,7 +14512,7 @@
                 </a:solidFill>
                 <a:latin typeface="Calibri"/>
               </a:rPr>
-              <a:t>–   Primera: el volumen que espera Huellitas, con numeros propios del estudiante, del estilo tantas citas por dia por tantos dias de operacion al ano por tantos anos de historia.</a:t>
+              <a:t>–   Y ahi esta el caso que no tiene alternativa, el que justifica aprender el tema aunque hoy no se aplique: borrar cinco anos de historia con DELETE FROM cita WHERE fecha_hora &lt; TIMESTAMP '2021-01-01 00:00:00' toca millones de filas</a:t>
             </a:r>
           </a:p>
           <a:p>
@@ -13464,7 +14528,7 @@
                 </a:solidFill>
                 <a:latin typeface="Calibri"/>
               </a:rPr>
-              <a:t>–   Un dato de referencia para calibrar: 40 citas diarias durante 300 dias son 12.000 citas al ano</a:t>
+              <a:t>–   Genera un registro de transacciones enorme, sostiene bloqueos largos y deja la tabla que hay que limpiar despues</a:t>
             </a:r>
           </a:p>
           <a:p>
@@ -13480,7 +14544,7 @@
                 </a:solidFill>
                 <a:latin typeface="Calibri"/>
               </a:rPr>
-              <a:t>–   Y a cinco anos son 60.000; eso esta tres ordenes de magnitud por debajo del umbral de particionamiento, asi que el veredicto honesto para VetCare es que NO se particiona, y decirlo con el numero al lado vale mas que decir que si por quedar bien.</a:t>
+              <a:t>–   En cambio DROP TABLE cita_hist_2021 es una operacion de metadatos que tarda un instante, y ALTER TABLE cita_hist DETACH PARTITION cita_hist_2021 la separa sin borrar los datos si hay que conservarlos aparte.</a:t>
             </a:r>
           </a:p>
         </p:txBody>
@@ -13661,7 +14725,7 @@
                 </a:solidFill>
                 <a:latin typeface="Calibri"/>
               </a:rPr>
-              <a:t>El veredicto de particionamiento que pide la pregunta 5 (2/3)</a:t>
+              <a:t>El veredicto de particionamiento (3/3)</a:t>
             </a:r>
           </a:p>
         </p:txBody>
@@ -13700,7 +14764,7 @@
                 </a:solidFill>
                 <a:latin typeface="Calibri"/>
               </a:rPr>
-              <a:t>–   Segunda: la ganancia de rendimiento con 5.010 filas no es apreciable, y reconocerlo suma puntos en vez de restarlos, porque la alternativa es inventar una mejora que el plan no muestra.</a:t>
+              <a:t>–   En Oracle la sentencia equivalente es ALTER TABLE cita DROP PARTITION cita_2021, y la diferencia de sintaxis conviene mencionarla porque el motor de hoy es PostgreSQL.</a:t>
             </a:r>
           </a:p>
           <a:p>
@@ -13716,39 +14780,7 @@
                 </a:solidFill>
                 <a:latin typeface="Calibri"/>
               </a:rPr>
-              <a:t>–   Tercera: lo que si quedo comprobado, que son dos cosas concretas, la poda de particiones en el plan y la facilidad de archivado.</a:t>
-            </a:r>
-          </a:p>
-          <a:p>
-            <a:pPr>
-              <a:spcAft>
-                <a:spcPts val="800"/>
-              </a:spcAft>
-            </a:pPr>
-            <a:r>
-              <a:rPr sz="2000" b="0" i="0">
-                <a:solidFill>
-                  <a:srgbClr val="333333"/>
-                </a:solidFill>
-                <a:latin typeface="Calibri"/>
-              </a:rPr>
-              <a:t>–   Y ahi esta el caso que no tiene alternativa, el que justifica aprender el tema aunque hoy no se aplique: borrar cinco anos de historia con DELETE FROM cita WHERE fecha_hora &lt; TIMESTAMP '2021-01-01 00:00:00' toca millones de filas</a:t>
-            </a:r>
-          </a:p>
-          <a:p>
-            <a:pPr>
-              <a:spcAft>
-                <a:spcPts val="800"/>
-              </a:spcAft>
-            </a:pPr>
-            <a:r>
-              <a:rPr sz="2000" b="0" i="0">
-                <a:solidFill>
-                  <a:srgbClr val="333333"/>
-                </a:solidFill>
-                <a:latin typeface="Calibri"/>
-              </a:rPr>
-              <a:t>–   Genera un registro de transacciones enorme, sostiene bloqueos largos y deja la tabla que hay que limpiar despues</a:t>
+              <a:t>–   Ese contraste entre DROP de particion y DELETE masivo conecta directo con la Clase 8, donde el registro de transacciones y la duracion de los bloqueos son el tema.</a:t>
             </a:r>
           </a:p>
         </p:txBody>
@@ -13929,7 +14961,7 @@
                 </a:solidFill>
                 <a:latin typeface="Calibri"/>
               </a:rPr>
-              <a:t>El veredicto de particionamiento que pide la pregunta 5 (3/3)</a:t>
+              <a:t>La demo, en el orden en que se proyecta (1/2)</a:t>
             </a:r>
           </a:p>
         </p:txBody>
@@ -13968,7 +15000,7 @@
                 </a:solidFill>
                 <a:latin typeface="Calibri"/>
               </a:rPr>
-              <a:t>–   En cambio DROP TABLE cita_hist_2021 es una operacion de metadatos que tarda un instante, y ALTER TABLE cita_hist DETACH PARTITION cita_hist_2021 la separa sin borrar los datos si hay que conservarlos aparte.</a:t>
+              <a:t>–   La demo es el script Codigo/07_indices_vetcare.sql y se corre, no en otra herramienta, porque el volumen sembrado es el que hace cambiar el plan.</a:t>
             </a:r>
           </a:p>
           <a:p>
@@ -13984,7 +15016,7 @@
                 </a:solidFill>
                 <a:latin typeface="Calibri"/>
               </a:rPr>
-              <a:t>–   En Oracle la sentencia equivalente es ALTER TABLE cita DROP PARTITION cita_2021, y la diferencia de sintaxis conviene mencionarla porque el motor de hoy es PostgreSQL.</a:t>
+              <a:t>–   El bloque 0 crea las tablas y siembra 30.000 citas con generate_series; hay que advertir que ese bloque recrea las tablas, asi que se corre en una base vacia y no sobre una VetCare DB con datos que alguien quiera conservar.</a:t>
             </a:r>
           </a:p>
           <a:p>
@@ -14000,7 +15032,39 @@
                 </a:solidFill>
                 <a:latin typeface="Calibri"/>
               </a:rPr>
-              <a:t>–   Ese contraste entre DROP de particion y DELETE masivo conecta directo con la Clase 8, donde el registro de transacciones y la duracion de los bloqueos son el tema.</a:t>
+              <a:t>–   Termina con una consulta de control que debe devolver 18.182 PROGRAMADA, 9.091 ATENDIDA y 2.727 CANCELADA; si esos numeros no salen, nada de lo que sigue cuadra y hay que parar ahi.</a:t>
+            </a:r>
+          </a:p>
+          <a:p>
+            <a:pPr>
+              <a:spcAft>
+                <a:spcPts val="800"/>
+              </a:spcAft>
+            </a:pPr>
+            <a:r>
+              <a:rPr sz="2000" b="0" i="0">
+                <a:solidFill>
+                  <a:srgbClr val="333333"/>
+                </a:solidFill>
+                <a:latin typeface="Calibri"/>
+              </a:rPr>
+              <a:t>–   El bloque 1 es la linea base, con los dos Seq Scan.</a:t>
+            </a:r>
+          </a:p>
+          <a:p>
+            <a:pPr>
+              <a:spcAft>
+                <a:spcPts val="800"/>
+              </a:spcAft>
+            </a:pPr>
+            <a:r>
+              <a:rPr sz="2000" b="0" i="0">
+                <a:solidFill>
+                  <a:srgbClr val="333333"/>
+                </a:solidFill>
+                <a:latin typeface="Calibri"/>
+              </a:rPr>
+              <a:t>–   El bloque 2 crea los tres indices, corre ANALYZE y repite las dos consultas: ese es el momento de la clase, y conviene proyectar las dos salidas una debajo de la otra y leer en voz alta la linea del nodo.</a:t>
             </a:r>
           </a:p>
         </p:txBody>
@@ -14181,7 +15245,7 @@
                 </a:solidFill>
                 <a:latin typeface="Calibri"/>
               </a:rPr>
-              <a:t>La demo, en el orden en que se proyecta (1/2)</a:t>
+              <a:t>La demo, en el orden en que se proyecta (2/2)</a:t>
             </a:r>
           </a:p>
         </p:txBody>
@@ -14220,7 +15284,7 @@
                 </a:solidFill>
                 <a:latin typeface="Calibri"/>
               </a:rPr>
-              <a:t>–   La demo es el script Codigo/07_indices_vetcare.sql y se corre en la consola de la plataforma del curso, no en otra herramienta, porque el volumen sembrado es el que hace cambiar el plan.</a:t>
+              <a:t>–   El bloque 3 es el experimento del orden, con su DROP INDEX al final.</a:t>
             </a:r>
           </a:p>
           <a:p>
@@ -14236,7 +15300,7 @@
                 </a:solidFill>
                 <a:latin typeface="Calibri"/>
               </a:rPr>
-              <a:t>–   El bloque 0 crea las tablas y siembra 30.000 citas con generate_series; hay que advertir que ese bloque recrea las tablas, asi que se corre en una base vacia y no sobre una VetCare DB con datos que alguien quiera conservar.</a:t>
+              <a:t>–   El bloque 4 es el particionamiento completo, con una salvedad que hay que decir en vivo: como la siembra del bloque 0 pone todas las citas en 2026, todo cae en cita_hist_2026 y cita_hist_2025 queda vacia; eso ya demuestra el enrutamiento</a:t>
             </a:r>
           </a:p>
           <a:p>
@@ -14252,39 +15316,7 @@
                 </a:solidFill>
                 <a:latin typeface="Calibri"/>
               </a:rPr>
-              <a:t>–   Termina con una consulta de control que debe devolver 18.182 PROGRAMADA, 9.091 ATENDIDA y 2.727 CANCELADA; si esos numeros no salen, nada de lo que sigue cuadra y hay que parar ahi.</a:t>
-            </a:r>
-          </a:p>
-          <a:p>
-            <a:pPr>
-              <a:spcAft>
-                <a:spcPts val="800"/>
-              </a:spcAft>
-            </a:pPr>
-            <a:r>
-              <a:rPr sz="2000" b="0" i="0">
-                <a:solidFill>
-                  <a:srgbClr val="333333"/>
-                </a:solidFill>
-                <a:latin typeface="Calibri"/>
-              </a:rPr>
-              <a:t>–   El bloque 1 es la linea base, con los dos Seq Scan.</a:t>
-            </a:r>
-          </a:p>
-          <a:p>
-            <a:pPr>
-              <a:spcAft>
-                <a:spcPts val="800"/>
-              </a:spcAft>
-            </a:pPr>
-            <a:r>
-              <a:rPr sz="2000" b="0" i="0">
-                <a:solidFill>
-                  <a:srgbClr val="333333"/>
-                </a:solidFill>
-                <a:latin typeface="Calibri"/>
-              </a:rPr>
-              <a:t>–   El bloque 2 crea los tres indices de la pregunta 1, corre ANALYZE y repite las dos consultas: ese es el momento de la clase, y conviene proyectar las dos salidas una debajo de la otra y leer en voz alta la linea del nodo.</a:t>
+              <a:t>–   Si el bloque 0 no alcanza el tiempo.</a:t>
             </a:r>
           </a:p>
         </p:txBody>
@@ -14465,7 +15497,7 @@
                 </a:solidFill>
                 <a:latin typeface="Calibri"/>
               </a:rPr>
-              <a:t>La demo, en el orden en que se proyecta (2/2)</a:t>
+              <a:t>Donde corre esto, y que no se puede medir aqui</a:t>
             </a:r>
           </a:p>
         </p:txBody>
@@ -14504,7 +15536,7 @@
                 </a:solidFill>
                 <a:latin typeface="Calibri"/>
               </a:rPr>
-              <a:t>–   El bloque 3 es el experimento del orden, con su DROP INDEX al final.</a:t>
+              <a:t>–   La herramienta de hoy es una sola y conviene decirlo sin ambiguedad: PostgreSQL en el navegador, que ejecuta PostgreSQL sobre PGlite dentro del navegador.</a:t>
             </a:r>
           </a:p>
           <a:p>
@@ -14520,39 +15552,7 @@
                 </a:solidFill>
                 <a:latin typeface="Calibri"/>
               </a:rPr>
-              <a:t>–   El bloque 4 es el particionamiento completo, con una salvedad que hay que decir en vivo: como la siembra del bloque 0 pone todas las citas en 2026, todo cae en cita_hist_2026 y cita_hist_2025 queda vacia; eso ya demuestra el enrutamiento</a:t>
-            </a:r>
-          </a:p>
-          <a:p>
-            <a:pPr>
-              <a:spcAft>
-                <a:spcPts val="800"/>
-              </a:spcAft>
-            </a:pPr>
-            <a:r>
-              <a:rPr sz="2000" b="0" i="0">
-                <a:solidFill>
-                  <a:srgbClr val="333333"/>
-                </a:solidFill>
-                <a:latin typeface="Calibri"/>
-              </a:rPr>
-              <a:t>–   Y la base de la pregunta 3 en la plataforma del curso si reparte sus 5.010 citas entre los dos anos.</a:t>
-            </a:r>
-          </a:p>
-          <a:p>
-            <a:pPr>
-              <a:spcAft>
-                <a:spcPts val="800"/>
-              </a:spcAft>
-            </a:pPr>
-            <a:r>
-              <a:rPr sz="2000" b="0" i="0">
-                <a:solidFill>
-                  <a:srgbClr val="333333"/>
-                </a:solidFill>
-                <a:latin typeface="Calibri"/>
-              </a:rPr>
-              <a:t>–   Si el bloque 0 no alcanza el tiempo, la alternativa es abrir directamente la pregunta 1 del taller en la plataforma del curso, que ya trae la base sembrada, y correr los bloques 1 y 2 ahi.</a:t>
+              <a:t>–   En particular DB Fiddle queda fuera, aunque tambien tenga PostgreSQL, por un motivo concreto: la base sembrada con las 30.010 citas no existe alli.</a:t>
             </a:r>
           </a:p>
         </p:txBody>
@@ -15033,7 +16033,7 @@
                 </a:solidFill>
                 <a:latin typeface="Calibri"/>
               </a:rPr>
-              <a:t>Donde corre esto, y que no se puede medir aqui</a:t>
+              <a:t>Preguntas frecuentes del grupo (1/3)</a:t>
             </a:r>
           </a:p>
         </p:txBody>
@@ -15072,7 +16072,7 @@
                 </a:solidFill>
                 <a:latin typeface="Calibri"/>
               </a:rPr>
-              <a:t>–   La herramienta de hoy es una sola y conviene decirlo sin ambiguedad: la plataforma del curso, que ejecuta PostgreSQL sobre PGlite dentro del navegador.</a:t>
+              <a:t>–   Primera, y la mas previsible: entonces creo (estado, fecha_hora) y tambien (fecha_hora, estado).</a:t>
             </a:r>
           </a:p>
           <a:p>
@@ -15088,7 +16088,7 @@
                 </a:solidFill>
                 <a:latin typeface="Calibri"/>
               </a:rPr>
-              <a:t>–   En particular DB Fiddle queda fuera, aunque tambien tenga PostgreSQL, por un motivo concreto: la base sembrada con las 30.010 citas no existe alli, y sin ella no se puede reproducir ni el cambio de plan ni las 91 filas que la rubrica menciona.</a:t>
+              <a:t>–   En produccion rara vez se justifica tener los dos, porque el segundo queda casi siempre cubierto por el indice de una sola columna sobre fecha_hora mas el filtro de estado aplicado sobre las pocas filas que sobreviven, y cada indice extra se paga en cada escritura.</a:t>
             </a:r>
           </a:p>
           <a:p>
@@ -15104,23 +16104,7 @@
                 </a:solidFill>
                 <a:latin typeface="Calibri"/>
               </a:rPr>
-              <a:t>–   Un alterno que cuesta puntos no es un alterno.</a:t>
-            </a:r>
-          </a:p>
-          <a:p>
-            <a:pPr>
-              <a:spcAft>
-                <a:spcPts val="800"/>
-              </a:spcAft>
-            </a:pPr>
-            <a:r>
-              <a:rPr sz="2000" b="0" i="0">
-                <a:solidFill>
-                  <a:srgbClr val="333333"/>
-                </a:solidFill>
-                <a:latin typeface="Calibri"/>
-              </a:rPr>
-              <a:t>–   Google Docs se usa para la tabla de justificacion de la pregunta 5, que es prosa y no SQL.</a:t>
+              <a:t>–   Hoy se crean los dos a proposito, para medir, y el experimento termina con un DROP INDEX que muestra que pasa cuando falta uno: crear para medir y crear para dejar son dos cosas distintas, y esa distincion es la respuesta.</a:t>
             </a:r>
           </a:p>
         </p:txBody>
@@ -15301,7 +16285,7 @@
                 </a:solidFill>
                 <a:latin typeface="Calibri"/>
               </a:rPr>
-              <a:t>Preguntas frecuentes del grupo (1/3)</a:t>
+              <a:t>Preguntas frecuentes del grupo (2/3)</a:t>
             </a:r>
           </a:p>
         </p:txBody>
@@ -15340,7 +16324,7 @@
                 </a:solidFill>
                 <a:latin typeface="Calibri"/>
               </a:rPr>
-              <a:t>–   Primera, y la mas previsible: entonces creo (estado, fecha_hora) y tambien (fecha_hora, estado).</a:t>
+              <a:t>–   Segunda: cree el indice y el plan no cambio, entonces sirve o no sirve.</a:t>
             </a:r>
           </a:p>
           <a:p>
@@ -15356,7 +16340,7 @@
                 </a:solidFill>
                 <a:latin typeface="Calibri"/>
               </a:rPr>
-              <a:t>–   En produccion rara vez se justifica tener los dos, porque el segundo queda casi siempre cubierto por el indice de una sola columna sobre fecha_hora mas el filtro de estado aplicado sobre las pocas filas que sobreviven, y cada indice extra se paga en cada escritura.</a:t>
+              <a:t>–   Con 20 filas el indice puede estar bien elegido y el motor tener razon en no usarlo; con las 30.010 de hoy el volumen ya no es excusa, asi que se revisa en este orden, el ANALYZE, el nombre de la columna lider, y si el predicado es sargable.</a:t>
             </a:r>
           </a:p>
           <a:p>
@@ -15372,7 +16356,7 @@
                 </a:solidFill>
                 <a:latin typeface="Calibri"/>
               </a:rPr>
-              <a:t>–   Hoy se crean los dos a proposito, para medir, y la pregunta 2 termina con un DROP INDEX que muestra que pasa cuando falta uno: crear para medir y crear para dejar son dos cosas distintas, y esa distincion es la respuesta.</a:t>
+              <a:t>–   Tercera: si particionar no mejora nada con este volumen, para que lo hacemos.</a:t>
             </a:r>
           </a:p>
         </p:txBody>
@@ -15553,7 +16537,7 @@
                 </a:solidFill>
                 <a:latin typeface="Calibri"/>
               </a:rPr>
-              <a:t>Preguntas frecuentes del grupo (2/3)</a:t>
+              <a:t>Preguntas frecuentes del grupo (3/3)</a:t>
             </a:r>
           </a:p>
         </p:txBody>
@@ -15592,7 +16576,7 @@
                 </a:solidFill>
                 <a:latin typeface="Calibri"/>
               </a:rPr>
-              <a:t>–   Segunda: cree el indice y el plan no cambio, entonces sirve o no sirve.</a:t>
+              <a:t>–   Cuarta: el indice parcial y el completo indexan la misma columna, no es redundante.</a:t>
             </a:r>
           </a:p>
           <a:p>
@@ -15608,7 +16592,7 @@
                 </a:solidFill>
                 <a:latin typeface="Calibri"/>
               </a:rPr>
-              <a:t>–   Con 20 filas el indice puede estar bien elegido y el motor tener razon en no usarlo; con las 30.010 de hoy el volumen ya no es excusa, asi que se revisa en este orden, el ANALYZE, el nombre de la columna lider, y si el predicado es sargable.</a:t>
+              <a:t>–   No lo es mientras existan consultas que no traigan el filtro de estado: esas solo pueden usar el completo.</a:t>
             </a:r>
           </a:p>
           <a:p>
@@ -15624,7 +16608,7 @@
                 </a:solidFill>
                 <a:latin typeface="Calibri"/>
               </a:rPr>
-              <a:t>–   Tercera: si particionar no mejora nada con este volumen, para que lo hacemos.</a:t>
+              <a:t>–   Si todas las consultas del PI filtran por PROGRAMADA, entonces si sobra el completo.</a:t>
             </a:r>
           </a:p>
           <a:p>
@@ -15640,7 +16624,23 @@
                 </a:solidFill>
                 <a:latin typeface="Calibri"/>
               </a:rPr>
-              <a:t>–   Porque el archivado no tiene alternativa —DROP TABLE de una particion contra un DELETE de millones de filas— y porque son 20 puntos de la actividad, que se califican sobre SQL ejecutado y no sobre una explicacion.</a:t>
+              <a:t>–   Quinta: puedo poner el indice y ya, sin medir.</a:t>
+            </a:r>
+          </a:p>
+          <a:p>
+            <a:pPr>
+              <a:spcAft>
+                <a:spcPts val="800"/>
+              </a:spcAft>
+            </a:pPr>
+            <a:r>
+              <a:rPr sz="2000" b="0" i="0">
+                <a:solidFill>
+                  <a:srgbClr val="333333"/>
+                </a:solidFill>
+                <a:latin typeface="Calibri"/>
+              </a:rPr>
+              <a:t>–   No, porque hace falta la linea base con Seq Scan; sin el antes, el despues no demuestra nada.</a:t>
             </a:r>
           </a:p>
         </p:txBody>
@@ -15821,21 +16821,141 @@
                 </a:solidFill>
                 <a:latin typeface="Calibri"/>
               </a:rPr>
-              <a:t>Preguntas frecuentes del grupo (3/3)</a:t>
-            </a:r>
-          </a:p>
-        </p:txBody>
-      </p:sp>
-      <p:sp>
-        <p:nvSpPr>
-          <p:cNvPr id="5" name="TextBox 4"/>
+              <a:t>Crear el indice y probar que se usa</a:t>
+            </a:r>
+          </a:p>
+        </p:txBody>
+      </p:sp>
+      <p:sp>
+        <p:nvSpPr>
+          <p:cNvPr id="5" name="Rounded Rectangle 4"/>
+          <p:cNvSpPr/>
+          <p:nvPr/>
+        </p:nvSpPr>
+        <p:spPr>
+          <a:xfrm>
+            <a:off x="457200" y="1261872"/>
+            <a:ext cx="11277295" cy="5093208"/>
+          </a:xfrm>
+          <a:prstGeom prst="roundRect">
+            <a:avLst>
+              <a:gd name="adj" fmla="val 12000"/>
+            </a:avLst>
+          </a:prstGeom>
+          <a:solidFill>
+            <a:srgbClr val="1E2A38"/>
+          </a:solidFill>
+          <a:ln>
+            <a:noFill/>
+          </a:ln>
+        </p:spPr>
+        <p:style>
+          <a:lnRef idx="1">
+            <a:schemeClr val="accent1"/>
+          </a:lnRef>
+          <a:fillRef idx="3">
+            <a:schemeClr val="accent1"/>
+          </a:fillRef>
+          <a:effectRef idx="2">
+            <a:schemeClr val="accent1"/>
+          </a:effectRef>
+          <a:fontRef idx="minor">
+            <a:schemeClr val="lt1"/>
+          </a:fontRef>
+        </p:style>
+        <p:txBody>
+          <a:bodyPr rtlCol="0" anchor="ctr"/>
+          <a:lstStyle/>
+          <a:p>
+            <a:pPr algn="ctr"/>
+          </a:p>
+        </p:txBody>
+      </p:sp>
+      <p:sp>
+        <p:nvSpPr>
+          <p:cNvPr id="6" name="Rectangle 5"/>
+          <p:cNvSpPr/>
+          <p:nvPr/>
+        </p:nvSpPr>
+        <p:spPr>
+          <a:xfrm>
+            <a:off x="457200" y="1261872"/>
+            <a:ext cx="11277295" cy="320040"/>
+          </a:xfrm>
+          <a:prstGeom prst="rect">
+            <a:avLst/>
+          </a:prstGeom>
+          <a:solidFill>
+            <a:srgbClr val="095292"/>
+          </a:solidFill>
+          <a:ln>
+            <a:noFill/>
+          </a:ln>
+        </p:spPr>
+        <p:style>
+          <a:lnRef idx="1">
+            <a:schemeClr val="accent1"/>
+          </a:lnRef>
+          <a:fillRef idx="3">
+            <a:schemeClr val="accent1"/>
+          </a:fillRef>
+          <a:effectRef idx="2">
+            <a:schemeClr val="accent1"/>
+          </a:effectRef>
+          <a:fontRef idx="minor">
+            <a:schemeClr val="lt1"/>
+          </a:fontRef>
+        </p:style>
+        <p:txBody>
+          <a:bodyPr rtlCol="0" anchor="ctr"/>
+          <a:lstStyle/>
+          <a:p>
+            <a:pPr algn="ctr"/>
+          </a:p>
+        </p:txBody>
+      </p:sp>
+      <p:sp>
+        <p:nvSpPr>
+          <p:cNvPr id="7" name="TextBox 6"/>
           <p:cNvSpPr txBox="1"/>
           <p:nvPr/>
         </p:nvSpPr>
         <p:spPr>
           <a:xfrm>
-            <a:off x="457200" y="1170432"/>
-            <a:ext cx="11277295" cy="5230368"/>
+            <a:off x="685800" y="1307592"/>
+            <a:ext cx="10820095" cy="256032"/>
+          </a:xfrm>
+          <a:prstGeom prst="rect">
+            <a:avLst/>
+          </a:prstGeom>
+          <a:noFill/>
+        </p:spPr>
+        <p:txBody>
+          <a:bodyPr wrap="square" anchor="ctr"/>
+          <a:lstStyle/>
+          <a:p>
+            <a:r>
+              <a:rPr sz="1000" b="1" i="0">
+                <a:solidFill>
+                  <a:srgbClr val="269CCB"/>
+                </a:solidFill>
+                <a:latin typeface="Calibri"/>
+              </a:rPr>
+              <a:t>● ● ●</a:t>
+            </a:r>
+          </a:p>
+        </p:txBody>
+      </p:sp>
+      <p:sp>
+        <p:nvSpPr>
+          <p:cNvPr id="8" name="TextBox 7"/>
+          <p:cNvSpPr txBox="1"/>
+          <p:nvPr/>
+        </p:nvSpPr>
+        <p:spPr>
+          <a:xfrm>
+            <a:off x="777240" y="1719072"/>
+            <a:ext cx="10637215" cy="4453128"/>
           </a:xfrm>
           <a:prstGeom prst="rect">
             <a:avLst/>
@@ -15850,88 +16970,184 @@
           <a:p>
             <a:pPr>
               <a:spcAft>
-                <a:spcPts val="800"/>
-              </a:spcAft>
-            </a:pPr>
-            <a:r>
-              <a:rPr sz="2000" b="0" i="0">
-                <a:solidFill>
-                  <a:srgbClr val="333333"/>
-                </a:solidFill>
-                <a:latin typeface="Calibri"/>
-              </a:rPr>
-              <a:t>–   Cuarta: el indice parcial y el completo indexan la misma columna, no es redundante.</a:t>
-            </a:r>
-          </a:p>
-          <a:p>
-            <a:pPr>
-              <a:spcAft>
-                <a:spcPts val="800"/>
-              </a:spcAft>
-            </a:pPr>
-            <a:r>
-              <a:rPr sz="2000" b="0" i="0">
-                <a:solidFill>
-                  <a:srgbClr val="333333"/>
-                </a:solidFill>
-                <a:latin typeface="Calibri"/>
-              </a:rPr>
-              <a:t>–   No lo es mientras existan consultas que no traigan el filtro de estado: esas solo pueden usar el completo.</a:t>
-            </a:r>
-          </a:p>
-          <a:p>
-            <a:pPr>
-              <a:spcAft>
-                <a:spcPts val="800"/>
-              </a:spcAft>
-            </a:pPr>
-            <a:r>
-              <a:rPr sz="2000" b="0" i="0">
-                <a:solidFill>
-                  <a:srgbClr val="333333"/>
-                </a:solidFill>
-                <a:latin typeface="Calibri"/>
-              </a:rPr>
-              <a:t>–   Si todas las consultas del PI filtran por PROGRAMADA, entonces si sobra el completo, y decirlo asi en la columna de veredicto es la respuesta que la rubrica busca.</a:t>
-            </a:r>
-          </a:p>
-          <a:p>
-            <a:pPr>
-              <a:spcAft>
-                <a:spcPts val="800"/>
-              </a:spcAft>
-            </a:pPr>
-            <a:r>
-              <a:rPr sz="2000" b="0" i="0">
-                <a:solidFill>
-                  <a:srgbClr val="333333"/>
-                </a:solidFill>
-                <a:latin typeface="Calibri"/>
-              </a:rPr>
-              <a:t>–   Quinta: puedo poner el indice y ya, sin medir.</a:t>
-            </a:r>
-          </a:p>
-          <a:p>
-            <a:pPr>
-              <a:spcAft>
-                <a:spcPts val="800"/>
-              </a:spcAft>
-            </a:pPr>
-            <a:r>
-              <a:rPr sz="2000" b="0" i="0">
-                <a:solidFill>
-                  <a:srgbClr val="333333"/>
-                </a:solidFill>
-                <a:latin typeface="Calibri"/>
-              </a:rPr>
-              <a:t>–   No, porque la pregunta 1 exige la linea base con Seq Scan; sin el antes, el despues no demuestra nada, y es la primera cosa que la rubrica revisa.</a:t>
-            </a:r>
-          </a:p>
-        </p:txBody>
-      </p:sp>
-      <p:sp>
-        <p:nvSpPr>
-          <p:cNvPr id="6" name="TextBox 5"/>
+                <a:spcPts val="400"/>
+              </a:spcAft>
+            </a:pPr>
+            <a:r>
+              <a:rPr sz="1400" b="0" i="0">
+                <a:solidFill>
+                  <a:srgbClr val="FFFFFF"/>
+                </a:solidFill>
+                <a:latin typeface="Calibri"/>
+              </a:rPr>
+              <a:t>CREATE INDEX idx_cita_fecha_hora ON cita (fecha_hora);</a:t>
+            </a:r>
+          </a:p>
+          <a:p>
+            <a:pPr>
+              <a:spcAft>
+                <a:spcPts val="400"/>
+              </a:spcAft>
+            </a:pPr>
+            <a:r>
+              <a:rPr sz="1400" b="0" i="0">
+                <a:solidFill>
+                  <a:srgbClr val="FFFFFF"/>
+                </a:solidFill>
+                <a:latin typeface="Calibri"/>
+              </a:rPr>
+              <a:t>CREATE INDEX idx_mascota_dueno    ON mascota (id_dueno);</a:t>
+            </a:r>
+          </a:p>
+          <a:p>
+            <a:pPr>
+              <a:spcAft>
+                <a:spcPts val="400"/>
+              </a:spcAft>
+            </a:pPr>
+            <a:r>
+              <a:rPr sz="1400" b="0" i="0">
+                <a:solidFill>
+                  <a:srgbClr val="FFFFFF"/>
+                </a:solidFill>
+                <a:latin typeface="Calibri"/>
+              </a:rPr>
+              <a:t>ANALYZE cita;      -- sin estadisticas frescas el planificador decide a ciegas</a:t>
+            </a:r>
+          </a:p>
+          <a:p>
+            <a:pPr>
+              <a:spcAft>
+                <a:spcPts val="400"/>
+              </a:spcAft>
+            </a:pPr>
+            <a:r>
+              <a:rPr sz="1400" b="0" i="0">
+                <a:solidFill>
+                  <a:srgbClr val="FFFFFF"/>
+                </a:solidFill>
+                <a:latin typeface="Calibri"/>
+              </a:rPr>
+              <a:t/>
+            </a:r>
+          </a:p>
+          <a:p>
+            <a:pPr>
+              <a:spcAft>
+                <a:spcPts val="400"/>
+              </a:spcAft>
+            </a:pPr>
+            <a:r>
+              <a:rPr sz="1400" b="0" i="0">
+                <a:solidFill>
+                  <a:srgbClr val="FFFFFF"/>
+                </a:solidFill>
+                <a:latin typeface="Calibri"/>
+              </a:rPr>
+              <a:t>EXPLAIN ANALYZE</a:t>
+            </a:r>
+          </a:p>
+          <a:p>
+            <a:pPr>
+              <a:spcAft>
+                <a:spcPts val="400"/>
+              </a:spcAft>
+            </a:pPr>
+            <a:r>
+              <a:rPr sz="1400" b="0" i="0">
+                <a:solidFill>
+                  <a:srgbClr val="FFFFFF"/>
+                </a:solidFill>
+                <a:latin typeface="Calibri"/>
+              </a:rPr>
+              <a:t>SELECT * FROM cita</a:t>
+            </a:r>
+          </a:p>
+          <a:p>
+            <a:pPr>
+              <a:spcAft>
+                <a:spcPts val="400"/>
+              </a:spcAft>
+            </a:pPr>
+            <a:r>
+              <a:rPr sz="1400" b="0" i="0">
+                <a:solidFill>
+                  <a:srgbClr val="FFFFFF"/>
+                </a:solidFill>
+                <a:latin typeface="Calibri"/>
+              </a:rPr>
+              <a:t>WHERE fecha_hora &gt;= TIMESTAMP '2026-09-01 00:00:00'</a:t>
+            </a:r>
+          </a:p>
+          <a:p>
+            <a:pPr>
+              <a:spcAft>
+                <a:spcPts val="400"/>
+              </a:spcAft>
+            </a:pPr>
+            <a:r>
+              <a:rPr sz="1400" b="0" i="0">
+                <a:solidFill>
+                  <a:srgbClr val="FFFFFF"/>
+                </a:solidFill>
+                <a:latin typeface="Calibri"/>
+              </a:rPr>
+              <a:t>  AND fecha_hora &lt;  TIMESTAMP '2026-09-02 00:00:00';</a:t>
+            </a:r>
+          </a:p>
+          <a:p>
+            <a:pPr>
+              <a:spcAft>
+                <a:spcPts val="400"/>
+              </a:spcAft>
+            </a:pPr>
+            <a:r>
+              <a:rPr sz="1400" b="0" i="0">
+                <a:solidFill>
+                  <a:srgbClr val="FFFFFF"/>
+                </a:solidFill>
+                <a:latin typeface="Calibri"/>
+              </a:rPr>
+              <a:t/>
+            </a:r>
+          </a:p>
+          <a:p>
+            <a:pPr>
+              <a:spcAft>
+                <a:spcPts val="400"/>
+              </a:spcAft>
+            </a:pPr>
+            <a:r>
+              <a:rPr sz="1400" b="0" i="0">
+                <a:solidFill>
+                  <a:srgbClr val="FFFFFF"/>
+                </a:solidFill>
+                <a:latin typeface="Calibri"/>
+              </a:rPr>
+              <a:t>-- Antes:   Seq Scan on cita  (rows=30010)</a:t>
+            </a:r>
+          </a:p>
+          <a:p>
+            <a:pPr>
+              <a:spcAft>
+                <a:spcPts val="400"/>
+              </a:spcAft>
+            </a:pPr>
+            <a:r>
+              <a:rPr sz="1400" b="0" i="0">
+                <a:solidFill>
+                  <a:srgbClr val="FFFFFF"/>
+                </a:solidFill>
+                <a:latin typeface="Calibri"/>
+              </a:rPr>
+              <a:t>-- Despues: Index Scan using idx_cita_fecha_hora on cita  (rows=41)</a:t>
+            </a:r>
+          </a:p>
+        </p:txBody>
+      </p:sp>
+      <p:sp>
+        <p:nvSpPr>
+          <p:cNvPr id="9" name="TextBox 8"/>
           <p:cNvSpPr txBox="1"/>
           <p:nvPr/>
         </p:nvSpPr>
@@ -16105,7 +17321,7 @@
                 </a:solidFill>
                 <a:latin typeface="Calibri"/>
               </a:rPr>
-              <a:t>Crear el indice y probar que se usa</a:t>
+              <a:t>El orden de columnas en un indice compuesto</a:t>
             </a:r>
           </a:p>
         </p:txBody>
@@ -16264,7 +17480,7 @@
                 </a:solidFill>
                 <a:latin typeface="Calibri"/>
               </a:rPr>
-              <a:t>CREATE INDEX idx_cita_fecha_hora ON cita (fecha_hora);</a:t>
+              <a:t>-- Consulta: filtra por id_veterinario y ordena por fecha_hora</a:t>
             </a:r>
           </a:p>
           <a:p>
@@ -16280,7 +17496,7 @@
                 </a:solidFill>
                 <a:latin typeface="Calibri"/>
               </a:rPr>
-              <a:t>CREATE INDEX idx_mascota_dueno    ON mascota (id_dueno);</a:t>
+              <a:t>CREATE INDEX idx_cita_vet_fecha ON cita (id_veterinario, fecha_hora);</a:t>
             </a:r>
           </a:p>
           <a:p>
@@ -16296,7 +17512,7 @@
                 </a:solidFill>
                 <a:latin typeface="Calibri"/>
               </a:rPr>
-              <a:t>ANALYZE cita;      -- sin estadisticas frescas el planificador decide a ciegas</a:t>
+              <a:t/>
             </a:r>
           </a:p>
           <a:p>
@@ -16312,6 +17528,86 @@
                 </a:solidFill>
                 <a:latin typeface="Calibri"/>
               </a:rPr>
+              <a:t>-- Sirve para:</a:t>
+            </a:r>
+          </a:p>
+          <a:p>
+            <a:pPr>
+              <a:spcAft>
+                <a:spcPts val="400"/>
+              </a:spcAft>
+            </a:pPr>
+            <a:r>
+              <a:rPr sz="1400" b="0" i="0">
+                <a:solidFill>
+                  <a:srgbClr val="FFFFFF"/>
+                </a:solidFill>
+                <a:latin typeface="Calibri"/>
+              </a:rPr>
+              <a:t>--   WHERE id_veterinario = 3                      -&gt; si (prefijo)</a:t>
+            </a:r>
+          </a:p>
+          <a:p>
+            <a:pPr>
+              <a:spcAft>
+                <a:spcPts val="400"/>
+              </a:spcAft>
+            </a:pPr>
+            <a:r>
+              <a:rPr sz="1400" b="0" i="0">
+                <a:solidFill>
+                  <a:srgbClr val="FFFFFF"/>
+                </a:solidFill>
+                <a:latin typeface="Calibri"/>
+              </a:rPr>
+              <a:t>--   WHERE id_veterinario = 3 ORDER BY fecha_hora  -&gt; si (prefijo + orden)</a:t>
+            </a:r>
+          </a:p>
+          <a:p>
+            <a:pPr>
+              <a:spcAft>
+                <a:spcPts val="400"/>
+              </a:spcAft>
+            </a:pPr>
+            <a:r>
+              <a:rPr sz="1400" b="0" i="0">
+                <a:solidFill>
+                  <a:srgbClr val="FFFFFF"/>
+                </a:solidFill>
+                <a:latin typeface="Calibri"/>
+              </a:rPr>
+              <a:t>-- NO sirve para:</a:t>
+            </a:r>
+          </a:p>
+          <a:p>
+            <a:pPr>
+              <a:spcAft>
+                <a:spcPts val="400"/>
+              </a:spcAft>
+            </a:pPr>
+            <a:r>
+              <a:rPr sz="1400" b="0" i="0">
+                <a:solidFill>
+                  <a:srgbClr val="FFFFFF"/>
+                </a:solidFill>
+                <a:latin typeface="Calibri"/>
+              </a:rPr>
+              <a:t>--   WHERE fecha_hora &gt;= ...                       -&gt; no (no es prefijo)</a:t>
+            </a:r>
+          </a:p>
+          <a:p>
+            <a:pPr>
+              <a:spcAft>
+                <a:spcPts val="400"/>
+              </a:spcAft>
+            </a:pPr>
+            <a:r>
+              <a:rPr sz="1400" b="0" i="0">
+                <a:solidFill>
+                  <a:srgbClr val="FFFFFF"/>
+                </a:solidFill>
+                <a:latin typeface="Calibri"/>
+              </a:rPr>
               <a:t/>
             </a:r>
           </a:p>
@@ -16328,103 +17624,7 @@
                 </a:solidFill>
                 <a:latin typeface="Calibri"/>
               </a:rPr>
-              <a:t>EXPLAIN ANALYZE</a:t>
-            </a:r>
-          </a:p>
-          <a:p>
-            <a:pPr>
-              <a:spcAft>
-                <a:spcPts val="400"/>
-              </a:spcAft>
-            </a:pPr>
-            <a:r>
-              <a:rPr sz="1400" b="0" i="0">
-                <a:solidFill>
-                  <a:srgbClr val="FFFFFF"/>
-                </a:solidFill>
-                <a:latin typeface="Calibri"/>
-              </a:rPr>
-              <a:t>SELECT * FROM cita</a:t>
-            </a:r>
-          </a:p>
-          <a:p>
-            <a:pPr>
-              <a:spcAft>
-                <a:spcPts val="400"/>
-              </a:spcAft>
-            </a:pPr>
-            <a:r>
-              <a:rPr sz="1400" b="0" i="0">
-                <a:solidFill>
-                  <a:srgbClr val="FFFFFF"/>
-                </a:solidFill>
-                <a:latin typeface="Calibri"/>
-              </a:rPr>
-              <a:t>WHERE fecha_hora &gt;= TIMESTAMP '2026-09-01 00:00:00'</a:t>
-            </a:r>
-          </a:p>
-          <a:p>
-            <a:pPr>
-              <a:spcAft>
-                <a:spcPts val="400"/>
-              </a:spcAft>
-            </a:pPr>
-            <a:r>
-              <a:rPr sz="1400" b="0" i="0">
-                <a:solidFill>
-                  <a:srgbClr val="FFFFFF"/>
-                </a:solidFill>
-                <a:latin typeface="Calibri"/>
-              </a:rPr>
-              <a:t>  AND fecha_hora &lt;  TIMESTAMP '2026-09-02 00:00:00';</a:t>
-            </a:r>
-          </a:p>
-          <a:p>
-            <a:pPr>
-              <a:spcAft>
-                <a:spcPts val="400"/>
-              </a:spcAft>
-            </a:pPr>
-            <a:r>
-              <a:rPr sz="1400" b="0" i="0">
-                <a:solidFill>
-                  <a:srgbClr val="FFFFFF"/>
-                </a:solidFill>
-                <a:latin typeface="Calibri"/>
-              </a:rPr>
-              <a:t/>
-            </a:r>
-          </a:p>
-          <a:p>
-            <a:pPr>
-              <a:spcAft>
-                <a:spcPts val="400"/>
-              </a:spcAft>
-            </a:pPr>
-            <a:r>
-              <a:rPr sz="1400" b="0" i="0">
-                <a:solidFill>
-                  <a:srgbClr val="FFFFFF"/>
-                </a:solidFill>
-                <a:latin typeface="Calibri"/>
-              </a:rPr>
-              <a:t>-- Antes:   Seq Scan on cita  (rows=30010)</a:t>
-            </a:r>
-          </a:p>
-          <a:p>
-            <a:pPr>
-              <a:spcAft>
-                <a:spcPts val="400"/>
-              </a:spcAft>
-            </a:pPr>
-            <a:r>
-              <a:rPr sz="1400" b="0" i="0">
-                <a:solidFill>
-                  <a:srgbClr val="FFFFFF"/>
-                </a:solidFill>
-                <a:latin typeface="Calibri"/>
-              </a:rPr>
-              <a:t>-- Despues: Index Scan using idx_cita_fecha_hora on cita  (rows=41)</a:t>
+              <a:t>-- La regla: primero la columna de IGUALDAD, despues la de RANGO u ORDEN.</a:t>
             </a:r>
           </a:p>
         </p:txBody>
@@ -16605,7 +17805,7 @@
                 </a:solidFill>
                 <a:latin typeface="Calibri"/>
               </a:rPr>
-              <a:t>El orden de columnas en un indice compuesto</a:t>
+              <a:t>Particionar el historico por rango de fecha</a:t>
             </a:r>
           </a:p>
         </p:txBody>
@@ -16764,7 +17964,7 @@
                 </a:solidFill>
                 <a:latin typeface="Calibri"/>
               </a:rPr>
-              <a:t>-- Consulta: filtra por id_veterinario y ordena por fecha_hora</a:t>
+              <a:t>CREATE TABLE cita_hist (</a:t>
             </a:r>
           </a:p>
           <a:p>
@@ -16780,7 +17980,7 @@
                 </a:solidFill>
                 <a:latin typeface="Calibri"/>
               </a:rPr>
-              <a:t>CREATE INDEX idx_cita_vet_fecha ON cita (id_veterinario, fecha_hora);</a:t>
+              <a:t>  id_cita     INT NOT NULL,</a:t>
             </a:r>
           </a:p>
           <a:p>
@@ -16796,6 +17996,70 @@
                 </a:solidFill>
                 <a:latin typeface="Calibri"/>
               </a:rPr>
+              <a:t>  id_mascota  INT NOT NULL,</a:t>
+            </a:r>
+          </a:p>
+          <a:p>
+            <a:pPr>
+              <a:spcAft>
+                <a:spcPts val="400"/>
+              </a:spcAft>
+            </a:pPr>
+            <a:r>
+              <a:rPr sz="1400" b="0" i="0">
+                <a:solidFill>
+                  <a:srgbClr val="FFFFFF"/>
+                </a:solidFill>
+                <a:latin typeface="Calibri"/>
+              </a:rPr>
+              <a:t>  fecha_hora  TIMESTAMP NOT NULL,</a:t>
+            </a:r>
+          </a:p>
+          <a:p>
+            <a:pPr>
+              <a:spcAft>
+                <a:spcPts val="400"/>
+              </a:spcAft>
+            </a:pPr>
+            <a:r>
+              <a:rPr sz="1400" b="0" i="0">
+                <a:solidFill>
+                  <a:srgbClr val="FFFFFF"/>
+                </a:solidFill>
+                <a:latin typeface="Calibri"/>
+              </a:rPr>
+              <a:t>  estado      VARCHAR(20) NOT NULL</a:t>
+            </a:r>
+          </a:p>
+          <a:p>
+            <a:pPr>
+              <a:spcAft>
+                <a:spcPts val="400"/>
+              </a:spcAft>
+            </a:pPr>
+            <a:r>
+              <a:rPr sz="1400" b="0" i="0">
+                <a:solidFill>
+                  <a:srgbClr val="FFFFFF"/>
+                </a:solidFill>
+                <a:latin typeface="Calibri"/>
+              </a:rPr>
+              <a:t>) PARTITION BY RANGE (fecha_hora);</a:t>
+            </a:r>
+          </a:p>
+          <a:p>
+            <a:pPr>
+              <a:spcAft>
+                <a:spcPts val="400"/>
+              </a:spcAft>
+            </a:pPr>
+            <a:r>
+              <a:rPr sz="1400" b="0" i="0">
+                <a:solidFill>
+                  <a:srgbClr val="FFFFFF"/>
+                </a:solidFill>
+                <a:latin typeface="Calibri"/>
+              </a:rPr>
               <a:t/>
             </a:r>
           </a:p>
@@ -16812,7 +18076,7 @@
                 </a:solidFill>
                 <a:latin typeface="Calibri"/>
               </a:rPr>
-              <a:t>-- Sirve para:</a:t>
+              <a:t>CREATE TABLE cita_hist_2025 PARTITION OF cita_hist</a:t>
             </a:r>
           </a:p>
           <a:p>
@@ -16828,7 +18092,7 @@
                 </a:solidFill>
                 <a:latin typeface="Calibri"/>
               </a:rPr>
-              <a:t>--   WHERE id_veterinario = 3                      -&gt; si (prefijo)</a:t>
+              <a:t>  FOR VALUES FROM ('2025-01-01') TO ('2026-01-01');</a:t>
             </a:r>
           </a:p>
           <a:p>
@@ -16844,7 +18108,7 @@
                 </a:solidFill>
                 <a:latin typeface="Calibri"/>
               </a:rPr>
-              <a:t>--   WHERE id_veterinario = 3 ORDER BY fecha_hora  -&gt; si (prefijo + orden)</a:t>
+              <a:t>CREATE TABLE cita_hist_2026 PARTITION OF cita_hist</a:t>
             </a:r>
           </a:p>
           <a:p>
@@ -16860,7 +18124,7 @@
                 </a:solidFill>
                 <a:latin typeface="Calibri"/>
               </a:rPr>
-              <a:t>-- NO sirve para:</a:t>
+              <a:t>  FOR VALUES FROM ('2026-01-01') TO ('2027-01-01');</a:t>
             </a:r>
           </a:p>
           <a:p>
@@ -16876,7 +18140,7 @@
                 </a:solidFill>
                 <a:latin typeface="Calibri"/>
               </a:rPr>
-              <a:t>--   WHERE fecha_hora &gt;= ...                       -&gt; no (no es prefijo)</a:t>
+              <a:t/>
             </a:r>
           </a:p>
           <a:p>
@@ -16892,7 +18156,7 @@
                 </a:solidFill>
                 <a:latin typeface="Calibri"/>
               </a:rPr>
-              <a:t/>
+              <a:t>-- La clave de particion TIENE que estar en la PK si hay PK: la unicidad</a:t>
             </a:r>
           </a:p>
           <a:p>
@@ -16908,7 +18172,7 @@
                 </a:solidFill>
                 <a:latin typeface="Calibri"/>
               </a:rPr>
-              <a:t>-- La regla: primero la columna de IGUALDAD, despues la de RANGO u ORDEN.</a:t>
+              <a:t>-- se garantiza por particion, no entre particiones.</a:t>
             </a:r>
           </a:p>
         </p:txBody>
@@ -17089,7 +18353,7 @@
                 </a:solidFill>
                 <a:latin typeface="Calibri"/>
               </a:rPr>
-              <a:t>Particionar el historico por rango de fecha</a:t>
+              <a:t>El costo de sobre-indexar, que casi nunca se menciona</a:t>
             </a:r>
           </a:p>
         </p:txBody>
@@ -17248,7 +18512,7 @@
                 </a:solidFill>
                 <a:latin typeface="Calibri"/>
               </a:rPr>
-              <a:t>CREATE TABLE cita_hist (</a:t>
+              <a:t>-- Cada indice se ACTUALIZA en cada INSERT, UPDATE y DELETE.</a:t>
             </a:r>
           </a:p>
           <a:p>
@@ -17264,7 +18528,7 @@
                 </a:solidFill>
                 <a:latin typeface="Calibri"/>
               </a:rPr>
-              <a:t>  id_cita     INT NOT NULL,</a:t>
+              <a:t>-- Seis indices sobre cita = seis escrituras extra por cita agendada.</a:t>
             </a:r>
           </a:p>
           <a:p>
@@ -17280,7 +18544,7 @@
                 </a:solidFill>
                 <a:latin typeface="Calibri"/>
               </a:rPr>
-              <a:t>  id_mascota  INT NOT NULL,</a:t>
+              <a:t/>
             </a:r>
           </a:p>
           <a:p>
@@ -17296,7 +18560,7 @@
                 </a:solidFill>
                 <a:latin typeface="Calibri"/>
               </a:rPr>
-              <a:t>  fecha_hora  TIMESTAMP NOT NULL,</a:t>
+              <a:t>-- Que indices existen y cuanto pesan:</a:t>
             </a:r>
           </a:p>
           <a:p>
@@ -17312,7 +18576,7 @@
                 </a:solidFill>
                 <a:latin typeface="Calibri"/>
               </a:rPr>
-              <a:t>  estado      VARCHAR(20) NOT NULL</a:t>
+              <a:t>SELECT indexrelname, idx_scan, pg_size_pretty(pg_relation_size(indexrelid))</a:t>
             </a:r>
           </a:p>
           <a:p>
@@ -17328,7 +18592,7 @@
                 </a:solidFill>
                 <a:latin typeface="Calibri"/>
               </a:rPr>
-              <a:t>) PARTITION BY RANGE (fecha_hora);</a:t>
+              <a:t>FROM pg_stat_user_indexes</a:t>
             </a:r>
           </a:p>
           <a:p>
@@ -17344,6 +18608,38 @@
                 </a:solidFill>
                 <a:latin typeface="Calibri"/>
               </a:rPr>
+              <a:t>WHERE relname = 'cita'</a:t>
+            </a:r>
+          </a:p>
+          <a:p>
+            <a:pPr>
+              <a:spcAft>
+                <a:spcPts val="400"/>
+              </a:spcAft>
+            </a:pPr>
+            <a:r>
+              <a:rPr sz="1400" b="0" i="0">
+                <a:solidFill>
+                  <a:srgbClr val="FFFFFF"/>
+                </a:solidFill>
+                <a:latin typeface="Calibri"/>
+              </a:rPr>
+              <a:t>ORDER BY idx_scan;</a:t>
+            </a:r>
+          </a:p>
+          <a:p>
+            <a:pPr>
+              <a:spcAft>
+                <a:spcPts val="400"/>
+              </a:spcAft>
+            </a:pPr>
+            <a:r>
+              <a:rPr sz="1400" b="0" i="0">
+                <a:solidFill>
+                  <a:srgbClr val="FFFFFF"/>
+                </a:solidFill>
+                <a:latin typeface="Calibri"/>
+              </a:rPr>
               <a:t/>
             </a:r>
           </a:p>
@@ -17360,7 +18656,7 @@
                 </a:solidFill>
                 <a:latin typeface="Calibri"/>
               </a:rPr>
-              <a:t>CREATE TABLE cita_hist_2025 PARTITION OF cita_hist</a:t>
+              <a:t>-- idx_scan = 0 despues de dias de uso: el indice no sirve a nadie y</a:t>
             </a:r>
           </a:p>
           <a:p>
@@ -17376,87 +18672,7 @@
                 </a:solidFill>
                 <a:latin typeface="Calibri"/>
               </a:rPr>
-              <a:t>  FOR VALUES FROM ('2025-01-01') TO ('2026-01-01');</a:t>
-            </a:r>
-          </a:p>
-          <a:p>
-            <a:pPr>
-              <a:spcAft>
-                <a:spcPts val="400"/>
-              </a:spcAft>
-            </a:pPr>
-            <a:r>
-              <a:rPr sz="1400" b="0" i="0">
-                <a:solidFill>
-                  <a:srgbClr val="FFFFFF"/>
-                </a:solidFill>
-                <a:latin typeface="Calibri"/>
-              </a:rPr>
-              <a:t>CREATE TABLE cita_hist_2026 PARTITION OF cita_hist</a:t>
-            </a:r>
-          </a:p>
-          <a:p>
-            <a:pPr>
-              <a:spcAft>
-                <a:spcPts val="400"/>
-              </a:spcAft>
-            </a:pPr>
-            <a:r>
-              <a:rPr sz="1400" b="0" i="0">
-                <a:solidFill>
-                  <a:srgbClr val="FFFFFF"/>
-                </a:solidFill>
-                <a:latin typeface="Calibri"/>
-              </a:rPr>
-              <a:t>  FOR VALUES FROM ('2026-01-01') TO ('2027-01-01');</a:t>
-            </a:r>
-          </a:p>
-          <a:p>
-            <a:pPr>
-              <a:spcAft>
-                <a:spcPts val="400"/>
-              </a:spcAft>
-            </a:pPr>
-            <a:r>
-              <a:rPr sz="1400" b="0" i="0">
-                <a:solidFill>
-                  <a:srgbClr val="FFFFFF"/>
-                </a:solidFill>
-                <a:latin typeface="Calibri"/>
-              </a:rPr>
-              <a:t/>
-            </a:r>
-          </a:p>
-          <a:p>
-            <a:pPr>
-              <a:spcAft>
-                <a:spcPts val="400"/>
-              </a:spcAft>
-            </a:pPr>
-            <a:r>
-              <a:rPr sz="1400" b="0" i="0">
-                <a:solidFill>
-                  <a:srgbClr val="FFFFFF"/>
-                </a:solidFill>
-                <a:latin typeface="Calibri"/>
-              </a:rPr>
-              <a:t>-- La clave de particion TIENE que estar en la PK si hay PK: la unicidad</a:t>
-            </a:r>
-          </a:p>
-          <a:p>
-            <a:pPr>
-              <a:spcAft>
-                <a:spcPts val="400"/>
-              </a:spcAft>
-            </a:pPr>
-            <a:r>
-              <a:rPr sz="1400" b="0" i="0">
-                <a:solidFill>
-                  <a:srgbClr val="FFFFFF"/>
-                </a:solidFill>
-                <a:latin typeface="Calibri"/>
-              </a:rPr>
-              <a:t>-- se garantiza por particion, no entre particiones.</a:t>
+              <a:t>-- se esta pagando en cada escritura. Candidato a DROP INDEX.</a:t>
             </a:r>
           </a:p>
         </p:txBody>
@@ -17637,7 +18853,7 @@
                 </a:solidFill>
                 <a:latin typeface="Calibri"/>
               </a:rPr>
-              <a:t>El costo de sobre-indexar, que casi nunca se menciona</a:t>
+              <a:t>Un indice se justifica con la consulta que lo usa</a:t>
             </a:r>
           </a:p>
         </p:txBody>
@@ -17651,7 +18867,7 @@
         <p:spPr>
           <a:xfrm>
             <a:off x="457200" y="1261872"/>
-            <a:ext cx="11277295" cy="5093208"/>
+            <a:ext cx="11277295" cy="4773168"/>
           </a:xfrm>
           <a:prstGeom prst="roundRect">
             <a:avLst>
@@ -17771,7 +18987,7 @@
         <p:spPr>
           <a:xfrm>
             <a:off x="777240" y="1719072"/>
-            <a:ext cx="10637215" cy="4453128"/>
+            <a:ext cx="10637215" cy="4133087"/>
           </a:xfrm>
           <a:prstGeom prst="rect">
             <a:avLst/>
@@ -17796,7 +19012,7 @@
                 </a:solidFill>
                 <a:latin typeface="Calibri"/>
               </a:rPr>
-              <a:t>-- Cada indice se ACTUALIZA en cada INSERT, UPDATE y DELETE.</a:t>
+              <a:t>-- Consulta frecuente: la agenda del dia (siempre PROGRAMADA)</a:t>
             </a:r>
           </a:p>
           <a:p>
@@ -17812,7 +19028,7 @@
                 </a:solidFill>
                 <a:latin typeface="Calibri"/>
               </a:rPr>
-              <a:t>-- Seis indices sobre cita = seis escrituras extra por cita agendada.</a:t>
+              <a:t>SELECT ... FROM cita</a:t>
             </a:r>
           </a:p>
           <a:p>
@@ -17828,6 +19044,22 @@
                 </a:solidFill>
                 <a:latin typeface="Calibri"/>
               </a:rPr>
+              <a:t> WHERE fecha_hora &gt;= :hoy AND estado = 'PROGRAMADA';</a:t>
+            </a:r>
+          </a:p>
+          <a:p>
+            <a:pPr>
+              <a:spcAft>
+                <a:spcPts val="400"/>
+              </a:spcAft>
+            </a:pPr>
+            <a:r>
+              <a:rPr sz="1400" b="0" i="0">
+                <a:solidFill>
+                  <a:srgbClr val="FFFFFF"/>
+                </a:solidFill>
+                <a:latin typeface="Calibri"/>
+              </a:rPr>
               <a:t/>
             </a:r>
           </a:p>
@@ -17844,7 +19076,7 @@
                 </a:solidFill>
                 <a:latin typeface="Calibri"/>
               </a:rPr>
-              <a:t>-- Que indices existen y cuanto pesan:</a:t>
+              <a:t>CREATE INDEX idx_cita_fecha_hora ON cita (fecha_hora);</a:t>
             </a:r>
           </a:p>
           <a:p>
@@ -17860,7 +19092,7 @@
                 </a:solidFill>
                 <a:latin typeface="Calibri"/>
               </a:rPr>
-              <a:t>SELECT indexrelname, idx_scan, pg_size_pretty(pg_relation_size(indexrelid))</a:t>
+              <a:t>CREATE INDEX idx_cita_programada_fecha ON cita (fecha_hora)</a:t>
             </a:r>
           </a:p>
           <a:p>
@@ -17876,7 +19108,7 @@
                 </a:solidFill>
                 <a:latin typeface="Calibri"/>
               </a:rPr>
-              <a:t>FROM pg_stat_user_indexes</a:t>
+              <a:t>  WHERE estado = 'PROGRAMADA';        -- indice PARCIAL</a:t>
             </a:r>
           </a:p>
           <a:p>
@@ -17892,7 +19124,7 @@
                 </a:solidFill>
                 <a:latin typeface="Calibri"/>
               </a:rPr>
-              <a:t>WHERE relname = 'cita'</a:t>
+              <a:t/>
             </a:r>
           </a:p>
           <a:p>
@@ -17908,7 +19140,7 @@
                 </a:solidFill>
                 <a:latin typeface="Calibri"/>
               </a:rPr>
-              <a:t>ORDER BY idx_scan;</a:t>
+              <a:t>-- Mal candidato: baja cardinalidad (solo 'S' o 'N')</a:t>
             </a:r>
           </a:p>
           <a:p>
@@ -17924,39 +19156,7 @@
                 </a:solidFill>
                 <a:latin typeface="Calibri"/>
               </a:rPr>
-              <a:t/>
-            </a:r>
-          </a:p>
-          <a:p>
-            <a:pPr>
-              <a:spcAft>
-                <a:spcPts val="400"/>
-              </a:spcAft>
-            </a:pPr>
-            <a:r>
-              <a:rPr sz="1400" b="0" i="0">
-                <a:solidFill>
-                  <a:srgbClr val="FFFFFF"/>
-                </a:solidFill>
-                <a:latin typeface="Calibri"/>
-              </a:rPr>
-              <a:t>-- idx_scan = 0 despues de dias de uso: el indice no sirve a nadie y</a:t>
-            </a:r>
-          </a:p>
-          <a:p>
-            <a:pPr>
-              <a:spcAft>
-                <a:spcPts val="400"/>
-              </a:spcAft>
-            </a:pPr>
-            <a:r>
-              <a:rPr sz="1400" b="0" i="0">
-                <a:solidFill>
-                  <a:srgbClr val="FFFFFF"/>
-                </a:solidFill>
-                <a:latin typeface="Calibri"/>
-              </a:rPr>
-              <a:t>-- se esta pagando en cada escritura. Candidato a DROP INDEX.</a:t>
+              <a:t>-- CREATE INDEX idx_mascota_activa ON mascota(activa);</a:t>
             </a:r>
           </a:p>
         </p:txBody>
@@ -17964,6 +19164,41 @@
       <p:sp>
         <p:nvSpPr>
           <p:cNvPr id="9" name="TextBox 8"/>
+          <p:cNvSpPr txBox="1"/>
+          <p:nvPr/>
+        </p:nvSpPr>
+        <p:spPr>
+          <a:xfrm>
+            <a:off x="457200" y="6080760"/>
+            <a:ext cx="11277295" cy="320040"/>
+          </a:xfrm>
+          <a:prstGeom prst="rect">
+            <a:avLst/>
+          </a:prstGeom>
+          <a:noFill/>
+        </p:spPr>
+        <p:txBody>
+          <a:bodyPr wrap="square">
+            <a:spAutoFit/>
+          </a:bodyPr>
+          <a:lstStyle/>
+          <a:p>
+            <a:pPr algn="ctr"/>
+            <a:r>
+              <a:rPr sz="1200" b="0" i="1">
+                <a:solidFill>
+                  <a:srgbClr val="666666"/>
+                </a:solidFill>
+                <a:latin typeface="Calibri"/>
+              </a:rPr>
+              <a:t>Cada indice acelera lecturas y encarece INSERT/UPDATE/DELETE. El nombre es el que el plan imprime en «Index Scan using».</a:t>
+            </a:r>
+          </a:p>
+        </p:txBody>
+      </p:sp>
+      <p:sp>
+        <p:nvSpPr>
+          <p:cNvPr id="10" name="TextBox 9"/>
           <p:cNvSpPr txBox="1"/>
           <p:nvPr/>
         </p:nvSpPr>
@@ -18137,141 +19372,21 @@
                 </a:solidFill>
                 <a:latin typeface="Calibri"/>
               </a:rPr>
-              <a:t>Un indice se justifica con la consulta que lo usa</a:t>
-            </a:r>
-          </a:p>
-        </p:txBody>
-      </p:sp>
-      <p:sp>
-        <p:nvSpPr>
-          <p:cNvPr id="5" name="Rounded Rectangle 4"/>
-          <p:cNvSpPr/>
-          <p:nvPr/>
-        </p:nvSpPr>
-        <p:spPr>
-          <a:xfrm>
-            <a:off x="457200" y="1261872"/>
-            <a:ext cx="11277295" cy="4773168"/>
-          </a:xfrm>
-          <a:prstGeom prst="roundRect">
-            <a:avLst>
-              <a:gd name="adj" fmla="val 12000"/>
-            </a:avLst>
-          </a:prstGeom>
-          <a:solidFill>
-            <a:srgbClr val="1E2A38"/>
-          </a:solidFill>
-          <a:ln>
-            <a:noFill/>
-          </a:ln>
-        </p:spPr>
-        <p:style>
-          <a:lnRef idx="1">
-            <a:schemeClr val="accent1"/>
-          </a:lnRef>
-          <a:fillRef idx="3">
-            <a:schemeClr val="accent1"/>
-          </a:fillRef>
-          <a:effectRef idx="2">
-            <a:schemeClr val="accent1"/>
-          </a:effectRef>
-          <a:fontRef idx="minor">
-            <a:schemeClr val="lt1"/>
-          </a:fontRef>
-        </p:style>
-        <p:txBody>
-          <a:bodyPr rtlCol="0" anchor="ctr"/>
-          <a:lstStyle/>
-          <a:p>
-            <a:pPr algn="ctr"/>
-          </a:p>
-        </p:txBody>
-      </p:sp>
-      <p:sp>
-        <p:nvSpPr>
-          <p:cNvPr id="6" name="Rectangle 5"/>
-          <p:cNvSpPr/>
-          <p:nvPr/>
-        </p:nvSpPr>
-        <p:spPr>
-          <a:xfrm>
-            <a:off x="457200" y="1261872"/>
-            <a:ext cx="11277295" cy="320040"/>
-          </a:xfrm>
-          <a:prstGeom prst="rect">
-            <a:avLst/>
-          </a:prstGeom>
-          <a:solidFill>
-            <a:srgbClr val="095292"/>
-          </a:solidFill>
-          <a:ln>
-            <a:noFill/>
-          </a:ln>
-        </p:spPr>
-        <p:style>
-          <a:lnRef idx="1">
-            <a:schemeClr val="accent1"/>
-          </a:lnRef>
-          <a:fillRef idx="3">
-            <a:schemeClr val="accent1"/>
-          </a:fillRef>
-          <a:effectRef idx="2">
-            <a:schemeClr val="accent1"/>
-          </a:effectRef>
-          <a:fontRef idx="minor">
-            <a:schemeClr val="lt1"/>
-          </a:fontRef>
-        </p:style>
-        <p:txBody>
-          <a:bodyPr rtlCol="0" anchor="ctr"/>
-          <a:lstStyle/>
-          <a:p>
-            <a:pPr algn="ctr"/>
-          </a:p>
-        </p:txBody>
-      </p:sp>
-      <p:sp>
-        <p:nvSpPr>
-          <p:cNvPr id="7" name="TextBox 6"/>
+              <a:t>Los cinco indices de hoy, con su nombre exacto</a:t>
+            </a:r>
+          </a:p>
+        </p:txBody>
+      </p:sp>
+      <p:sp>
+        <p:nvSpPr>
+          <p:cNvPr id="5" name="TextBox 4"/>
           <p:cNvSpPr txBox="1"/>
           <p:nvPr/>
         </p:nvSpPr>
         <p:spPr>
           <a:xfrm>
-            <a:off x="685800" y="1307592"/>
-            <a:ext cx="10820095" cy="256032"/>
-          </a:xfrm>
-          <a:prstGeom prst="rect">
-            <a:avLst/>
-          </a:prstGeom>
-          <a:noFill/>
-        </p:spPr>
-        <p:txBody>
-          <a:bodyPr wrap="square" anchor="ctr"/>
-          <a:lstStyle/>
-          <a:p>
-            <a:r>
-              <a:rPr sz="1000" b="1" i="0">
-                <a:solidFill>
-                  <a:srgbClr val="269CCB"/>
-                </a:solidFill>
-                <a:latin typeface="Calibri"/>
-              </a:rPr>
-              <a:t>● ● ●</a:t>
-            </a:r>
-          </a:p>
-        </p:txBody>
-      </p:sp>
-      <p:sp>
-        <p:nvSpPr>
-          <p:cNvPr id="8" name="TextBox 7"/>
-          <p:cNvSpPr txBox="1"/>
-          <p:nvPr/>
-        </p:nvSpPr>
-        <p:spPr>
-          <a:xfrm>
-            <a:off x="777240" y="1719072"/>
-            <a:ext cx="10637215" cy="4133087"/>
+            <a:off x="457200" y="1170432"/>
+            <a:ext cx="11277295" cy="5230368"/>
           </a:xfrm>
           <a:prstGeom prst="rect">
             <a:avLst/>
@@ -18286,203 +19401,250 @@
           <a:p>
             <a:pPr>
               <a:spcAft>
-                <a:spcPts val="400"/>
-              </a:spcAft>
-            </a:pPr>
-            <a:r>
-              <a:rPr sz="1400" b="0" i="0">
-                <a:solidFill>
-                  <a:srgbClr val="FFFFFF"/>
-                </a:solidFill>
-                <a:latin typeface="Calibri"/>
-              </a:rPr>
-              <a:t>-- Consulta frecuente: la agenda del dia (siempre PROGRAMADA)</a:t>
-            </a:r>
-          </a:p>
-          <a:p>
-            <a:pPr>
-              <a:spcAft>
-                <a:spcPts val="400"/>
-              </a:spcAft>
-            </a:pPr>
-            <a:r>
-              <a:rPr sz="1400" b="0" i="0">
-                <a:solidFill>
-                  <a:srgbClr val="FFFFFF"/>
-                </a:solidFill>
-                <a:latin typeface="Calibri"/>
-              </a:rPr>
-              <a:t>SELECT ... FROM cita</a:t>
-            </a:r>
-          </a:p>
-          <a:p>
-            <a:pPr>
-              <a:spcAft>
-                <a:spcPts val="400"/>
-              </a:spcAft>
-            </a:pPr>
-            <a:r>
-              <a:rPr sz="1400" b="0" i="0">
-                <a:solidFill>
-                  <a:srgbClr val="FFFFFF"/>
-                </a:solidFill>
-                <a:latin typeface="Calibri"/>
-              </a:rPr>
-              <a:t> WHERE fecha_hora &gt;= :hoy AND estado = 'PROGRAMADA';</a:t>
-            </a:r>
-          </a:p>
-          <a:p>
-            <a:pPr>
-              <a:spcAft>
-                <a:spcPts val="400"/>
-              </a:spcAft>
-            </a:pPr>
-            <a:r>
-              <a:rPr sz="1400" b="0" i="0">
-                <a:solidFill>
-                  <a:srgbClr val="FFFFFF"/>
-                </a:solidFill>
-                <a:latin typeface="Calibri"/>
-              </a:rPr>
-              <a:t/>
-            </a:r>
-          </a:p>
-          <a:p>
-            <a:pPr>
-              <a:spcAft>
-                <a:spcPts val="400"/>
-              </a:spcAft>
-            </a:pPr>
-            <a:r>
-              <a:rPr sz="1400" b="0" i="0">
-                <a:solidFill>
-                  <a:srgbClr val="FFFFFF"/>
-                </a:solidFill>
-                <a:latin typeface="Calibri"/>
-              </a:rPr>
-              <a:t>CREATE INDEX idx_cita_fecha_hora ON cita (fecha_hora);</a:t>
-            </a:r>
-          </a:p>
-          <a:p>
-            <a:pPr>
-              <a:spcAft>
-                <a:spcPts val="400"/>
-              </a:spcAft>
-            </a:pPr>
-            <a:r>
-              <a:rPr sz="1400" b="0" i="0">
-                <a:solidFill>
-                  <a:srgbClr val="FFFFFF"/>
-                </a:solidFill>
-                <a:latin typeface="Calibri"/>
-              </a:rPr>
-              <a:t>CREATE INDEX idx_cita_programada_fecha ON cita (fecha_hora)</a:t>
-            </a:r>
-          </a:p>
-          <a:p>
-            <a:pPr>
-              <a:spcAft>
-                <a:spcPts val="400"/>
-              </a:spcAft>
-            </a:pPr>
-            <a:r>
-              <a:rPr sz="1400" b="0" i="0">
-                <a:solidFill>
-                  <a:srgbClr val="FFFFFF"/>
-                </a:solidFill>
-                <a:latin typeface="Calibri"/>
-              </a:rPr>
-              <a:t>  WHERE estado = 'PROGRAMADA';        -- indice PARCIAL</a:t>
-            </a:r>
-          </a:p>
-          <a:p>
-            <a:pPr>
-              <a:spcAft>
-                <a:spcPts val="400"/>
-              </a:spcAft>
-            </a:pPr>
-            <a:r>
-              <a:rPr sz="1400" b="0" i="0">
-                <a:solidFill>
-                  <a:srgbClr val="FFFFFF"/>
-                </a:solidFill>
-                <a:latin typeface="Calibri"/>
-              </a:rPr>
-              <a:t/>
-            </a:r>
-          </a:p>
-          <a:p>
-            <a:pPr>
-              <a:spcAft>
-                <a:spcPts val="400"/>
-              </a:spcAft>
-            </a:pPr>
-            <a:r>
-              <a:rPr sz="1400" b="0" i="0">
-                <a:solidFill>
-                  <a:srgbClr val="FFFFFF"/>
-                </a:solidFill>
-                <a:latin typeface="Calibri"/>
-              </a:rPr>
-              <a:t>-- Mal candidato: baja cardinalidad (solo 'S' o 'N')</a:t>
-            </a:r>
-          </a:p>
-          <a:p>
-            <a:pPr>
-              <a:spcAft>
-                <a:spcPts val="400"/>
-              </a:spcAft>
-            </a:pPr>
-            <a:r>
-              <a:rPr sz="1400" b="0" i="0">
-                <a:solidFill>
-                  <a:srgbClr val="FFFFFF"/>
-                </a:solidFill>
-                <a:latin typeface="Calibri"/>
-              </a:rPr>
-              <a:t>-- CREATE INDEX idx_mascota_activa ON mascota(activa);</a:t>
-            </a:r>
-          </a:p>
-        </p:txBody>
-      </p:sp>
-      <p:sp>
-        <p:nvSpPr>
-          <p:cNvPr id="9" name="TextBox 8"/>
-          <p:cNvSpPr txBox="1"/>
-          <p:nvPr/>
-        </p:nvSpPr>
-        <p:spPr>
-          <a:xfrm>
-            <a:off x="457200" y="6080760"/>
-            <a:ext cx="11277295" cy="320040"/>
-          </a:xfrm>
-          <a:prstGeom prst="rect">
-            <a:avLst/>
-          </a:prstGeom>
-          <a:noFill/>
-        </p:spPr>
-        <p:txBody>
-          <a:bodyPr wrap="square">
-            <a:spAutoFit/>
-          </a:bodyPr>
-          <a:lstStyle/>
-          <a:p>
-            <a:pPr algn="ctr"/>
-            <a:r>
-              <a:rPr sz="1200" b="0" i="1">
-                <a:solidFill>
-                  <a:srgbClr val="666666"/>
-                </a:solidFill>
-                <a:latin typeface="Calibri"/>
-              </a:rPr>
-              <a:t>Cada indice acelera lecturas y encarece INSERT/UPDATE/DELETE. El nombre se califica letra por letra.</a:t>
-            </a:r>
-          </a:p>
-        </p:txBody>
-      </p:sp>
-      <p:sp>
-        <p:nvSpPr>
-          <p:cNvPr id="10" name="TextBox 9"/>
+                <a:spcPts val="800"/>
+              </a:spcAft>
+            </a:pPr>
+            <a:r>
+              <a:rPr sz="2000" b="0" i="0">
+                <a:solidFill>
+                  <a:srgbClr val="333333"/>
+                </a:solidFill>
+                <a:latin typeface="Calibri"/>
+              </a:rPr>
+              <a:t>–   </a:t>
+            </a:r>
+            <a:r>
+              <a:rPr sz="2000" b="1" i="0">
+                <a:solidFill>
+                  <a:srgbClr val="333333"/>
+                </a:solidFill>
+                <a:latin typeface="Calibri"/>
+              </a:rPr>
+              <a:t>«idx_cita_fecha» no es ninguno de los cinco</a:t>
+            </a:r>
+            <a:r>
+              <a:rPr sz="2000" b="0" i="0">
+                <a:solidFill>
+                  <a:srgbClr val="333333"/>
+                </a:solidFill>
+                <a:latin typeface="Calibri"/>
+              </a:rPr>
+              <a:t>: el sufijo es «_fecha_hora», como la columna.</a:t>
+            </a:r>
+          </a:p>
+          <a:p>
+            <a:pPr>
+              <a:spcAft>
+                <a:spcPts val="800"/>
+              </a:spcAft>
+            </a:pPr>
+            <a:r>
+              <a:rPr sz="2000" b="0" i="0">
+                <a:solidFill>
+                  <a:srgbClr val="333333"/>
+                </a:solidFill>
+                <a:latin typeface="Calibri"/>
+              </a:rPr>
+              <a:t>–   </a:t>
+            </a:r>
+            <a:r>
+              <a:rPr sz="2000" b="1" i="0">
+                <a:solidFill>
+                  <a:srgbClr val="333333"/>
+                </a:solidFill>
+                <a:latin typeface="Calibri"/>
+              </a:rPr>
+              <a:t>Simple o compuesto.</a:t>
+            </a:r>
+            <a:r>
+              <a:rPr sz="2000" b="0" i="0">
+                <a:solidFill>
+                  <a:srgbClr val="333333"/>
+                </a:solidFill>
+                <a:latin typeface="Calibri"/>
+              </a:rPr>
+              <a:t> Los tres primeros son de una columna; los dos ultimos llevan las mismas dos columnas </a:t>
+            </a:r>
+            <a:r>
+              <a:rPr sz="2000" b="1" i="0">
+                <a:solidFill>
+                  <a:srgbClr val="333333"/>
+                </a:solidFill>
+                <a:latin typeface="Calibri"/>
+              </a:rPr>
+              <a:t>en orden inverso</a:t>
+            </a:r>
+            <a:r>
+              <a:rPr sz="2000" b="0" i="0">
+                <a:solidFill>
+                  <a:srgbClr val="333333"/>
+                </a:solidFill>
+                <a:latin typeface="Calibri"/>
+              </a:rPr>
+              <a:t>, y existen precisamente para que se vea que el orden cambia el resultado.</a:t>
+            </a:r>
+          </a:p>
+          <a:p>
+            <a:pPr>
+              <a:spcAft>
+                <a:spcPts val="800"/>
+              </a:spcAft>
+            </a:pPr>
+            <a:r>
+              <a:rPr sz="2000" b="0" i="0">
+                <a:solidFill>
+                  <a:srgbClr val="333333"/>
+                </a:solidFill>
+                <a:latin typeface="Calibri"/>
+              </a:rPr>
+              <a:t>–   </a:t>
+            </a:r>
+            <a:r>
+              <a:rPr sz="2000" b="1" i="0">
+                <a:solidFill>
+                  <a:srgbClr val="333333"/>
+                </a:solidFill>
+                <a:latin typeface="Calibri"/>
+              </a:rPr>
+              <a:t>La secuencia que hay que respetar.</a:t>
+            </a:r>
+            <a:r>
+              <a:rPr sz="2000" b="0" i="0">
+                <a:solidFill>
+                  <a:srgbClr val="333333"/>
+                </a:solidFill>
+                <a:latin typeface="Calibri"/>
+              </a:rPr>
+              <a:t> «EXPLAIN ANALYZE» </a:t>
+            </a:r>
+            <a:r>
+              <a:rPr sz="2000" b="1" i="0">
+                <a:solidFill>
+                  <a:srgbClr val="333333"/>
+                </a:solidFill>
+                <a:latin typeface="Calibri"/>
+              </a:rPr>
+              <a:t>antes</a:t>
+            </a:r>
+            <a:r>
+              <a:rPr sz="2000" b="0" i="0">
+                <a:solidFill>
+                  <a:srgbClr val="333333"/>
+                </a:solidFill>
+                <a:latin typeface="Calibri"/>
+              </a:rPr>
+              <a:t> (tiene que salir «Seq Scan») -&gt; «CREATE INDEX» -&gt; </a:t>
+            </a:r>
+            <a:r>
+              <a:rPr sz="2000" b="1" i="0">
+                <a:solidFill>
+                  <a:srgbClr val="333333"/>
+                </a:solidFill>
+                <a:latin typeface="Calibri"/>
+              </a:rPr>
+              <a:t>«ANALYZE cita;»</a:t>
+            </a:r>
+            <a:r>
+              <a:rPr sz="2000" b="0" i="0">
+                <a:solidFill>
+                  <a:srgbClr val="333333"/>
+                </a:solidFill>
+                <a:latin typeface="Calibri"/>
+              </a:rPr>
+              <a:t> -&gt; el mismo «EXPLAIN» otra vez. Sin el «ANALYZE» intermedio el planeador sigue con las estadisticas viejas y puede ignorar el indice que acabas de crear: la mitad de los «no me sirvio» de la clase son este paso saltado.</a:t>
+            </a:r>
+          </a:p>
+          <a:p>
+            <a:pPr>
+              <a:spcAft>
+                <a:spcPts val="800"/>
+              </a:spcAft>
+            </a:pPr>
+            <a:r>
+              <a:rPr sz="2000" b="0" i="0">
+                <a:solidFill>
+                  <a:srgbClr val="333333"/>
+                </a:solidFill>
+                <a:latin typeface="Calibri"/>
+              </a:rPr>
+              <a:t>–   </a:t>
+            </a:r>
+            <a:r>
+              <a:rPr sz="2000" b="1" i="0">
+                <a:solidFill>
+                  <a:srgbClr val="333333"/>
+                </a:solidFill>
+                <a:latin typeface="Calibri"/>
+              </a:rPr>
+              <a:t>La evidencia de que existen.</a:t>
+            </a:r>
+            <a:r>
+              <a:rPr sz="2000" b="0" i="0">
+                <a:solidFill>
+                  <a:srgbClr val="333333"/>
+                </a:solidFill>
+                <a:latin typeface="Calibri"/>
+              </a:rPr>
+              <a:t> «SELECT indexname, tablename, indexdef FROM pg_indexes WHERE tablename IN ('cita','mascota') ORDER BY tablename, indexname;» — «indexdef» devuelve el «CREATE INDEX» completo, asi que ahi se ve tambien el «WHERE» del parcial.</a:t>
+            </a:r>
+          </a:p>
+          <a:p>
+            <a:pPr>
+              <a:spcAft>
+                <a:spcPts val="800"/>
+              </a:spcAft>
+            </a:pPr>
+            <a:r>
+              <a:rPr sz="2000" b="0" i="0">
+                <a:solidFill>
+                  <a:srgbClr val="333333"/>
+                </a:solidFill>
+                <a:latin typeface="Calibri"/>
+              </a:rPr>
+              <a:t>–   </a:t>
+            </a:r>
+            <a:r>
+              <a:rPr sz="2000" b="1" i="0">
+                <a:solidFill>
+                  <a:srgbClr val="333333"/>
+                </a:solidFill>
+                <a:latin typeface="Calibri"/>
+              </a:rPr>
+              <a:t>Y el experimento del orden.</a:t>
+            </a:r>
+            <a:r>
+              <a:rPr sz="2000" b="0" i="0">
+                <a:solidFill>
+                  <a:srgbClr val="333333"/>
+                </a:solidFill>
+                <a:latin typeface="Calibri"/>
+              </a:rPr>
+              <a:t> Con los dos compuestos creados se miden tres consultas: estado + rango de fecha, solo rango, solo estado. Despues se hace «DROP INDEX idx_cita_fecha_estado» y se vuelve a medir la del rango solo. </a:t>
+            </a:r>
+            <a:r>
+              <a:rPr sz="2000" b="1" i="0">
+                <a:solidFill>
+                  <a:srgbClr val="333333"/>
+                </a:solidFill>
+                <a:latin typeface="Calibri"/>
+              </a:rPr>
+              <a:t>La columna de igualdad va primero y la de rango al final</a:t>
+            </a:r>
+            <a:r>
+              <a:rPr sz="2000" b="0" i="0">
+                <a:solidFill>
+                  <a:srgbClr val="333333"/>
+                </a:solidFill>
+                <a:latin typeface="Calibri"/>
+              </a:rPr>
+              <a:t>; un indice cuya columna lider no aparece en el «WHERE» normalmente no se usa.</a:t>
+            </a:r>
+          </a:p>
+        </p:txBody>
+      </p:sp>
+      <p:sp>
+        <p:nvSpPr>
+          <p:cNvPr id="6" name="TextBox 5"/>
           <p:cNvSpPr txBox="1"/>
           <p:nvPr/>
         </p:nvSpPr>
@@ -18550,7 +19712,7 @@
         <p:spPr>
           <a:xfrm>
             <a:off x="0" y="0"/>
-            <a:ext cx="12191695" cy="1170432"/>
+            <a:ext cx="12191695" cy="960120"/>
           </a:xfrm>
           <a:prstGeom prst="rect">
             <a:avLst/>
@@ -18592,7 +19754,7 @@
         </p:nvSpPr>
         <p:spPr>
           <a:xfrm>
-            <a:off x="0" y="1170432"/>
+            <a:off x="0" y="960120"/>
             <a:ext cx="12191695" cy="41148"/>
           </a:xfrm>
           <a:prstGeom prst="rect">
@@ -18636,7 +19798,7 @@
         <p:spPr>
           <a:xfrm>
             <a:off x="457200" y="164592"/>
-            <a:ext cx="11277295" cy="384048"/>
+            <a:ext cx="11277295" cy="502920"/>
           </a:xfrm>
           <a:prstGeom prst="rect">
             <a:avLst/>
@@ -18656,7 +19818,7 @@
                 </a:solidFill>
                 <a:latin typeface="Calibri"/>
               </a:rPr>
-              <a:t>Los cinco indices de hoy, con su nombre exacto</a:t>
+              <a:t>El indice parcial: el mismo beneficio, una fraccion del tamano</a:t>
             </a:r>
           </a:p>
         </p:txBody>
@@ -18669,8 +19831,8 @@
         </p:nvSpPr>
         <p:spPr>
           <a:xfrm>
-            <a:off x="457200" y="566928"/>
-            <a:ext cx="11277295" cy="411480"/>
+            <a:off x="457200" y="1170432"/>
+            <a:ext cx="11277295" cy="5230368"/>
           </a:xfrm>
           <a:prstGeom prst="rect">
             <a:avLst/>
@@ -18683,14 +19845,299 @@
           </a:bodyPr>
           <a:lstStyle/>
           <a:p>
-            <a:r>
-              <a:rPr sz="1400" b="0" i="0">
-                <a:solidFill>
-                  <a:srgbClr val="B8D8EE"/>
-                </a:solidFill>
-                <a:latin typeface="Calibri"/>
-              </a:rPr>
-              <a:t>Preguntas 1 y 2 del taller — 50 de los 100 puntos — y los nombres son los que se escriben en la plantilla del entregable</a:t>
+            <a:pPr>
+              <a:spcAft>
+                <a:spcPts val="800"/>
+              </a:spcAft>
+            </a:pPr>
+            <a:r>
+              <a:rPr sz="2000" b="0" i="0">
+                <a:solidFill>
+                  <a:srgbClr val="333333"/>
+                </a:solidFill>
+                <a:latin typeface="Calibri"/>
+              </a:rPr>
+              <a:t>–   </a:t>
+            </a:r>
+            <a:r>
+              <a:rPr sz="2000" b="1" i="0">
+                <a:solidFill>
+                  <a:srgbClr val="333333"/>
+                </a:solidFill>
+                <a:latin typeface="Calibri"/>
+              </a:rPr>
+              <a:t>Que es.</a:t>
+            </a:r>
+            <a:r>
+              <a:rPr sz="2000" b="0" i="0">
+                <a:solidFill>
+                  <a:srgbClr val="333333"/>
+                </a:solidFill>
+                <a:latin typeface="Calibri"/>
+              </a:rPr>
+              <a:t> Un indice que solo contiene las filas que cumplen una condicion: «CREATE INDEX idx_cita_programada_fecha ON cita (fecha_hora) WHERE estado = 'PROGRAMADA';». El «WHERE» no es el de la consulta: es </a:t>
+            </a:r>
+            <a:r>
+              <a:rPr sz="2000" b="1" i="0">
+                <a:solidFill>
+                  <a:srgbClr val="333333"/>
+                </a:solidFill>
+                <a:latin typeface="Calibri"/>
+              </a:rPr>
+              <a:t>parte de la definicion del indice</a:t>
+            </a:r>
+            <a:r>
+              <a:rPr sz="2000" b="0" i="0">
+                <a:solidFill>
+                  <a:srgbClr val="333333"/>
+                </a:solidFill>
+                <a:latin typeface="Calibri"/>
+              </a:rPr>
+              <a:t> y decide que filas entran en el arbol.</a:t>
+            </a:r>
+          </a:p>
+          <a:p>
+            <a:pPr>
+              <a:spcAft>
+                <a:spcPts val="800"/>
+              </a:spcAft>
+            </a:pPr>
+            <a:r>
+              <a:rPr sz="2000" b="0" i="0">
+                <a:solidFill>
+                  <a:srgbClr val="333333"/>
+                </a:solidFill>
+                <a:latin typeface="Calibri"/>
+              </a:rPr>
+              <a:t>–   </a:t>
+            </a:r>
+            <a:r>
+              <a:rPr sz="2000" b="1" i="0">
+                <a:solidFill>
+                  <a:srgbClr val="333333"/>
+                </a:solidFill>
+                <a:latin typeface="Calibri"/>
+              </a:rPr>
+              <a:t>Cuanto se ahorra, con los datos de hoy.</a:t>
+            </a:r>
+            <a:r>
+              <a:rPr sz="2000" b="0" i="0">
+                <a:solidFill>
+                  <a:srgbClr val="333333"/>
+                </a:solidFill>
+                <a:latin typeface="Calibri"/>
+              </a:rPr>
+              <a:t> De las 30.010 citas sembradas, </a:t>
+            </a:r>
+            <a:r>
+              <a:rPr sz="2000" b="1" i="0">
+                <a:solidFill>
+                  <a:srgbClr val="333333"/>
+                </a:solidFill>
+                <a:latin typeface="Calibri"/>
+              </a:rPr>
+              <a:t>18.187</a:t>
+            </a:r>
+            <a:r>
+              <a:rPr sz="2000" b="0" i="0">
+                <a:solidFill>
+                  <a:srgbClr val="333333"/>
+                </a:solidFill>
+                <a:latin typeface="Calibri"/>
+              </a:rPr>
+              <a:t> estan «PROGRAMADA» (el 61 %): el indice completo indexa 30.010 entradas y el parcial 18.187, cuatro de cada diez menos. Menos entradas es menos disco, menos cache ocupada y menos trabajo en cada escritura de una cita </a:t>
+            </a:r>
+            <a:r>
+              <a:rPr sz="2000" b="1" i="0">
+                <a:solidFill>
+                  <a:srgbClr val="333333"/>
+                </a:solidFill>
+                <a:latin typeface="Calibri"/>
+              </a:rPr>
+              <a:t>que no este programada</a:t>
+            </a:r>
+            <a:r>
+              <a:rPr sz="2000" b="0" i="0">
+                <a:solidFill>
+                  <a:srgbClr val="333333"/>
+                </a:solidFill>
+                <a:latin typeface="Calibri"/>
+              </a:rPr>
+              <a:t>.</a:t>
+            </a:r>
+          </a:p>
+          <a:p>
+            <a:pPr>
+              <a:spcAft>
+                <a:spcPts val="800"/>
+              </a:spcAft>
+            </a:pPr>
+            <a:r>
+              <a:rPr sz="2000" b="0" i="0">
+                <a:solidFill>
+                  <a:srgbClr val="333333"/>
+                </a:solidFill>
+                <a:latin typeface="Calibri"/>
+              </a:rPr>
+              <a:t>–   </a:t>
+            </a:r>
+            <a:r>
+              <a:rPr sz="2000" b="1" i="0">
+                <a:solidFill>
+                  <a:srgbClr val="333333"/>
+                </a:solidFill>
+                <a:latin typeface="Calibri"/>
+              </a:rPr>
+              <a:t>La condicion para que sirva.</a:t>
+            </a:r>
+            <a:r>
+              <a:rPr sz="2000" b="0" i="0">
+                <a:solidFill>
+                  <a:srgbClr val="333333"/>
+                </a:solidFill>
+                <a:latin typeface="Calibri"/>
+              </a:rPr>
+              <a:t> El planeador solo lo usa si puede demostrar que la consulta </a:t>
+            </a:r>
+            <a:r>
+              <a:rPr sz="2000" b="1" i="0">
+                <a:solidFill>
+                  <a:srgbClr val="333333"/>
+                </a:solidFill>
+                <a:latin typeface="Calibri"/>
+              </a:rPr>
+              <a:t>trae la misma condicion</a:t>
+            </a:r>
+            <a:r>
+              <a:rPr sz="2000" b="0" i="0">
+                <a:solidFill>
+                  <a:srgbClr val="333333"/>
+                </a:solidFill>
+                <a:latin typeface="Calibri"/>
+              </a:rPr>
+              <a:t> del indice. «WHERE estado = 'PROGRAMADA' AND fecha_hora &gt;= ...» si lo aprovecha; la misma consulta sin el filtro de estado </a:t>
+            </a:r>
+            <a:r>
+              <a:rPr sz="2000" b="1" i="0">
+                <a:solidFill>
+                  <a:srgbClr val="333333"/>
+                </a:solidFill>
+                <a:latin typeface="Calibri"/>
+              </a:rPr>
+              <a:t>no</a:t>
+            </a:r>
+            <a:r>
+              <a:rPr sz="2000" b="0" i="0">
+                <a:solidFill>
+                  <a:srgbClr val="333333"/>
+                </a:solidFill>
+                <a:latin typeface="Calibri"/>
+              </a:rPr>
+              <a:t>, porque el indice no contiene las filas atendidas ni las canceladas.</a:t>
+            </a:r>
+          </a:p>
+          <a:p>
+            <a:pPr>
+              <a:spcAft>
+                <a:spcPts val="800"/>
+              </a:spcAft>
+            </a:pPr>
+            <a:r>
+              <a:rPr sz="2000" b="0" i="0">
+                <a:solidFill>
+                  <a:srgbClr val="333333"/>
+                </a:solidFill>
+                <a:latin typeface="Calibri"/>
+              </a:rPr>
+              <a:t>–   </a:t>
+            </a:r>
+            <a:r>
+              <a:rPr sz="2000" b="1" i="0">
+                <a:solidFill>
+                  <a:srgbClr val="333333"/>
+                </a:solidFill>
+                <a:latin typeface="Calibri"/>
+              </a:rPr>
+              <a:t>El caso de VetCare que lo justifica.</a:t>
+            </a:r>
+            <a:r>
+              <a:rPr sz="2000" b="0" i="0">
+                <a:solidFill>
+                  <a:srgbClr val="333333"/>
+                </a:solidFill>
+                <a:latin typeface="Calibri"/>
+              </a:rPr>
+              <a:t> La agenda del dia de la recepcion </a:t>
+            </a:r>
+            <a:r>
+              <a:rPr sz="2000" b="1" i="0">
+                <a:solidFill>
+                  <a:srgbClr val="333333"/>
+                </a:solidFill>
+                <a:latin typeface="Calibri"/>
+              </a:rPr>
+              <a:t>siempre</a:t>
+            </a:r>
+            <a:r>
+              <a:rPr sz="2000" b="0" i="0">
+                <a:solidFill>
+                  <a:srgbClr val="333333"/>
+                </a:solidFill>
+                <a:latin typeface="Calibri"/>
+              </a:rPr>
+              <a:t> filtra por «PROGRAMADA»: nadie abre la pantalla para ver las citas que ya se atendieron. Cuando el filtro es parte del caso de uso y no del capricho de una consulta, el parcial es la respuesta correcta.</a:t>
+            </a:r>
+          </a:p>
+          <a:p>
+            <a:pPr>
+              <a:spcAft>
+                <a:spcPts val="800"/>
+              </a:spcAft>
+            </a:pPr>
+            <a:r>
+              <a:rPr sz="2000" b="0" i="0">
+                <a:solidFill>
+                  <a:srgbClr val="333333"/>
+                </a:solidFill>
+                <a:latin typeface="Calibri"/>
+              </a:rPr>
+              <a:t>–   </a:t>
+            </a:r>
+            <a:r>
+              <a:rPr sz="2000" b="1" i="0">
+                <a:solidFill>
+                  <a:srgbClr val="333333"/>
+                </a:solidFill>
+                <a:latin typeface="Calibri"/>
+              </a:rPr>
+              <a:t>Cual de los dos elige.</a:t>
+            </a:r>
+            <a:r>
+              <a:rPr sz="2000" b="0" i="0">
+                <a:solidFill>
+                  <a:srgbClr val="333333"/>
+                </a:solidFill>
+                <a:latin typeface="Calibri"/>
+              </a:rPr>
+              <a:t> Con «idx_cita_fecha_hora» y «idx_cita_programada_fecha» compitiendo por la misma consulta, el plan nombra al ganador: hay que leer el «Index Scan using ...» y </a:t>
+            </a:r>
+            <a:r>
+              <a:rPr sz="2000" b="1" i="0">
+                <a:solidFill>
+                  <a:srgbClr val="333333"/>
+                </a:solidFill>
+                <a:latin typeface="Calibri"/>
+              </a:rPr>
+              <a:t>escribir cual salio</a:t>
+            </a:r>
+            <a:r>
+              <a:rPr sz="2000" b="0" i="0">
+                <a:solidFill>
+                  <a:srgbClr val="333333"/>
+                </a:solidFill>
+                <a:latin typeface="Calibri"/>
+              </a:rPr>
+              <a:t>.</a:t>
             </a:r>
           </a:p>
         </p:txBody>
@@ -18698,289 +20145,6 @@
       <p:sp>
         <p:nvSpPr>
           <p:cNvPr id="6" name="TextBox 5"/>
-          <p:cNvSpPr txBox="1"/>
-          <p:nvPr/>
-        </p:nvSpPr>
-        <p:spPr>
-          <a:xfrm>
-            <a:off x="457200" y="1380744"/>
-            <a:ext cx="11277295" cy="5020056"/>
-          </a:xfrm>
-          <a:prstGeom prst="rect">
-            <a:avLst/>
-          </a:prstGeom>
-          <a:noFill/>
-        </p:spPr>
-        <p:txBody>
-          <a:bodyPr wrap="square">
-            <a:spAutoFit/>
-          </a:bodyPr>
-          <a:lstStyle/>
-          <a:p>
-            <a:pPr>
-              <a:spcAft>
-                <a:spcPts val="800"/>
-              </a:spcAft>
-            </a:pPr>
-            <a:r>
-              <a:rPr sz="1800" b="0" i="0">
-                <a:solidFill>
-                  <a:srgbClr val="333333"/>
-                </a:solidFill>
-                <a:latin typeface="Calibri"/>
-              </a:rPr>
-              <a:t>–   </a:t>
-            </a:r>
-            <a:r>
-              <a:rPr sz="1800" b="1" i="0">
-                <a:solidFill>
-                  <a:srgbClr val="333333"/>
-                </a:solidFill>
-                <a:latin typeface="Calibri"/>
-              </a:rPr>
-              <a:t>El nombre se califica.</a:t>
-            </a:r>
-            <a:r>
-              <a:rPr sz="1800" b="0" i="0">
-                <a:solidFill>
-                  <a:srgbClr val="333333"/>
-                </a:solidFill>
-                <a:latin typeface="Calibri"/>
-              </a:rPr>
-              <a:t> La actividad dice «nombres exactos» y los compara letra por letra: «idx_cita_fecha_hora», «idx_mascota_dueno», «idx_cita_programada_fecha» en la pregunta 1, y «idx_cita_estado_fecha» + «idx_cita_fecha_estado» en la 2. </a:t>
-            </a:r>
-            <a:r>
-              <a:rPr sz="1800" b="1" i="0">
-                <a:solidFill>
-                  <a:srgbClr val="333333"/>
-                </a:solidFill>
-                <a:latin typeface="Calibri"/>
-              </a:rPr>
-              <a:t>«idx_cita_fecha» no es ninguno de los cinco</a:t>
-            </a:r>
-            <a:r>
-              <a:rPr sz="1800" b="0" i="0">
-                <a:solidFill>
-                  <a:srgbClr val="333333"/>
-                </a:solidFill>
-                <a:latin typeface="Calibri"/>
-              </a:rPr>
-              <a:t>: el sufijo es «_fecha_hora», como la columna.</a:t>
-            </a:r>
-          </a:p>
-          <a:p>
-            <a:pPr>
-              <a:spcAft>
-                <a:spcPts val="800"/>
-              </a:spcAft>
-            </a:pPr>
-            <a:r>
-              <a:rPr sz="1800" b="0" i="0">
-                <a:solidFill>
-                  <a:srgbClr val="333333"/>
-                </a:solidFill>
-                <a:latin typeface="Calibri"/>
-              </a:rPr>
-              <a:t>–   </a:t>
-            </a:r>
-            <a:r>
-              <a:rPr sz="1800" b="1" i="0">
-                <a:solidFill>
-                  <a:srgbClr val="333333"/>
-                </a:solidFill>
-                <a:latin typeface="Calibri"/>
-              </a:rPr>
-              <a:t>Simple o compuesto.</a:t>
-            </a:r>
-            <a:r>
-              <a:rPr sz="1800" b="0" i="0">
-                <a:solidFill>
-                  <a:srgbClr val="333333"/>
-                </a:solidFill>
-                <a:latin typeface="Calibri"/>
-              </a:rPr>
-              <a:t> Los tres primeros son de una columna; los dos ultimos llevan las mismas dos columnas </a:t>
-            </a:r>
-            <a:r>
-              <a:rPr sz="1800" b="1" i="0">
-                <a:solidFill>
-                  <a:srgbClr val="333333"/>
-                </a:solidFill>
-                <a:latin typeface="Calibri"/>
-              </a:rPr>
-              <a:t>en orden inverso</a:t>
-            </a:r>
-            <a:r>
-              <a:rPr sz="1800" b="0" i="0">
-                <a:solidFill>
-                  <a:srgbClr val="333333"/>
-                </a:solidFill>
-                <a:latin typeface="Calibri"/>
-              </a:rPr>
-              <a:t>, y existen precisamente para que se vea que el orden cambia el resultado.</a:t>
-            </a:r>
-          </a:p>
-          <a:p>
-            <a:pPr>
-              <a:spcAft>
-                <a:spcPts val="800"/>
-              </a:spcAft>
-            </a:pPr>
-            <a:r>
-              <a:rPr sz="1800" b="0" i="0">
-                <a:solidFill>
-                  <a:srgbClr val="333333"/>
-                </a:solidFill>
-                <a:latin typeface="Calibri"/>
-              </a:rPr>
-              <a:t>–   </a:t>
-            </a:r>
-            <a:r>
-              <a:rPr sz="1800" b="1" i="0">
-                <a:solidFill>
-                  <a:srgbClr val="333333"/>
-                </a:solidFill>
-                <a:latin typeface="Calibri"/>
-              </a:rPr>
-              <a:t>La secuencia que hay que respetar.</a:t>
-            </a:r>
-            <a:r>
-              <a:rPr sz="1800" b="0" i="0">
-                <a:solidFill>
-                  <a:srgbClr val="333333"/>
-                </a:solidFill>
-                <a:latin typeface="Calibri"/>
-              </a:rPr>
-              <a:t> «EXPLAIN ANALYZE» </a:t>
-            </a:r>
-            <a:r>
-              <a:rPr sz="1800" b="1" i="0">
-                <a:solidFill>
-                  <a:srgbClr val="333333"/>
-                </a:solidFill>
-                <a:latin typeface="Calibri"/>
-              </a:rPr>
-              <a:t>antes</a:t>
-            </a:r>
-            <a:r>
-              <a:rPr sz="1800" b="0" i="0">
-                <a:solidFill>
-                  <a:srgbClr val="333333"/>
-                </a:solidFill>
-                <a:latin typeface="Calibri"/>
-              </a:rPr>
-              <a:t> (tiene que salir «Seq Scan») -&gt; «CREATE INDEX» -&gt; </a:t>
-            </a:r>
-            <a:r>
-              <a:rPr sz="1800" b="1" i="0">
-                <a:solidFill>
-                  <a:srgbClr val="333333"/>
-                </a:solidFill>
-                <a:latin typeface="Calibri"/>
-              </a:rPr>
-              <a:t>«ANALYZE cita;»</a:t>
-            </a:r>
-            <a:r>
-              <a:rPr sz="1800" b="0" i="0">
-                <a:solidFill>
-                  <a:srgbClr val="333333"/>
-                </a:solidFill>
-                <a:latin typeface="Calibri"/>
-              </a:rPr>
-              <a:t> -&gt; el mismo «EXPLAIN» otra vez. Sin el «ANALYZE» intermedio el planeador sigue con las estadisticas viejas y puede ignorar el indice que acabas de crear: la mitad de los «no me sirvio» del taller son este paso saltado.</a:t>
-            </a:r>
-          </a:p>
-          <a:p>
-            <a:pPr>
-              <a:spcAft>
-                <a:spcPts val="800"/>
-              </a:spcAft>
-            </a:pPr>
-            <a:r>
-              <a:rPr sz="1800" b="0" i="0">
-                <a:solidFill>
-                  <a:srgbClr val="333333"/>
-                </a:solidFill>
-                <a:latin typeface="Calibri"/>
-              </a:rPr>
-              <a:t>–   </a:t>
-            </a:r>
-            <a:r>
-              <a:rPr sz="1800" b="1" i="0">
-                <a:solidFill>
-                  <a:srgbClr val="333333"/>
-                </a:solidFill>
-                <a:latin typeface="Calibri"/>
-              </a:rPr>
-              <a:t>La evidencia de que existen.</a:t>
-            </a:r>
-            <a:r>
-              <a:rPr sz="1800" b="0" i="0">
-                <a:solidFill>
-                  <a:srgbClr val="333333"/>
-                </a:solidFill>
-                <a:latin typeface="Calibri"/>
-              </a:rPr>
-              <a:t> «SELECT indexname, tablename, indexdef FROM pg_indexes WHERE tablename IN ('cita','mascota') ORDER BY tablename, indexname;» — «indexdef» devuelve el «CREATE INDEX» completo, asi que ahi se ve tambien el «WHERE» del parcial.</a:t>
-            </a:r>
-          </a:p>
-          <a:p>
-            <a:pPr>
-              <a:spcAft>
-                <a:spcPts val="800"/>
-              </a:spcAft>
-            </a:pPr>
-            <a:r>
-              <a:rPr sz="1800" b="0" i="0">
-                <a:solidFill>
-                  <a:srgbClr val="333333"/>
-                </a:solidFill>
-                <a:latin typeface="Calibri"/>
-              </a:rPr>
-              <a:t>–   </a:t>
-            </a:r>
-            <a:r>
-              <a:rPr sz="1800" b="1" i="0">
-                <a:solidFill>
-                  <a:srgbClr val="333333"/>
-                </a:solidFill>
-                <a:latin typeface="Calibri"/>
-              </a:rPr>
-              <a:t>Y el experimento del orden.</a:t>
-            </a:r>
-            <a:r>
-              <a:rPr sz="1800" b="0" i="0">
-                <a:solidFill>
-                  <a:srgbClr val="333333"/>
-                </a:solidFill>
-                <a:latin typeface="Calibri"/>
-              </a:rPr>
-              <a:t> Con los dos compuestos creados se miden tres consultas: estado + rango de fecha, solo rango, solo estado. Despues se hace «DROP INDEX idx_cita_fecha_estado» y se vuelve a medir la del rango solo. </a:t>
-            </a:r>
-            <a:r>
-              <a:rPr sz="1800" b="1" i="0">
-                <a:solidFill>
-                  <a:srgbClr val="333333"/>
-                </a:solidFill>
-                <a:latin typeface="Calibri"/>
-              </a:rPr>
-              <a:t>La columna de igualdad va primero y la de rango al final</a:t>
-            </a:r>
-            <a:r>
-              <a:rPr sz="1800" b="0" i="0">
-                <a:solidFill>
-                  <a:srgbClr val="333333"/>
-                </a:solidFill>
-                <a:latin typeface="Calibri"/>
-              </a:rPr>
-              <a:t>; un indice cuya columna lider no aparece en el «WHERE» normalmente no se usa.</a:t>
-            </a:r>
-          </a:p>
-        </p:txBody>
-      </p:sp>
-      <p:sp>
-        <p:nvSpPr>
-          <p:cNvPr id="7" name="TextBox 6"/>
           <p:cNvSpPr txBox="1"/>
           <p:nvPr/>
         </p:nvSpPr>
@@ -19316,7 +20480,7 @@
         <p:spPr>
           <a:xfrm>
             <a:off x="0" y="0"/>
-            <a:ext cx="12191695" cy="1170432"/>
+            <a:ext cx="12191695" cy="960120"/>
           </a:xfrm>
           <a:prstGeom prst="rect">
             <a:avLst/>
@@ -19358,7 +20522,7 @@
         </p:nvSpPr>
         <p:spPr>
           <a:xfrm>
-            <a:off x="0" y="1170432"/>
+            <a:off x="0" y="960120"/>
             <a:ext cx="12191695" cy="41148"/>
           </a:xfrm>
           <a:prstGeom prst="rect">
@@ -19402,7 +20566,7 @@
         <p:spPr>
           <a:xfrm>
             <a:off x="457200" y="164592"/>
-            <a:ext cx="11277295" cy="384048"/>
+            <a:ext cx="11277295" cy="502920"/>
           </a:xfrm>
           <a:prstGeom prst="rect">
             <a:avLst/>
@@ -19422,7 +20586,7 @@
                 </a:solidFill>
                 <a:latin typeface="Calibri"/>
               </a:rPr>
-              <a:t>El indice parcial: el mismo beneficio, una fraccion del tamano</a:t>
+              <a:t>Particionar hoy de verdad: rango por ano, poda y archivado</a:t>
             </a:r>
           </a:p>
         </p:txBody>
@@ -19435,8 +20599,8 @@
         </p:nvSpPr>
         <p:spPr>
           <a:xfrm>
-            <a:off x="457200" y="566928"/>
-            <a:ext cx="11277295" cy="411480"/>
+            <a:off x="457200" y="1170432"/>
+            <a:ext cx="11277295" cy="5230368"/>
           </a:xfrm>
           <a:prstGeom prst="rect">
             <a:avLst/>
@@ -19449,14 +20613,281 @@
           </a:bodyPr>
           <a:lstStyle/>
           <a:p>
-            <a:r>
-              <a:rPr sz="1400" b="0" i="0">
-                <a:solidFill>
-                  <a:srgbClr val="B8D8EE"/>
-                </a:solidFill>
-                <a:latin typeface="Calibri"/>
-              </a:rPr>
-              <a:t>La pregunta 1 lo exige por nombre y su rubrica descuenta si falta; la pregunta 4 lo vuelve a cobrar como afirmacion correcta</a:t>
+            <a:pPr>
+              <a:spcAft>
+                <a:spcPts val="800"/>
+              </a:spcAft>
+            </a:pPr>
+            <a:r>
+              <a:rPr sz="1700" b="0" i="0">
+                <a:solidFill>
+                  <a:srgbClr val="333333"/>
+                </a:solidFill>
+                <a:latin typeface="Calibri"/>
+              </a:rPr>
+              <a:t>–   </a:t>
+            </a:r>
+            <a:r>
+              <a:rPr sz="1700" b="1" i="0">
+                <a:solidFill>
+                  <a:srgbClr val="333333"/>
+                </a:solidFill>
+                <a:latin typeface="Calibri"/>
+              </a:rPr>
+              <a:t>El DDL, en tres sentencias.</a:t>
+            </a:r>
+            <a:r>
+              <a:rPr sz="1700" b="0" i="0">
+                <a:solidFill>
+                  <a:srgbClr val="333333"/>
+                </a:solidFill>
+                <a:latin typeface="Calibri"/>
+              </a:rPr>
+              <a:t> «CREATE TABLE cita_hist (... ) PARTITION BY RANGE (fecha_hora);» y despues una particion por ano: «CREATE TABLE cita_hist_2025 PARTITION OF cita_hist FOR VALUES FROM (TIMESTAMP '2025-01-01') TO (TIMESTAMP '2026-01-01');». El rango es </a:t>
+            </a:r>
+            <a:r>
+              <a:rPr sz="1700" b="1" i="0">
+                <a:solidFill>
+                  <a:srgbClr val="333333"/>
+                </a:solidFill>
+                <a:latin typeface="Calibri"/>
+              </a:rPr>
+              <a:t>cerrado por abajo y abierto por arriba</a:t>
+            </a:r>
+            <a:r>
+              <a:rPr sz="1700" b="0" i="0">
+                <a:solidFill>
+                  <a:srgbClr val="333333"/>
+                </a:solidFill>
+                <a:latin typeface="Calibri"/>
+              </a:rPr>
+              <a:t>, asi que el «TO» de una particion es el «FROM» de la siguiente y nunca se solapan.</a:t>
+            </a:r>
+          </a:p>
+          <a:p>
+            <a:pPr>
+              <a:spcAft>
+                <a:spcPts val="800"/>
+              </a:spcAft>
+            </a:pPr>
+            <a:r>
+              <a:rPr sz="1700" b="0" i="0">
+                <a:solidFill>
+                  <a:srgbClr val="333333"/>
+                </a:solidFill>
+                <a:latin typeface="Calibri"/>
+              </a:rPr>
+              <a:t>–   </a:t>
+            </a:r>
+            <a:r>
+              <a:rPr sz="1700" b="1" i="0">
+                <a:solidFill>
+                  <a:srgbClr val="333333"/>
+                </a:solidFill>
+                <a:latin typeface="Calibri"/>
+              </a:rPr>
+              <a:t>La trampa que cuesta la pregunta.</a:t>
+            </a:r>
+            <a:r>
+              <a:rPr sz="1700" b="0" i="0">
+                <a:solidFill>
+                  <a:srgbClr val="333333"/>
+                </a:solidFill>
+                <a:latin typeface="Calibri"/>
+              </a:rPr>
+              <a:t> En una tabla particionada la clave primaria </a:t>
+            </a:r>
+            <a:r>
+              <a:rPr sz="1700" b="1" i="0">
+                <a:solidFill>
+                  <a:srgbClr val="333333"/>
+                </a:solidFill>
+                <a:latin typeface="Calibri"/>
+              </a:rPr>
+              <a:t>debe incluir la columna de particion</a:t>
+            </a:r>
+            <a:r>
+              <a:rPr sz="1700" b="0" i="0">
+                <a:solidFill>
+                  <a:srgbClr val="333333"/>
+                </a:solidFill>
+                <a:latin typeface="Calibri"/>
+              </a:rPr>
+              <a:t>: «PRIMARY KEY (id_cita, fecha_hora)». Un «PRIMARY KEY (id_cita)» a secas no compila, y el error del motor no dice «te falta la columna de particion» con esas palabras.</a:t>
+            </a:r>
+          </a:p>
+          <a:p>
+            <a:pPr>
+              <a:spcAft>
+                <a:spcPts val="800"/>
+              </a:spcAft>
+            </a:pPr>
+            <a:r>
+              <a:rPr sz="1700" b="0" i="0">
+                <a:solidFill>
+                  <a:srgbClr val="333333"/>
+                </a:solidFill>
+                <a:latin typeface="Calibri"/>
+              </a:rPr>
+              <a:t>–   </a:t>
+            </a:r>
+            <a:r>
+              <a:rPr sz="1700" b="1" i="0">
+                <a:solidFill>
+                  <a:srgbClr val="333333"/>
+                </a:solidFill>
+                <a:latin typeface="Calibri"/>
+              </a:rPr>
+              <a:t>La prueba de que el reparto ocurrio.</a:t>
+            </a:r>
+            <a:r>
+              <a:rPr sz="1700" b="0" i="0">
+                <a:solidFill>
+                  <a:srgbClr val="333333"/>
+                </a:solidFill>
+                <a:latin typeface="Calibri"/>
+              </a:rPr>
+              <a:t> «SELECT tableoid::regclass AS particion, COUNT(*), MIN(fecha_hora), MAX(fecha_hora) FROM cita_hist GROUP BY 1 ORDER BY 1;» — «tableoid» es la columna de sistema que dice </a:t>
+            </a:r>
+            <a:r>
+              <a:rPr sz="1700" b="1" i="0">
+                <a:solidFill>
+                  <a:srgbClr val="333333"/>
+                </a:solidFill>
+                <a:latin typeface="Calibri"/>
+              </a:rPr>
+              <a:t>en que tabla fisica vive cada fila</a:t>
+            </a:r>
+            <a:r>
+              <a:rPr sz="1700" b="0" i="0">
+                <a:solidFill>
+                  <a:srgbClr val="333333"/>
+                </a:solidFill>
+                <a:latin typeface="Calibri"/>
+              </a:rPr>
+              <a:t>, y «::regclass» la traduce a nombre. Sin esta consulta no hay evidencia del enrutamiento, solo un «INSERT» que no dio error.</a:t>
+            </a:r>
+          </a:p>
+          <a:p>
+            <a:pPr>
+              <a:spcAft>
+                <a:spcPts val="800"/>
+              </a:spcAft>
+            </a:pPr>
+            <a:r>
+              <a:rPr sz="1700" b="0" i="0">
+                <a:solidFill>
+                  <a:srgbClr val="333333"/>
+                </a:solidFill>
+                <a:latin typeface="Calibri"/>
+              </a:rPr>
+              <a:t>–   </a:t>
+            </a:r>
+            <a:r>
+              <a:rPr sz="1700" b="1" i="0">
+                <a:solidFill>
+                  <a:srgbClr val="333333"/>
+                </a:solidFill>
+                <a:latin typeface="Calibri"/>
+              </a:rPr>
+              <a:t>La poda, que es lo unico que mejora hoy.</a:t>
+            </a:r>
+            <a:r>
+              <a:rPr sz="1700" b="0" i="0">
+                <a:solidFill>
+                  <a:srgbClr val="333333"/>
+                </a:solidFill>
+                <a:latin typeface="Calibri"/>
+              </a:rPr>
+              <a:t> En «EXPLAIN ANALYZE» de una consulta acotada a 2026 el plan tiene que mencionar </a:t>
+            </a:r>
+            <a:r>
+              <a:rPr sz="1700" b="1" i="0">
+                <a:solidFill>
+                  <a:srgbClr val="333333"/>
+                </a:solidFill>
+                <a:latin typeface="Calibri"/>
+              </a:rPr>
+              <a:t>solo «cita_hist_2026»</a:t>
+            </a:r>
+            <a:r>
+              <a:rPr sz="1700" b="0" i="0">
+                <a:solidFill>
+                  <a:srgbClr val="333333"/>
+                </a:solidFill>
+                <a:latin typeface="Calibri"/>
+              </a:rPr>
+              <a:t>. Con 5.010 filas el tiempo no baja de forma apreciable y hay que decirlo: lo que se demuestra es que el motor </a:t>
+            </a:r>
+            <a:r>
+              <a:rPr sz="1700" b="1" i="0">
+                <a:solidFill>
+                  <a:srgbClr val="333333"/>
+                </a:solidFill>
+                <a:latin typeface="Calibri"/>
+              </a:rPr>
+              <a:t>descarta particiones enteras</a:t>
+            </a:r>
+            <a:r>
+              <a:rPr sz="1700" b="0" i="0">
+                <a:solidFill>
+                  <a:srgbClr val="333333"/>
+                </a:solidFill>
+                <a:latin typeface="Calibri"/>
+              </a:rPr>
+              <a:t> antes de leer.</a:t>
+            </a:r>
+          </a:p>
+          <a:p>
+            <a:pPr>
+              <a:spcAft>
+                <a:spcPts val="800"/>
+              </a:spcAft>
+            </a:pPr>
+            <a:r>
+              <a:rPr sz="1700" b="0" i="0">
+                <a:solidFill>
+                  <a:srgbClr val="333333"/>
+                </a:solidFill>
+                <a:latin typeface="Calibri"/>
+              </a:rPr>
+              <a:t>–   </a:t>
+            </a:r>
+            <a:r>
+              <a:rPr sz="1700" b="1" i="0">
+                <a:solidFill>
+                  <a:srgbClr val="333333"/>
+                </a:solidFill>
+                <a:latin typeface="Calibri"/>
+              </a:rPr>
+              <a:t>Y el beneficio real, que es de mantenimiento.</a:t>
+            </a:r>
+            <a:r>
+              <a:rPr sz="1700" b="0" i="0">
+                <a:solidFill>
+                  <a:srgbClr val="333333"/>
+                </a:solidFill>
+                <a:latin typeface="Calibri"/>
+              </a:rPr>
+              <a:t> Archivar 2025 es «DROP TABLE cita_hist_2025», una operacion de </a:t>
+            </a:r>
+            <a:r>
+              <a:rPr sz="1700" b="1" i="0">
+                <a:solidFill>
+                  <a:srgbClr val="333333"/>
+                </a:solidFill>
+                <a:latin typeface="Calibri"/>
+              </a:rPr>
+              <a:t>metadatos</a:t>
+            </a:r>
+            <a:r>
+              <a:rPr sz="1700" b="0" i="0">
+                <a:solidFill>
+                  <a:srgbClr val="333333"/>
+                </a:solidFill>
+                <a:latin typeface="Calibri"/>
+              </a:rPr>
+              <a:t> que tarda un instante. El «DELETE FROM cita WHERE fecha_hora &lt; ...» equivalente toca millones de filas, infla el registro de transacciones y sostiene bloqueos largos — el contraste conecta directo con la Clase 8.</a:t>
             </a:r>
           </a:p>
         </p:txBody>
@@ -19464,325 +20895,6 @@
       <p:sp>
         <p:nvSpPr>
           <p:cNvPr id="6" name="TextBox 5"/>
-          <p:cNvSpPr txBox="1"/>
-          <p:nvPr/>
-        </p:nvSpPr>
-        <p:spPr>
-          <a:xfrm>
-            <a:off x="457200" y="1380744"/>
-            <a:ext cx="11277295" cy="5020056"/>
-          </a:xfrm>
-          <a:prstGeom prst="rect">
-            <a:avLst/>
-          </a:prstGeom>
-          <a:noFill/>
-        </p:spPr>
-        <p:txBody>
-          <a:bodyPr wrap="square">
-            <a:spAutoFit/>
-          </a:bodyPr>
-          <a:lstStyle/>
-          <a:p>
-            <a:pPr>
-              <a:spcAft>
-                <a:spcPts val="800"/>
-              </a:spcAft>
-            </a:pPr>
-            <a:r>
-              <a:rPr sz="1900" b="0" i="0">
-                <a:solidFill>
-                  <a:srgbClr val="333333"/>
-                </a:solidFill>
-                <a:latin typeface="Calibri"/>
-              </a:rPr>
-              <a:t>–   </a:t>
-            </a:r>
-            <a:r>
-              <a:rPr sz="1900" b="1" i="0">
-                <a:solidFill>
-                  <a:srgbClr val="333333"/>
-                </a:solidFill>
-                <a:latin typeface="Calibri"/>
-              </a:rPr>
-              <a:t>Que es.</a:t>
-            </a:r>
-            <a:r>
-              <a:rPr sz="1900" b="0" i="0">
-                <a:solidFill>
-                  <a:srgbClr val="333333"/>
-                </a:solidFill>
-                <a:latin typeface="Calibri"/>
-              </a:rPr>
-              <a:t> Un indice que solo contiene las filas que cumplen una condicion: «CREATE INDEX idx_cita_programada_fecha ON cita (fecha_hora) WHERE estado = 'PROGRAMADA';». El «WHERE» no es el de la consulta: es </a:t>
-            </a:r>
-            <a:r>
-              <a:rPr sz="1900" b="1" i="0">
-                <a:solidFill>
-                  <a:srgbClr val="333333"/>
-                </a:solidFill>
-                <a:latin typeface="Calibri"/>
-              </a:rPr>
-              <a:t>parte de la definicion del indice</a:t>
-            </a:r>
-            <a:r>
-              <a:rPr sz="1900" b="0" i="0">
-                <a:solidFill>
-                  <a:srgbClr val="333333"/>
-                </a:solidFill>
-                <a:latin typeface="Calibri"/>
-              </a:rPr>
-              <a:t> y decide que filas entran en el arbol.</a:t>
-            </a:r>
-          </a:p>
-          <a:p>
-            <a:pPr>
-              <a:spcAft>
-                <a:spcPts val="800"/>
-              </a:spcAft>
-            </a:pPr>
-            <a:r>
-              <a:rPr sz="1900" b="0" i="0">
-                <a:solidFill>
-                  <a:srgbClr val="333333"/>
-                </a:solidFill>
-                <a:latin typeface="Calibri"/>
-              </a:rPr>
-              <a:t>–   </a:t>
-            </a:r>
-            <a:r>
-              <a:rPr sz="1900" b="1" i="0">
-                <a:solidFill>
-                  <a:srgbClr val="333333"/>
-                </a:solidFill>
-                <a:latin typeface="Calibri"/>
-              </a:rPr>
-              <a:t>Cuanto se ahorra, con los datos de hoy.</a:t>
-            </a:r>
-            <a:r>
-              <a:rPr sz="1900" b="0" i="0">
-                <a:solidFill>
-                  <a:srgbClr val="333333"/>
-                </a:solidFill>
-                <a:latin typeface="Calibri"/>
-              </a:rPr>
-              <a:t> De las 30.010 citas sembradas, </a:t>
-            </a:r>
-            <a:r>
-              <a:rPr sz="1900" b="1" i="0">
-                <a:solidFill>
-                  <a:srgbClr val="333333"/>
-                </a:solidFill>
-                <a:latin typeface="Calibri"/>
-              </a:rPr>
-              <a:t>18.187</a:t>
-            </a:r>
-            <a:r>
-              <a:rPr sz="1900" b="0" i="0">
-                <a:solidFill>
-                  <a:srgbClr val="333333"/>
-                </a:solidFill>
-                <a:latin typeface="Calibri"/>
-              </a:rPr>
-              <a:t> estan «PROGRAMADA» (el 61 %): el indice completo indexa 30.010 entradas y el parcial 18.187, cuatro de cada diez menos. Menos entradas es menos disco, menos cache ocupada y menos trabajo en cada escritura de una cita </a:t>
-            </a:r>
-            <a:r>
-              <a:rPr sz="1900" b="1" i="0">
-                <a:solidFill>
-                  <a:srgbClr val="333333"/>
-                </a:solidFill>
-                <a:latin typeface="Calibri"/>
-              </a:rPr>
-              <a:t>que no este programada</a:t>
-            </a:r>
-            <a:r>
-              <a:rPr sz="1900" b="0" i="0">
-                <a:solidFill>
-                  <a:srgbClr val="333333"/>
-                </a:solidFill>
-                <a:latin typeface="Calibri"/>
-              </a:rPr>
-              <a:t>.</a:t>
-            </a:r>
-          </a:p>
-          <a:p>
-            <a:pPr>
-              <a:spcAft>
-                <a:spcPts val="800"/>
-              </a:spcAft>
-            </a:pPr>
-            <a:r>
-              <a:rPr sz="1900" b="0" i="0">
-                <a:solidFill>
-                  <a:srgbClr val="333333"/>
-                </a:solidFill>
-                <a:latin typeface="Calibri"/>
-              </a:rPr>
-              <a:t>–   </a:t>
-            </a:r>
-            <a:r>
-              <a:rPr sz="1900" b="1" i="0">
-                <a:solidFill>
-                  <a:srgbClr val="333333"/>
-                </a:solidFill>
-                <a:latin typeface="Calibri"/>
-              </a:rPr>
-              <a:t>La condicion para que sirva.</a:t>
-            </a:r>
-            <a:r>
-              <a:rPr sz="1900" b="0" i="0">
-                <a:solidFill>
-                  <a:srgbClr val="333333"/>
-                </a:solidFill>
-                <a:latin typeface="Calibri"/>
-              </a:rPr>
-              <a:t> El planeador solo lo usa si puede demostrar que la consulta </a:t>
-            </a:r>
-            <a:r>
-              <a:rPr sz="1900" b="1" i="0">
-                <a:solidFill>
-                  <a:srgbClr val="333333"/>
-                </a:solidFill>
-                <a:latin typeface="Calibri"/>
-              </a:rPr>
-              <a:t>trae la misma condicion</a:t>
-            </a:r>
-            <a:r>
-              <a:rPr sz="1900" b="0" i="0">
-                <a:solidFill>
-                  <a:srgbClr val="333333"/>
-                </a:solidFill>
-                <a:latin typeface="Calibri"/>
-              </a:rPr>
-              <a:t> del indice. «WHERE estado = 'PROGRAMADA' AND fecha_hora &gt;= ...» si lo aprovecha; la misma consulta sin el filtro de estado </a:t>
-            </a:r>
-            <a:r>
-              <a:rPr sz="1900" b="1" i="0">
-                <a:solidFill>
-                  <a:srgbClr val="333333"/>
-                </a:solidFill>
-                <a:latin typeface="Calibri"/>
-              </a:rPr>
-              <a:t>no</a:t>
-            </a:r>
-            <a:r>
-              <a:rPr sz="1900" b="0" i="0">
-                <a:solidFill>
-                  <a:srgbClr val="333333"/>
-                </a:solidFill>
-                <a:latin typeface="Calibri"/>
-              </a:rPr>
-              <a:t>, porque el indice no contiene las filas atendidas ni las canceladas.</a:t>
-            </a:r>
-          </a:p>
-          <a:p>
-            <a:pPr>
-              <a:spcAft>
-                <a:spcPts val="800"/>
-              </a:spcAft>
-            </a:pPr>
-            <a:r>
-              <a:rPr sz="1900" b="0" i="0">
-                <a:solidFill>
-                  <a:srgbClr val="333333"/>
-                </a:solidFill>
-                <a:latin typeface="Calibri"/>
-              </a:rPr>
-              <a:t>–   </a:t>
-            </a:r>
-            <a:r>
-              <a:rPr sz="1900" b="1" i="0">
-                <a:solidFill>
-                  <a:srgbClr val="333333"/>
-                </a:solidFill>
-                <a:latin typeface="Calibri"/>
-              </a:rPr>
-              <a:t>El caso de VetCare que lo justifica.</a:t>
-            </a:r>
-            <a:r>
-              <a:rPr sz="1900" b="0" i="0">
-                <a:solidFill>
-                  <a:srgbClr val="333333"/>
-                </a:solidFill>
-                <a:latin typeface="Calibri"/>
-              </a:rPr>
-              <a:t> La agenda del dia de la recepcion </a:t>
-            </a:r>
-            <a:r>
-              <a:rPr sz="1900" b="1" i="0">
-                <a:solidFill>
-                  <a:srgbClr val="333333"/>
-                </a:solidFill>
-                <a:latin typeface="Calibri"/>
-              </a:rPr>
-              <a:t>siempre</a:t>
-            </a:r>
-            <a:r>
-              <a:rPr sz="1900" b="0" i="0">
-                <a:solidFill>
-                  <a:srgbClr val="333333"/>
-                </a:solidFill>
-                <a:latin typeface="Calibri"/>
-              </a:rPr>
-              <a:t> filtra por «PROGRAMADA»: nadie abre la pantalla para ver las citas que ya se atendieron. Cuando el filtro es parte del caso de uso y no del capricho de una consulta, el parcial es la respuesta correcta.</a:t>
-            </a:r>
-          </a:p>
-          <a:p>
-            <a:pPr>
-              <a:spcAft>
-                <a:spcPts val="800"/>
-              </a:spcAft>
-            </a:pPr>
-            <a:r>
-              <a:rPr sz="1900" b="0" i="0">
-                <a:solidFill>
-                  <a:srgbClr val="333333"/>
-                </a:solidFill>
-                <a:latin typeface="Calibri"/>
-              </a:rPr>
-              <a:t>–   </a:t>
-            </a:r>
-            <a:r>
-              <a:rPr sz="1900" b="1" i="0">
-                <a:solidFill>
-                  <a:srgbClr val="333333"/>
-                </a:solidFill>
-                <a:latin typeface="Calibri"/>
-              </a:rPr>
-              <a:t>Cual de los dos elige.</a:t>
-            </a:r>
-            <a:r>
-              <a:rPr sz="1900" b="0" i="0">
-                <a:solidFill>
-                  <a:srgbClr val="333333"/>
-                </a:solidFill>
-                <a:latin typeface="Calibri"/>
-              </a:rPr>
-              <a:t> Con «idx_cita_fecha_hora» y «idx_cita_programada_fecha» compitiendo por la misma consulta, el plan nombra al ganador: hay que leer el «Index Scan using ...» y </a:t>
-            </a:r>
-            <a:r>
-              <a:rPr sz="1900" b="1" i="0">
-                <a:solidFill>
-                  <a:srgbClr val="333333"/>
-                </a:solidFill>
-                <a:latin typeface="Calibri"/>
-              </a:rPr>
-              <a:t>escribir cual salio</a:t>
-            </a:r>
-            <a:r>
-              <a:rPr sz="1900" b="0" i="0">
-                <a:solidFill>
-                  <a:srgbClr val="333333"/>
-                </a:solidFill>
-                <a:latin typeface="Calibri"/>
-              </a:rPr>
-              <a:t>, porque la rubrica descuenta si no se comenta.</a:t>
-            </a:r>
-          </a:p>
-        </p:txBody>
-      </p:sp>
-      <p:sp>
-        <p:nvSpPr>
-          <p:cNvPr id="7" name="TextBox 6"/>
           <p:cNvSpPr txBox="1"/>
           <p:nvPr/>
         </p:nvSpPr>
@@ -19850,7 +20962,7 @@
         <p:spPr>
           <a:xfrm>
             <a:off x="0" y="0"/>
-            <a:ext cx="12191695" cy="1170432"/>
+            <a:ext cx="12191695" cy="960120"/>
           </a:xfrm>
           <a:prstGeom prst="rect">
             <a:avLst/>
@@ -19892,7 +21004,7 @@
         </p:nvSpPr>
         <p:spPr>
           <a:xfrm>
-            <a:off x="0" y="1170432"/>
+            <a:off x="0" y="960120"/>
             <a:ext cx="12191695" cy="41148"/>
           </a:xfrm>
           <a:prstGeom prst="rect">
@@ -19936,7 +21048,7 @@
         <p:spPr>
           <a:xfrm>
             <a:off x="457200" y="164592"/>
-            <a:ext cx="11277295" cy="384048"/>
+            <a:ext cx="11277295" cy="502920"/>
           </a:xfrm>
           <a:prstGeom prst="rect">
             <a:avLst/>
@@ -19956,7 +21068,7 @@
                 </a:solidFill>
                 <a:latin typeface="Calibri"/>
               </a:rPr>
-              <a:t>Particionar hoy de verdad: rango por ano, poda y archivado</a:t>
+              <a:t>Demo del dia</a:t>
             </a:r>
           </a:p>
         </p:txBody>
@@ -19969,8 +21081,8 @@
         </p:nvSpPr>
         <p:spPr>
           <a:xfrm>
-            <a:off x="457200" y="566928"/>
-            <a:ext cx="11277295" cy="411480"/>
+            <a:off x="457200" y="1170432"/>
+            <a:ext cx="11277295" cy="5230368"/>
           </a:xfrm>
           <a:prstGeom prst="rect">
             <a:avLst/>
@@ -19983,14 +21095,103 @@
           </a:bodyPr>
           <a:lstStyle/>
           <a:p>
-            <a:r>
-              <a:rPr sz="1400" b="0" i="0">
-                <a:solidFill>
-                  <a:srgbClr val="B8D8EE"/>
-                </a:solidFill>
-                <a:latin typeface="Calibri"/>
-              </a:rPr>
-              <a:t>Es la pregunta 3 completa —20 de los 100 puntos— y el segundo parrafo de la pregunta 5: hoy se implementa, no se cuenta</a:t>
+            <a:pPr>
+              <a:spcAft>
+                <a:spcPts val="800"/>
+              </a:spcAft>
+            </a:pPr>
+            <a:r>
+              <a:rPr sz="2000" b="0" i="0">
+                <a:solidFill>
+                  <a:srgbClr val="333333"/>
+                </a:solidFill>
+                <a:latin typeface="Calibri"/>
+              </a:rPr>
+              <a:t>–   </a:t>
+            </a:r>
+            <a:r>
+              <a:rPr sz="2000" b="1" i="0">
+                <a:solidFill>
+                  <a:srgbClr val="333333"/>
+                </a:solidFill>
+                <a:latin typeface="Calibri"/>
+              </a:rPr>
+              <a:t>Herramienta:</a:t>
+            </a:r>
+            <a:r>
+              <a:rPr sz="2000" b="0" i="0">
+                <a:solidFill>
+                  <a:srgbClr val="333333"/>
+                </a:solidFill>
+                <a:latin typeface="Calibri"/>
+              </a:rPr>
+              <a:t> PostgreSQL/PGlite</a:t>
+            </a:r>
+          </a:p>
+          <a:p>
+            <a:pPr>
+              <a:spcAft>
+                <a:spcPts val="800"/>
+              </a:spcAft>
+            </a:pPr>
+            <a:r>
+              <a:rPr sz="2000" b="0" i="0">
+                <a:solidFill>
+                  <a:srgbClr val="333333"/>
+                </a:solidFill>
+                <a:latin typeface="Calibri"/>
+              </a:rPr>
+              <a:t>–   </a:t>
+            </a:r>
+            <a:r>
+              <a:rPr sz="2000" b="1" i="0">
+                <a:solidFill>
+                  <a:srgbClr val="333333"/>
+                </a:solidFill>
+                <a:latin typeface="Calibri"/>
+              </a:rPr>
+              <a:t>Demo:</a:t>
+            </a:r>
+            <a:r>
+              <a:rPr sz="2000" b="0" i="0">
+                <a:solidFill>
+                  <a:srgbClr val="333333"/>
+                </a:solidFill>
+                <a:latin typeface="Calibri"/>
+              </a:rPr>
+              <a:t> EXPLAIN ANALYZE con Seq Scan, CREATE INDEX idx_cita_fecha_hora, ANALYZE, y el mismo EXPLAIN mostrando Index Scan.</a:t>
+            </a:r>
+          </a:p>
+          <a:p>
+            <a:pPr>
+              <a:spcAft>
+                <a:spcPts val="800"/>
+              </a:spcAft>
+            </a:pPr>
+            <a:r>
+              <a:rPr sz="2000" b="0" i="0">
+                <a:solidFill>
+                  <a:srgbClr val="333333"/>
+                </a:solidFill>
+                <a:latin typeface="Calibri"/>
+              </a:rPr>
+              <a:t>–   Sigan el mismo dominio VetCare (no inventen otro caso).</a:t>
+            </a:r>
+          </a:p>
+          <a:p>
+            <a:pPr>
+              <a:spcAft>
+                <a:spcPts val="800"/>
+              </a:spcAft>
+            </a:pPr>
+            <a:r>
+              <a:rPr sz="2000" b="0" i="0">
+                <a:solidFill>
+                  <a:srgbClr val="333333"/>
+                </a:solidFill>
+                <a:latin typeface="Calibri"/>
+              </a:rPr>
+              <a:t>–   Al final de la demo: dejar enlace/script compartible al grupo.</a:t>
             </a:r>
           </a:p>
         </p:txBody>
@@ -19998,307 +21199,6 @@
       <p:sp>
         <p:nvSpPr>
           <p:cNvPr id="6" name="TextBox 5"/>
-          <p:cNvSpPr txBox="1"/>
-          <p:nvPr/>
-        </p:nvSpPr>
-        <p:spPr>
-          <a:xfrm>
-            <a:off x="457200" y="1380744"/>
-            <a:ext cx="11277295" cy="5020056"/>
-          </a:xfrm>
-          <a:prstGeom prst="rect">
-            <a:avLst/>
-          </a:prstGeom>
-          <a:noFill/>
-        </p:spPr>
-        <p:txBody>
-          <a:bodyPr wrap="square">
-            <a:spAutoFit/>
-          </a:bodyPr>
-          <a:lstStyle/>
-          <a:p>
-            <a:pPr>
-              <a:spcAft>
-                <a:spcPts val="800"/>
-              </a:spcAft>
-            </a:pPr>
-            <a:r>
-              <a:rPr sz="1700" b="0" i="0">
-                <a:solidFill>
-                  <a:srgbClr val="333333"/>
-                </a:solidFill>
-                <a:latin typeface="Calibri"/>
-              </a:rPr>
-              <a:t>–   </a:t>
-            </a:r>
-            <a:r>
-              <a:rPr sz="1700" b="1" i="0">
-                <a:solidFill>
-                  <a:srgbClr val="333333"/>
-                </a:solidFill>
-                <a:latin typeface="Calibri"/>
-              </a:rPr>
-              <a:t>El DDL, en tres sentencias.</a:t>
-            </a:r>
-            <a:r>
-              <a:rPr sz="1700" b="0" i="0">
-                <a:solidFill>
-                  <a:srgbClr val="333333"/>
-                </a:solidFill>
-                <a:latin typeface="Calibri"/>
-              </a:rPr>
-              <a:t> «CREATE TABLE cita_hist (... ) PARTITION BY RANGE (fecha_hora);» y despues una particion por ano: «CREATE TABLE cita_hist_2025 PARTITION OF cita_hist FOR VALUES FROM (TIMESTAMP '2025-01-01') TO (TIMESTAMP '2026-01-01');». El rango es </a:t>
-            </a:r>
-            <a:r>
-              <a:rPr sz="1700" b="1" i="0">
-                <a:solidFill>
-                  <a:srgbClr val="333333"/>
-                </a:solidFill>
-                <a:latin typeface="Calibri"/>
-              </a:rPr>
-              <a:t>cerrado por abajo y abierto por arriba</a:t>
-            </a:r>
-            <a:r>
-              <a:rPr sz="1700" b="0" i="0">
-                <a:solidFill>
-                  <a:srgbClr val="333333"/>
-                </a:solidFill>
-                <a:latin typeface="Calibri"/>
-              </a:rPr>
-              <a:t>, asi que el «TO» de una particion es el «FROM» de la siguiente y nunca se solapan.</a:t>
-            </a:r>
-          </a:p>
-          <a:p>
-            <a:pPr>
-              <a:spcAft>
-                <a:spcPts val="800"/>
-              </a:spcAft>
-            </a:pPr>
-            <a:r>
-              <a:rPr sz="1700" b="0" i="0">
-                <a:solidFill>
-                  <a:srgbClr val="333333"/>
-                </a:solidFill>
-                <a:latin typeface="Calibri"/>
-              </a:rPr>
-              <a:t>–   </a:t>
-            </a:r>
-            <a:r>
-              <a:rPr sz="1700" b="1" i="0">
-                <a:solidFill>
-                  <a:srgbClr val="333333"/>
-                </a:solidFill>
-                <a:latin typeface="Calibri"/>
-              </a:rPr>
-              <a:t>La trampa que cuesta la pregunta.</a:t>
-            </a:r>
-            <a:r>
-              <a:rPr sz="1700" b="0" i="0">
-                <a:solidFill>
-                  <a:srgbClr val="333333"/>
-                </a:solidFill>
-                <a:latin typeface="Calibri"/>
-              </a:rPr>
-              <a:t> En una tabla particionada la clave primaria </a:t>
-            </a:r>
-            <a:r>
-              <a:rPr sz="1700" b="1" i="0">
-                <a:solidFill>
-                  <a:srgbClr val="333333"/>
-                </a:solidFill>
-                <a:latin typeface="Calibri"/>
-              </a:rPr>
-              <a:t>debe incluir la columna de particion</a:t>
-            </a:r>
-            <a:r>
-              <a:rPr sz="1700" b="0" i="0">
-                <a:solidFill>
-                  <a:srgbClr val="333333"/>
-                </a:solidFill>
-                <a:latin typeface="Calibri"/>
-              </a:rPr>
-              <a:t>: «PRIMARY KEY (id_cita, fecha_hora)». Un «PRIMARY KEY (id_cita)» a secas no compila, y el error del motor no dice «te falta la columna de particion» con esas palabras.</a:t>
-            </a:r>
-          </a:p>
-          <a:p>
-            <a:pPr>
-              <a:spcAft>
-                <a:spcPts val="800"/>
-              </a:spcAft>
-            </a:pPr>
-            <a:r>
-              <a:rPr sz="1700" b="0" i="0">
-                <a:solidFill>
-                  <a:srgbClr val="333333"/>
-                </a:solidFill>
-                <a:latin typeface="Calibri"/>
-              </a:rPr>
-              <a:t>–   </a:t>
-            </a:r>
-            <a:r>
-              <a:rPr sz="1700" b="1" i="0">
-                <a:solidFill>
-                  <a:srgbClr val="333333"/>
-                </a:solidFill>
-                <a:latin typeface="Calibri"/>
-              </a:rPr>
-              <a:t>La prueba de que el reparto ocurrio.</a:t>
-            </a:r>
-            <a:r>
-              <a:rPr sz="1700" b="0" i="0">
-                <a:solidFill>
-                  <a:srgbClr val="333333"/>
-                </a:solidFill>
-                <a:latin typeface="Calibri"/>
-              </a:rPr>
-              <a:t> «SELECT tableoid::regclass AS particion, COUNT(*), MIN(fecha_hora), MAX(fecha_hora) FROM cita_hist GROUP BY 1 ORDER BY 1;» — «tableoid» es la columna de sistema que dice </a:t>
-            </a:r>
-            <a:r>
-              <a:rPr sz="1700" b="1" i="0">
-                <a:solidFill>
-                  <a:srgbClr val="333333"/>
-                </a:solidFill>
-                <a:latin typeface="Calibri"/>
-              </a:rPr>
-              <a:t>en que tabla fisica vive cada fila</a:t>
-            </a:r>
-            <a:r>
-              <a:rPr sz="1700" b="0" i="0">
-                <a:solidFill>
-                  <a:srgbClr val="333333"/>
-                </a:solidFill>
-                <a:latin typeface="Calibri"/>
-              </a:rPr>
-              <a:t>, y «::regclass» la traduce a nombre. Sin esta consulta no hay evidencia del enrutamiento, solo un «INSERT» que no dio error.</a:t>
-            </a:r>
-          </a:p>
-          <a:p>
-            <a:pPr>
-              <a:spcAft>
-                <a:spcPts val="800"/>
-              </a:spcAft>
-            </a:pPr>
-            <a:r>
-              <a:rPr sz="1700" b="0" i="0">
-                <a:solidFill>
-                  <a:srgbClr val="333333"/>
-                </a:solidFill>
-                <a:latin typeface="Calibri"/>
-              </a:rPr>
-              <a:t>–   </a:t>
-            </a:r>
-            <a:r>
-              <a:rPr sz="1700" b="1" i="0">
-                <a:solidFill>
-                  <a:srgbClr val="333333"/>
-                </a:solidFill>
-                <a:latin typeface="Calibri"/>
-              </a:rPr>
-              <a:t>La poda, que es lo unico que mejora hoy.</a:t>
-            </a:r>
-            <a:r>
-              <a:rPr sz="1700" b="0" i="0">
-                <a:solidFill>
-                  <a:srgbClr val="333333"/>
-                </a:solidFill>
-                <a:latin typeface="Calibri"/>
-              </a:rPr>
-              <a:t> En «EXPLAIN ANALYZE» de una consulta acotada a 2026 el plan tiene que mencionar </a:t>
-            </a:r>
-            <a:r>
-              <a:rPr sz="1700" b="1" i="0">
-                <a:solidFill>
-                  <a:srgbClr val="333333"/>
-                </a:solidFill>
-                <a:latin typeface="Calibri"/>
-              </a:rPr>
-              <a:t>solo «cita_hist_2026»</a:t>
-            </a:r>
-            <a:r>
-              <a:rPr sz="1700" b="0" i="0">
-                <a:solidFill>
-                  <a:srgbClr val="333333"/>
-                </a:solidFill>
-                <a:latin typeface="Calibri"/>
-              </a:rPr>
-              <a:t>. Con 5.010 filas el tiempo no baja de forma apreciable y hay que decirlo: lo que se demuestra es que el motor </a:t>
-            </a:r>
-            <a:r>
-              <a:rPr sz="1700" b="1" i="0">
-                <a:solidFill>
-                  <a:srgbClr val="333333"/>
-                </a:solidFill>
-                <a:latin typeface="Calibri"/>
-              </a:rPr>
-              <a:t>descarta particiones enteras</a:t>
-            </a:r>
-            <a:r>
-              <a:rPr sz="1700" b="0" i="0">
-                <a:solidFill>
-                  <a:srgbClr val="333333"/>
-                </a:solidFill>
-                <a:latin typeface="Calibri"/>
-              </a:rPr>
-              <a:t> antes de leer.</a:t>
-            </a:r>
-          </a:p>
-          <a:p>
-            <a:pPr>
-              <a:spcAft>
-                <a:spcPts val="800"/>
-              </a:spcAft>
-            </a:pPr>
-            <a:r>
-              <a:rPr sz="1700" b="0" i="0">
-                <a:solidFill>
-                  <a:srgbClr val="333333"/>
-                </a:solidFill>
-                <a:latin typeface="Calibri"/>
-              </a:rPr>
-              <a:t>–   </a:t>
-            </a:r>
-            <a:r>
-              <a:rPr sz="1700" b="1" i="0">
-                <a:solidFill>
-                  <a:srgbClr val="333333"/>
-                </a:solidFill>
-                <a:latin typeface="Calibri"/>
-              </a:rPr>
-              <a:t>Y el beneficio real, que es de mantenimiento.</a:t>
-            </a:r>
-            <a:r>
-              <a:rPr sz="1700" b="0" i="0">
-                <a:solidFill>
-                  <a:srgbClr val="333333"/>
-                </a:solidFill>
-                <a:latin typeface="Calibri"/>
-              </a:rPr>
-              <a:t> Archivar 2025 es «DROP TABLE cita_hist_2025», una operacion de </a:t>
-            </a:r>
-            <a:r>
-              <a:rPr sz="1700" b="1" i="0">
-                <a:solidFill>
-                  <a:srgbClr val="333333"/>
-                </a:solidFill>
-                <a:latin typeface="Calibri"/>
-              </a:rPr>
-              <a:t>metadatos</a:t>
-            </a:r>
-            <a:r>
-              <a:rPr sz="1700" b="0" i="0">
-                <a:solidFill>
-                  <a:srgbClr val="333333"/>
-                </a:solidFill>
-                <a:latin typeface="Calibri"/>
-              </a:rPr>
-              <a:t> que tarda un instante. El «DELETE FROM cita WHERE fecha_hora &lt; ...» equivalente toca millones de filas, infla el registro de transacciones y sostiene bloqueos largos — el contraste conecta directo con la Clase 8.</a:t>
-            </a:r>
-          </a:p>
-        </p:txBody>
-      </p:sp>
-      <p:sp>
-        <p:nvSpPr>
-          <p:cNvPr id="7" name="TextBox 6"/>
           <p:cNvSpPr txBox="1"/>
           <p:nvPr/>
         </p:nvSpPr>
@@ -20366,310 +21266,6 @@
         <p:spPr>
           <a:xfrm>
             <a:off x="0" y="0"/>
-            <a:ext cx="12191695" cy="960120"/>
-          </a:xfrm>
-          <a:prstGeom prst="rect">
-            <a:avLst/>
-          </a:prstGeom>
-          <a:solidFill>
-            <a:srgbClr val="095292"/>
-          </a:solidFill>
-          <a:ln>
-            <a:noFill/>
-          </a:ln>
-        </p:spPr>
-        <p:style>
-          <a:lnRef idx="1">
-            <a:schemeClr val="accent1"/>
-          </a:lnRef>
-          <a:fillRef idx="3">
-            <a:schemeClr val="accent1"/>
-          </a:fillRef>
-          <a:effectRef idx="2">
-            <a:schemeClr val="accent1"/>
-          </a:effectRef>
-          <a:fontRef idx="minor">
-            <a:schemeClr val="lt1"/>
-          </a:fontRef>
-        </p:style>
-        <p:txBody>
-          <a:bodyPr rtlCol="0" anchor="ctr"/>
-          <a:lstStyle/>
-          <a:p>
-            <a:pPr algn="ctr"/>
-          </a:p>
-        </p:txBody>
-      </p:sp>
-      <p:sp>
-        <p:nvSpPr>
-          <p:cNvPr id="3" name="Rectangle 2"/>
-          <p:cNvSpPr/>
-          <p:nvPr/>
-        </p:nvSpPr>
-        <p:spPr>
-          <a:xfrm>
-            <a:off x="0" y="960120"/>
-            <a:ext cx="12191695" cy="41148"/>
-          </a:xfrm>
-          <a:prstGeom prst="rect">
-            <a:avLst/>
-          </a:prstGeom>
-          <a:solidFill>
-            <a:srgbClr val="FFD000"/>
-          </a:solidFill>
-          <a:ln>
-            <a:noFill/>
-          </a:ln>
-        </p:spPr>
-        <p:style>
-          <a:lnRef idx="1">
-            <a:schemeClr val="accent1"/>
-          </a:lnRef>
-          <a:fillRef idx="3">
-            <a:schemeClr val="accent1"/>
-          </a:fillRef>
-          <a:effectRef idx="2">
-            <a:schemeClr val="accent1"/>
-          </a:effectRef>
-          <a:fontRef idx="minor">
-            <a:schemeClr val="lt1"/>
-          </a:fontRef>
-        </p:style>
-        <p:txBody>
-          <a:bodyPr rtlCol="0" anchor="ctr"/>
-          <a:lstStyle/>
-          <a:p>
-            <a:pPr algn="ctr"/>
-          </a:p>
-        </p:txBody>
-      </p:sp>
-      <p:sp>
-        <p:nvSpPr>
-          <p:cNvPr id="4" name="TextBox 3"/>
-          <p:cNvSpPr txBox="1"/>
-          <p:nvPr/>
-        </p:nvSpPr>
-        <p:spPr>
-          <a:xfrm>
-            <a:off x="457200" y="164592"/>
-            <a:ext cx="11277295" cy="502920"/>
-          </a:xfrm>
-          <a:prstGeom prst="rect">
-            <a:avLst/>
-          </a:prstGeom>
-          <a:noFill/>
-        </p:spPr>
-        <p:txBody>
-          <a:bodyPr wrap="square">
-            <a:spAutoFit/>
-          </a:bodyPr>
-          <a:lstStyle/>
-          <a:p>
-            <a:r>
-              <a:rPr sz="2600" b="1" i="0">
-                <a:solidFill>
-                  <a:srgbClr val="FFFFFF"/>
-                </a:solidFill>
-                <a:latin typeface="Calibri"/>
-              </a:rPr>
-              <a:t>Demo del dia</a:t>
-            </a:r>
-          </a:p>
-        </p:txBody>
-      </p:sp>
-      <p:sp>
-        <p:nvSpPr>
-          <p:cNvPr id="5" name="TextBox 4"/>
-          <p:cNvSpPr txBox="1"/>
-          <p:nvPr/>
-        </p:nvSpPr>
-        <p:spPr>
-          <a:xfrm>
-            <a:off x="457200" y="1170432"/>
-            <a:ext cx="11277295" cy="5230368"/>
-          </a:xfrm>
-          <a:prstGeom prst="rect">
-            <a:avLst/>
-          </a:prstGeom>
-          <a:noFill/>
-        </p:spPr>
-        <p:txBody>
-          <a:bodyPr wrap="square">
-            <a:spAutoFit/>
-          </a:bodyPr>
-          <a:lstStyle/>
-          <a:p>
-            <a:pPr>
-              <a:spcAft>
-                <a:spcPts val="800"/>
-              </a:spcAft>
-            </a:pPr>
-            <a:r>
-              <a:rPr sz="2000" b="0" i="0">
-                <a:solidFill>
-                  <a:srgbClr val="333333"/>
-                </a:solidFill>
-                <a:latin typeface="Calibri"/>
-              </a:rPr>
-              <a:t>–   </a:t>
-            </a:r>
-            <a:r>
-              <a:rPr sz="2000" b="1" i="0">
-                <a:solidFill>
-                  <a:srgbClr val="333333"/>
-                </a:solidFill>
-                <a:latin typeface="Calibri"/>
-              </a:rPr>
-              <a:t>Herramienta:</a:t>
-            </a:r>
-            <a:r>
-              <a:rPr sz="2000" b="0" i="0">
-                <a:solidFill>
-                  <a:srgbClr val="333333"/>
-                </a:solidFill>
-                <a:latin typeface="Calibri"/>
-              </a:rPr>
-              <a:t> PostgreSQL en el navegador</a:t>
-            </a:r>
-          </a:p>
-          <a:p>
-            <a:pPr>
-              <a:spcAft>
-                <a:spcPts val="800"/>
-              </a:spcAft>
-            </a:pPr>
-            <a:r>
-              <a:rPr sz="2000" b="0" i="0">
-                <a:solidFill>
-                  <a:srgbClr val="333333"/>
-                </a:solidFill>
-                <a:latin typeface="Calibri"/>
-              </a:rPr>
-              <a:t>–   </a:t>
-            </a:r>
-            <a:r>
-              <a:rPr sz="2000" b="1" i="0">
-                <a:solidFill>
-                  <a:srgbClr val="333333"/>
-                </a:solidFill>
-                <a:latin typeface="Calibri"/>
-              </a:rPr>
-              <a:t>Demo:</a:t>
-            </a:r>
-            <a:r>
-              <a:rPr sz="2000" b="0" i="0">
-                <a:solidFill>
-                  <a:srgbClr val="333333"/>
-                </a:solidFill>
-                <a:latin typeface="Calibri"/>
-              </a:rPr>
-              <a:t> EXPLAIN ANALYZE con Seq Scan, CREATE INDEX idx_cita_fecha_hora, ANALYZE, y el mismo EXPLAIN mostrando Index Scan.</a:t>
-            </a:r>
-          </a:p>
-          <a:p>
-            <a:pPr>
-              <a:spcAft>
-                <a:spcPts val="800"/>
-              </a:spcAft>
-            </a:pPr>
-            <a:r>
-              <a:rPr sz="2000" b="0" i="0">
-                <a:solidFill>
-                  <a:srgbClr val="333333"/>
-                </a:solidFill>
-                <a:latin typeface="Calibri"/>
-              </a:rPr>
-              <a:t>–   Sigan el mismo dominio VetCare (no inventen otro caso).</a:t>
-            </a:r>
-          </a:p>
-          <a:p>
-            <a:pPr>
-              <a:spcAft>
-                <a:spcPts val="800"/>
-              </a:spcAft>
-            </a:pPr>
-            <a:r>
-              <a:rPr sz="2000" b="0" i="0">
-                <a:solidFill>
-                  <a:srgbClr val="333333"/>
-                </a:solidFill>
-                <a:latin typeface="Calibri"/>
-              </a:rPr>
-              <a:t>–   Al final de la demo: dejar enlace/script compartible al grupo.</a:t>
-            </a:r>
-          </a:p>
-        </p:txBody>
-      </p:sp>
-      <p:sp>
-        <p:nvSpPr>
-          <p:cNvPr id="6" name="TextBox 5"/>
-          <p:cNvSpPr txBox="1"/>
-          <p:nvPr/>
-        </p:nvSpPr>
-        <p:spPr>
-          <a:xfrm>
-            <a:off x="11185855" y="6473952"/>
-            <a:ext cx="640080" cy="274320"/>
-          </a:xfrm>
-          <a:prstGeom prst="rect">
-            <a:avLst/>
-          </a:prstGeom>
-          <a:noFill/>
-        </p:spPr>
-        <p:txBody>
-          <a:bodyPr wrap="square">
-            <a:spAutoFit/>
-          </a:bodyPr>
-          <a:lstStyle/>
-          <a:p>
-            <a:pPr algn="r"/>
-            <a:r>
-              <a:rPr sz="1100" b="0" i="0">
-                <a:solidFill>
-                  <a:srgbClr val="666666"/>
-                </a:solidFill>
-                <a:latin typeface="Calibri"/>
-              </a:rPr>
-              <a:t>52</a:t>
-            </a:r>
-          </a:p>
-        </p:txBody>
-      </p:sp>
-    </p:spTree>
-  </p:cSld>
-  <p:clrMapOvr>
-    <a:masterClrMapping/>
-  </p:clrMapOvr>
-</p:sld>
-</file>
-
-<file path=ppt/slides/slide53.xml><?xml version="1.0" encoding="utf-8"?>
-<p:sld xmlns:a="http://schemas.openxmlformats.org/drawingml/2006/main" xmlns:p="http://schemas.openxmlformats.org/presentationml/2006/main" xmlns:r="http://schemas.openxmlformats.org/officeDocument/2006/relationships">
-  <p:cSld>
-    <p:bg>
-      <p:bgPr>
-        <a:solidFill>
-          <a:srgbClr val="FFFFFF"/>
-        </a:solidFill>
-        <a:effectLst/>
-      </p:bgPr>
-    </p:bg>
-    <p:spTree>
-      <p:nvGrpSpPr>
-        <p:cNvPr id="1" name=""/>
-        <p:cNvGrpSpPr/>
-        <p:nvPr/>
-      </p:nvGrpSpPr>
-      <p:grpSpPr/>
-      <p:sp>
-        <p:nvSpPr>
-          <p:cNvPr id="2" name="Rectangle 1"/>
-          <p:cNvSpPr/>
-          <p:nvPr/>
-        </p:nvSpPr>
-        <p:spPr>
-          <a:xfrm>
-            <a:off x="0" y="0"/>
             <a:ext cx="12191695" cy="164592"/>
           </a:xfrm>
           <a:prstGeom prst="rect">
@@ -21923,7 +22519,7 @@
                 </a:solidFill>
                 <a:latin typeface="Calibri"/>
               </a:rPr>
-              <a:t>–   El precio de indexar se paga en cada escritura y hay que cuantificarlo, porque es la mitad del veredicto que la pregunta 5 pide por escrito.</a:t>
+              <a:t>–   El precio de indexar se paga en cada escritura y hay que cuantificarlo.</a:t>
             </a:r>
           </a:p>
           <a:p>

--- a/Bases de Datos II/Clases/Clase 7 - Indices y particionamiento/Presentacion.pptx
+++ b/Bases de Datos II/Clases/Clase 7 - Indices y particionamiento/Presentacion.pptx
@@ -1045,7 +1045,7 @@
           <a:lstStyle/>
           <a:p>
             <a:r>
-              <a:t>Si todas las consultas del PI filtran por PROGRAMADA, entonces si sobra el completo.</a:t>
+              <a:t>Si todas las consultas del proyecto filtran por PROGRAMADA, entonces si sobra el completo.</a:t>
             </a:r>
           </a:p>
           <a:p>
@@ -1060,7 +1060,7 @@
           </a:p>
           <a:p>
             <a:r>
-              <a:t>Fuera de la lamina (habla de la practica): Si todas las consultas del PI filtran por PROGRAMADA, entonces si sobra el completo, y decirlo asi en la columna de veredicto es la respuesta que la rubrica busca.</a:t>
+              <a:t>Fuera de la lamina (habla de la practica): Si todas las consultas del proyecto filtran por PROGRAMADA, entonces si sobra el completo, y decirlo asi en la columna de veredicto es la respuesta que la rubrica busca.</a:t>
             </a:r>
           </a:p>
           <a:p>
@@ -5034,13 +5034,13 @@
           <a:p>
             <a:pPr algn="ctr"/>
             <a:r>
-              <a:rPr sz="4000" b="1" i="0">
+              <a:rPr sz="3400" b="1" i="0">
                 <a:solidFill>
                   <a:srgbClr val="FFFFFF"/>
                 </a:solidFill>
                 <a:latin typeface="Calibri"/>
               </a:rPr>
-              <a:t>Indices y particionamiento · VetCare</a:t>
+              <a:t>Indices y particionamiento · la clínica</a:t>
             </a:r>
           </a:p>
         </p:txBody>
@@ -5118,7 +5118,7 @@
                 </a:solidFill>
                 <a:latin typeface="Calibri"/>
               </a:rPr>
-              <a:t>Diseno fisico al servicio del PI</a:t>
+              <a:t>Diseno fisico al servicio del proyecto</a:t>
             </a:r>
           </a:p>
         </p:txBody>
@@ -5670,7 +5670,7 @@
                 </a:solidFill>
                 <a:latin typeface="Calibri"/>
               </a:rPr>
-              <a:t>–   En VetCare: idx_cita_estado_fecha sirve para WHERE estado = 'PROGRAMADA' AND fecha_hora &gt;= TIMESTAMP '2026-03-01 00:00:00' y para WHERE estado = 'PROGRAMADA' a secas, y no sirve para un filtro que solo trae fecha_hora; para eso existe idx_cita_fecha_hora.</a:t>
+              <a:t>–   En la clínica: idx_cita_estado_fecha sirve para WHERE estado = 'PROGRAMADA' AND fecha_hora &gt;= TIMESTAMP '2026-03-01 00:00:00' y para WHERE estado = 'PROGRAMADA' a secas, y no sirve para un filtro que solo trae fecha_hora; para eso existe idx_cita_fecha_hora.</a:t>
             </a:r>
           </a:p>
           <a:p>
@@ -8092,7 +8092,7 @@
                 </a:solidFill>
                 <a:latin typeface="Calibri"/>
               </a:rPr>
-              <a:t> Indices y particionamiento · VetCare</a:t>
+              <a:t> Indices y particionamiento · la clínica</a:t>
             </a:r>
           </a:p>
           <a:p>
@@ -8167,7 +8167,7 @@
                 </a:solidFill>
                 <a:latin typeface="Calibri"/>
               </a:rPr>
-              <a:t>–   Recorrido: teoría del tema, una lámina por concepto, y demo del docente sobre VetCare DB.</a:t>
+              <a:t>–   Recorrido: teoría del tema, una lámina por concepto, y demo del docente sobre la base de la clínica.</a:t>
             </a:r>
           </a:p>
           <a:p>
@@ -9961,7 +9961,7 @@
                 </a:solidFill>
                 <a:latin typeface="Calibri"/>
               </a:rPr>
-              <a:t>–   El caso de VetCare que lo justifica hay que nombrarlo: la agenda del dia de la recepcion SIEMPRE filtra por PROGRAMADA, porque nadie abre esa pantalla para ver las citas que ya se atendieron.</a:t>
+              <a:t>–   El caso de la clínica que lo justifica hay que nombrarlo: la agenda del dia de la recepcion SIEMPRE filtra por PROGRAMADA, porque nadie abre esa pantalla para ver las citas que ya se atendieron.</a:t>
             </a:r>
           </a:p>
           <a:p>
@@ -11444,7 +11444,7 @@
                 </a:solidFill>
                 <a:latin typeface="Calibri"/>
               </a:rPr>
-              <a:t>Encuadre · clase regular · VetCare</a:t>
+              <a:t>Encuadre · clase regular · la clínica</a:t>
             </a:r>
           </a:p>
         </p:txBody>
@@ -11559,7 +11559,7 @@
                 </a:solidFill>
                 <a:latin typeface="Calibri"/>
               </a:rPr>
-              <a:t>Teoría Core breve (al servicio del PI)</a:t>
+              <a:t>Teoría Core breve (al servicio del proyecto)</a:t>
             </a:r>
           </a:p>
         </p:txBody>
@@ -13396,7 +13396,7 @@
                 </a:solidFill>
                 <a:latin typeface="Calibri"/>
               </a:rPr>
-              <a:t>–   Primera: el volumen que espera Huellitas, con numeros propios del estudiante, del estilo tantas citas por dia por tantos dias de operacion al ano por tantos anos de historia.</a:t>
+              <a:t>–   Primera: el volumen que espera la clínica, con numeros propios del estudiante, del estilo tantas citas por dia por tantos dias de operacion al ano por tantos anos de historia.</a:t>
             </a:r>
           </a:p>
           <a:p>
@@ -13428,7 +13428,7 @@
                 </a:solidFill>
                 <a:latin typeface="Calibri"/>
               </a:rPr>
-              <a:t>–   Y a cinco anos son 60.000; eso esta tres ordenes de magnitud por debajo del umbral de particionamiento, asi que el veredicto honesto para VetCare es que NO se particiona, y decirlo con el numero al lado vale mas que decir que si por quedar bien.</a:t>
+              <a:t>–   Y a cinco anos son 60.000; eso esta tres ordenes de magnitud por debajo del umbral de particionamiento, asi que el veredicto honesto para la clínica es que NO se particiona, y decirlo con el numero al lado vale mas que decir que si por quedar bien.</a:t>
             </a:r>
           </a:p>
           <a:p>
@@ -13964,7 +13964,7 @@
                 </a:solidFill>
                 <a:latin typeface="Calibri"/>
               </a:rPr>
-              <a:t>–   La demo es el script Codigo/07_indices_vetcare.sql y se corre, no en otra herramienta, porque el volumen sembrado es el que hace cambiar el plan.</a:t>
+              <a:t>–   La demo es el script Codigo/07_indices_clinica.sql y se corre, no en otra herramienta, porque el volumen sembrado es el que hace cambiar el plan.</a:t>
             </a:r>
           </a:p>
           <a:p>
@@ -13980,7 +13980,7 @@
                 </a:solidFill>
                 <a:latin typeface="Calibri"/>
               </a:rPr>
-              <a:t>–   El bloque 0 crea las tablas y siembra 30.000 citas con generate_series; hay que advertir que ese bloque recrea las tablas, asi que se corre en una base vacia y no sobre una VetCare DB con datos que alguien quiera conservar.</a:t>
+              <a:t>–   El bloque 0 crea las tablas y siembra 30.000 citas con generate_series; hay que advertir que ese bloque recrea las tablas, asi que se corre en una base vacia y no sobre la base de la clínica con datos que alguien quiera conservar.</a:t>
             </a:r>
           </a:p>
           <a:p>
@@ -18870,7 +18870,7 @@
                 </a:solidFill>
                 <a:latin typeface="Calibri"/>
               </a:rPr>
-              <a:t>El caso de VetCare que lo justifica.</a:t>
+              <a:t>El caso de la clínica que lo justifica.</a:t>
             </a:r>
             <a:r>
               <a:rPr sz="2000" b="0" i="0">
@@ -19753,7 +19753,7 @@
                 </a:solidFill>
                 <a:latin typeface="Calibri"/>
               </a:rPr>
-              <a:t>–   Sigan el mismo dominio VetCare (no inventen otro caso).</a:t>
+              <a:t>–   Sigan el mismo dominio de la clínica (no inventen otro caso).</a:t>
             </a:r>
           </a:p>
           <a:p>
@@ -19982,7 +19982,7 @@
                 </a:solidFill>
                 <a:latin typeface="Calibri"/>
               </a:rPr>
-              <a:t>Clase 7 · Indices y particionamiento · VetCare</a:t>
+              <a:t>Clase 7 · Indices y particionamiento · la clínica</a:t>
             </a:r>
           </a:p>
         </p:txBody>

--- a/Bases de Datos II/Clases/Clase 7 - Indices y particionamiento/Presentacion.pptx
+++ b/Bases de Datos II/Clases/Clase 7 - Indices y particionamiento/Presentacion.pptx
@@ -7,8 +7,8 @@
   <p:sldIdLst>
     <p:sldId id="256" r:id="rId7"/>
     <p:sldId id="257" r:id="rId8"/>
-    <p:sldId id="258" r:id="rId10"/>
-    <p:sldId id="259" r:id="rId11"/>
+    <p:sldId id="258" r:id="rId9"/>
+    <p:sldId id="259" r:id="rId10"/>
     <p:sldId id="260" r:id="rId12"/>
     <p:sldId id="261" r:id="rId13"/>
     <p:sldId id="262" r:id="rId14"/>
@@ -529,43 +529,77 @@
           <a:lstStyle/>
           <a:p>
             <a:r>
-              <a:t>TEXTO COMPLETO DE LA LÁMINA (se proyecta resumido):</a:t>
-            </a:r>
-          </a:p>
-          <a:p/>
-          <a:p>
-            <a:r>
-              <a:t>Tema de hoy: Indices y particionamiento · la clínica</a:t>
-            </a:r>
-          </a:p>
-          <a:p/>
-          <a:p>
-            <a:r>
-              <a:t>Herramienta: PostgreSQL/PGlite · Bloque 120 min</a:t>
-            </a:r>
-          </a:p>
-          <a:p/>
-          <a:p>
-            <a:r>
-              <a:t>Gratis + navegador · free tier · sin software de pago obligatorio.</a:t>
-            </a:r>
-          </a:p>
-          <a:p/>
-          <a:p>
-            <a:r>
-              <a:t>Recorrido: teoría del tema, una lámina por concepto, y demo del docente sobre la base de la clínica.</a:t>
-            </a:r>
-          </a:p>
-          <a:p/>
-          <a:p>
-            <a:r>
-              <a:t>Cada lámina se sostiene sola: sirve para repasar aunque hayas faltado.</a:t>
-            </a:r>
-          </a:p>
-          <a:p/>
-          <a:p>
-            <a:r>
-              <a:t>Conceptos de hoy: De donde viene la clase · El B-Tree por dentro, en cinco minutos · El precio se paga en cada escritura, y se cuantifica · El costo de sobre-indexar, que casi nunca se menciona.</a:t>
+              <a:t>DESARROLLO (para explicarlo, no se proyecta):</a:t>
+            </a:r>
+          </a:p>
+          <a:p>
+            <a:r>
+              <a:t>La Clase 6 dejo al grupo mirando planes que decian Seq Scan donde se esperaba algo mejor; hoy se construye la estructura que cambia esa linea.</a:t>
+            </a:r>
+          </a:p>
+          <a:p>
+            <a:r>
+              <a:t>Un indice es una estructura de datos auxiliar, redundante y opcional, que el motor crea a partir de una o mas columnas de una tabla, mantiene ordenada por esas columnas y sincroniza automaticamente con cada cambio de los datos.</a:t>
+            </a:r>
+          </a:p>
+          <a:p>
+            <a:r>
+              <a:t>Cada entrada guarda dos cosas: el valor de la clave y un puntero fisico a la fila completa, que en PostgreSQL se llama ctid y en Oracle ROWID.</a:t>
+            </a:r>
+          </a:p>
+          <a:p>
+            <a:r>
+              <a:t>Redundante: no agrega informacion nueva, duplica columnas que ya estan en la tabla, y por eso se puede borrar y volver a crear sin perder un dato.</a:t>
+            </a:r>
+          </a:p>
+          <a:p>
+            <a:r>
+              <a:t>Opcional: ninguna consulta deja de funcionar si el indice no existe, solo tarda mas.</a:t>
+            </a:r>
+          </a:p>
+          <a:p>
+            <a:r>
+              <a:t>Automatico: nadie escribe codigo para mantenerlo, el motor lo actualiza dentro de la misma operacion del INSERT, del UPDATE o del DELETE, y de ahi sale el costo del que habla la segunda mitad de la clase.</a:t>
+            </a:r>
+          </a:p>
+          <a:p>
+            <a:r>
+              <a:t>La base de hoy es la misma de la clase anterior: 30.010 citas del 5 de enero al 23 de julio de 2026, 5.008 mascotas, 2.006 duenos y 16 veterinarios, con estadisticas frescas y sin ningun indice salvo los de las claves primarias.</a:t>
+            </a:r>
+          </a:p>
+          <a:p>
+            <a:r>
+              <a:t>Sobre esa tabla, un indice de una columna sobre cita(fecha_hora) guarda 30.010 entradas de unos 20 a 25 bytes y ocupa del orden de 700 KB frente a los 2 MB de la tabla</a:t>
+            </a:r>
+          </a:p>
+          <a:p>
+            <a:r>
+              <a:t>Como orden de magnitud, cada indice de una columna cuesta entre el 10 % y el 30 % del tamano de la tabla, y esa cifra es estimacion de oficio, no constante del motor.</a:t>
+            </a:r>
+          </a:p>
+          <a:p>
+            <a:r>
+              <a:t>El numero real se lee con; y es el que hay que reportar, no el de esta linea.</a:t>
+            </a:r>
+          </a:p>
+          <a:p>
+            <a:r>
+              <a:t>NOTAS:</a:t>
+            </a:r>
+          </a:p>
+          <a:p>
+            <a:r>
+              <a:t>Los tres adjetivos de la definicion importan.</a:t>
+            </a:r>
+          </a:p>
+          <a:p>
+            <a:r>
+              <a:t>CÓDIGO CITADO (referencia):</a:t>
+            </a:r>
+          </a:p>
+          <a:p>
+            <a:r>
+              <a:t>SELECT pg_size_pretty(pg_relation_size('idx_cita_fecha_hora'))</a:t>
             </a:r>
           </a:p>
         </p:txBody>
@@ -640,37 +674,52 @@
           </a:p>
           <a:p>
             <a:r>
-              <a:t>Se crean los dos compuestos, se corre ANALYZE cita, y se miden tres consultas.</a:t>
-            </a:r>
-          </a:p>
-          <a:p>
-            <a:r>
-              <a:t>Q1 filtra por estado con igualdad y por fecha_hora con rango: favorece a idx_cita_estado_fecha, porque la columna de igualdad es la lider y el rango queda al final.</a:t>
-            </a:r>
-          </a:p>
-          <a:p>
-            <a:r>
-              <a:t>Q2 filtra solo por rango de fecha_hora: favorece a idx_cita_fecha_estado, porque ahi fecha_hora si es la lider.</a:t>
-            </a:r>
-          </a:p>
-          <a:p>
-            <a:r>
-              <a:t>Q3 filtra solo por estado, sin fecha: idx_cita_fecha_estado no le sirve, porque su columna lider no aparece en el WHERE, y con CANCELADA siendo apenas 2.728 de 30.010 filas el motor puede elegir idx_cita_estado_fecha o resolver por conteo.</a:t>
-            </a:r>
-          </a:p>
-          <a:p>
-            <a:r>
-              <a:t>Despues viene la parte que convierte la observacion en experimento: se hace DROP INDEX idx_cita_fecha_estado y se vuelve a medir Q2.</a:t>
-            </a:r>
-          </a:p>
-          <a:p>
-            <a:r>
-              <a:t>El plan cae en idx_cita_fecha_hora, que tambien tiene fecha_hora como lider, o vuelve al recorrido completo, pero NO se pasa a idx_cita_estado_fecha.</a:t>
-            </a:r>
-          </a:p>
-          <a:p>
-            <a:r>
-              <a:t>Un matiz honesto: el planeador decide por costo y puede sorprender, sobre todo entre dos indices que compiten de cerca; la instruccion al grupo es reportar lo que VIO en su plan, no lo que decia la diapositiva, y explicar la eleccion.</a:t>
+              <a:t>Un indice parcial es el que solo contiene las filas que cumplen una condicion, y la sintaxis es WHERE estado = 'PROGRAMADA'.</a:t>
+            </a:r>
+          </a:p>
+          <a:p>
+            <a:r>
+              <a:t>Lo primero que hay que aclarar, porque es donde se confunde todo el mundo: ese WHERE no es el de la consulta, es parte de la DEFINICION del indice y decide que filas entran en el arbol.</a:t>
+            </a:r>
+          </a:p>
+          <a:p>
+            <a:r>
+              <a:t>Con los datos de hoy el ahorro se puede decir con numeros exactos: de las 30.010 citas, 18.187 estan PROGRAMADA, el 61 %; el indice completo indexa 30.010 entradas y el parcial 18.187, cuatro de cada diez menos.</a:t>
+            </a:r>
+          </a:p>
+          <a:p>
+            <a:r>
+              <a:t>Menos entradas es menos disco, menos memoria intermedia ocupada y menos trabajo en cada escritura de una cita que no este programada.</a:t>
+            </a:r>
+          </a:p>
+          <a:p>
+            <a:r>
+              <a:t>La condicion para que el planeador lo use es estricta: tiene que poder demostrar que la consulta trae la misma condicion del indice.</a:t>
+            </a:r>
+          </a:p>
+          <a:p>
+            <a:r>
+              <a:t>WHERE estado = 'PROGRAMADA' AND fecha_hora &gt;=... si lo aprovecha; la misma consulta sin el filtro de estado no, porque el indice no contiene las filas atendidas ni las canceladas y el motor no puede arriesgarse a devolver un resultado incompleto.</a:t>
+            </a:r>
+          </a:p>
+          <a:p>
+            <a:r>
+              <a:t>Cuando el filtro es parte del caso de uso y no del capricho de una consulta, el parcial es la respuesta correcta.</a:t>
+            </a:r>
+          </a:p>
+          <a:p>
+            <a:r>
+              <a:t>Y en C1 los dos indices sobre fecha_hora compiten: se espera que gane el parcial</a:t>
+            </a:r>
+          </a:p>
+          <a:p>
+            <a:r>
+              <a:t>Porque recorre 91 entradas y ya sabe que todas cumplen el estado, mientras el completo recorreria las 150 del dia y tendria que descartar 59 despues de ir a la tabla a leer el estado.</a:t>
+            </a:r>
+          </a:p>
+          <a:p>
+            <a:r>
+              <a:t>La diferencia de costo es pequena con este volumen, asi que si en la corrida gana el completo la respuesta correcta sigue siendo la que reporta lo que se vio.</a:t>
             </a:r>
           </a:p>
           <a:p>
@@ -680,17 +729,17 @@
           </a:p>
           <a:p>
             <a:r>
-              <a:t>Eso es la regla del prefijo izquierdo vista en vivo, y es la unica manera de que no quede como una frase que se memoriza.</a:t>
-            </a:r>
-          </a:p>
-          <a:p>
-            <a:r>
-              <a:t>Un plan distinto bien leido vale mas que el plan esperado copiado.</a:t>
-            </a:r>
-          </a:p>
-          <a:p>
-            <a:r>
-              <a:t>Fuera de la lamina (habla de la practica): La pregunta 2 no pide creer la regla del prefijo izquierdo, pide demostrarla, y el docente tiene que poder anticipar los tres resultados.</a:t>
+              <a:t>El caso de la clínica que lo justifica hay que nombrarlo: la agenda del dia de la recepcion SIEMPRE filtra por PROGRAMADA, porque nadie abre esa pantalla para ver las citas que ya se atendieron.</a:t>
+            </a:r>
+          </a:p>
+          <a:p>
+            <a:r>
+              <a:t>CÓDIGO CITADO (referencia):</a:t>
+            </a:r>
+          </a:p>
+          <a:p>
+            <a:r>
+              <a:t>CREATE INDEX idx_cita_programada_fecha ON cita (fecha_hora)</a:t>
             </a:r>
           </a:p>
         </p:txBody>
@@ -760,37 +809,17 @@
           <a:lstStyle/>
           <a:p>
             <a:r>
-              <a:t>TEXTO COMPLETO DE LA LÁMINA (se proyecta resumido):</a:t>
-            </a:r>
-          </a:p>
-          <a:p/>
-          <a:p>
-            <a:r>
-              <a:t>El nombre importa. El plan imprime «Index Scan using» seguido del nombre, asi que se lee en la salida: `idx_cita_fecha_hora`, `idx_mascota_dueno`, `idx_cita_programada_fecha` para la medicion, y `idx_cita_estado_fecha` + `idx_cita_fecha_estado` para el orden. `idx_cita_fecha` no es ninguno de los cinco: el sufijo es `_fecha_hora`, como la columna.</a:t>
-            </a:r>
-          </a:p>
-          <a:p/>
-          <a:p>
-            <a:r>
-              <a:t>Simple o compuesto. Los tres primeros son de una columna; los dos ultimos llevan las mismas dos columnas en orden inverso, y existen precisamente para que se vea que el orden cambia el resultado.</a:t>
-            </a:r>
-          </a:p>
-          <a:p/>
-          <a:p>
-            <a:r>
-              <a:t>La secuencia que hay que respetar. `EXPLAIN ANALYZE` antes (tiene que salir `Seq Scan`) -&gt; `CREATE INDEX` -&gt; `ANALYZE cita;` -&gt; el mismo `EXPLAIN` otra vez. Sin el `ANALYZE` intermedio el planeador sigue con las estadisticas viejas y puede ignorar el indice que acabas de crear: la mitad de los «no me sirvio» de la clase son este paso saltado.</a:t>
-            </a:r>
-          </a:p>
-          <a:p/>
-          <a:p>
-            <a:r>
-              <a:t>La evidencia de que existen. `SELECT indexname, tablename, indexdef FROM pg_indexes WHERE tablename IN ('cita','mascota') ORDER BY tablename, indexname;` — `indexdef` devuelve el `CREATE INDEX` completo, asi que ahi se ve tambien el `WHERE` del parcial.</a:t>
-            </a:r>
-          </a:p>
-          <a:p/>
-          <a:p>
-            <a:r>
-              <a:t>Y el experimento del orden. Con los dos compuestos creados se miden tres consultas: estado + rango de fecha, solo rango, solo estado. Despues se hace `DROP INDEX idx_cita_fecha_estado` y se vuelve a medir la del rango solo. La columna de igualdad va primero y la de rango al final; un indice cuya columna lider no aparece en el `WHERE` normalmente no se usa.</a:t>
+              <a:t>Fuera de la lamina (habla de la practica, no del tema):</a:t>
+            </a:r>
+          </a:p>
+          <a:p>
+            <a:r>
+              <a:t>- Cual de los dos elige. Con `idx_cita_fecha_hora` y `idx_cita_programada_fecha` compitiendo por la misma consulta, el plan nombra al ganador: hay que leer el `Index Scan using ...` y escribir cual salio, porque la rubrica descuenta si no se comenta.</a:t>
+            </a:r>
+          </a:p>
+          <a:p>
+            <a:r>
+              <a:t>- La pregunta 1 lo exige por nombre y su rubrica descuenta si falta; la pregunta 4 lo vuelve a cobrar como afirmacion correcta</a:t>
             </a:r>
           </a:p>
         </p:txBody>
@@ -865,52 +894,32 @@
           </a:p>
           <a:p>
             <a:r>
-              <a:t>Un indice parcial es el que solo contiene las filas que cumplen una condicion, y la sintaxis es WHERE estado = 'PROGRAMADA'.</a:t>
-            </a:r>
-          </a:p>
-          <a:p>
-            <a:r>
-              <a:t>Lo primero que hay que aclarar, porque es donde se confunde todo el mundo: ese WHERE no es el de la consulta, es parte de la DEFINICION del indice y decide que filas entran en el arbol.</a:t>
-            </a:r>
-          </a:p>
-          <a:p>
-            <a:r>
-              <a:t>Con los datos de hoy el ahorro se puede decir con numeros exactos: de las 30.010 citas, 18.187 estan PROGRAMADA, el 61 %; el indice completo indexa 30.010 entradas y el parcial 18.187, cuatro de cada diez menos.</a:t>
-            </a:r>
-          </a:p>
-          <a:p>
-            <a:r>
-              <a:t>Menos entradas es menos disco, menos memoria intermedia ocupada y menos trabajo en cada escritura de una cita que no este programada.</a:t>
-            </a:r>
-          </a:p>
-          <a:p>
-            <a:r>
-              <a:t>La condicion para que el planeador lo use es estricta: tiene que poder demostrar que la consulta trae la misma condicion del indice.</a:t>
-            </a:r>
-          </a:p>
-          <a:p>
-            <a:r>
-              <a:t>WHERE estado = 'PROGRAMADA' AND fecha_hora &gt;=... si lo aprovecha; la misma consulta sin el filtro de estado no, porque el indice no contiene las filas atendidas ni las canceladas y el motor no puede arriesgarse a devolver un resultado incompleto.</a:t>
-            </a:r>
-          </a:p>
-          <a:p>
-            <a:r>
-              <a:t>Cuando el filtro es parte del caso de uso y no del capricho de una consulta, el parcial es la respuesta correcta.</a:t>
-            </a:r>
-          </a:p>
-          <a:p>
-            <a:r>
-              <a:t>Y en C1 los dos indices sobre fecha_hora compiten: se espera que gane el parcial</a:t>
-            </a:r>
-          </a:p>
-          <a:p>
-            <a:r>
-              <a:t>Porque recorre 91 entradas y ya sabe que todas cumplen el estado, mientras el completo recorreria las 150 del dia y tendria que descartar 59 despues de ir a la tabla a leer el estado.</a:t>
-            </a:r>
-          </a:p>
-          <a:p>
-            <a:r>
-              <a:t>La diferencia de costo es pequena con este volumen, asi que si en la corrida gana el completo la respuesta correcta sigue siendo la que reporta lo que se vio.</a:t>
+              <a:t>Particionar es dividir una sola tabla logica en fragmentos fisicos llamados particiones, segun una clave, de modo que el motor descarte de entrada las que no pueden contener lo buscado; ese descarte se llama poda de particiones o partition pruning.</a:t>
+            </a:r>
+          </a:p>
+          <a:p>
+            <a:r>
+              <a:t>La forma mas frecuente es por rango de fechas: una particion por ano, de manera que una consulta de 2026 lee unicamente la particion de 2026 y el plan lo muestra.</a:t>
+            </a:r>
+          </a:p>
+          <a:p>
+            <a:r>
+              <a:t>La frase que lo separa del tema anterior es corta: el indice ordena, la particion separa.</a:t>
+            </a:r>
+          </a:p>
+          <a:p>
+            <a:r>
+              <a:t>El particionamiento se implementa completo —DDL, dos particiones, migracion de las citas, prueba de enrutamiento y prueba de poda— sobre una base de 5.010 citas repartidas entre 2025 y 2026.</a:t>
+            </a:r>
+          </a:p>
+          <a:p>
+            <a:r>
+              <a:t>Si el docente anuncia que hoy no se implementa.</a:t>
+            </a:r>
+          </a:p>
+          <a:p>
+            <a:r>
+              <a:t>Error comun: declarar la clave primaria solo sobre id_cita.</a:t>
             </a:r>
           </a:p>
           <a:p>
@@ -920,17 +929,27 @@
           </a:p>
           <a:p>
             <a:r>
-              <a:t>El caso de la clínica que lo justifica hay que nombrarlo: la agenda del dia de la recepcion SIEMPRE filtra por PROGRAMADA, porque nadie abre esa pantalla para ver las citas que ya se atendieron.</a:t>
-            </a:r>
-          </a:p>
-          <a:p>
-            <a:r>
-              <a:t>CÓDIGO CITADO (referencia):</a:t>
-            </a:r>
-          </a:p>
-          <a:p>
-            <a:r>
-              <a:t>CREATE INDEX idx_cita_programada_fecha ON cita (fecha_hora)</a:t>
+              <a:t>El umbral en el que empieza a pagar en produccion es alto y hay que decirlo con numeros para que nadie lo use de adorno: como convencion de oficio se piensa en particionar por encima de unas decenas de millones de filas o de tablas de decenas de gigabytes, y por debajo de eso un indice sobre fecha_hora hace el mismo trabajo con mucho menos mantenimiento.</a:t>
+            </a:r>
+          </a:p>
+          <a:p>
+            <a:r>
+              <a:t>Ahora la advertencia importante para el docente, porque es la que ha costado puntos: eso NO significa que hoy el particionamiento sea una idea conceptual que solo se cuenta.</a:t>
+            </a:r>
+          </a:p>
+          <a:p>
+            <a:r>
+              <a:t>Lo que si es cierto, y hay que decirlo en la misma frase, es que con 5.010 filas la ganancia de RENDIMIENTO no es apreciable: lo que se demuestra hoy es que el motor descarta particiones enteras antes de leer, y que archivar un ano se vuelve trivial.</a:t>
+            </a:r>
+          </a:p>
+          <a:p>
+            <a:r>
+              <a:t>En una tabla particionada PostgreSQL exige que la PK incluya la columna de particion, asi que la clave pasa a ser (id_cita, fecha_hora).</a:t>
+            </a:r>
+          </a:p>
+          <a:p>
+            <a:r>
+              <a:t>Fuera de la lamina (habla de la practica): Si el docente anuncia que hoy no se implementa, el estudiante llega al taller con una respuesta en prosa a una pregunta que pide SQL ejecutado.</a:t>
             </a:r>
           </a:p>
         </p:txBody>
@@ -1000,53 +1019,97 @@
           <a:lstStyle/>
           <a:p>
             <a:r>
-              <a:t>TEXTO COMPLETO DE LA LÁMINA (se proyecta resumido):</a:t>
-            </a:r>
-          </a:p>
-          <a:p/>
-          <a:p>
-            <a:r>
-              <a:t>Que es. Un indice que solo contiene las filas que cumplen una condicion: `CREATE INDEX idx_cita_programada_fecha ON cita (fecha_hora) WHERE estado = 'PROGRAMADA';`. El `WHERE` no es el de la consulta: es parte de la definicion del indice y decide que filas entran en el arbol.</a:t>
-            </a:r>
-          </a:p>
-          <a:p/>
-          <a:p>
-            <a:r>
-              <a:t>Cuanto se ahorra, con los datos de hoy. De las 30.010 citas sembradas, 18.187 estan `PROGRAMADA` (el 61 %): el indice completo indexa 30.010 entradas y el parcial 18.187, cuatro de cada diez menos. Menos entradas es menos disco, menos cache ocupada y menos trabajo en cada escritura de una cita que no este programada.</a:t>
-            </a:r>
-          </a:p>
-          <a:p/>
-          <a:p>
-            <a:r>
-              <a:t>La condicion para que sirva. El planeador solo lo usa si puede demostrar que la consulta trae la misma condicion del indice. `WHERE estado = 'PROGRAMADA' AND fecha_hora &gt;= ...` si lo aprovecha; la misma consulta sin el filtro de estado no, porque el indice no contiene las filas atendidas ni las canceladas.</a:t>
-            </a:r>
-          </a:p>
-          <a:p/>
-          <a:p>
-            <a:r>
-              <a:t>El caso de la clínica que lo justifica. La agenda del dia de la recepcion siempre filtra por `PROGRAMADA`: nadie abre la pantalla para ver las citas que ya se atendieron. Cuando el filtro es parte del caso de uso y no del capricho de una consulta, el parcial es la respuesta correcta.</a:t>
-            </a:r>
-          </a:p>
-          <a:p/>
-          <a:p>
-            <a:r>
-              <a:t>Cual de los dos elige. Con `idx_cita_fecha_hora` y `idx_cita_programada_fecha` compitiendo por la misma consulta, el plan nombra al ganador: hay que leer el `Index Scan using ...` y escribir cual salio.</a:t>
-            </a:r>
-          </a:p>
-          <a:p/>
-          <a:p>
-            <a:r>
-              <a:t>Fuera de la lamina (habla de la practica, no del tema):</a:t>
-            </a:r>
-          </a:p>
-          <a:p>
-            <a:r>
-              <a:t>- Cual de los dos elige. Con `idx_cita_fecha_hora` y `idx_cita_programada_fecha` compitiendo por la misma consulta, el plan nombra al ganador: hay que leer el `Index Scan using ...` y escribir cual salio, porque la rubrica descuenta si no se comenta.</a:t>
-            </a:r>
-          </a:p>
-          <a:p>
-            <a:r>
-              <a:t>- La pregunta 1 lo exige por nombre y su rubrica descuenta si falta; la pregunta 4 lo vuelve a cobrar como afirmacion correcta</a:t>
+              <a:t>DESARROLLO (para explicarlo, no se proyecta):</a:t>
+            </a:r>
+          </a:p>
+          <a:p>
+            <a:r>
+              <a:t>El DDL son tres sentencias y dos trampas.</a:t>
+            </a:r>
+          </a:p>
+          <a:p>
+            <a:r>
+              <a:t>La primera sentencia declara la tabla particionada: PARTITION BY RANGE (fecha_hora)</a:t>
+            </a:r>
+          </a:p>
+          <a:p>
+            <a:r>
+              <a:t>Las otras dos crean las particiones: TO (TIMESTAMP '2026-01-01'); y su gemela de 2026.</a:t>
+            </a:r>
+          </a:p>
+          <a:p>
+            <a:r>
+              <a:t>Primera trampa, la que cuesta la pregunta: en una tabla particionada la clave primaria DEBE incluir la columna de particion, asi que PRIMARY KEY (id_cita, fecha_hora) y no PRIMARY KEY (id_cita) a secas.</a:t>
+            </a:r>
+          </a:p>
+          <a:p>
+            <a:r>
+              <a:t>Esto no es una rareza de MySQL, es la regla de PostgreSQL, y el mensaje de error del motor no dice «te falta la columna de particion» con esas palabras, asi que el estudiante que lo intenta se queda mirando un error que no entiende.</a:t>
+            </a:r>
+          </a:p>
+          <a:p>
+            <a:r>
+              <a:t>Segunda trampa, mas silenciosa: el rango es cerrado por abajo y abierto por arriba, de modo que el TO de una particion es exactamente el FROM de la siguiente y nunca se solapan</a:t>
+            </a:r>
+          </a:p>
+          <a:p>
+            <a:r>
+              <a:t>Quien escriba TO (TIMESTAMP '2025-12-31') se queda sin sitio donde poner las citas del 31 de diciembre y el INSERT falla con un error de que no se encontro particion.</a:t>
+            </a:r>
+          </a:p>
+          <a:p>
+            <a:r>
+              <a:t>Despues del DDL viene la migracion,, y la prueba de que el reparto ocurrio:, MIN(fecha_hora), MAX(fecha_hora) tableoid es una columna de sistema que dice en que tabla FISICA vive cada fila y::regclass la traduce a nombre.</a:t>
+            </a:r>
+          </a:p>
+          <a:p>
+            <a:r>
+              <a:t>La poda se comprueba con EXPLAIN ANALYZE de una consulta acotada a 2026: en el plan debe aparecer SOLO cita_hist_2026.</a:t>
+            </a:r>
+          </a:p>
+          <a:p>
+            <a:r>
+              <a:t>NOTAS:</a:t>
+            </a:r>
+          </a:p>
+          <a:p>
+            <a:r>
+              <a:t>Sin esa consulta no hay evidencia del enrutamiento, solo un INSERT que no dio error.</a:t>
+            </a:r>
+          </a:p>
+          <a:p>
+            <a:r>
+              <a:t>CÓDIGO CITADO (referencia):</a:t>
+            </a:r>
+          </a:p>
+          <a:p>
+            <a:r>
+              <a:t>CREATE TABLE cita_hist (id_cita INT, id_mascota INT, id_veterinario INT, fecha_hora TIMESTAMP NOT NULL, estado TEXT, PRIMARY KEY (id_cita, fecha_hora))</a:t>
+            </a:r>
+          </a:p>
+          <a:p>
+            <a:r>
+              <a:t>CREATE TABLE cita_hist_2025 PARTITION OF cita_hist FOR VALUES FROM (TIMESTAMP '2025-01-01')</a:t>
+            </a:r>
+          </a:p>
+          <a:p>
+            <a:r>
+              <a:t>INSERT INTO cita_hist SELECT id_cita, id_mascota, id_veterinario, fecha_hora, estado FROM cita</a:t>
+            </a:r>
+          </a:p>
+          <a:p>
+            <a:r>
+              <a:t>SELECT tableoid::regclass AS particion, COUNT(*)</a:t>
+            </a:r>
+          </a:p>
+          <a:p>
+            <a:r>
+              <a:t>FROM cita_hist GROUP BY 1 ORDER BY 1</a:t>
+            </a:r>
+          </a:p>
+          <a:p>
+            <a:r>
+              <a:t>Fuera de la lamina (habla de la practica): Sin esa consulta no hay evidencia del enrutamiento, solo un INSERT que no dio error, y la rubrica lo pide explicitamente.</a:t>
             </a:r>
           </a:p>
         </p:txBody>
@@ -1121,32 +1184,52 @@
           </a:p>
           <a:p>
             <a:r>
-              <a:t>Particionar es dividir una sola tabla logica en fragmentos fisicos llamados particiones, segun una clave, de modo que el motor descarte de entrada las que no pueden contener lo buscado; ese descarte se llama poda de particiones o partition pruning.</a:t>
-            </a:r>
-          </a:p>
-          <a:p>
-            <a:r>
-              <a:t>La forma mas frecuente es por rango de fechas: una particion por ano, de manera que una consulta de 2026 lee unicamente la particion de 2026 y el plan lo muestra.</a:t>
-            </a:r>
-          </a:p>
-          <a:p>
-            <a:r>
-              <a:t>La frase que lo separa del tema anterior es corta: el indice ordena, la particion separa.</a:t>
-            </a:r>
-          </a:p>
-          <a:p>
-            <a:r>
-              <a:t>El particionamiento se implementa completo —DDL, dos particiones, migracion de las citas, prueba de enrutamiento y prueba de poda— sobre una base de 5.010 citas repartidas entre 2025 y 2026.</a:t>
-            </a:r>
-          </a:p>
-          <a:p>
-            <a:r>
-              <a:t>Si el docente anuncia que hoy no se implementa.</a:t>
-            </a:r>
-          </a:p>
-          <a:p>
-            <a:r>
-              <a:t>Error comun: declarar la clave primaria solo sobre id_cita.</a:t>
+              <a:t>Primera: el volumen que espera la clínica, con numeros propios del estudiante, del estilo tantas citas por dia por tantos dias de operacion al ano por tantos anos de historia.</a:t>
+            </a:r>
+          </a:p>
+          <a:p>
+            <a:r>
+              <a:t>Un dato de referencia para calibrar: 40 citas diarias durante 300 dias son 12.000 citas al ano</a:t>
+            </a:r>
+          </a:p>
+          <a:p>
+            <a:r>
+              <a:t>Y a cinco anos son 60.000; eso esta tres ordenes de magnitud por debajo del umbral de particionamiento, asi que el veredicto honesto para la clínica es que NO se particiona, y decirlo con el numero al lado vale mas que decir que si por quedar bien.</a:t>
+            </a:r>
+          </a:p>
+          <a:p>
+            <a:r>
+              <a:t>Segunda: la ganancia de rendimiento con 5.010 filas no es apreciable.</a:t>
+            </a:r>
+          </a:p>
+          <a:p>
+            <a:r>
+              <a:t>Tercera: lo que si quedo comprobado, que son dos cosas concretas, la poda de particiones en el plan y la facilidad de archivado.</a:t>
+            </a:r>
+          </a:p>
+          <a:p>
+            <a:r>
+              <a:t>Y ahi esta el caso que no tiene alternativa, el que justifica aprender el tema aunque hoy no se aplique: borrar cinco anos de historia con DELETE FROM cita WHERE fecha_hora &lt; TIMESTAMP '2021-01-01 00:00:00' toca millones de filas</a:t>
+            </a:r>
+          </a:p>
+          <a:p>
+            <a:r>
+              <a:t>Genera un registro de transacciones enorme, sostiene bloqueos largos y deja la tabla que hay que limpiar despues</a:t>
+            </a:r>
+          </a:p>
+          <a:p>
+            <a:r>
+              <a:t>En cambio DROP TABLE cita_hist_2021 es una operacion de metadatos que tarda un instante, y ALTER TABLE cita_hist DETACH PARTITION cita_hist_2021 la separa sin borrar los datos si hay que conservarlos aparte.</a:t>
+            </a:r>
+          </a:p>
+          <a:p>
+            <a:r>
+              <a:t>En Oracle la sentencia equivalente es ALTER TABLE cita DROP PARTITION cita_2021, y la diferencia de sintaxis conviene mencionarla porque el motor de hoy es PostgreSQL.</a:t>
+            </a:r>
+          </a:p>
+          <a:p>
+            <a:r>
+              <a:t>Ese contraste entre DROP de particion y DELETE masivo conecta directo con la Clase 8, donde el registro de transacciones y la duracion de los bloqueos son el tema.</a:t>
             </a:r>
           </a:p>
           <a:p>
@@ -1156,27 +1239,12 @@
           </a:p>
           <a:p>
             <a:r>
-              <a:t>El umbral en el que empieza a pagar en produccion es alto y hay que decirlo con numeros para que nadie lo use de adorno: como convencion de oficio se piensa en particionar por encima de unas decenas de millones de filas o de tablas de decenas de gigabytes, y por debajo de eso un indice sobre fecha_hora hace el mismo trabajo con mucho menos mantenimiento.</a:t>
-            </a:r>
-          </a:p>
-          <a:p>
-            <a:r>
-              <a:t>Ahora la advertencia importante para el docente, porque es la que ha costado puntos: eso NO significa que hoy el particionamiento sea una idea conceptual que solo se cuenta.</a:t>
-            </a:r>
-          </a:p>
-          <a:p>
-            <a:r>
-              <a:t>Lo que si es cierto, y hay que decirlo en la misma frase, es que con 5.010 filas la ganancia de RENDIMIENTO no es apreciable: lo que se demuestra hoy es que el motor descarta particiones enteras antes de leer, y que archivar un ano se vuelve trivial.</a:t>
-            </a:r>
-          </a:p>
-          <a:p>
-            <a:r>
-              <a:t>En una tabla particionada PostgreSQL exige que la PK incluya la columna de particion, asi que la clave pasa a ser (id_cita, fecha_hora).</a:t>
-            </a:r>
-          </a:p>
-          <a:p>
-            <a:r>
-              <a:t>Fuera de la lamina (habla de la practica): Si el docente anuncia que hoy no se implementa, el estudiante llega al taller con una respuesta en prosa a una pregunta que pide SQL ejecutado.</a:t>
+              <a:t>Un veredicto de particionamiento tiene tres exigencias distintas.</a:t>
+            </a:r>
+          </a:p>
+          <a:p>
+            <a:r>
+              <a:t>Fuera de la lamina (habla de la practica): Segunda: la ganancia de rendimiento con 5.010 filas no es apreciable, y reconocerlo suma puntos en vez de restarlos, porque la alternativa es inventar una mejora que el plan no muestra.</a:t>
             </a:r>
           </a:p>
         </p:txBody>
@@ -1251,47 +1319,27 @@
           </a:p>
           <a:p>
             <a:r>
-              <a:t>El DDL son tres sentencias y dos trampas.</a:t>
-            </a:r>
-          </a:p>
-          <a:p>
-            <a:r>
-              <a:t>La primera sentencia declara la tabla particionada: PARTITION BY RANGE (fecha_hora)</a:t>
-            </a:r>
-          </a:p>
-          <a:p>
-            <a:r>
-              <a:t>Las otras dos crean las particiones: TO (TIMESTAMP '2026-01-01'); y su gemela de 2026.</a:t>
-            </a:r>
-          </a:p>
-          <a:p>
-            <a:r>
-              <a:t>Primera trampa, la que cuesta la pregunta: en una tabla particionada la clave primaria DEBE incluir la columna de particion, asi que PRIMARY KEY (id_cita, fecha_hora) y no PRIMARY KEY (id_cita) a secas.</a:t>
-            </a:r>
-          </a:p>
-          <a:p>
-            <a:r>
-              <a:t>Esto no es una rareza de MySQL, es la regla de PostgreSQL, y el mensaje de error del motor no dice «te falta la columna de particion» con esas palabras, asi que el estudiante que lo intenta se queda mirando un error que no entiende.</a:t>
-            </a:r>
-          </a:p>
-          <a:p>
-            <a:r>
-              <a:t>Segunda trampa, mas silenciosa: el rango es cerrado por abajo y abierto por arriba, de modo que el TO de una particion es exactamente el FROM de la siguiente y nunca se solapan</a:t>
-            </a:r>
-          </a:p>
-          <a:p>
-            <a:r>
-              <a:t>Quien escriba TO (TIMESTAMP '2025-12-31') se queda sin sitio donde poner las citas del 31 de diciembre y el INSERT falla con un error de que no se encontro particion.</a:t>
-            </a:r>
-          </a:p>
-          <a:p>
-            <a:r>
-              <a:t>Despues del DDL viene la migracion,, y la prueba de que el reparto ocurrio:, MIN(fecha_hora), MAX(fecha_hora) tableoid es una columna de sistema que dice en que tabla FISICA vive cada fila y::regclass la traduce a nombre.</a:t>
-            </a:r>
-          </a:p>
-          <a:p>
-            <a:r>
-              <a:t>La poda se comprueba con EXPLAIN ANALYZE de una consulta acotada a 2026: en el plan debe aparecer SOLO cita_hist_2026.</a:t>
+              <a:t>La demo es el script Codigo/07_indices_clinica.sql y se corre, no en otra herramienta, porque el volumen sembrado es el que hace cambiar el plan.</a:t>
+            </a:r>
+          </a:p>
+          <a:p>
+            <a:r>
+              <a:t>Termina con una consulta de control que debe devolver 18.187 PROGRAMADA, 9.095 ATENDIDA y 2.728 CANCELADA; si esos numeros no salen, nada de lo que sigue cuadra y hay que parar ahi.</a:t>
+            </a:r>
+          </a:p>
+          <a:p>
+            <a:r>
+              <a:t>El bloque 1 es la linea base, con los dos Seq Scan.</a:t>
+            </a:r>
+          </a:p>
+          <a:p>
+            <a:r>
+              <a:t>El bloque 3 es el experimento del orden, con su DROP INDEX al final.</a:t>
+            </a:r>
+          </a:p>
+          <a:p>
+            <a:r>
+              <a:t>Si el bloque 0 no alcanza el tiempo.</a:t>
             </a:r>
           </a:p>
           <a:p>
@@ -1301,42 +1349,37 @@
           </a:p>
           <a:p>
             <a:r>
-              <a:t>Sin esa consulta no hay evidencia del enrutamiento, solo un INSERT que no dio error.</a:t>
-            </a:r>
-          </a:p>
-          <a:p>
-            <a:r>
-              <a:t>CÓDIGO CITADO (referencia):</a:t>
-            </a:r>
-          </a:p>
-          <a:p>
-            <a:r>
-              <a:t>CREATE TABLE cita_hist (id_cita INT, id_mascota INT, id_veterinario INT, fecha_hora TIMESTAMP NOT NULL, estado TEXT, PRIMARY KEY (id_cita, fecha_hora))</a:t>
-            </a:r>
-          </a:p>
-          <a:p>
-            <a:r>
-              <a:t>CREATE TABLE cita_hist_2025 PARTITION OF cita_hist FOR VALUES FROM (TIMESTAMP '2025-01-01')</a:t>
-            </a:r>
-          </a:p>
-          <a:p>
-            <a:r>
-              <a:t>INSERT INTO cita_hist SELECT id_cita, id_mascota, id_veterinario, fecha_hora, estado FROM cita</a:t>
-            </a:r>
-          </a:p>
-          <a:p>
-            <a:r>
-              <a:t>SELECT tableoid::regclass AS particion, COUNT(*)</a:t>
-            </a:r>
-          </a:p>
-          <a:p>
-            <a:r>
-              <a:t>FROM cita_hist GROUP BY 1 ORDER BY 1</a:t>
-            </a:r>
-          </a:p>
-          <a:p>
-            <a:r>
-              <a:t>Fuera de la lamina (habla de la practica): Sin esa consulta no hay evidencia del enrutamiento, solo un INSERT que no dio error, y la rubrica lo pide explicitamente.</a:t>
+              <a:t>El script trae cinco bloques y el orden importa.</a:t>
+            </a:r>
+          </a:p>
+          <a:p>
+            <a:r>
+              <a:t>El bloque 2 crea los tres indices, corre ANALYZE y repite las dos consultas: ese es el momento de la clase, y conviene proyectar las dos salidas una debajo de la otra y leer en voz alta la linea del nodo.</a:t>
+            </a:r>
+          </a:p>
+          <a:p>
+            <a:r>
+              <a:t>El bloque 4 es el particionamiento completo, con una salvedad que hay que decir en vivo: como la siembra del bloque 0 pone todas las citas en 2026, todo cae en cita_hist_2026 y cita_hist_2025 queda vacia; eso ya demuestra el enrutamiento.</a:t>
+            </a:r>
+          </a:p>
+          <a:p>
+            <a:r>
+              <a:t>Lo que no se puede hacer es medir en una base de 20 filas: el plan no va a cambiar y el grupo se va a llevar la conclusion contraria.</a:t>
+            </a:r>
+          </a:p>
+          <a:p>
+            <a:r>
+              <a:t>Fuera de la lamina (habla de la practica): El bloque 0 crea las tablas y siembra la misma base de la actividad: 10 citas a mano mas 30.000 con generate_series, 30.010 en total; hay que advertir que ese bloque recrea las tablas, asi que se corre en una base vacia y no sobre la base de la clínica con datos que alguien quiera conservar.</a:t>
+            </a:r>
+          </a:p>
+          <a:p>
+            <a:r>
+              <a:t>Fuera de la lamina (habla de la practica): El bloque 4 es el particionamiento completo, con una salvedad que hay que decir en vivo: como la siembra del bloque 0 pone todas las citas en 2026, todo cae en cita_hist_2026 y cita_hist_2025 queda vacia; eso ya demuestra el enrutamiento, y la base de la pregunta 3 si reparte sus 5.010 citas entre los dos anos.</a:t>
+            </a:r>
+          </a:p>
+          <a:p>
+            <a:r>
+              <a:t>Fuera de la lamina (habla de la practica): Si el bloque 0 no alcanza el tiempo, la alternativa es abrir directamente la pregunta 1 de la clase, que ya trae la base sembrada, y correr los bloques 1 y 2 ahi.</a:t>
             </a:r>
           </a:p>
         </p:txBody>
@@ -1406,376 +1449,6 @@
           <a:lstStyle/>
           <a:p>
             <a:r>
-              <a:t>TEXTO COMPLETO DE LA LÁMINA (se proyecta resumido):</a:t>
-            </a:r>
-          </a:p>
-          <a:p/>
-          <a:p>
-            <a:r>
-              <a:t>El DDL, en tres sentencias. `CREATE TABLE cita_hist (... ) PARTITION BY RANGE (fecha_hora);` y despues una particion por ano: `CREATE TABLE cita_hist_2025 PARTITION OF cita_hist FOR VALUES FROM (TIMESTAMP '2025-01-01') TO (TIMESTAMP '2026-01-01');`. El rango es cerrado por abajo y abierto por arriba, asi que el `TO` de una particion es el `FROM` de la siguiente y nunca se solapan.</a:t>
-            </a:r>
-          </a:p>
-          <a:p/>
-          <a:p>
-            <a:r>
-              <a:t>La trampa que cuesta la pregunta. En una tabla particionada la clave primaria debe incluir la columna de particion: `PRIMARY KEY (id_cita, fecha_hora)`. Un `PRIMARY KEY (id_cita)` a secas no compila, y el error del motor no dice «te falta la columna de particion» con esas palabras.</a:t>
-            </a:r>
-          </a:p>
-          <a:p/>
-          <a:p>
-            <a:r>
-              <a:t>La prueba de que el reparto ocurrio. `SELECT tableoid::regclass AS particion, COUNT(*), MIN(fecha_hora), MAX(fecha_hora) FROM cita_hist GROUP BY 1 ORDER BY 1;` — `tableoid` es la columna de sistema que dice en que tabla fisica vive cada fila, y `::regclass` la traduce a nombre. Sin esta consulta no hay evidencia del enrutamiento, solo un `INSERT` que no dio error.</a:t>
-            </a:r>
-          </a:p>
-          <a:p/>
-          <a:p>
-            <a:r>
-              <a:t>La poda, que es lo unico que mejora hoy. En `EXPLAIN ANALYZE` de una consulta acotada a 2026 el plan tiene que mencionar solo `cita_hist_2026`. Con 5.010 filas el tiempo no baja de forma apreciable y hay que decirlo: lo que se demuestra es que el motor descarta particiones enteras antes de leer.</a:t>
-            </a:r>
-          </a:p>
-          <a:p/>
-          <a:p>
-            <a:r>
-              <a:t>Y el beneficio real, que es de mantenimiento. Archivar 2025 es `DROP TABLE cita_hist_2025`, una operacion de metadatos que tarda un instante. El `DELETE FROM cita WHERE fecha_hora &lt; ...` equivalente toca millones de filas, infla el registro de transacciones y sostiene bloqueos largos — el contraste conecta directo con la Clase 8.</a:t>
-            </a:r>
-          </a:p>
-        </p:txBody>
-      </p:sp>
-      <p:sp>
-        <p:nvSpPr>
-          <p:cNvPr id="4" name="Slide Number Placeholder 3"/>
-          <p:cNvSpPr>
-            <a:spLocks noGrp="1"/>
-          </p:cNvSpPr>
-          <p:nvPr>
-            <p:ph type="sldNum" idx="5" sz="quarter"/>
-          </p:nvPr>
-        </p:nvSpPr>
-        <p:spPr/>
-      </p:sp>
-    </p:spTree>
-  </p:cSld>
-  <p:clrMapOvr>
-    <a:masterClrMapping/>
-  </p:clrMapOvr>
-</p:notes>
-</file>
-
-<file path=ppt/notesSlides/notesSlide17.xml><?xml version="1.0" encoding="utf-8"?>
-<p:notes xmlns:a="http://schemas.openxmlformats.org/drawingml/2006/main" xmlns:p="http://schemas.openxmlformats.org/presentationml/2006/main" xmlns:r="http://schemas.openxmlformats.org/officeDocument/2006/relationships">
-  <p:cSld>
-    <p:spTree>
-      <p:nvGrpSpPr>
-        <p:cNvPr id="1" name=""/>
-        <p:cNvGrpSpPr/>
-        <p:nvPr/>
-      </p:nvGrpSpPr>
-      <p:grpSpPr>
-        <a:xfrm>
-          <a:off x="0" y="0"/>
-          <a:ext cx="0" cy="0"/>
-          <a:chOff x="0" y="0"/>
-          <a:chExt cx="0" cy="0"/>
-        </a:xfrm>
-      </p:grpSpPr>
-      <p:sp>
-        <p:nvSpPr>
-          <p:cNvPr id="2" name="Slide Image Placeholder 1"/>
-          <p:cNvSpPr>
-            <a:spLocks noGrp="1"/>
-          </p:cNvSpPr>
-          <p:nvPr>
-            <p:ph type="sldImg" idx="2"/>
-          </p:nvPr>
-        </p:nvSpPr>
-        <p:spPr/>
-      </p:sp>
-      <p:sp>
-        <p:nvSpPr>
-          <p:cNvPr id="3" name="Notes Placeholder 2"/>
-          <p:cNvSpPr>
-            <a:spLocks noGrp="1"/>
-          </p:cNvSpPr>
-          <p:nvPr>
-            <p:ph type="body" idx="3" sz="quarter"/>
-          </p:nvPr>
-        </p:nvSpPr>
-        <p:spPr/>
-        <p:txBody>
-          <a:bodyPr/>
-          <a:lstStyle/>
-          <a:p>
-            <a:r>
-              <a:t>DESARROLLO (para explicarlo, no se proyecta):</a:t>
-            </a:r>
-          </a:p>
-          <a:p>
-            <a:r>
-              <a:t>Primera: el volumen que espera la clínica, con numeros propios del estudiante, del estilo tantas citas por dia por tantos dias de operacion al ano por tantos anos de historia.</a:t>
-            </a:r>
-          </a:p>
-          <a:p>
-            <a:r>
-              <a:t>Un dato de referencia para calibrar: 40 citas diarias durante 300 dias son 12.000 citas al ano</a:t>
-            </a:r>
-          </a:p>
-          <a:p>
-            <a:r>
-              <a:t>Y a cinco anos son 60.000; eso esta tres ordenes de magnitud por debajo del umbral de particionamiento, asi que el veredicto honesto para la clínica es que NO se particiona, y decirlo con el numero al lado vale mas que decir que si por quedar bien.</a:t>
-            </a:r>
-          </a:p>
-          <a:p>
-            <a:r>
-              <a:t>Segunda: la ganancia de rendimiento con 5.010 filas no es apreciable.</a:t>
-            </a:r>
-          </a:p>
-          <a:p>
-            <a:r>
-              <a:t>Tercera: lo que si quedo comprobado, que son dos cosas concretas, la poda de particiones en el plan y la facilidad de archivado.</a:t>
-            </a:r>
-          </a:p>
-          <a:p>
-            <a:r>
-              <a:t>Y ahi esta el caso que no tiene alternativa, el que justifica aprender el tema aunque hoy no se aplique: borrar cinco anos de historia con DELETE FROM cita WHERE fecha_hora &lt; TIMESTAMP '2021-01-01 00:00:00' toca millones de filas</a:t>
-            </a:r>
-          </a:p>
-          <a:p>
-            <a:r>
-              <a:t>Genera un registro de transacciones enorme, sostiene bloqueos largos y deja la tabla que hay que limpiar despues</a:t>
-            </a:r>
-          </a:p>
-          <a:p>
-            <a:r>
-              <a:t>En cambio DROP TABLE cita_hist_2021 es una operacion de metadatos que tarda un instante, y ALTER TABLE cita_hist DETACH PARTITION cita_hist_2021 la separa sin borrar los datos si hay que conservarlos aparte.</a:t>
-            </a:r>
-          </a:p>
-          <a:p>
-            <a:r>
-              <a:t>En Oracle la sentencia equivalente es ALTER TABLE cita DROP PARTITION cita_2021, y la diferencia de sintaxis conviene mencionarla porque el motor de hoy es PostgreSQL.</a:t>
-            </a:r>
-          </a:p>
-          <a:p>
-            <a:r>
-              <a:t>Ese contraste entre DROP de particion y DELETE masivo conecta directo con la Clase 8, donde el registro de transacciones y la duracion de los bloqueos son el tema.</a:t>
-            </a:r>
-          </a:p>
-          <a:p>
-            <a:r>
-              <a:t>NOTAS:</a:t>
-            </a:r>
-          </a:p>
-          <a:p>
-            <a:r>
-              <a:t>Un veredicto de particionamiento tiene tres exigencias distintas.</a:t>
-            </a:r>
-          </a:p>
-          <a:p>
-            <a:r>
-              <a:t>Fuera de la lamina (habla de la practica): Segunda: la ganancia de rendimiento con 5.010 filas no es apreciable, y reconocerlo suma puntos en vez de restarlos, porque la alternativa es inventar una mejora que el plan no muestra.</a:t>
-            </a:r>
-          </a:p>
-        </p:txBody>
-      </p:sp>
-      <p:sp>
-        <p:nvSpPr>
-          <p:cNvPr id="4" name="Slide Number Placeholder 3"/>
-          <p:cNvSpPr>
-            <a:spLocks noGrp="1"/>
-          </p:cNvSpPr>
-          <p:nvPr>
-            <p:ph type="sldNum" idx="5" sz="quarter"/>
-          </p:nvPr>
-        </p:nvSpPr>
-        <p:spPr/>
-      </p:sp>
-    </p:spTree>
-  </p:cSld>
-  <p:clrMapOvr>
-    <a:masterClrMapping/>
-  </p:clrMapOvr>
-</p:notes>
-</file>
-
-<file path=ppt/notesSlides/notesSlide18.xml><?xml version="1.0" encoding="utf-8"?>
-<p:notes xmlns:a="http://schemas.openxmlformats.org/drawingml/2006/main" xmlns:p="http://schemas.openxmlformats.org/presentationml/2006/main" xmlns:r="http://schemas.openxmlformats.org/officeDocument/2006/relationships">
-  <p:cSld>
-    <p:spTree>
-      <p:nvGrpSpPr>
-        <p:cNvPr id="1" name=""/>
-        <p:cNvGrpSpPr/>
-        <p:nvPr/>
-      </p:nvGrpSpPr>
-      <p:grpSpPr>
-        <a:xfrm>
-          <a:off x="0" y="0"/>
-          <a:ext cx="0" cy="0"/>
-          <a:chOff x="0" y="0"/>
-          <a:chExt cx="0" cy="0"/>
-        </a:xfrm>
-      </p:grpSpPr>
-      <p:sp>
-        <p:nvSpPr>
-          <p:cNvPr id="2" name="Slide Image Placeholder 1"/>
-          <p:cNvSpPr>
-            <a:spLocks noGrp="1"/>
-          </p:cNvSpPr>
-          <p:nvPr>
-            <p:ph type="sldImg" idx="2"/>
-          </p:nvPr>
-        </p:nvSpPr>
-        <p:spPr/>
-      </p:sp>
-      <p:sp>
-        <p:nvSpPr>
-          <p:cNvPr id="3" name="Notes Placeholder 2"/>
-          <p:cNvSpPr>
-            <a:spLocks noGrp="1"/>
-          </p:cNvSpPr>
-          <p:nvPr>
-            <p:ph type="body" idx="3" sz="quarter"/>
-          </p:nvPr>
-        </p:nvSpPr>
-        <p:spPr/>
-        <p:txBody>
-          <a:bodyPr/>
-          <a:lstStyle/>
-          <a:p>
-            <a:r>
-              <a:t>DESARROLLO (para explicarlo, no se proyecta):</a:t>
-            </a:r>
-          </a:p>
-          <a:p>
-            <a:r>
-              <a:t>La demo es el script Codigo/07_indices_clinica.sql y se corre, no en otra herramienta, porque el volumen sembrado es el que hace cambiar el plan.</a:t>
-            </a:r>
-          </a:p>
-          <a:p>
-            <a:r>
-              <a:t>Termina con una consulta de control que debe devolver 18.187 PROGRAMADA, 9.095 ATENDIDA y 2.728 CANCELADA; si esos numeros no salen, nada de lo que sigue cuadra y hay que parar ahi.</a:t>
-            </a:r>
-          </a:p>
-          <a:p>
-            <a:r>
-              <a:t>El bloque 1 es la linea base, con los dos Seq Scan.</a:t>
-            </a:r>
-          </a:p>
-          <a:p>
-            <a:r>
-              <a:t>El bloque 3 es el experimento del orden, con su DROP INDEX al final.</a:t>
-            </a:r>
-          </a:p>
-          <a:p>
-            <a:r>
-              <a:t>Si el bloque 0 no alcanza el tiempo.</a:t>
-            </a:r>
-          </a:p>
-          <a:p>
-            <a:r>
-              <a:t>NOTAS:</a:t>
-            </a:r>
-          </a:p>
-          <a:p>
-            <a:r>
-              <a:t>El script trae cinco bloques y el orden importa.</a:t>
-            </a:r>
-          </a:p>
-          <a:p>
-            <a:r>
-              <a:t>El bloque 2 crea los tres indices, corre ANALYZE y repite las dos consultas: ese es el momento de la clase, y conviene proyectar las dos salidas una debajo de la otra y leer en voz alta la linea del nodo.</a:t>
-            </a:r>
-          </a:p>
-          <a:p>
-            <a:r>
-              <a:t>El bloque 4 es el particionamiento completo, con una salvedad que hay que decir en vivo: como la siembra del bloque 0 pone todas las citas en 2026, todo cae en cita_hist_2026 y cita_hist_2025 queda vacia; eso ya demuestra el enrutamiento.</a:t>
-            </a:r>
-          </a:p>
-          <a:p>
-            <a:r>
-              <a:t>Lo que no se puede hacer es medir en una base de 20 filas: el plan no va a cambiar y el grupo se va a llevar la conclusion contraria.</a:t>
-            </a:r>
-          </a:p>
-          <a:p>
-            <a:r>
-              <a:t>Fuera de la lamina (habla de la practica): El bloque 0 crea las tablas y siembra la misma base de la actividad: 10 citas a mano mas 30.000 con generate_series, 30.010 en total; hay que advertir que ese bloque recrea las tablas, asi que se corre en una base vacia y no sobre la base de la clínica con datos que alguien quiera conservar.</a:t>
-            </a:r>
-          </a:p>
-          <a:p>
-            <a:r>
-              <a:t>Fuera de la lamina (habla de la practica): El bloque 4 es el particionamiento completo, con una salvedad que hay que decir en vivo: como la siembra del bloque 0 pone todas las citas en 2026, todo cae en cita_hist_2026 y cita_hist_2025 queda vacia; eso ya demuestra el enrutamiento, y la base de la pregunta 3 si reparte sus 5.010 citas entre los dos anos.</a:t>
-            </a:r>
-          </a:p>
-          <a:p>
-            <a:r>
-              <a:t>Fuera de la lamina (habla de la practica): Si el bloque 0 no alcanza el tiempo, la alternativa es abrir directamente la pregunta 1 de la clase, que ya trae la base sembrada, y correr los bloques 1 y 2 ahi.</a:t>
-            </a:r>
-          </a:p>
-        </p:txBody>
-      </p:sp>
-      <p:sp>
-        <p:nvSpPr>
-          <p:cNvPr id="4" name="Slide Number Placeholder 3"/>
-          <p:cNvSpPr>
-            <a:spLocks noGrp="1"/>
-          </p:cNvSpPr>
-          <p:nvPr>
-            <p:ph type="sldNum" idx="5" sz="quarter"/>
-          </p:nvPr>
-        </p:nvSpPr>
-        <p:spPr/>
-      </p:sp>
-    </p:spTree>
-  </p:cSld>
-  <p:clrMapOvr>
-    <a:masterClrMapping/>
-  </p:clrMapOvr>
-</p:notes>
-</file>
-
-<file path=ppt/notesSlides/notesSlide19.xml><?xml version="1.0" encoding="utf-8"?>
-<p:notes xmlns:a="http://schemas.openxmlformats.org/drawingml/2006/main" xmlns:p="http://schemas.openxmlformats.org/presentationml/2006/main" xmlns:r="http://schemas.openxmlformats.org/officeDocument/2006/relationships">
-  <p:cSld>
-    <p:spTree>
-      <p:nvGrpSpPr>
-        <p:cNvPr id="1" name=""/>
-        <p:cNvGrpSpPr/>
-        <p:nvPr/>
-      </p:nvGrpSpPr>
-      <p:grpSpPr>
-        <a:xfrm>
-          <a:off x="0" y="0"/>
-          <a:ext cx="0" cy="0"/>
-          <a:chOff x="0" y="0"/>
-          <a:chExt cx="0" cy="0"/>
-        </a:xfrm>
-      </p:grpSpPr>
-      <p:sp>
-        <p:nvSpPr>
-          <p:cNvPr id="2" name="Slide Image Placeholder 1"/>
-          <p:cNvSpPr>
-            <a:spLocks noGrp="1"/>
-          </p:cNvSpPr>
-          <p:nvPr>
-            <p:ph type="sldImg" idx="2"/>
-          </p:nvPr>
-        </p:nvSpPr>
-        <p:spPr/>
-      </p:sp>
-      <p:sp>
-        <p:nvSpPr>
-          <p:cNvPr id="3" name="Notes Placeholder 2"/>
-          <p:cNvSpPr>
-            <a:spLocks noGrp="1"/>
-          </p:cNvSpPr>
-          <p:nvPr>
-            <p:ph type="body" idx="3" sz="quarter"/>
-          </p:nvPr>
-        </p:nvSpPr>
-        <p:spPr/>
-        <p:txBody>
-          <a:bodyPr/>
-          <a:lstStyle/>
-          <a:p>
-            <a:r>
               <a:t>DESARROLLO (para explicarlo, no se proyecta):</a:t>
             </a:r>
           </a:p>
@@ -1976,52 +1649,42 @@
           </a:p>
           <a:p>
             <a:r>
-              <a:t>La Clase 6 dejo al grupo mirando planes que decian Seq Scan donde se esperaba algo mejor; hoy se construye la estructura que cambia esa linea.</a:t>
-            </a:r>
-          </a:p>
-          <a:p>
-            <a:r>
-              <a:t>Un indice es una estructura de datos auxiliar, redundante y opcional, que el motor crea a partir de una o mas columnas de una tabla, mantiene ordenada por esas columnas y sincroniza automaticamente con cada cambio de los datos.</a:t>
-            </a:r>
-          </a:p>
-          <a:p>
-            <a:r>
-              <a:t>Cada entrada guarda dos cosas: el valor de la clave y un puntero fisico a la fila completa, que en PostgreSQL se llama ctid y en Oracle ROWID.</a:t>
-            </a:r>
-          </a:p>
-          <a:p>
-            <a:r>
-              <a:t>Redundante: no agrega informacion nueva, duplica columnas que ya estan en la tabla, y por eso se puede borrar y volver a crear sin perder un dato.</a:t>
-            </a:r>
-          </a:p>
-          <a:p>
-            <a:r>
-              <a:t>Opcional: ninguna consulta deja de funcionar si el indice no existe, solo tarda mas.</a:t>
-            </a:r>
-          </a:p>
-          <a:p>
-            <a:r>
-              <a:t>Automatico: nadie escribe codigo para mantenerlo, el motor lo actualiza dentro de la misma operacion del INSERT, del UPDATE o del DELETE, y de ahi sale el costo del que habla la segunda mitad de la clase.</a:t>
-            </a:r>
-          </a:p>
-          <a:p>
-            <a:r>
-              <a:t>La base de hoy es la misma de la clase anterior: 30.010 citas del 5 de enero al 23 de julio de 2026, 5.008 mascotas, 2.006 duenos y 16 veterinarios, con estadisticas frescas y sin ningun indice salvo los de las claves primarias.</a:t>
-            </a:r>
-          </a:p>
-          <a:p>
-            <a:r>
-              <a:t>Sobre esa tabla, un indice de una columna sobre cita(fecha_hora) guarda 30.010 entradas de unos 20 a 25 bytes y ocupa del orden de 700 KB frente a los 2 MB de la tabla</a:t>
-            </a:r>
-          </a:p>
-          <a:p>
-            <a:r>
-              <a:t>Como orden de magnitud, cada indice de una columna cuesta entre el 10 % y el 30 % del tamano de la tabla, y esa cifra es estimacion de oficio, no constante del motor.</a:t>
-            </a:r>
-          </a:p>
-          <a:p>
-            <a:r>
-              <a:t>El numero real se lee con; y es el que hay que reportar, no el de esta linea.</a:t>
+              <a:t>El tipo de indice por omision en PostgreSQL, Oracle, MySQL y SQL Server es el B-Tree, arbol balanceado, y entenderlo por dentro toma cinco minutos bien invertidos.</a:t>
+            </a:r>
+          </a:p>
+          <a:p>
+            <a:r>
+              <a:t>Tiene tres clases de nodos: una raiz, cero o mas niveles intermedios o de rama, y un nivel de hojas donde estan todas las claves con sus punteros.</a:t>
+            </a:r>
+          </a:p>
+          <a:p>
+            <a:r>
+              <a:t>Cada nodo ocupa una pagina, tipicamente de 8 KB, y si cada entrada pesa unos 20 bytes, en una pagina caben del orden de 400 claves; ese numero se llama grado de ramificacion o fan-out.</a:t>
+            </a:r>
+          </a:p>
+          <a:p>
+            <a:r>
+              <a:t>Con 400 hijos por nodo, un arbol de un nivel cubre 400 filas, de dos niveles 160.000, de tres niveles 64 millones y de cuatro niveles mas de 25 mil millones.</a:t>
+            </a:r>
+          </a:p>
+          <a:p>
+            <a:r>
+              <a:t>El crecimiento es logaritmico: duplicar la tabla no duplica el tiempo de busqueda, apenas lo mueve.</a:t>
+            </a:r>
+          </a:p>
+          <a:p>
+            <a:r>
+              <a:t>El indice de cita de hoy, con 30.010 entradas, tiene apenas dos niveles: unas 75 paginas de hojas y una raiz que apunta a todas.</a:t>
+            </a:r>
+          </a:p>
+          <a:p>
+            <a:r>
+              <a:t>Un detalle mas explica la mitad de los usos reales: las hojas estan enlazadas entre si formando una lista, de modo que al llegar a la primera clave que cumple la condicion se puede seguir avanzando en orden</a:t>
+            </a:r>
+          </a:p>
+          <a:p>
+            <a:r>
+              <a:t>Por eso un B-Tree sirve para BETWEEN, para mayor que, para menor que y para devolver filas ya ordenadas sin ejecutar un ordenamiento aparte, no solo para igualdades.</a:t>
             </a:r>
           </a:p>
           <a:p>
@@ -2031,117 +1694,17 @@
           </a:p>
           <a:p>
             <a:r>
-              <a:t>Los tres adjetivos de la definicion importan.</a:t>
-            </a:r>
-          </a:p>
-          <a:p>
-            <a:r>
-              <a:t>CÓDIGO CITADO (referencia):</a:t>
-            </a:r>
-          </a:p>
-          <a:p>
-            <a:r>
-              <a:t>SELECT pg_size_pretty(pg_relation_size('idx_cita_fecha_hora'))</a:t>
-            </a:r>
-          </a:p>
-        </p:txBody>
-      </p:sp>
-      <p:sp>
-        <p:nvSpPr>
-          <p:cNvPr id="4" name="Slide Number Placeholder 3"/>
-          <p:cNvSpPr>
-            <a:spLocks noGrp="1"/>
-          </p:cNvSpPr>
-          <p:nvPr>
-            <p:ph type="sldNum" idx="5" sz="quarter"/>
-          </p:nvPr>
-        </p:nvSpPr>
-        <p:spPr/>
-      </p:sp>
-    </p:spTree>
-  </p:cSld>
-  <p:clrMapOvr>
-    <a:masterClrMapping/>
-  </p:clrMapOvr>
-</p:notes>
-</file>
-
-<file path=ppt/notesSlides/notesSlide20.xml><?xml version="1.0" encoding="utf-8"?>
-<p:notes xmlns:a="http://schemas.openxmlformats.org/drawingml/2006/main" xmlns:p="http://schemas.openxmlformats.org/presentationml/2006/main" xmlns:r="http://schemas.openxmlformats.org/officeDocument/2006/relationships">
-  <p:cSld>
-    <p:spTree>
-      <p:nvGrpSpPr>
-        <p:cNvPr id="1" name=""/>
-        <p:cNvGrpSpPr/>
-        <p:nvPr/>
-      </p:nvGrpSpPr>
-      <p:grpSpPr>
-        <a:xfrm>
-          <a:off x="0" y="0"/>
-          <a:ext cx="0" cy="0"/>
-          <a:chOff x="0" y="0"/>
-          <a:chExt cx="0" cy="0"/>
-        </a:xfrm>
-      </p:grpSpPr>
-      <p:sp>
-        <p:nvSpPr>
-          <p:cNvPr id="2" name="Slide Image Placeholder 1"/>
-          <p:cNvSpPr>
-            <a:spLocks noGrp="1"/>
-          </p:cNvSpPr>
-          <p:nvPr>
-            <p:ph type="sldImg" idx="2"/>
-          </p:nvPr>
-        </p:nvSpPr>
-        <p:spPr/>
-      </p:sp>
-      <p:sp>
-        <p:nvSpPr>
-          <p:cNvPr id="3" name="Notes Placeholder 2"/>
-          <p:cNvSpPr>
-            <a:spLocks noGrp="1"/>
-          </p:cNvSpPr>
-          <p:nvPr>
-            <p:ph type="body" idx="3" sz="quarter"/>
-          </p:nvPr>
-        </p:nvSpPr>
-        <p:spPr/>
-        <p:txBody>
-          <a:bodyPr/>
-          <a:lstStyle/>
-          <a:p>
-            <a:r>
-              <a:t>TEXTO COMPLETO DE LA LÁMINA (se proyecta resumido):</a:t>
-            </a:r>
-          </a:p>
-          <a:p/>
-          <a:p>
-            <a:r>
-              <a:t>Herramienta: PostgreSQL/PGlite</a:t>
-            </a:r>
-          </a:p>
-          <a:p/>
-          <a:p>
-            <a:r>
-              <a:t>Demo: EXPLAIN ANALYZE con Seq Scan, CREATE INDEX idx_cita_fecha_hora, ANALYZE, y el mismo EXPLAIN mostrando Index Scan.</a:t>
-            </a:r>
-          </a:p>
-          <a:p/>
-          <a:p>
-            <a:r>
-              <a:t>Sigan el mismo dominio de la clínica (no inventen otro caso).</a:t>
-            </a:r>
-          </a:p>
-          <a:p/>
-          <a:p>
-            <a:r>
-              <a:t>Qué observar: el plan pasa de Seq Scan a Index Scan using con el nombre del indice, y con la particion la consulta de un ano lee una sola particion.</a:t>
-            </a:r>
-          </a:p>
-          <a:p/>
-          <a:p>
-            <a:r>
-              <a:t>Qué observar: despues de crear el indice hace falta ANALYZE: sin estadisticas frescas el planeador puede seguir eligiendo el Seq Scan.</a:t>
+              <a:t>Balanceado significa que todas las hojas quedan a la misma profundidad, asi que cualquier busqueda cuesta lo mismo y no hay valores afortunados.</a:t>
+            </a:r>
+          </a:p>
+          <a:p>
+            <a:r>
+              <a:t>De ahi la afirmacion que el docente debe poder defender: tres o cuatro niveles alcanzan para tablas de millones de filas, y encontrar una fila cuesta tres o cuatro lecturas de pagina, sin importar si la tabla tiene cien mil filas o cincuenta millones.</a:t>
+            </a:r>
+          </a:p>
+          <a:p>
+            <a:r>
+              <a:t>Esa es exactamente la forma de la consulta C1 de la clase, que pide un rango de un dia.</a:t>
             </a:r>
           </a:p>
         </p:txBody>
@@ -2216,62 +1779,67 @@
           </a:p>
           <a:p>
             <a:r>
-              <a:t>El tipo de indice por omision en PostgreSQL, Oracle, MySQL y SQL Server es el B-Tree, arbol balanceado, y entenderlo por dentro toma cinco minutos bien invertidos.</a:t>
-            </a:r>
-          </a:p>
-          <a:p>
-            <a:r>
-              <a:t>Tiene tres clases de nodos: una raiz, cero o mas niveles intermedios o de rama, y un nivel de hojas donde estan todas las claves con sus punteros.</a:t>
-            </a:r>
-          </a:p>
-          <a:p>
-            <a:r>
-              <a:t>Cada nodo ocupa una pagina, tipicamente de 8 KB, y si cada entrada pesa unos 20 bytes, en una pagina caben del orden de 400 claves; ese numero se llama grado de ramificacion o fan-out.</a:t>
-            </a:r>
-          </a:p>
-          <a:p>
-            <a:r>
-              <a:t>Con 400 hijos por nodo, un arbol de un nivel cubre 400 filas, de dos niveles 160.000, de tres niveles 64 millones y de cuatro niveles mas de 25 mil millones.</a:t>
-            </a:r>
-          </a:p>
-          <a:p>
-            <a:r>
-              <a:t>El crecimiento es logaritmico: duplicar la tabla no duplica el tiempo de busqueda, apenas lo mueve.</a:t>
-            </a:r>
-          </a:p>
-          <a:p>
-            <a:r>
-              <a:t>El indice de cita de hoy, con 30.010 entradas, tiene apenas dos niveles: unas 75 paginas de hojas y una raiz que apunta a todas.</a:t>
-            </a:r>
-          </a:p>
-          <a:p>
-            <a:r>
-              <a:t>Un detalle mas explica la mitad de los usos reales: las hojas estan enlazadas entre si formando una lista, de modo que al llegar a la primera clave que cumple la condicion se puede seguir avanzando en orden</a:t>
-            </a:r>
-          </a:p>
-          <a:p>
-            <a:r>
-              <a:t>Por eso un B-Tree sirve para BETWEEN, para mayor que, para menor que y para devolver filas ya ordenadas sin ejecutar un ordenamiento aparte, no solo para igualdades.</a:t>
-            </a:r>
-          </a:p>
-          <a:p>
-            <a:r>
-              <a:t>NOTAS:</a:t>
-            </a:r>
-          </a:p>
-          <a:p>
-            <a:r>
-              <a:t>Balanceado significa que todas las hojas quedan a la misma profundidad, asi que cualquier busqueda cuesta lo mismo y no hay valores afortunados.</a:t>
-            </a:r>
-          </a:p>
-          <a:p>
-            <a:r>
-              <a:t>De ahi la afirmacion que el docente debe poder defender: tres o cuatro niveles alcanzan para tablas de millones de filas, y encontrar una fila cuesta tres o cuatro lecturas de pagina, sin importar si la tabla tiene cien mil filas o cincuenta millones.</a:t>
-            </a:r>
-          </a:p>
-          <a:p>
-            <a:r>
-              <a:t>Esa es exactamente la forma de la consulta C1 de la clase, que pide un rango de un dia.</a:t>
+              <a:t>El precio de indexar se paga en cada escritura y hay que cuantificarlo.</a:t>
+            </a:r>
+          </a:p>
+          <a:p>
+            <a:r>
+              <a:t>Un INSERT en cita con cuatro indices no es una operacion, son cinco: la fila en la tabla mas una insercion ordenada en cada arbol, cada una bajando dos o tres niveles y a veces partiendo en dos una pagina llena, lo que ademas fragmenta el indice.</a:t>
+            </a:r>
+          </a:p>
+          <a:p>
+            <a:r>
+              <a:t>Como orden de magnitud de oficio, cada indice adicional encarece las escrituras entre un 5 % y un 15 %</a:t>
+            </a:r>
+          </a:p>
+          <a:p>
+            <a:r>
+              <a:t>Y una tabla con diez indices puede escribir varias veces mas lento que la misma con dos; el numero exacto depende del motor y hay que medirlo, pero la direccion nunca cambia.</a:t>
+            </a:r>
+          </a:p>
+          <a:p>
+            <a:r>
+              <a:t>El UPDATE tiene un matiz util y muy citable: solo se actualizan los indices que contienen alguna columna modificada, asi que cambiar cita.estado de PROGRAMADA a ATENDIDA toca idx_cita_estado_fecha pero no idx_cita_fecha_hora</a:t>
+            </a:r>
+          </a:p>
+          <a:p>
+            <a:r>
+              <a:t>De donde sale la advertencia de no indexar columnas que cambian en cada operacion salvo que una consulta muy frecuente lo exija.</a:t>
+            </a:r>
+          </a:p>
+          <a:p>
+            <a:r>
+              <a:t>Ojo con una excepcion que aparece hoy: el indice PARCIAL sobre las citas PROGRAMADA si se toca cuando el estado cambia, porque la fila entra o sale del indice.</a:t>
+            </a:r>
+          </a:p>
+          <a:p>
+            <a:r>
+              <a:t>En espacio, no es raro que la suma de los indices supere el tamano de la tabla.</a:t>
+            </a:r>
+          </a:p>
+          <a:p>
+            <a:r>
+              <a:t>La guia es concreta: dos a cuatro indices por tabla caliente ademas de los que ya trae la clave primaria, cada uno con su consulta escrita al lado</a:t>
+            </a:r>
+          </a:p>
+          <a:p>
+            <a:r>
+              <a:t>Y la regla de descarte mas util que existe, si el estudiante no puede escribir la consulta que usa el indice, el indice se borra.</a:t>
+            </a:r>
+          </a:p>
+          <a:p>
+            <a:r>
+              <a:t>En produccion eso se decide con datos: PostgreSQL expone pg_stat_user_indexes, donde idx_scan en cero significa que el indice nunca se uso.</a:t>
+            </a:r>
+          </a:p>
+          <a:p>
+            <a:r>
+              <a:t>Fuera de la lamina (habla de la practica): El precio de indexar se paga en cada escritura y hay que cuantificarlo, porque es la mitad del veredicto que la pregunta 5 pide por escrito.</a:t>
+            </a:r>
+          </a:p>
+          <a:p>
+            <a:r>
+              <a:t>Fuera de la lamina (habla de la practica): En produccion eso se decide con datos: PostgreSQL expone pg_stat_user_indexes, donde idx_scan en cero significa que el indice nunca se uso; conviene mencionarlo aunque en una sesion de taller no de tiempo de acumular estadisticas de uso.</a:t>
             </a:r>
           </a:p>
         </p:txBody>
@@ -2346,67 +1914,37 @@
           </a:p>
           <a:p>
             <a:r>
-              <a:t>El precio de indexar se paga en cada escritura y hay que cuantificarlo.</a:t>
-            </a:r>
-          </a:p>
-          <a:p>
-            <a:r>
-              <a:t>Un INSERT en cita con cuatro indices no es una operacion, son cinco: la fila en la tabla mas una insercion ordenada en cada arbol, cada una bajando dos o tres niveles y a veces partiendo en dos una pagina llena, lo que ademas fragmenta el indice.</a:t>
-            </a:r>
-          </a:p>
-          <a:p>
-            <a:r>
-              <a:t>Como orden de magnitud de oficio, cada indice adicional encarece las escrituras entre un 5 % y un 15 %</a:t>
-            </a:r>
-          </a:p>
-          <a:p>
-            <a:r>
-              <a:t>Y una tabla con diez indices puede escribir varias veces mas lento que la misma con dos; el numero exacto depende del motor y hay que medirlo, pero la direccion nunca cambia.</a:t>
-            </a:r>
-          </a:p>
-          <a:p>
-            <a:r>
-              <a:t>El UPDATE tiene un matiz util y muy citable: solo se actualizan los indices que contienen alguna columna modificada, asi que cambiar cita.estado de PROGRAMADA a ATENDIDA toca idx_cita_estado_fecha pero no idx_cita_fecha_hora</a:t>
-            </a:r>
-          </a:p>
-          <a:p>
-            <a:r>
-              <a:t>De donde sale la advertencia de no indexar columnas que cambian en cada operacion salvo que una consulta muy frecuente lo exija.</a:t>
-            </a:r>
-          </a:p>
-          <a:p>
-            <a:r>
-              <a:t>Ojo con una excepcion que aparece hoy: el indice PARCIAL sobre las citas PROGRAMADA si se toca cuando el estado cambia, porque la fila entra o sale del indice.</a:t>
-            </a:r>
-          </a:p>
-          <a:p>
-            <a:r>
-              <a:t>En espacio, no es raro que la suma de los indices supere el tamano de la tabla.</a:t>
-            </a:r>
-          </a:p>
-          <a:p>
-            <a:r>
-              <a:t>La guia es concreta: dos a cuatro indices por tabla caliente ademas de los que ya trae la clave primaria, cada uno con su consulta escrita al lado</a:t>
-            </a:r>
-          </a:p>
-          <a:p>
-            <a:r>
-              <a:t>Y la regla de descarte mas util que existe, si el estudiante no puede escribir la consulta que usa el indice, el indice se borra.</a:t>
-            </a:r>
-          </a:p>
-          <a:p>
-            <a:r>
-              <a:t>En produccion eso se decide con datos: PostgreSQL expone pg_stat_user_indexes, donde idx_scan en cero significa que el indice nunca se uso.</a:t>
-            </a:r>
-          </a:p>
-          <a:p>
-            <a:r>
-              <a:t>Fuera de la lamina (habla de la practica): El precio de indexar se paga en cada escritura y hay que cuantificarlo, porque es la mitad del veredicto que la pregunta 5 pide por escrito.</a:t>
-            </a:r>
-          </a:p>
-          <a:p>
-            <a:r>
-              <a:t>Fuera de la lamina (habla de la practica): En produccion eso se decide con datos: PostgreSQL expone pg_stat_user_indexes, donde idx_scan en cero significa que el indice nunca se uso; conviene mencionarlo aunque en una sesion de taller no de tiempo de acumular estadisticas de uso.</a:t>
+              <a:t>Un indice compuesto es el creado sobre dos o mas columnas, y su regla de uso es la fuente de error mas frecuente del tema.</a:t>
+            </a:r>
+          </a:p>
+          <a:p>
+            <a:r>
+              <a:t>Las entradas se ordenan por la primera columna y solo dentro de los valores iguales de la primera se ordenan por la segunda; es el orden de un directorio telefonico por apellido y luego nombre.</a:t>
+            </a:r>
+          </a:p>
+          <a:p>
+            <a:r>
+              <a:t>En la clínica: idx_cita_estado_fecha sirve para WHERE estado = 'PROGRAMADA' AND fecha_hora &gt;= TIMESTAMP '2026-03-01 00:00:00' y para WHERE estado = 'PROGRAMADA' a secas, y no sirve para un filtro que solo trae fecha_hora; para eso existe idx_cita_fecha_hora.</a:t>
+            </a:r>
+          </a:p>
+          <a:p>
+            <a:r>
+              <a:t>Y un numero citable que desarma la idea de indexar todo por si acaso: un indice de k columnas atiende solamente los k prefijos, no las combinaciones, asi que uno de tres columnas atiende tres formas de consulta y no seis.</a:t>
+            </a:r>
+          </a:p>
+          <a:p>
+            <a:r>
+              <a:t>NOTAS:</a:t>
+            </a:r>
+          </a:p>
+          <a:p>
+            <a:r>
+              <a:t>De ahi la regla del prefijo mas a la izquierda: un indice sobre (estado, fecha_hora) resuelve una busqueda por estado, y una por estado junto con fecha_hora, pero NO resuelve eficientemente una busqueda solo por fecha_hora, igual que en el directorio no se pueden encontrar todas las personas llamadas Ana sin leerlo entero.</a:t>
+            </a:r>
+          </a:p>
+          <a:p>
+            <a:r>
+              <a:t>El corolario de diseno cabe en una linea, y es la que hay que dejar escrita en la pizarra: las columnas comparadas por igualdad van primero y la comparada por rango va al final, porque despues del primer rango el orden interno del indice deja de ser aprovechable.</a:t>
             </a:r>
           </a:p>
         </p:txBody>
@@ -2481,22 +2019,37 @@
           </a:p>
           <a:p>
             <a:r>
-              <a:t>Un indice compuesto es el creado sobre dos o mas columnas, y su regla de uso es la fuente de error mas frecuente del tema.</a:t>
-            </a:r>
-          </a:p>
-          <a:p>
-            <a:r>
-              <a:t>Las entradas se ordenan por la primera columna y solo dentro de los valores iguales de la primera se ordenan por la segunda; es el orden de un directorio telefonico por apellido y luego nombre.</a:t>
-            </a:r>
-          </a:p>
-          <a:p>
-            <a:r>
-              <a:t>En la clínica: idx_cita_estado_fecha sirve para WHERE estado = 'PROGRAMADA' AND fecha_hora &gt;= TIMESTAMP '2026-03-01 00:00:00' y para WHERE estado = 'PROGRAMADA' a secas, y no sirve para un filtro que solo trae fecha_hora; para eso existe idx_cita_fecha_hora.</a:t>
-            </a:r>
-          </a:p>
-          <a:p>
-            <a:r>
-              <a:t>Y un numero citable que desarma la idea de indexar todo por si acaso: un indice de k columnas atiende solamente los k prefijos, no las combinaciones, asi que uno de tres columnas atiende tres formas de consulta y no seis.</a:t>
+              <a:t>Cuando todas las columnas que la consulta necesita, las del WHERE y las del SELECT, estan dentro del indice, el motor responde sin tocar la tabla, y eso se llama index-only scan o indice cubridor.</a:t>
+            </a:r>
+          </a:p>
+          <a:p>
+            <a:r>
+              <a:t>Ejemplo exacto con los indices de hoy: SELECT estado, fecha_hora FROM cita WHERE estado = 'PROGRAMADA' AND fecha_hora &gt;= TIMESTAMP '2026-03-01 00:00:00' se puede responder entera desde idx_cita_estado_fecha, y el plan lo dice con las palabras Index Only Scan.</a:t>
+            </a:r>
+          </a:p>
+          <a:p>
+            <a:r>
+              <a:t>El ahorro es justamente la parte cara del acceso por indice: en lugar de dos o tres lecturas para bajar el arbol mas un centenar de lecturas dispersas a la tabla, quedan unas pocas lecturas de hojas contiguas.</a:t>
+            </a:r>
+          </a:p>
+          <a:p>
+            <a:r>
+              <a:t>Si la consulta agrega id_mascota la ventaja se pierde, y hay dos maneras de recuperarla: agregar la columna a la clave, o usar la clausula INCLUDE de PostgreSQL, INCLUDE (id_mascota)</a:t>
+            </a:r>
+          </a:p>
+          <a:p>
+            <a:r>
+              <a:t>Que guarda la columna en las hojas sin usarla para ordenar y por lo tanto sin engordar los niveles superiores</a:t>
+            </a:r>
+          </a:p>
+          <a:p>
+            <a:r>
+              <a:t>Un detalle honesto que evita una confusion en vivo: en PostgreSQL el index-only scan depende del mapa de visibilidad</a:t>
+            </a:r>
+          </a:p>
+          <a:p>
+            <a:r>
+              <a:t>Asi que inmediatamente despues de una carga masiva el plan puede seguir mostrando Index Scan hasta que pase VACUUM, y eso no significa que el indice este mal disenado.</a:t>
             </a:r>
           </a:p>
           <a:p>
@@ -2506,12 +2059,22 @@
           </a:p>
           <a:p>
             <a:r>
-              <a:t>De ahi la regla del prefijo mas a la izquierda: un indice sobre (estado, fecha_hora) resuelve una busqueda por estado, y una por estado junto con fecha_hora, pero NO resuelve eficientemente una busqueda solo por fecha_hora, igual que en el directorio no se pueden encontrar todas las personas llamadas Ana sin leerlo entero.</a:t>
-            </a:r>
-          </a:p>
-          <a:p>
-            <a:r>
-              <a:t>El corolario de diseno cabe en una linea, y es la que hay que dejar escrita en la pizarra: las columnas comparadas por igualdad van primero y la comparada por rango va al final, porque despues del primer rango el orden interno del indice deja de ser aprovechable.</a:t>
+              <a:t>Oracle no tiene INCLUDE y la columna se agrega al final de la clave.</a:t>
+            </a:r>
+          </a:p>
+          <a:p>
+            <a:r>
+              <a:t>CÓDIGO CITADO (referencia):</a:t>
+            </a:r>
+          </a:p>
+          <a:p>
+            <a:r>
+              <a:t>CREATE INDEX idx_cita_cubridor ON cita (estado, fecha_hora)</a:t>
+            </a:r>
+          </a:p>
+          <a:p>
+            <a:r>
+              <a:t>Fuera de la lamina (habla de la practica): Esto NO se califica hoy, pero es la respuesta a la pregunta que va a salir cuando alguien vea Index Only Scan en su plan y no sepa si esta bien.</a:t>
             </a:r>
           </a:p>
         </p:txBody>
@@ -2586,37 +2149,37 @@
           </a:p>
           <a:p>
             <a:r>
-              <a:t>Cuando todas las columnas que la consulta necesita, las del WHERE y las del SELECT, estan dentro del indice, el motor responde sin tocar la tabla, y eso se llama index-only scan o indice cubridor.</a:t>
-            </a:r>
-          </a:p>
-          <a:p>
-            <a:r>
-              <a:t>Ejemplo exacto con los indices de hoy: SELECT estado, fecha_hora FROM cita WHERE estado = 'PROGRAMADA' AND fecha_hora &gt;= TIMESTAMP '2026-03-01 00:00:00' se puede responder entera desde idx_cita_estado_fecha, y el plan lo dice con las palabras Index Only Scan.</a:t>
-            </a:r>
-          </a:p>
-          <a:p>
-            <a:r>
-              <a:t>El ahorro es justamente la parte cara del acceso por indice: en lugar de dos o tres lecturas para bajar el arbol mas un centenar de lecturas dispersas a la tabla, quedan unas pocas lecturas de hojas contiguas.</a:t>
-            </a:r>
-          </a:p>
-          <a:p>
-            <a:r>
-              <a:t>Si la consulta agrega id_mascota la ventaja se pierde, y hay dos maneras de recuperarla: agregar la columna a la clave, o usar la clausula INCLUDE de PostgreSQL, INCLUDE (id_mascota)</a:t>
-            </a:r>
-          </a:p>
-          <a:p>
-            <a:r>
-              <a:t>Que guarda la columna en las hojas sin usarla para ordenar y por lo tanto sin engordar los niveles superiores</a:t>
-            </a:r>
-          </a:p>
-          <a:p>
-            <a:r>
-              <a:t>Un detalle honesto que evita una confusion en vivo: en PostgreSQL el index-only scan depende del mapa de visibilidad</a:t>
-            </a:r>
-          </a:p>
-          <a:p>
-            <a:r>
-              <a:t>Asi que inmediatamente despues de una carga masiva el plan puede seguir mostrando Index Scan hasta que pase VACUUM, y eso no significa que el indice este mal disenado.</a:t>
+              <a:t>Un indice existente puede quedar sin usar por siete razones, y recitarlas separa al docente que responde del que dice que el motor es raro.</a:t>
+            </a:r>
+          </a:p>
+          <a:p>
+            <a:r>
+              <a:t>Uno, la tabla es demasiado pequena: dueno con 2.006 filas cabe en unas 20 paginas y ningun indice le gana a leer 20 paginas seguidas; con las 20 filas de prueba de una base propia jamas se usara un indice y el motor esta en lo correcto.</a:t>
+            </a:r>
+          </a:p>
+          <a:p>
+            <a:r>
+              <a:t>Dos, el predicado no es sargable, como se vio en la Clase 6: UPPER(nombre), EXTRACT(YEAR FROM fecha_hora) o una conversion implicita de tipo bloquean el indice</a:t>
+            </a:r>
+          </a:p>
+          <a:p>
+            <a:r>
+              <a:t>Y la salida es el indice funcional, CREATE INDEX idx_mascota_nombre_upper ON mascota (UPPER(nombre)).</a:t>
+            </a:r>
+          </a:p>
+          <a:p>
+            <a:r>
+              <a:t>Tres, la selectividad es mala: WHERE activa = 'S' devuelve mas del 90 % de mascota y el recorrido completo gana con razon.</a:t>
+            </a:r>
+          </a:p>
+          <a:p>
+            <a:r>
+              <a:t>Cuatro, las estadisticas estan viejas y el motor cree que la tabla es diminuta; se corrige con ANALYZE cita, y es el paso que se salta medio salon.</a:t>
+            </a:r>
+          </a:p>
+          <a:p>
+            <a:r>
+              <a:t>Con la base de hoy la excusa del volumen no aplica: 30.010 citas son suficientes para que el planeador prefiera el indice, asi que si el plan no cambia el problema esta en el predicado, en el nombre de la columna lider o en el ANALYZE que falto.</a:t>
             </a:r>
           </a:p>
           <a:p>
@@ -2626,22 +2189,17 @@
           </a:p>
           <a:p>
             <a:r>
-              <a:t>Oracle no tiene INCLUDE y la columna se agrega al final de la clave.</a:t>
-            </a:r>
-          </a:p>
-          <a:p>
-            <a:r>
-              <a:t>CÓDIGO CITADO (referencia):</a:t>
-            </a:r>
-          </a:p>
-          <a:p>
-            <a:r>
-              <a:t>CREATE INDEX idx_cita_cubridor ON cita (estado, fecha_hora)</a:t>
-            </a:r>
-          </a:p>
-          <a:p>
-            <a:r>
-              <a:t>Fuera de la lamina (habla de la practica): Esto NO se califica hoy, pero es la respuesta a la pregunta que va a salir cuando alguien vea Index Only Scan en su plan y no sepa si esta bien.</a:t>
+              <a:t>Cinco, se violo el prefijo mas a la izquierda.</a:t>
+            </a:r>
+          </a:p>
+          <a:p>
+            <a:r>
+              <a:t>Seis, la condicion combina columnas de indices distintos con OR, caso en el que el motor arma una combinacion de mapas de bits o simplemente escanea.</a:t>
+            </a:r>
+          </a:p>
+          <a:p>
+            <a:r>
+              <a:t>Siete, el tipo de dato o la ordenacion no coincide con lo que el predicado compara.</a:t>
             </a:r>
           </a:p>
         </p:txBody>
@@ -2716,37 +2274,37 @@
           </a:p>
           <a:p>
             <a:r>
-              <a:t>Un indice existente puede quedar sin usar por siete razones, y recitarlas separa al docente que responde del que dice que el motor es raro.</a:t>
-            </a:r>
-          </a:p>
-          <a:p>
-            <a:r>
-              <a:t>Uno, la tabla es demasiado pequena: dueno con 2.006 filas cabe en unas 20 paginas y ningun indice le gana a leer 20 paginas seguidas; con las 20 filas de prueba de una base propia jamas se usara un indice y el motor esta en lo correcto.</a:t>
-            </a:r>
-          </a:p>
-          <a:p>
-            <a:r>
-              <a:t>Dos, el predicado no es sargable, como se vio en la Clase 6: UPPER(nombre), EXTRACT(YEAR FROM fecha_hora) o una conversion implicita de tipo bloquean el indice</a:t>
-            </a:r>
-          </a:p>
-          <a:p>
-            <a:r>
-              <a:t>Y la salida es el indice funcional, CREATE INDEX idx_mascota_nombre_upper ON mascota (UPPER(nombre)).</a:t>
-            </a:r>
-          </a:p>
-          <a:p>
-            <a:r>
-              <a:t>Tres, la selectividad es mala: WHERE activa = 'S' devuelve mas del 90 % de mascota y el recorrido completo gana con razon.</a:t>
-            </a:r>
-          </a:p>
-          <a:p>
-            <a:r>
-              <a:t>Cuatro, las estadisticas estan viejas y el motor cree que la tabla es diminuta; se corrige con ANALYZE cita, y es el paso que se salta medio salon.</a:t>
-            </a:r>
-          </a:p>
-          <a:p>
-            <a:r>
-              <a:t>Con la base de hoy la excusa del volumen no aplica: 30.010 citas son suficientes para que el planeador prefiera el indice, asi que si el plan no cambia el problema esta en el predicado, en el nombre de la columna lider o en el ANALYZE que falto.</a:t>
+              <a:t>Los tres de la medicion: idx_cita_fecha_hora sobre cita (fecha_hora), que atiende cualquier consulta por rango de fecha con o sin estado; idx_mascota_dueno sobre mascota (id_dueno)</a:t>
+            </a:r>
+          </a:p>
+          <a:p>
+            <a:r>
+              <a:t>Que atiende el historial de un dueno; y idx_cita_programada_fecha, el indice parcial sobre cita (fecha_hora) WHERE estado = 'PROGRAMADA', que atiende la agenda del dia de la recepcion.</a:t>
+            </a:r>
+          </a:p>
+          <a:p>
+            <a:r>
+              <a:t>Los dos del experimento de orden: idx_cita_estado_fecha sobre cita (estado, fecha_hora) e idx_cita_fecha_estado sobre cita (fecha_hora, estado), las mismas dos columnas en orden inverso, creados a proposito para medir la diferencia.</a:t>
+            </a:r>
+          </a:p>
+          <a:p>
+            <a:r>
+              <a:t>Un aviso concreto: idx_cita_fecha no es ninguno de los cinco, el sufijo es _fecha_hora como la columna, y ese fue durante un tiempo el nombre que aparecia en el material.</a:t>
+            </a:r>
+          </a:p>
+          <a:p>
+            <a:r>
+              <a:t>Primero: declarar PRIMARY KEY o UNIQUE crea automaticamente un indice unico para sostener la restriccion, asi que id_dueno, id_mascota e id_cita YA tienen indice y crear otro encima solo duplica espacio y trabajo de escritura.</a:t>
+            </a:r>
+          </a:p>
+          <a:p>
+            <a:r>
+              <a:t>Segundo, menos conocido: declarar una FOREIGN KEY NO crea indice en ninguno de los dos motores. mascota.id_dueno apunta a dueno, pero del lado de mascota no hay nada ordenado</a:t>
+            </a:r>
+          </a:p>
+          <a:p>
+            <a:r>
+              <a:t>Y por eso idx_mascota_dueno si es una adicion legitima; sin el, ademas, borrar un dueno obliga a recorrer mascota completa para verificar la integridad.</a:t>
             </a:r>
           </a:p>
           <a:p>
@@ -2756,17 +2314,27 @@
           </a:p>
           <a:p>
             <a:r>
-              <a:t>Cinco, se violo el prefijo mas a la izquierda.</a:t>
-            </a:r>
-          </a:p>
-          <a:p>
-            <a:r>
-              <a:t>Seis, la condicion combina columnas de indices distintos con OR, caso en el que el motor arma una combinacion de mapas de bits o simplemente escanea.</a:t>
-            </a:r>
-          </a:p>
-          <a:p>
-            <a:r>
-              <a:t>Siete, el tipo de dato o la ordenacion no coincide con lo que el predicado compara.</a:t>
+              <a:t>El nombre de cada indice importa.</a:t>
+            </a:r>
+          </a:p>
+          <a:p>
+            <a:r>
+              <a:t>Dos hechos sobre claves evitan la mitad de los indices inutiles que se entregan en los proyectos.</a:t>
+            </a:r>
+          </a:p>
+          <a:p>
+            <a:r>
+              <a:t>Fuera de la lamina (habla de la practica): Aqui empieza la parte que se califica letra por letra, y conviene decirlo con esas palabras.</a:t>
+            </a:r>
+          </a:p>
+          <a:p>
+            <a:r>
+              <a:t>Fuera de la lamina (habla de la practica): El nombre de cada indice importa, porque el plan de ejecucion imprime literalmente Index Scan using seguido del nombre y porque la tabla de justificacion de la pregunta 5 se llena con esos mismos nombres.</a:t>
+            </a:r>
+          </a:p>
+          <a:p>
+            <a:r>
+              <a:t>Fuera de la lamina (habla de la practica): Un aviso concreto: idx_cita_fecha no es ninguno de los cinco, el sufijo es _fecha_hora como la columna, y ese fue durante un tiempo el nombre que aparecia en el material; si alguien lo escribe asi pierde puntos por el nombre y no por el concepto.</a:t>
             </a:r>
           </a:p>
         </p:txBody>
@@ -2841,37 +2409,42 @@
           </a:p>
           <a:p>
             <a:r>
-              <a:t>Los tres de la medicion: idx_cita_fecha_hora sobre cita (fecha_hora), que atiende cualquier consulta por rango de fecha con o sin estado; idx_mascota_dueno sobre mascota (id_dueno)</a:t>
-            </a:r>
-          </a:p>
-          <a:p>
-            <a:r>
-              <a:t>Que atiende el historial de un dueno; y idx_cita_programada_fecha, el indice parcial sobre cita (fecha_hora) WHERE estado = 'PROGRAMADA', que atiende la agenda del dia de la recepcion.</a:t>
-            </a:r>
-          </a:p>
-          <a:p>
-            <a:r>
-              <a:t>Los dos del experimento de orden: idx_cita_estado_fecha sobre cita (estado, fecha_hora) e idx_cita_fecha_estado sobre cita (fecha_hora, estado), las mismas dos columnas en orden inverso, creados a proposito para medir la diferencia.</a:t>
-            </a:r>
-          </a:p>
-          <a:p>
-            <a:r>
-              <a:t>Un aviso concreto: idx_cita_fecha no es ninguno de los cinco, el sufijo es _fecha_hora como la columna, y ese fue durante un tiempo el nombre que aparecia en el material.</a:t>
-            </a:r>
-          </a:p>
-          <a:p>
-            <a:r>
-              <a:t>Primero: declarar PRIMARY KEY o UNIQUE crea automaticamente un indice unico para sostener la restriccion, asi que id_dueno, id_mascota e id_cita YA tienen indice y crear otro encima solo duplica espacio y trabajo de escritura.</a:t>
-            </a:r>
-          </a:p>
-          <a:p>
-            <a:r>
-              <a:t>Segundo, menos conocido: declarar una FOREIGN KEY NO crea indice en ninguno de los dos motores. mascota.id_dueno apunta a dueno, pero del lado de mascota no hay nada ordenado</a:t>
-            </a:r>
-          </a:p>
-          <a:p>
-            <a:r>
-              <a:t>Y por eso idx_mascota_dueno si es una adicion legitima; sin el, ademas, borrar un dueno obliga a recorrer mascota completa para verificar la integridad.</a:t>
+              <a:t>La clase entera vive en una secuencia de cuatro pasos que hay que proyectar en ese orden, porque cambiarlo destruye la evidencia.</a:t>
+            </a:r>
+          </a:p>
+          <a:p>
+            <a:r>
+              <a:t>Primero, EXPLAIN ANALYZE de las dos consultas frecuentes ANTES de crear nada: tiene que salir Seq Scan on cita y Seq Scan on mascota, y ese es el punto de comparacion.</a:t>
+            </a:r>
+          </a:p>
+          <a:p>
+            <a:r>
+              <a:t>C1 es la agenda del dia, SELECT id_cita, fecha_hora, estado FROM cita WHERE fecha_hora &gt;= TIMESTAMP '2026-03-10 00:00:00' AND fecha_hora &lt; TIMESTAMP '2026-03-11 00:00:00' AND estado = 'PROGRAMADA', y devuelve 91 filas de las 150 citas que tiene ese dia</a:t>
+            </a:r>
+          </a:p>
+          <a:p>
+            <a:r>
+              <a:t>Tercero, y este es el paso que se salta medio salon, ANALYZE cita; y ANALYZE mascota;: crear el indice NO actualiza las estadisticas, el planeador decide por costo estimado, y con numeros viejos puede ignorar un indice perfectamente bueno.</a:t>
+            </a:r>
+          </a:p>
+          <a:p>
+            <a:r>
+              <a:t>La mitad de los avisos de «cree el indice y no me sirvio» de la clase son este paso omitido.</a:t>
+            </a:r>
+          </a:p>
+          <a:p>
+            <a:r>
+              <a:t>Cuarto, las MISMAS dos consultas otra vez, sin cambiar una coma: si se cambia una fecha o un id la comparacion deja de valer.</a:t>
+            </a:r>
+          </a:p>
+          <a:p>
+            <a:r>
+              <a:t>Y el cierre es la evidencia de que existen: ORDER BY tablename, indexname; la columna indexdef devuelve el CREATE INDEX completo, asi que ahi se ve tambien la clausula WHERE del indice parcial, que es lo que confirma que se creo parcial y no completo.</a:t>
+            </a:r>
+          </a:p>
+          <a:p>
+            <a:r>
+              <a:t>El enunciado ademas exige comentar CUAL de los dos indices sobre fecha_hora eligio el planeador para C1.</a:t>
             </a:r>
           </a:p>
           <a:p>
@@ -2881,27 +2454,27 @@
           </a:p>
           <a:p>
             <a:r>
-              <a:t>El nombre de cada indice importa.</a:t>
-            </a:r>
-          </a:p>
-          <a:p>
-            <a:r>
-              <a:t>Dos hechos sobre claves evitan la mitad de los indices inutiles que se entregan en los proyectos.</a:t>
-            </a:r>
-          </a:p>
-          <a:p>
-            <a:r>
-              <a:t>Fuera de la lamina (habla de la practica): Aqui empieza la parte que se califica letra por letra, y conviene decirlo con esas palabras.</a:t>
-            </a:r>
-          </a:p>
-          <a:p>
-            <a:r>
-              <a:t>Fuera de la lamina (habla de la practica): El nombre de cada indice importa, porque el plan de ejecucion imprime literalmente Index Scan using seguido del nombre y porque la tabla de justificacion de la pregunta 5 se llena con esos mismos nombres.</a:t>
-            </a:r>
-          </a:p>
-          <a:p>
-            <a:r>
-              <a:t>Fuera de la lamina (habla de la practica): Un aviso concreto: idx_cita_fecha no es ninguno de los cinco, el sufijo es _fecha_hora como la columna, y ese fue durante un tiempo el nombre que aparecia en el material; si alguien lo escribe asi pierde puntos por el nombre y no por el concepto.</a:t>
+              <a:t>Segundo, los CREATE INDEX.</a:t>
+            </a:r>
+          </a:p>
+          <a:p>
+            <a:r>
+              <a:t>CÓDIGO CITADO (referencia):</a:t>
+            </a:r>
+          </a:p>
+          <a:p>
+            <a:r>
+              <a:t>SELECT id_mascota, nombre, especie FROM mascota WHERE id_dueno = 1234</a:t>
+            </a:r>
+          </a:p>
+          <a:p>
+            <a:r>
+              <a:t>SELECT indexname, tablename, indexdef FROM pg_indexes WHERE tablename IN ('cita','mascota')</a:t>
+            </a:r>
+          </a:p>
+          <a:p>
+            <a:r>
+              <a:t>Fuera de la lamina (habla de la practica): El enunciado ademas exige comentar CUAL de los dos indices sobre fecha_hora eligio el planeador para C1, y la rubrica descuenta si no se comenta: no basta pegar el plan, hay que leerlo.</a:t>
             </a:r>
           </a:p>
         </p:txBody>
@@ -2976,42 +2549,37 @@
           </a:p>
           <a:p>
             <a:r>
-              <a:t>La clase entera vive en una secuencia de cuatro pasos que hay que proyectar en ese orden, porque cambiarlo destruye la evidencia.</a:t>
-            </a:r>
-          </a:p>
-          <a:p>
-            <a:r>
-              <a:t>Primero, EXPLAIN ANALYZE de las dos consultas frecuentes ANTES de crear nada: tiene que salir Seq Scan on cita y Seq Scan on mascota, y ese es el punto de comparacion.</a:t>
-            </a:r>
-          </a:p>
-          <a:p>
-            <a:r>
-              <a:t>C1 es la agenda del dia, SELECT id_cita, fecha_hora, estado FROM cita WHERE fecha_hora &gt;= TIMESTAMP '2026-03-10 00:00:00' AND fecha_hora &lt; TIMESTAMP '2026-03-11 00:00:00' AND estado = 'PROGRAMADA', y devuelve 91 filas de las 150 citas que tiene ese dia</a:t>
-            </a:r>
-          </a:p>
-          <a:p>
-            <a:r>
-              <a:t>Tercero, y este es el paso que se salta medio salon, ANALYZE cita; y ANALYZE mascota;: crear el indice NO actualiza las estadisticas, el planeador decide por costo estimado, y con numeros viejos puede ignorar un indice perfectamente bueno.</a:t>
-            </a:r>
-          </a:p>
-          <a:p>
-            <a:r>
-              <a:t>La mitad de los avisos de «cree el indice y no me sirvio» de la clase son este paso omitido.</a:t>
-            </a:r>
-          </a:p>
-          <a:p>
-            <a:r>
-              <a:t>Cuarto, las MISMAS dos consultas otra vez, sin cambiar una coma: si se cambia una fecha o un id la comparacion deja de valer.</a:t>
-            </a:r>
-          </a:p>
-          <a:p>
-            <a:r>
-              <a:t>Y el cierre es la evidencia de que existen: ORDER BY tablename, indexname; la columna indexdef devuelve el CREATE INDEX completo, asi que ahi se ve tambien la clausula WHERE del indice parcial, que es lo que confirma que se creo parcial y no completo.</a:t>
-            </a:r>
-          </a:p>
-          <a:p>
-            <a:r>
-              <a:t>El enunciado ademas exige comentar CUAL de los dos indices sobre fecha_hora eligio el planeador para C1.</a:t>
+              <a:t>Se crean los dos compuestos, se corre ANALYZE cita, y se miden tres consultas.</a:t>
+            </a:r>
+          </a:p>
+          <a:p>
+            <a:r>
+              <a:t>Q1 filtra por estado con igualdad y por fecha_hora con rango: favorece a idx_cita_estado_fecha, porque la columna de igualdad es la lider y el rango queda al final.</a:t>
+            </a:r>
+          </a:p>
+          <a:p>
+            <a:r>
+              <a:t>Q2 filtra solo por rango de fecha_hora: favorece a idx_cita_fecha_estado, porque ahi fecha_hora si es la lider.</a:t>
+            </a:r>
+          </a:p>
+          <a:p>
+            <a:r>
+              <a:t>Q3 filtra solo por estado, sin fecha: idx_cita_fecha_estado no le sirve, porque su columna lider no aparece en el WHERE, y con CANCELADA siendo apenas 2.728 de 30.010 filas el motor puede elegir idx_cita_estado_fecha o resolver por conteo.</a:t>
+            </a:r>
+          </a:p>
+          <a:p>
+            <a:r>
+              <a:t>Despues viene la parte que convierte la observacion en experimento: se hace DROP INDEX idx_cita_fecha_estado y se vuelve a medir Q2.</a:t>
+            </a:r>
+          </a:p>
+          <a:p>
+            <a:r>
+              <a:t>El plan cae en idx_cita_fecha_hora, que tambien tiene fecha_hora como lider, o vuelve al recorrido completo, pero NO se pasa a idx_cita_estado_fecha.</a:t>
+            </a:r>
+          </a:p>
+          <a:p>
+            <a:r>
+              <a:t>Un matiz honesto: el planeador decide por costo y puede sorprender, sobre todo entre dos indices que compiten de cerca; la instruccion al grupo es reportar lo que VIO en su plan, no lo que decia la diapositiva, y explicar la eleccion.</a:t>
             </a:r>
           </a:p>
           <a:p>
@@ -3021,27 +2589,17 @@
           </a:p>
           <a:p>
             <a:r>
-              <a:t>Segundo, los CREATE INDEX.</a:t>
-            </a:r>
-          </a:p>
-          <a:p>
-            <a:r>
-              <a:t>CÓDIGO CITADO (referencia):</a:t>
-            </a:r>
-          </a:p>
-          <a:p>
-            <a:r>
-              <a:t>SELECT id_mascota, nombre, especie FROM mascota WHERE id_dueno = 1234</a:t>
-            </a:r>
-          </a:p>
-          <a:p>
-            <a:r>
-              <a:t>SELECT indexname, tablename, indexdef FROM pg_indexes WHERE tablename IN ('cita','mascota')</a:t>
-            </a:r>
-          </a:p>
-          <a:p>
-            <a:r>
-              <a:t>Fuera de la lamina (habla de la practica): El enunciado ademas exige comentar CUAL de los dos indices sobre fecha_hora eligio el planeador para C1, y la rubrica descuenta si no se comenta: no basta pegar el plan, hay que leerlo.</a:t>
+              <a:t>Eso es la regla del prefijo izquierdo vista en vivo, y es la unica manera de que no quede como una frase que se memoriza.</a:t>
+            </a:r>
+          </a:p>
+          <a:p>
+            <a:r>
+              <a:t>Un plan distinto bien leido vale mas que el plan esperado copiado.</a:t>
+            </a:r>
+          </a:p>
+          <a:p>
+            <a:r>
+              <a:t>Fuera de la lamina (habla de la practica): La pregunta 2 no pide creer la regla del prefijo izquierdo, pide demostrarla, y el docente tiene que poder anticipar los tres resultados.</a:t>
             </a:r>
           </a:p>
         </p:txBody>
@@ -6572,118 +6130,14 @@
       </p:sp>
       <p:sp>
         <p:nvSpPr>
-          <p:cNvPr id="5" name="Rounded Rectangle 4"/>
-          <p:cNvSpPr/>
-          <p:nvPr/>
-        </p:nvSpPr>
-        <p:spPr>
-          <a:xfrm>
-            <a:off x="5797149" y="1432925"/>
-            <a:ext cx="6010497" cy="4339621"/>
-          </a:xfrm>
-          <a:prstGeom prst="roundRect">
-            <a:avLst>
-              <a:gd name="adj" fmla="val 4000"/>
-            </a:avLst>
-          </a:prstGeom>
-          <a:solidFill>
-            <a:srgbClr val="E8EEF4"/>
-          </a:solidFill>
-          <a:ln>
-            <a:noFill/>
-          </a:ln>
-        </p:spPr>
-        <p:style>
-          <a:lnRef idx="1">
-            <a:schemeClr val="accent1"/>
-          </a:lnRef>
-          <a:fillRef idx="3">
-            <a:schemeClr val="accent1"/>
-          </a:fillRef>
-          <a:effectRef idx="2">
-            <a:schemeClr val="accent1"/>
-          </a:effectRef>
-          <a:fontRef idx="minor">
-            <a:schemeClr val="lt1"/>
-          </a:fontRef>
-        </p:style>
-        <p:txBody>
-          <a:bodyPr rtlCol="0" anchor="ctr"/>
-          <a:lstStyle/>
-          <a:p>
-            <a:pPr algn="ctr"/>
-          </a:p>
-        </p:txBody>
-      </p:sp>
-      <p:pic>
-        <p:nvPicPr>
-          <p:cNvPr id="6" name="Picture 5" descr="library-index-card-catalog.jpg"/>
-          <p:cNvPicPr>
-            <a:picLocks noChangeAspect="1"/>
-          </p:cNvPicPr>
-          <p:nvPr/>
-        </p:nvPicPr>
-        <p:blipFill>
-          <a:blip r:embed="rId2"/>
-          <a:stretch>
-            <a:fillRect/>
-          </a:stretch>
-        </p:blipFill>
-        <p:spPr>
-          <a:xfrm>
-            <a:off x="5870301" y="1506077"/>
-            <a:ext cx="5864193" cy="4193317"/>
-          </a:xfrm>
-          <a:prstGeom prst="rect">
-            <a:avLst/>
-          </a:prstGeom>
-        </p:spPr>
-      </p:pic>
-      <p:sp>
-        <p:nvSpPr>
-          <p:cNvPr id="7" name="TextBox 6"/>
+          <p:cNvPr id="5" name="TextBox 4"/>
           <p:cNvSpPr txBox="1"/>
           <p:nvPr/>
         </p:nvSpPr>
         <p:spPr>
           <a:xfrm>
-            <a:off x="5870301" y="5961888"/>
-            <a:ext cx="5864193" cy="320040"/>
-          </a:xfrm>
-          <a:prstGeom prst="rect">
-            <a:avLst/>
-          </a:prstGeom>
-          <a:noFill/>
-        </p:spPr>
-        <p:txBody>
-          <a:bodyPr wrap="square">
-            <a:spAutoFit/>
-          </a:bodyPr>
-          <a:lstStyle/>
-          <a:p>
-            <a:pPr algn="ctr"/>
-            <a:r>
-              <a:rPr sz="1100" b="0" i="1">
-                <a:solidFill>
-                  <a:srgbClr val="666666"/>
-                </a:solidFill>
-                <a:latin typeface="Calibri"/>
-              </a:rPr>
-              <a:t>Foto: George Diamanto · Pexels</a:t>
-            </a:r>
-          </a:p>
-        </p:txBody>
-      </p:sp>
-      <p:sp>
-        <p:nvSpPr>
-          <p:cNvPr id="8" name="TextBox 7"/>
-          <p:cNvSpPr txBox="1"/>
-          <p:nvPr/>
-        </p:nvSpPr>
-        <p:spPr>
-          <a:xfrm>
-            <a:off x="457200" y="1353312"/>
-            <a:ext cx="5093061" cy="5047488"/>
+            <a:off x="457200" y="1170432"/>
+            <a:ext cx="11277295" cy="5230368"/>
           </a:xfrm>
           <a:prstGeom prst="rect">
             <a:avLst/>
@@ -6740,14 +6194,14 @@
                 </a:solidFill>
                 <a:latin typeface="Calibri"/>
               </a:rPr>
-              <a:t>–   Dos, el predicado no es sargable, como se vio en la Clase 6: UPPER(nombre), EXTRACT(YEAR FROM fecha_hora) o una conversion implicita de tipo bloquean…</a:t>
-            </a:r>
-          </a:p>
-        </p:txBody>
-      </p:sp>
-      <p:sp>
-        <p:nvSpPr>
-          <p:cNvPr id="9" name="TextBox 8"/>
+              <a:t>–   Dos, el predicado no es sargable, como se vio en la Clase 6: UPPER(nombre), EXTRACT(YEAR FROM fecha_hora) o una conversion implicita de tipo bloquean el indice</a:t>
+            </a:r>
+          </a:p>
+        </p:txBody>
+      </p:sp>
+      <p:sp>
+        <p:nvSpPr>
+          <p:cNvPr id="6" name="TextBox 5"/>
           <p:cNvSpPr txBox="1"/>
           <p:nvPr/>
         </p:nvSpPr>
@@ -6928,118 +6382,14 @@
       </p:sp>
       <p:sp>
         <p:nvSpPr>
-          <p:cNvPr id="5" name="Rounded Rectangle 4"/>
-          <p:cNvSpPr/>
-          <p:nvPr/>
-        </p:nvSpPr>
-        <p:spPr>
-          <a:xfrm>
-            <a:off x="5797149" y="1573813"/>
-            <a:ext cx="6010497" cy="4057845"/>
-          </a:xfrm>
-          <a:prstGeom prst="roundRect">
-            <a:avLst>
-              <a:gd name="adj" fmla="val 4000"/>
-            </a:avLst>
-          </a:prstGeom>
-          <a:solidFill>
-            <a:srgbClr val="E8EEF4"/>
-          </a:solidFill>
-          <a:ln>
-            <a:noFill/>
-          </a:ln>
-        </p:spPr>
-        <p:style>
-          <a:lnRef idx="1">
-            <a:schemeClr val="accent1"/>
-          </a:lnRef>
-          <a:fillRef idx="3">
-            <a:schemeClr val="accent1"/>
-          </a:fillRef>
-          <a:effectRef idx="2">
-            <a:schemeClr val="accent1"/>
-          </a:effectRef>
-          <a:fontRef idx="minor">
-            <a:schemeClr val="lt1"/>
-          </a:fontRef>
-        </p:style>
-        <p:txBody>
-          <a:bodyPr rtlCol="0" anchor="ctr"/>
-          <a:lstStyle/>
-          <a:p>
-            <a:pPr algn="ctr"/>
-          </a:p>
-        </p:txBody>
-      </p:sp>
-      <p:pic>
-        <p:nvPicPr>
-          <p:cNvPr id="6" name="Picture 5" descr="book-index-pages.jpg"/>
-          <p:cNvPicPr>
-            <a:picLocks noChangeAspect="1"/>
-          </p:cNvPicPr>
-          <p:nvPr/>
-        </p:nvPicPr>
-        <p:blipFill>
-          <a:blip r:embed="rId2"/>
-          <a:stretch>
-            <a:fillRect/>
-          </a:stretch>
-        </p:blipFill>
-        <p:spPr>
-          <a:xfrm>
-            <a:off x="5870301" y="1646965"/>
-            <a:ext cx="5864193" cy="3911541"/>
-          </a:xfrm>
-          <a:prstGeom prst="rect">
-            <a:avLst/>
-          </a:prstGeom>
-        </p:spPr>
-      </p:pic>
-      <p:sp>
-        <p:nvSpPr>
-          <p:cNvPr id="7" name="TextBox 6"/>
+          <p:cNvPr id="5" name="TextBox 4"/>
           <p:cNvSpPr txBox="1"/>
           <p:nvPr/>
         </p:nvSpPr>
         <p:spPr>
           <a:xfrm>
-            <a:off x="5870301" y="5961888"/>
-            <a:ext cx="5864193" cy="320040"/>
-          </a:xfrm>
-          <a:prstGeom prst="rect">
-            <a:avLst/>
-          </a:prstGeom>
-          <a:noFill/>
-        </p:spPr>
-        <p:txBody>
-          <a:bodyPr wrap="square">
-            <a:spAutoFit/>
-          </a:bodyPr>
-          <a:lstStyle/>
-          <a:p>
-            <a:pPr algn="ctr"/>
-            <a:r>
-              <a:rPr sz="1100" b="0" i="1">
-                <a:solidFill>
-                  <a:srgbClr val="666666"/>
-                </a:solidFill>
-                <a:latin typeface="Calibri"/>
-              </a:rPr>
-              <a:t>Foto: https://kaboompics.com/ · Pexels</a:t>
-            </a:r>
-          </a:p>
-        </p:txBody>
-      </p:sp>
-      <p:sp>
-        <p:nvSpPr>
-          <p:cNvPr id="8" name="TextBox 7"/>
-          <p:cNvSpPr txBox="1"/>
-          <p:nvPr/>
-        </p:nvSpPr>
-        <p:spPr>
-          <a:xfrm>
-            <a:off x="457200" y="1353312"/>
-            <a:ext cx="5093061" cy="5047488"/>
+            <a:off x="457200" y="1170432"/>
+            <a:ext cx="11277295" cy="5230368"/>
           </a:xfrm>
           <a:prstGeom prst="rect">
             <a:avLst/>
@@ -7103,7 +6453,7 @@
       </p:sp>
       <p:sp>
         <p:nvSpPr>
-          <p:cNvPr id="9" name="TextBox 8"/>
+          <p:cNvPr id="6" name="TextBox 5"/>
           <p:cNvSpPr txBox="1"/>
           <p:nvPr/>
         </p:nvSpPr>
@@ -12010,118 +11360,14 @@
       </p:sp>
       <p:sp>
         <p:nvSpPr>
-          <p:cNvPr id="6" name="Rounded Rectangle 5"/>
-          <p:cNvSpPr/>
-          <p:nvPr/>
-        </p:nvSpPr>
-        <p:spPr>
-          <a:xfrm>
-            <a:off x="5797149" y="1678969"/>
-            <a:ext cx="6010497" cy="4057845"/>
-          </a:xfrm>
-          <a:prstGeom prst="roundRect">
-            <a:avLst>
-              <a:gd name="adj" fmla="val 4000"/>
-            </a:avLst>
-          </a:prstGeom>
-          <a:solidFill>
-            <a:srgbClr val="E8EEF4"/>
-          </a:solidFill>
-          <a:ln>
-            <a:noFill/>
-          </a:ln>
-        </p:spPr>
-        <p:style>
-          <a:lnRef idx="1">
-            <a:schemeClr val="accent1"/>
-          </a:lnRef>
-          <a:fillRef idx="3">
-            <a:schemeClr val="accent1"/>
-          </a:fillRef>
-          <a:effectRef idx="2">
-            <a:schemeClr val="accent1"/>
-          </a:effectRef>
-          <a:fontRef idx="minor">
-            <a:schemeClr val="lt1"/>
-          </a:fontRef>
-        </p:style>
-        <p:txBody>
-          <a:bodyPr rtlCol="0" anchor="ctr"/>
-          <a:lstStyle/>
-          <a:p>
-            <a:pPr algn="ctr"/>
-          </a:p>
-        </p:txBody>
-      </p:sp>
-      <p:pic>
-        <p:nvPicPr>
-          <p:cNvPr id="7" name="Picture 6" descr="library-catalog-drawers.jpg"/>
-          <p:cNvPicPr>
-            <a:picLocks noChangeAspect="1"/>
-          </p:cNvPicPr>
-          <p:nvPr/>
-        </p:nvPicPr>
-        <p:blipFill>
-          <a:blip r:embed="rId2"/>
-          <a:stretch>
-            <a:fillRect/>
-          </a:stretch>
-        </p:blipFill>
-        <p:spPr>
-          <a:xfrm>
-            <a:off x="5870301" y="1752121"/>
-            <a:ext cx="5864193" cy="3911541"/>
-          </a:xfrm>
-          <a:prstGeom prst="rect">
-            <a:avLst/>
-          </a:prstGeom>
-        </p:spPr>
-      </p:pic>
-      <p:sp>
-        <p:nvSpPr>
-          <p:cNvPr id="8" name="TextBox 7"/>
+          <p:cNvPr id="6" name="TextBox 5"/>
           <p:cNvSpPr txBox="1"/>
           <p:nvPr/>
         </p:nvSpPr>
         <p:spPr>
           <a:xfrm>
-            <a:off x="5870301" y="5961888"/>
-            <a:ext cx="5864193" cy="320040"/>
-          </a:xfrm>
-          <a:prstGeom prst="rect">
-            <a:avLst/>
-          </a:prstGeom>
-          <a:noFill/>
-        </p:spPr>
-        <p:txBody>
-          <a:bodyPr wrap="square">
-            <a:spAutoFit/>
-          </a:bodyPr>
-          <a:lstStyle/>
-          <a:p>
-            <a:pPr algn="ctr"/>
-            <a:r>
-              <a:rPr sz="1100" b="0" i="1">
-                <a:solidFill>
-                  <a:srgbClr val="666666"/>
-                </a:solidFill>
-                <a:latin typeface="Calibri"/>
-              </a:rPr>
-              <a:t>Foto: cottonbro studio · Pexels</a:t>
-            </a:r>
-          </a:p>
-        </p:txBody>
-      </p:sp>
-      <p:sp>
-        <p:nvSpPr>
-          <p:cNvPr id="9" name="TextBox 8"/>
-          <p:cNvSpPr txBox="1"/>
-          <p:nvPr/>
-        </p:nvSpPr>
-        <p:spPr>
-          <a:xfrm>
-            <a:off x="457200" y="1563624"/>
-            <a:ext cx="5093061" cy="4837176"/>
+            <a:off x="457200" y="1380744"/>
+            <a:ext cx="11277295" cy="5020056"/>
           </a:xfrm>
           <a:prstGeom prst="rect">
             <a:avLst/>
@@ -12140,7 +11386,7 @@
               </a:spcAft>
             </a:pPr>
             <a:r>
-              <a:rPr sz="2000" b="0" i="0">
+              <a:rPr sz="1800" b="0" i="0">
                 <a:solidFill>
                   <a:srgbClr val="333333"/>
                 </a:solidFill>
@@ -12149,7 +11395,7 @@
               <a:t>–   </a:t>
             </a:r>
             <a:r>
-              <a:rPr sz="2000" b="1" i="0">
+              <a:rPr sz="1800" b="1" i="0">
                 <a:solidFill>
                   <a:srgbClr val="333333"/>
                 </a:solidFill>
@@ -12158,13 +11404,31 @@
               <a:t>El nombre importa.</a:t>
             </a:r>
             <a:r>
-              <a:rPr sz="2000" b="0" i="0">
+              <a:rPr sz="1800" b="0" i="0">
                 <a:solidFill>
                   <a:srgbClr val="333333"/>
                 </a:solidFill>
                 <a:latin typeface="Calibri"/>
               </a:rPr>
-              <a:t> El plan imprime «Index Scan using» seguido del nombre, asi que se lee en la salida:</a:t>
+              <a:t> El plan imprime «Index Scan using» seguido del nombre, asi que se lee en la salida: «idx_cita_fecha_hora», «idx_mascota_dueno», «idx_cita_programada_fecha» para la medicion, y «idx_cita_estado_fecha» + «idx_cita_fecha_estado» para el orden. </a:t>
+            </a:r>
+            <a:r>
+              <a:rPr sz="1800" b="1" i="0">
+                <a:solidFill>
+                  <a:srgbClr val="333333"/>
+                </a:solidFill>
+                <a:latin typeface="Calibri"/>
+              </a:rPr>
+              <a:t>«idx_cita_fecha» no es ninguno de los cinco</a:t>
+            </a:r>
+            <a:r>
+              <a:rPr sz="1800" b="0" i="0">
+                <a:solidFill>
+                  <a:srgbClr val="333333"/>
+                </a:solidFill>
+                <a:latin typeface="Calibri"/>
+              </a:rPr>
+              <a:t>: el sufijo es «_fecha_hora», como la columna.</a:t>
             </a:r>
           </a:p>
           <a:p>
@@ -12174,7 +11438,7 @@
               </a:spcAft>
             </a:pPr>
             <a:r>
-              <a:rPr sz="2000" b="0" i="0">
+              <a:rPr sz="1800" b="0" i="0">
                 <a:solidFill>
                   <a:srgbClr val="333333"/>
                 </a:solidFill>
@@ -12183,7 +11447,7 @@
               <a:t>–   </a:t>
             </a:r>
             <a:r>
-              <a:rPr sz="2000" b="1" i="0">
+              <a:rPr sz="1800" b="1" i="0">
                 <a:solidFill>
                   <a:srgbClr val="333333"/>
                 </a:solidFill>
@@ -12192,13 +11456,31 @@
               <a:t>Simple o compuesto.</a:t>
             </a:r>
             <a:r>
-              <a:rPr sz="2000" b="0" i="0">
+              <a:rPr sz="1800" b="0" i="0">
                 <a:solidFill>
                   <a:srgbClr val="333333"/>
                 </a:solidFill>
                 <a:latin typeface="Calibri"/>
               </a:rPr>
-              <a:t> Los tres primeros son de una columna;</a:t>
+              <a:t> Los tres primeros son de una columna; los dos ultimos llevan las mismas dos columnas </a:t>
+            </a:r>
+            <a:r>
+              <a:rPr sz="1800" b="1" i="0">
+                <a:solidFill>
+                  <a:srgbClr val="333333"/>
+                </a:solidFill>
+                <a:latin typeface="Calibri"/>
+              </a:rPr>
+              <a:t>en orden inverso</a:t>
+            </a:r>
+            <a:r>
+              <a:rPr sz="1800" b="0" i="0">
+                <a:solidFill>
+                  <a:srgbClr val="333333"/>
+                </a:solidFill>
+                <a:latin typeface="Calibri"/>
+              </a:rPr>
+              <a:t>, y existen precisamente para que se vea que el orden cambia el resultado.</a:t>
             </a:r>
           </a:p>
           <a:p>
@@ -12208,7 +11490,7 @@
               </a:spcAft>
             </a:pPr>
             <a:r>
-              <a:rPr sz="2000" b="0" i="0">
+              <a:rPr sz="1800" b="0" i="0">
                 <a:solidFill>
                   <a:srgbClr val="333333"/>
                 </a:solidFill>
@@ -12217,13 +11499,58 @@
               <a:t>–   </a:t>
             </a:r>
             <a:r>
-              <a:rPr sz="2000" b="1" i="0">
+              <a:rPr sz="1800" b="1" i="0">
                 <a:solidFill>
                   <a:srgbClr val="333333"/>
                 </a:solidFill>
                 <a:latin typeface="Calibri"/>
               </a:rPr>
               <a:t>La secuencia que hay que respetar.</a:t>
+            </a:r>
+            <a:r>
+              <a:rPr sz="1800" b="0" i="0">
+                <a:solidFill>
+                  <a:srgbClr val="333333"/>
+                </a:solidFill>
+                <a:latin typeface="Calibri"/>
+              </a:rPr>
+              <a:t> «EXPLAIN ANALYZE» </a:t>
+            </a:r>
+            <a:r>
+              <a:rPr sz="1800" b="1" i="0">
+                <a:solidFill>
+                  <a:srgbClr val="333333"/>
+                </a:solidFill>
+                <a:latin typeface="Calibri"/>
+              </a:rPr>
+              <a:t>antes</a:t>
+            </a:r>
+            <a:r>
+              <a:rPr sz="1800" b="0" i="0">
+                <a:solidFill>
+                  <a:srgbClr val="333333"/>
+                </a:solidFill>
+                <a:latin typeface="Calibri"/>
+              </a:rPr>
+              <a:t> (tiene que salir «Seq Scan») -&gt; «CREATE INDEX» -&gt; </a:t>
+            </a:r>
+            <a:r>
+              <a:rPr sz="1800" b="1" i="0">
+                <a:solidFill>
+                  <a:srgbClr val="333333"/>
+                </a:solidFill>
+                <a:latin typeface="Calibri"/>
+              </a:rPr>
+              <a:t>«ANALYZE cita;»</a:t>
+            </a:r>
+            <a:r>
+              <a:rPr sz="1800" b="0" i="0">
+                <a:solidFill>
+                  <a:srgbClr val="333333"/>
+                </a:solidFill>
+                <a:latin typeface="Calibri"/>
+              </a:rPr>
+              <a:t> -&gt; el mismo «EXPLAIN» otra vez. Sin el «ANALYZE» intermedio el planeador sigue con las estadisticas viejas y puede ignorar el indice que acabas de crear: la mitad de los «no me sirvio» de la clase son este paso saltado.</a:t>
             </a:r>
           </a:p>
           <a:p>
@@ -12233,7 +11560,7 @@
               </a:spcAft>
             </a:pPr>
             <a:r>
-              <a:rPr sz="2000" b="0" i="0">
+              <a:rPr sz="1800" b="0" i="0">
                 <a:solidFill>
                   <a:srgbClr val="333333"/>
                 </a:solidFill>
@@ -12242,7 +11569,7 @@
               <a:t>–   </a:t>
             </a:r>
             <a:r>
-              <a:rPr sz="2000" b="1" i="0">
+              <a:rPr sz="1800" b="1" i="0">
                 <a:solidFill>
                   <a:srgbClr val="333333"/>
                 </a:solidFill>
@@ -12250,12 +11577,73 @@
               </a:rPr>
               <a:t>La evidencia de que existen.</a:t>
             </a:r>
-          </a:p>
-        </p:txBody>
-      </p:sp>
-      <p:sp>
-        <p:nvSpPr>
-          <p:cNvPr id="10" name="TextBox 9"/>
+            <a:r>
+              <a:rPr sz="1800" b="0" i="0">
+                <a:solidFill>
+                  <a:srgbClr val="333333"/>
+                </a:solidFill>
+                <a:latin typeface="Calibri"/>
+              </a:rPr>
+              <a:t> «SELECT indexname, tablename, indexdef FROM pg_indexes WHERE tablename IN ('cita','mascota') ORDER BY tablename, indexname;» — «indexdef» devuelve el «CREATE INDEX» completo, asi que ahi se ve tambien el «WHERE» del parcial.</a:t>
+            </a:r>
+          </a:p>
+          <a:p>
+            <a:pPr>
+              <a:spcAft>
+                <a:spcPts val="800"/>
+              </a:spcAft>
+            </a:pPr>
+            <a:r>
+              <a:rPr sz="1800" b="0" i="0">
+                <a:solidFill>
+                  <a:srgbClr val="333333"/>
+                </a:solidFill>
+                <a:latin typeface="Calibri"/>
+              </a:rPr>
+              <a:t>–   </a:t>
+            </a:r>
+            <a:r>
+              <a:rPr sz="1800" b="1" i="0">
+                <a:solidFill>
+                  <a:srgbClr val="333333"/>
+                </a:solidFill>
+                <a:latin typeface="Calibri"/>
+              </a:rPr>
+              <a:t>Y el experimento del orden.</a:t>
+            </a:r>
+            <a:r>
+              <a:rPr sz="1800" b="0" i="0">
+                <a:solidFill>
+                  <a:srgbClr val="333333"/>
+                </a:solidFill>
+                <a:latin typeface="Calibri"/>
+              </a:rPr>
+              <a:t> Con los dos compuestos creados se miden tres consultas: estado + rango de fecha, solo rango, solo estado. Despues se hace «DROP INDEX idx_cita_fecha_estado» y se vuelve a medir la del rango solo. </a:t>
+            </a:r>
+            <a:r>
+              <a:rPr sz="1800" b="1" i="0">
+                <a:solidFill>
+                  <a:srgbClr val="333333"/>
+                </a:solidFill>
+                <a:latin typeface="Calibri"/>
+              </a:rPr>
+              <a:t>La columna de igualdad va primero y la de rango al final</a:t>
+            </a:r>
+            <a:r>
+              <a:rPr sz="1800" b="0" i="0">
+                <a:solidFill>
+                  <a:srgbClr val="333333"/>
+                </a:solidFill>
+                <a:latin typeface="Calibri"/>
+              </a:rPr>
+              <a:t>; un indice cuya columna lider no aparece en el «WHERE» normalmente no se usa.</a:t>
+            </a:r>
+          </a:p>
+        </p:txBody>
+      </p:sp>
+      <p:sp>
+        <p:nvSpPr>
+          <p:cNvPr id="7" name="TextBox 6"/>
           <p:cNvSpPr txBox="1"/>
           <p:nvPr/>
         </p:nvSpPr>
@@ -12992,118 +12380,14 @@
       </p:sp>
       <p:sp>
         <p:nvSpPr>
-          <p:cNvPr id="5" name="Rounded Rectangle 4"/>
-          <p:cNvSpPr/>
-          <p:nvPr/>
-        </p:nvSpPr>
-        <p:spPr>
-          <a:xfrm>
-            <a:off x="5797149" y="1573813"/>
-            <a:ext cx="6010497" cy="4057845"/>
-          </a:xfrm>
-          <a:prstGeom prst="roundRect">
-            <a:avLst>
-              <a:gd name="adj" fmla="val 4000"/>
-            </a:avLst>
-          </a:prstGeom>
-          <a:solidFill>
-            <a:srgbClr val="E8EEF4"/>
-          </a:solidFill>
-          <a:ln>
-            <a:noFill/>
-          </a:ln>
-        </p:spPr>
-        <p:style>
-          <a:lnRef idx="1">
-            <a:schemeClr val="accent1"/>
-          </a:lnRef>
-          <a:fillRef idx="3">
-            <a:schemeClr val="accent1"/>
-          </a:fillRef>
-          <a:effectRef idx="2">
-            <a:schemeClr val="accent1"/>
-          </a:effectRef>
-          <a:fontRef idx="minor">
-            <a:schemeClr val="lt1"/>
-          </a:fontRef>
-        </p:style>
-        <p:txBody>
-          <a:bodyPr rtlCol="0" anchor="ctr"/>
-          <a:lstStyle/>
-          <a:p>
-            <a:pPr algn="ctr"/>
-          </a:p>
-        </p:txBody>
-      </p:sp>
-      <p:pic>
-        <p:nvPicPr>
-          <p:cNvPr id="6" name="Picture 5" descr="highlighted-pages-book.jpg"/>
-          <p:cNvPicPr>
-            <a:picLocks noChangeAspect="1"/>
-          </p:cNvPicPr>
-          <p:nvPr/>
-        </p:nvPicPr>
-        <p:blipFill>
-          <a:blip r:embed="rId2"/>
-          <a:stretch>
-            <a:fillRect/>
-          </a:stretch>
-        </p:blipFill>
-        <p:spPr>
-          <a:xfrm>
-            <a:off x="5870301" y="1646965"/>
-            <a:ext cx="5864193" cy="3911541"/>
-          </a:xfrm>
-          <a:prstGeom prst="rect">
-            <a:avLst/>
-          </a:prstGeom>
-        </p:spPr>
-      </p:pic>
-      <p:sp>
-        <p:nvSpPr>
-          <p:cNvPr id="7" name="TextBox 6"/>
+          <p:cNvPr id="5" name="TextBox 4"/>
           <p:cNvSpPr txBox="1"/>
           <p:nvPr/>
         </p:nvSpPr>
         <p:spPr>
           <a:xfrm>
-            <a:off x="5870301" y="5961888"/>
-            <a:ext cx="5864193" cy="320040"/>
-          </a:xfrm>
-          <a:prstGeom prst="rect">
-            <a:avLst/>
-          </a:prstGeom>
-          <a:noFill/>
-        </p:spPr>
-        <p:txBody>
-          <a:bodyPr wrap="square">
-            <a:spAutoFit/>
-          </a:bodyPr>
-          <a:lstStyle/>
-          <a:p>
-            <a:pPr algn="ctr"/>
-            <a:r>
-              <a:rPr sz="1100" b="0" i="1">
-                <a:solidFill>
-                  <a:srgbClr val="666666"/>
-                </a:solidFill>
-                <a:latin typeface="Calibri"/>
-              </a:rPr>
-              <a:t>Foto: Jesus Vidal · Pexels</a:t>
-            </a:r>
-          </a:p>
-        </p:txBody>
-      </p:sp>
-      <p:sp>
-        <p:nvSpPr>
-          <p:cNvPr id="8" name="TextBox 7"/>
-          <p:cNvSpPr txBox="1"/>
-          <p:nvPr/>
-        </p:nvSpPr>
-        <p:spPr>
-          <a:xfrm>
-            <a:off x="457200" y="1353312"/>
-            <a:ext cx="5093061" cy="5047488"/>
+            <a:off x="457200" y="1170432"/>
+            <a:ext cx="11277295" cy="5230368"/>
           </a:xfrm>
           <a:prstGeom prst="rect">
             <a:avLst/>
@@ -13146,7 +12430,25 @@
                 </a:solidFill>
                 <a:latin typeface="Calibri"/>
               </a:rPr>
-              <a:t> Un indice que solo contiene las filas que cumplen una condicion:</a:t>
+              <a:t> Un indice que solo contiene las filas que cumplen una condicion: «CREATE INDEX idx_cita_programada_fecha ON cita (fecha_hora) WHERE estado = 'PROGRAMADA';». El «WHERE» no es el de la consulta: es </a:t>
+            </a:r>
+            <a:r>
+              <a:rPr sz="2000" b="1" i="0">
+                <a:solidFill>
+                  <a:srgbClr val="333333"/>
+                </a:solidFill>
+                <a:latin typeface="Calibri"/>
+              </a:rPr>
+              <a:t>parte de la definicion del indice</a:t>
+            </a:r>
+            <a:r>
+              <a:rPr sz="2000" b="0" i="0">
+                <a:solidFill>
+                  <a:srgbClr val="333333"/>
+                </a:solidFill>
+                <a:latin typeface="Calibri"/>
+              </a:rPr>
+              <a:t> y decide que filas entran en el arbol.</a:t>
             </a:r>
           </a:p>
           <a:p>
@@ -13198,7 +12500,25 @@
                 </a:solidFill>
                 <a:latin typeface="Calibri"/>
               </a:rPr>
-              <a:t> estan «PROGRAMADA» (el 61 %):</a:t>
+              <a:t> estan «PROGRAMADA» (el 61 %): el indice completo indexa 30.010 entradas y el parcial 18.187, cuatro de cada diez menos. Menos entradas es menos disco, menos cache ocupada y menos trabajo en cada escritura de una cita </a:t>
+            </a:r>
+            <a:r>
+              <a:rPr sz="2000" b="1" i="0">
+                <a:solidFill>
+                  <a:srgbClr val="333333"/>
+                </a:solidFill>
+                <a:latin typeface="Calibri"/>
+              </a:rPr>
+              <a:t>que no este programada</a:t>
+            </a:r>
+            <a:r>
+              <a:rPr sz="2000" b="0" i="0">
+                <a:solidFill>
+                  <a:srgbClr val="333333"/>
+                </a:solidFill>
+                <a:latin typeface="Calibri"/>
+              </a:rPr>
+              <a:t>.</a:t>
             </a:r>
           </a:p>
           <a:p>
@@ -13250,14 +12570,136 @@
                 </a:solidFill>
                 <a:latin typeface="Calibri"/>
               </a:rPr>
-              <a:t> del indice.</a:t>
-            </a:r>
-          </a:p>
-        </p:txBody>
-      </p:sp>
-      <p:sp>
-        <p:nvSpPr>
-          <p:cNvPr id="9" name="TextBox 8"/>
+              <a:t> del indice. «WHERE estado = 'PROGRAMADA' AND fecha_hora &gt;= ...» si lo aprovecha; la misma consulta sin el filtro de estado </a:t>
+            </a:r>
+            <a:r>
+              <a:rPr sz="2000" b="1" i="0">
+                <a:solidFill>
+                  <a:srgbClr val="333333"/>
+                </a:solidFill>
+                <a:latin typeface="Calibri"/>
+              </a:rPr>
+              <a:t>no</a:t>
+            </a:r>
+            <a:r>
+              <a:rPr sz="2000" b="0" i="0">
+                <a:solidFill>
+                  <a:srgbClr val="333333"/>
+                </a:solidFill>
+                <a:latin typeface="Calibri"/>
+              </a:rPr>
+              <a:t>, porque el indice no contiene las filas atendidas ni las canceladas.</a:t>
+            </a:r>
+          </a:p>
+          <a:p>
+            <a:pPr>
+              <a:spcAft>
+                <a:spcPts val="800"/>
+              </a:spcAft>
+            </a:pPr>
+            <a:r>
+              <a:rPr sz="2000" b="0" i="0">
+                <a:solidFill>
+                  <a:srgbClr val="333333"/>
+                </a:solidFill>
+                <a:latin typeface="Calibri"/>
+              </a:rPr>
+              <a:t>–   </a:t>
+            </a:r>
+            <a:r>
+              <a:rPr sz="2000" b="1" i="0">
+                <a:solidFill>
+                  <a:srgbClr val="333333"/>
+                </a:solidFill>
+                <a:latin typeface="Calibri"/>
+              </a:rPr>
+              <a:t>El caso de la clínica que lo justifica.</a:t>
+            </a:r>
+            <a:r>
+              <a:rPr sz="2000" b="0" i="0">
+                <a:solidFill>
+                  <a:srgbClr val="333333"/>
+                </a:solidFill>
+                <a:latin typeface="Calibri"/>
+              </a:rPr>
+              <a:t> La agenda del dia de la recepcion </a:t>
+            </a:r>
+            <a:r>
+              <a:rPr sz="2000" b="1" i="0">
+                <a:solidFill>
+                  <a:srgbClr val="333333"/>
+                </a:solidFill>
+                <a:latin typeface="Calibri"/>
+              </a:rPr>
+              <a:t>siempre</a:t>
+            </a:r>
+            <a:r>
+              <a:rPr sz="2000" b="0" i="0">
+                <a:solidFill>
+                  <a:srgbClr val="333333"/>
+                </a:solidFill>
+                <a:latin typeface="Calibri"/>
+              </a:rPr>
+              <a:t> filtra por «PROGRAMADA»: nadie abre la pantalla para ver las citas que ya se atendieron. Cuando el filtro es parte del caso de uso y no del capricho de una consulta, el parcial es la respuesta correcta.</a:t>
+            </a:r>
+          </a:p>
+          <a:p>
+            <a:pPr>
+              <a:spcAft>
+                <a:spcPts val="800"/>
+              </a:spcAft>
+            </a:pPr>
+            <a:r>
+              <a:rPr sz="2000" b="0" i="0">
+                <a:solidFill>
+                  <a:srgbClr val="333333"/>
+                </a:solidFill>
+                <a:latin typeface="Calibri"/>
+              </a:rPr>
+              <a:t>–   </a:t>
+            </a:r>
+            <a:r>
+              <a:rPr sz="2000" b="1" i="0">
+                <a:solidFill>
+                  <a:srgbClr val="333333"/>
+                </a:solidFill>
+                <a:latin typeface="Calibri"/>
+              </a:rPr>
+              <a:t>Cual de los dos elige.</a:t>
+            </a:r>
+            <a:r>
+              <a:rPr sz="2000" b="0" i="0">
+                <a:solidFill>
+                  <a:srgbClr val="333333"/>
+                </a:solidFill>
+                <a:latin typeface="Calibri"/>
+              </a:rPr>
+              <a:t> Con «idx_cita_fecha_hora» y «idx_cita_programada_fecha» compitiendo por la misma consulta, el plan nombra al ganador: hay que leer el «Index Scan using ...» y </a:t>
+            </a:r>
+            <a:r>
+              <a:rPr sz="2000" b="1" i="0">
+                <a:solidFill>
+                  <a:srgbClr val="333333"/>
+                </a:solidFill>
+                <a:latin typeface="Calibri"/>
+              </a:rPr>
+              <a:t>escribir cual salio</a:t>
+            </a:r>
+            <a:r>
+              <a:rPr sz="2000" b="0" i="0">
+                <a:solidFill>
+                  <a:srgbClr val="333333"/>
+                </a:solidFill>
+                <a:latin typeface="Calibri"/>
+              </a:rPr>
+              <a:t>.</a:t>
+            </a:r>
+          </a:p>
+        </p:txBody>
+      </p:sp>
+      <p:sp>
+        <p:nvSpPr>
+          <p:cNvPr id="6" name="TextBox 5"/>
           <p:cNvSpPr txBox="1"/>
           <p:nvPr/>
         </p:nvSpPr>
@@ -13438,118 +12880,14 @@
       </p:sp>
       <p:sp>
         <p:nvSpPr>
-          <p:cNvPr id="5" name="Rounded Rectangle 4"/>
-          <p:cNvSpPr/>
-          <p:nvPr/>
-        </p:nvSpPr>
-        <p:spPr>
-          <a:xfrm>
-            <a:off x="5797149" y="1573813"/>
-            <a:ext cx="6010497" cy="4057845"/>
-          </a:xfrm>
-          <a:prstGeom prst="roundRect">
-            <a:avLst>
-              <a:gd name="adj" fmla="val 4000"/>
-            </a:avLst>
-          </a:prstGeom>
-          <a:solidFill>
-            <a:srgbClr val="E8EEF4"/>
-          </a:solidFill>
-          <a:ln>
-            <a:noFill/>
-          </a:ln>
-        </p:spPr>
-        <p:style>
-          <a:lnRef idx="1">
-            <a:schemeClr val="accent1"/>
-          </a:lnRef>
-          <a:fillRef idx="3">
-            <a:schemeClr val="accent1"/>
-          </a:fillRef>
-          <a:effectRef idx="2">
-            <a:schemeClr val="accent1"/>
-          </a:effectRef>
-          <a:fontRef idx="minor">
-            <a:schemeClr val="lt1"/>
-          </a:fontRef>
-        </p:style>
-        <p:txBody>
-          <a:bodyPr rtlCol="0" anchor="ctr"/>
-          <a:lstStyle/>
-          <a:p>
-            <a:pPr algn="ctr"/>
-          </a:p>
-        </p:txBody>
-      </p:sp>
-      <p:pic>
-        <p:nvPicPr>
-          <p:cNvPr id="6" name="Picture 5" descr="notebook-planning-desk-coffee.jpg"/>
-          <p:cNvPicPr>
-            <a:picLocks noChangeAspect="1"/>
-          </p:cNvPicPr>
-          <p:nvPr/>
-        </p:nvPicPr>
-        <p:blipFill>
-          <a:blip r:embed="rId2"/>
-          <a:stretch>
-            <a:fillRect/>
-          </a:stretch>
-        </p:blipFill>
-        <p:spPr>
-          <a:xfrm>
-            <a:off x="5870301" y="1646965"/>
-            <a:ext cx="5864193" cy="3911541"/>
-          </a:xfrm>
-          <a:prstGeom prst="rect">
-            <a:avLst/>
-          </a:prstGeom>
-        </p:spPr>
-      </p:pic>
-      <p:sp>
-        <p:nvSpPr>
-          <p:cNvPr id="7" name="TextBox 6"/>
+          <p:cNvPr id="5" name="TextBox 4"/>
           <p:cNvSpPr txBox="1"/>
           <p:nvPr/>
         </p:nvSpPr>
         <p:spPr>
           <a:xfrm>
-            <a:off x="5870301" y="5961888"/>
-            <a:ext cx="5864193" cy="320040"/>
-          </a:xfrm>
-          <a:prstGeom prst="rect">
-            <a:avLst/>
-          </a:prstGeom>
-          <a:noFill/>
-        </p:spPr>
-        <p:txBody>
-          <a:bodyPr wrap="square">
-            <a:spAutoFit/>
-          </a:bodyPr>
-          <a:lstStyle/>
-          <a:p>
-            <a:pPr algn="ctr"/>
-            <a:r>
-              <a:rPr sz="1100" b="0" i="1">
-                <a:solidFill>
-                  <a:srgbClr val="666666"/>
-                </a:solidFill>
-                <a:latin typeface="Calibri"/>
-              </a:rPr>
-              <a:t>Foto: Cup of  Couple · Pexels</a:t>
-            </a:r>
-          </a:p>
-        </p:txBody>
-      </p:sp>
-      <p:sp>
-        <p:nvSpPr>
-          <p:cNvPr id="8" name="TextBox 7"/>
-          <p:cNvSpPr txBox="1"/>
-          <p:nvPr/>
-        </p:nvSpPr>
-        <p:spPr>
-          <a:xfrm>
-            <a:off x="457200" y="1353312"/>
-            <a:ext cx="5093061" cy="5047488"/>
+            <a:off x="457200" y="1170432"/>
+            <a:ext cx="11277295" cy="5230368"/>
           </a:xfrm>
           <a:prstGeom prst="rect">
             <a:avLst/>
@@ -13670,11 +13008,61 @@
               <a:t>–   Recorrido: teoría del tema, una lámina por concepto, y demo del docente sobre la base de la clínica.</a:t>
             </a:r>
           </a:p>
-        </p:txBody>
-      </p:sp>
-      <p:sp>
-        <p:nvSpPr>
-          <p:cNvPr id="9" name="TextBox 8"/>
+          <a:p>
+            <a:pPr>
+              <a:spcAft>
+                <a:spcPts val="800"/>
+              </a:spcAft>
+            </a:pPr>
+            <a:r>
+              <a:rPr sz="2000" b="0" i="0">
+                <a:solidFill>
+                  <a:srgbClr val="333333"/>
+                </a:solidFill>
+                <a:latin typeface="Calibri"/>
+              </a:rPr>
+              <a:t>–   Cada lámina se sostiene sola: sirve para repasar aunque hayas faltado.</a:t>
+            </a:r>
+          </a:p>
+          <a:p>
+            <a:pPr>
+              <a:spcAft>
+                <a:spcPts val="800"/>
+              </a:spcAft>
+            </a:pPr>
+            <a:r>
+              <a:rPr sz="2000" b="0" i="0">
+                <a:solidFill>
+                  <a:srgbClr val="333333"/>
+                </a:solidFill>
+                <a:latin typeface="Calibri"/>
+              </a:rPr>
+              <a:t>–   </a:t>
+            </a:r>
+            <a:r>
+              <a:rPr sz="2000" b="1" i="0">
+                <a:solidFill>
+                  <a:srgbClr val="333333"/>
+                </a:solidFill>
+                <a:latin typeface="Calibri"/>
+              </a:rPr>
+              <a:t>Conceptos de hoy:</a:t>
+            </a:r>
+            <a:r>
+              <a:rPr sz="2000" b="0" i="0">
+                <a:solidFill>
+                  <a:srgbClr val="333333"/>
+                </a:solidFill>
+                <a:latin typeface="Calibri"/>
+              </a:rPr>
+              <a:t> De donde viene la clase · El B-Tree por dentro, en cinco minutos · El precio se paga en cada escritura, y se cuantifica · El costo de sobre-indexar, que casi nunca se menciona.</a:t>
+            </a:r>
+          </a:p>
+        </p:txBody>
+      </p:sp>
+      <p:sp>
+        <p:nvSpPr>
+          <p:cNvPr id="6" name="TextBox 5"/>
           <p:cNvSpPr txBox="1"/>
           <p:nvPr/>
         </p:nvSpPr>
@@ -16736,118 +16124,14 @@
       </p:sp>
       <p:sp>
         <p:nvSpPr>
-          <p:cNvPr id="6" name="Rounded Rectangle 5"/>
-          <p:cNvSpPr/>
-          <p:nvPr/>
-        </p:nvSpPr>
-        <p:spPr>
-          <a:xfrm>
-            <a:off x="5797149" y="1675849"/>
-            <a:ext cx="6010497" cy="4064084"/>
-          </a:xfrm>
-          <a:prstGeom prst="roundRect">
-            <a:avLst>
-              <a:gd name="adj" fmla="val 4000"/>
-            </a:avLst>
-          </a:prstGeom>
-          <a:solidFill>
-            <a:srgbClr val="E8EEF4"/>
-          </a:solidFill>
-          <a:ln>
-            <a:noFill/>
-          </a:ln>
-        </p:spPr>
-        <p:style>
-          <a:lnRef idx="1">
-            <a:schemeClr val="accent1"/>
-          </a:lnRef>
-          <a:fillRef idx="3">
-            <a:schemeClr val="accent1"/>
-          </a:fillRef>
-          <a:effectRef idx="2">
-            <a:schemeClr val="accent1"/>
-          </a:effectRef>
-          <a:fontRef idx="minor">
-            <a:schemeClr val="lt1"/>
-          </a:fontRef>
-        </p:style>
-        <p:txBody>
-          <a:bodyPr rtlCol="0" anchor="ctr"/>
-          <a:lstStyle/>
-          <a:p>
-            <a:pPr algn="ctr"/>
-          </a:p>
-        </p:txBody>
-      </p:sp>
-      <p:pic>
-        <p:nvPicPr>
-          <p:cNvPr id="7" name="Picture 6" descr="filing-cabinet-drawers-years.jpg"/>
-          <p:cNvPicPr>
-            <a:picLocks noChangeAspect="1"/>
-          </p:cNvPicPr>
-          <p:nvPr/>
-        </p:nvPicPr>
-        <p:blipFill>
-          <a:blip r:embed="rId2"/>
-          <a:stretch>
-            <a:fillRect/>
-          </a:stretch>
-        </p:blipFill>
-        <p:spPr>
-          <a:xfrm>
-            <a:off x="5870301" y="1749001"/>
-            <a:ext cx="5864193" cy="3917780"/>
-          </a:xfrm>
-          <a:prstGeom prst="rect">
-            <a:avLst/>
-          </a:prstGeom>
-        </p:spPr>
-      </p:pic>
-      <p:sp>
-        <p:nvSpPr>
-          <p:cNvPr id="8" name="TextBox 7"/>
+          <p:cNvPr id="6" name="TextBox 5"/>
           <p:cNvSpPr txBox="1"/>
           <p:nvPr/>
         </p:nvSpPr>
         <p:spPr>
           <a:xfrm>
-            <a:off x="5870301" y="5961888"/>
-            <a:ext cx="5864193" cy="320040"/>
-          </a:xfrm>
-          <a:prstGeom prst="rect">
-            <a:avLst/>
-          </a:prstGeom>
-          <a:noFill/>
-        </p:spPr>
-        <p:txBody>
-          <a:bodyPr wrap="square">
-            <a:spAutoFit/>
-          </a:bodyPr>
-          <a:lstStyle/>
-          <a:p>
-            <a:pPr algn="ctr"/>
-            <a:r>
-              <a:rPr sz="1100" b="0" i="1">
-                <a:solidFill>
-                  <a:srgbClr val="666666"/>
-                </a:solidFill>
-                <a:latin typeface="Calibri"/>
-              </a:rPr>
-              <a:t>Foto: Element5 Digital · Pexels</a:t>
-            </a:r>
-          </a:p>
-        </p:txBody>
-      </p:sp>
-      <p:sp>
-        <p:nvSpPr>
-          <p:cNvPr id="9" name="TextBox 8"/>
-          <p:cNvSpPr txBox="1"/>
-          <p:nvPr/>
-        </p:nvSpPr>
-        <p:spPr>
-          <a:xfrm>
-            <a:off x="457200" y="1563624"/>
-            <a:ext cx="5093061" cy="4837176"/>
+            <a:off x="457200" y="1380744"/>
+            <a:ext cx="11277295" cy="5020056"/>
           </a:xfrm>
           <a:prstGeom prst="rect">
             <a:avLst/>
@@ -16866,7 +16150,7 @@
               </a:spcAft>
             </a:pPr>
             <a:r>
-              <a:rPr sz="2000" b="0" i="0">
+              <a:rPr sz="1700" b="0" i="0">
                 <a:solidFill>
                   <a:srgbClr val="333333"/>
                 </a:solidFill>
@@ -16875,13 +16159,40 @@
               <a:t>–   </a:t>
             </a:r>
             <a:r>
-              <a:rPr sz="2000" b="1" i="0">
+              <a:rPr sz="1700" b="1" i="0">
                 <a:solidFill>
                   <a:srgbClr val="333333"/>
                 </a:solidFill>
                 <a:latin typeface="Calibri"/>
               </a:rPr>
               <a:t>El DDL, en tres sentencias.</a:t>
+            </a:r>
+            <a:r>
+              <a:rPr sz="1700" b="0" i="0">
+                <a:solidFill>
+                  <a:srgbClr val="333333"/>
+                </a:solidFill>
+                <a:latin typeface="Calibri"/>
+              </a:rPr>
+              <a:t> «CREATE TABLE cita_hist (... ) PARTITION BY RANGE (fecha_hora);» y despues una particion por ano: «CREATE TABLE cita_hist_2025 PARTITION OF cita_hist FOR VALUES FROM (TIMESTAMP '2025-01-01') TO (TIMESTAMP '2026-01-01');». El rango es </a:t>
+            </a:r>
+            <a:r>
+              <a:rPr sz="1700" b="1" i="0">
+                <a:solidFill>
+                  <a:srgbClr val="333333"/>
+                </a:solidFill>
+                <a:latin typeface="Calibri"/>
+              </a:rPr>
+              <a:t>cerrado por abajo y abierto por arriba</a:t>
+            </a:r>
+            <a:r>
+              <a:rPr sz="1700" b="0" i="0">
+                <a:solidFill>
+                  <a:srgbClr val="333333"/>
+                </a:solidFill>
+                <a:latin typeface="Calibri"/>
+              </a:rPr>
+              <a:t>, asi que el «TO» de una particion es el «FROM» de la siguiente y nunca se solapan.</a:t>
             </a:r>
           </a:p>
           <a:p>
@@ -16891,7 +16202,7 @@
               </a:spcAft>
             </a:pPr>
             <a:r>
-              <a:rPr sz="2000" b="0" i="0">
+              <a:rPr sz="1700" b="0" i="0">
                 <a:solidFill>
                   <a:srgbClr val="333333"/>
                 </a:solidFill>
@@ -16900,7 +16211,7 @@
               <a:t>–   </a:t>
             </a:r>
             <a:r>
-              <a:rPr sz="2000" b="1" i="0">
+              <a:rPr sz="1700" b="1" i="0">
                 <a:solidFill>
                   <a:srgbClr val="333333"/>
                 </a:solidFill>
@@ -16909,7 +16220,7 @@
               <a:t>La trampa que cuesta la pregunta.</a:t>
             </a:r>
             <a:r>
-              <a:rPr sz="2000" b="0" i="0">
+              <a:rPr sz="1700" b="0" i="0">
                 <a:solidFill>
                   <a:srgbClr val="333333"/>
                 </a:solidFill>
@@ -16918,7 +16229,7 @@
               <a:t> En una tabla particionada la clave primaria </a:t>
             </a:r>
             <a:r>
-              <a:rPr sz="2000" b="1" i="0">
+              <a:rPr sz="1700" b="1" i="0">
                 <a:solidFill>
                   <a:srgbClr val="333333"/>
                 </a:solidFill>
@@ -16927,13 +16238,13 @@
               <a:t>debe incluir la columna de particion</a:t>
             </a:r>
             <a:r>
-              <a:rPr sz="2000" b="0" i="0">
+              <a:rPr sz="1700" b="0" i="0">
                 <a:solidFill>
                   <a:srgbClr val="333333"/>
                 </a:solidFill>
                 <a:latin typeface="Calibri"/>
               </a:rPr>
-              <a:t>:</a:t>
+              <a:t>: «PRIMARY KEY (id_cita, fecha_hora)». Un «PRIMARY KEY (id_cita)» a secas no compila, y el error del motor no dice «te falta la columna de particion» con esas palabras.</a:t>
             </a:r>
           </a:p>
           <a:p>
@@ -16943,7 +16254,7 @@
               </a:spcAft>
             </a:pPr>
             <a:r>
-              <a:rPr sz="2000" b="0" i="0">
+              <a:rPr sz="1700" b="0" i="0">
                 <a:solidFill>
                   <a:srgbClr val="333333"/>
                 </a:solidFill>
@@ -16952,13 +16263,40 @@
               <a:t>–   </a:t>
             </a:r>
             <a:r>
-              <a:rPr sz="2000" b="1" i="0">
+              <a:rPr sz="1700" b="1" i="0">
                 <a:solidFill>
                   <a:srgbClr val="333333"/>
                 </a:solidFill>
                 <a:latin typeface="Calibri"/>
               </a:rPr>
               <a:t>La prueba de que el reparto ocurrio.</a:t>
+            </a:r>
+            <a:r>
+              <a:rPr sz="1700" b="0" i="0">
+                <a:solidFill>
+                  <a:srgbClr val="333333"/>
+                </a:solidFill>
+                <a:latin typeface="Calibri"/>
+              </a:rPr>
+              <a:t> «SELECT tableoid::regclass AS particion, COUNT(*), MIN(fecha_hora), MAX(fecha_hora) FROM cita_hist GROUP BY 1 ORDER BY 1;» — «tableoid» es la columna de sistema que dice </a:t>
+            </a:r>
+            <a:r>
+              <a:rPr sz="1700" b="1" i="0">
+                <a:solidFill>
+                  <a:srgbClr val="333333"/>
+                </a:solidFill>
+                <a:latin typeface="Calibri"/>
+              </a:rPr>
+              <a:t>en que tabla fisica vive cada fila</a:t>
+            </a:r>
+            <a:r>
+              <a:rPr sz="1700" b="0" i="0">
+                <a:solidFill>
+                  <a:srgbClr val="333333"/>
+                </a:solidFill>
+                <a:latin typeface="Calibri"/>
+              </a:rPr>
+              <a:t>, y «::regclass» la traduce a nombre. Sin esta consulta no hay evidencia del enrutamiento, solo un «INSERT» que no dio error.</a:t>
             </a:r>
           </a:p>
           <a:p>
@@ -16968,7 +16306,7 @@
               </a:spcAft>
             </a:pPr>
             <a:r>
-              <a:rPr sz="2000" b="0" i="0">
+              <a:rPr sz="1700" b="0" i="0">
                 <a:solidFill>
                   <a:srgbClr val="333333"/>
                 </a:solidFill>
@@ -16977,7 +16315,7 @@
               <a:t>–   </a:t>
             </a:r>
             <a:r>
-              <a:rPr sz="2000" b="1" i="0">
+              <a:rPr sz="1700" b="1" i="0">
                 <a:solidFill>
                   <a:srgbClr val="333333"/>
                 </a:solidFill>
@@ -16986,7 +16324,7 @@
               <a:t>La poda, que es lo unico que mejora hoy.</a:t>
             </a:r>
             <a:r>
-              <a:rPr sz="2000" b="0" i="0">
+              <a:rPr sz="1700" b="0" i="0">
                 <a:solidFill>
                   <a:srgbClr val="333333"/>
                 </a:solidFill>
@@ -16995,7 +16333,7 @@
               <a:t> En «EXPLAIN ANALYZE» de una consulta acotada a 2026 el plan tiene que mencionar </a:t>
             </a:r>
             <a:r>
-              <a:rPr sz="2000" b="1" i="0">
+              <a:rPr sz="1700" b="1" i="0">
                 <a:solidFill>
                   <a:srgbClr val="333333"/>
                 </a:solidFill>
@@ -17004,20 +16342,90 @@
               <a:t>solo «cita_hist_2026»</a:t>
             </a:r>
             <a:r>
-              <a:rPr sz="2000" b="0" i="0">
+              <a:rPr sz="1700" b="0" i="0">
                 <a:solidFill>
                   <a:srgbClr val="333333"/>
                 </a:solidFill>
                 <a:latin typeface="Calibri"/>
               </a:rPr>
-              <a:t>.</a:t>
-            </a:r>
-          </a:p>
-        </p:txBody>
-      </p:sp>
-      <p:sp>
-        <p:nvSpPr>
-          <p:cNvPr id="10" name="TextBox 9"/>
+              <a:t>. Con 5.010 filas el tiempo no baja de forma apreciable y hay que decirlo: lo que se demuestra es que el motor </a:t>
+            </a:r>
+            <a:r>
+              <a:rPr sz="1700" b="1" i="0">
+                <a:solidFill>
+                  <a:srgbClr val="333333"/>
+                </a:solidFill>
+                <a:latin typeface="Calibri"/>
+              </a:rPr>
+              <a:t>descarta particiones enteras</a:t>
+            </a:r>
+            <a:r>
+              <a:rPr sz="1700" b="0" i="0">
+                <a:solidFill>
+                  <a:srgbClr val="333333"/>
+                </a:solidFill>
+                <a:latin typeface="Calibri"/>
+              </a:rPr>
+              <a:t> antes de leer.</a:t>
+            </a:r>
+          </a:p>
+          <a:p>
+            <a:pPr>
+              <a:spcAft>
+                <a:spcPts val="800"/>
+              </a:spcAft>
+            </a:pPr>
+            <a:r>
+              <a:rPr sz="1700" b="0" i="0">
+                <a:solidFill>
+                  <a:srgbClr val="333333"/>
+                </a:solidFill>
+                <a:latin typeface="Calibri"/>
+              </a:rPr>
+              <a:t>–   </a:t>
+            </a:r>
+            <a:r>
+              <a:rPr sz="1700" b="1" i="0">
+                <a:solidFill>
+                  <a:srgbClr val="333333"/>
+                </a:solidFill>
+                <a:latin typeface="Calibri"/>
+              </a:rPr>
+              <a:t>Y el beneficio real, que es de mantenimiento.</a:t>
+            </a:r>
+            <a:r>
+              <a:rPr sz="1700" b="0" i="0">
+                <a:solidFill>
+                  <a:srgbClr val="333333"/>
+                </a:solidFill>
+                <a:latin typeface="Calibri"/>
+              </a:rPr>
+              <a:t> Archivar 2025 es «DROP TABLE cita_hist_2025», una operacion de </a:t>
+            </a:r>
+            <a:r>
+              <a:rPr sz="1700" b="1" i="0">
+                <a:solidFill>
+                  <a:srgbClr val="333333"/>
+                </a:solidFill>
+                <a:latin typeface="Calibri"/>
+              </a:rPr>
+              <a:t>metadatos</a:t>
+            </a:r>
+            <a:r>
+              <a:rPr sz="1700" b="0" i="0">
+                <a:solidFill>
+                  <a:srgbClr val="333333"/>
+                </a:solidFill>
+                <a:latin typeface="Calibri"/>
+              </a:rPr>
+              <a:t> que tarda un instante. El «DELETE FROM cita WHERE fecha_hora &lt; ...» equivalente toca millones de filas, infla el registro de transacciones y sostiene bloqueos largos — el contraste conecta directo con la Clase 8.</a:t>
+            </a:r>
+          </a:p>
+        </p:txBody>
+      </p:sp>
+      <p:sp>
+        <p:nvSpPr>
+          <p:cNvPr id="7" name="TextBox 6"/>
           <p:cNvSpPr txBox="1"/>
           <p:nvPr/>
         </p:nvSpPr>
@@ -17198,118 +16606,14 @@
       </p:sp>
       <p:sp>
         <p:nvSpPr>
-          <p:cNvPr id="5" name="Rounded Rectangle 4"/>
-          <p:cNvSpPr/>
-          <p:nvPr/>
-        </p:nvSpPr>
-        <p:spPr>
-          <a:xfrm>
-            <a:off x="5797149" y="1573813"/>
-            <a:ext cx="6010497" cy="4057845"/>
-          </a:xfrm>
-          <a:prstGeom prst="roundRect">
-            <a:avLst>
-              <a:gd name="adj" fmla="val 4000"/>
-            </a:avLst>
-          </a:prstGeom>
-          <a:solidFill>
-            <a:srgbClr val="E8EEF4"/>
-          </a:solidFill>
-          <a:ln>
-            <a:noFill/>
-          </a:ln>
-        </p:spPr>
-        <p:style>
-          <a:lnRef idx="1">
-            <a:schemeClr val="accent1"/>
-          </a:lnRef>
-          <a:fillRef idx="3">
-            <a:schemeClr val="accent1"/>
-          </a:fillRef>
-          <a:effectRef idx="2">
-            <a:schemeClr val="accent1"/>
-          </a:effectRef>
-          <a:fontRef idx="minor">
-            <a:schemeClr val="lt1"/>
-          </a:fontRef>
-        </p:style>
-        <p:txBody>
-          <a:bodyPr rtlCol="0" anchor="ctr"/>
-          <a:lstStyle/>
-          <a:p>
-            <a:pPr algn="ctr"/>
-          </a:p>
-        </p:txBody>
-      </p:sp>
-      <p:pic>
-        <p:nvPicPr>
-          <p:cNvPr id="6" name="Picture 5" descr="judge-gavel-decision.jpg"/>
-          <p:cNvPicPr>
-            <a:picLocks noChangeAspect="1"/>
-          </p:cNvPicPr>
-          <p:nvPr/>
-        </p:nvPicPr>
-        <p:blipFill>
-          <a:blip r:embed="rId2"/>
-          <a:stretch>
-            <a:fillRect/>
-          </a:stretch>
-        </p:blipFill>
-        <p:spPr>
-          <a:xfrm>
-            <a:off x="5870301" y="1646965"/>
-            <a:ext cx="5864193" cy="3911541"/>
-          </a:xfrm>
-          <a:prstGeom prst="rect">
-            <a:avLst/>
-          </a:prstGeom>
-        </p:spPr>
-      </p:pic>
-      <p:sp>
-        <p:nvSpPr>
-          <p:cNvPr id="7" name="TextBox 6"/>
+          <p:cNvPr id="5" name="TextBox 4"/>
           <p:cNvSpPr txBox="1"/>
           <p:nvPr/>
         </p:nvSpPr>
         <p:spPr>
           <a:xfrm>
-            <a:off x="5870301" y="5961888"/>
-            <a:ext cx="5864193" cy="320040"/>
-          </a:xfrm>
-          <a:prstGeom prst="rect">
-            <a:avLst/>
-          </a:prstGeom>
-          <a:noFill/>
-        </p:spPr>
-        <p:txBody>
-          <a:bodyPr wrap="square">
-            <a:spAutoFit/>
-          </a:bodyPr>
-          <a:lstStyle/>
-          <a:p>
-            <a:pPr algn="ctr"/>
-            <a:r>
-              <a:rPr sz="1100" b="0" i="1">
-                <a:solidFill>
-                  <a:srgbClr val="666666"/>
-                </a:solidFill>
-                <a:latin typeface="Calibri"/>
-              </a:rPr>
-              <a:t>Foto: KATRIN  BOLOVTSOVA · Pexels</a:t>
-            </a:r>
-          </a:p>
-        </p:txBody>
-      </p:sp>
-      <p:sp>
-        <p:nvSpPr>
-          <p:cNvPr id="8" name="TextBox 7"/>
-          <p:cNvSpPr txBox="1"/>
-          <p:nvPr/>
-        </p:nvSpPr>
-        <p:spPr>
-          <a:xfrm>
-            <a:off x="457200" y="1353312"/>
-            <a:ext cx="5093061" cy="5047488"/>
+            <a:off x="457200" y="1170432"/>
+            <a:ext cx="11277295" cy="5230368"/>
           </a:xfrm>
           <a:prstGeom prst="rect">
             <a:avLst/>
@@ -17389,7 +16693,7 @@
       </p:sp>
       <p:sp>
         <p:nvSpPr>
-          <p:cNvPr id="9" name="TextBox 8"/>
+          <p:cNvPr id="6" name="TextBox 5"/>
           <p:cNvSpPr txBox="1"/>
           <p:nvPr/>
         </p:nvSpPr>
@@ -17570,118 +16874,14 @@
       </p:sp>
       <p:sp>
         <p:nvSpPr>
-          <p:cNvPr id="5" name="Rounded Rectangle 4"/>
-          <p:cNvSpPr/>
-          <p:nvPr/>
-        </p:nvSpPr>
-        <p:spPr>
-          <a:xfrm>
-            <a:off x="5797149" y="1573813"/>
-            <a:ext cx="6010497" cy="4057845"/>
-          </a:xfrm>
-          <a:prstGeom prst="roundRect">
-            <a:avLst>
-              <a:gd name="adj" fmla="val 4000"/>
-            </a:avLst>
-          </a:prstGeom>
-          <a:solidFill>
-            <a:srgbClr val="E8EEF4"/>
-          </a:solidFill>
-          <a:ln>
-            <a:noFill/>
-          </a:ln>
-        </p:spPr>
-        <p:style>
-          <a:lnRef idx="1">
-            <a:schemeClr val="accent1"/>
-          </a:lnRef>
-          <a:fillRef idx="3">
-            <a:schemeClr val="accent1"/>
-          </a:fillRef>
-          <a:effectRef idx="2">
-            <a:schemeClr val="accent1"/>
-          </a:effectRef>
-          <a:fontRef idx="minor">
-            <a:schemeClr val="lt1"/>
-          </a:fontRef>
-        </p:style>
-        <p:txBody>
-          <a:bodyPr rtlCol="0" anchor="ctr"/>
-          <a:lstStyle/>
-          <a:p>
-            <a:pPr algn="ctr"/>
-          </a:p>
-        </p:txBody>
-      </p:sp>
-      <p:pic>
-        <p:nvPicPr>
-          <p:cNvPr id="6" name="Picture 5" descr="laptop-presentation-demo.jpg"/>
-          <p:cNvPicPr>
-            <a:picLocks noChangeAspect="1"/>
-          </p:cNvPicPr>
-          <p:nvPr/>
-        </p:nvPicPr>
-        <p:blipFill>
-          <a:blip r:embed="rId2"/>
-          <a:stretch>
-            <a:fillRect/>
-          </a:stretch>
-        </p:blipFill>
-        <p:spPr>
-          <a:xfrm>
-            <a:off x="5870301" y="1646965"/>
-            <a:ext cx="5864193" cy="3911541"/>
-          </a:xfrm>
-          <a:prstGeom prst="rect">
-            <a:avLst/>
-          </a:prstGeom>
-        </p:spPr>
-      </p:pic>
-      <p:sp>
-        <p:nvSpPr>
-          <p:cNvPr id="7" name="TextBox 6"/>
+          <p:cNvPr id="5" name="TextBox 4"/>
           <p:cNvSpPr txBox="1"/>
           <p:nvPr/>
         </p:nvSpPr>
         <p:spPr>
           <a:xfrm>
-            <a:off x="5870301" y="5961888"/>
-            <a:ext cx="5864193" cy="320040"/>
-          </a:xfrm>
-          <a:prstGeom prst="rect">
-            <a:avLst/>
-          </a:prstGeom>
-          <a:noFill/>
-        </p:spPr>
-        <p:txBody>
-          <a:bodyPr wrap="square">
-            <a:spAutoFit/>
-          </a:bodyPr>
-          <a:lstStyle/>
-          <a:p>
-            <a:pPr algn="ctr"/>
-            <a:r>
-              <a:rPr sz="1100" b="0" i="1">
-                <a:solidFill>
-                  <a:srgbClr val="666666"/>
-                </a:solidFill>
-                <a:latin typeface="Calibri"/>
-              </a:rPr>
-              <a:t>Foto: Matheus Bertelli · Pexels</a:t>
-            </a:r>
-          </a:p>
-        </p:txBody>
-      </p:sp>
-      <p:sp>
-        <p:nvSpPr>
-          <p:cNvPr id="8" name="TextBox 7"/>
-          <p:cNvSpPr txBox="1"/>
-          <p:nvPr/>
-        </p:nvSpPr>
-        <p:spPr>
-          <a:xfrm>
-            <a:off x="457200" y="1353312"/>
-            <a:ext cx="5093061" cy="5047488"/>
+            <a:off x="457200" y="1170432"/>
+            <a:ext cx="11277295" cy="5230368"/>
           </a:xfrm>
           <a:prstGeom prst="rect">
             <a:avLst/>
@@ -17761,7 +16961,7 @@
       </p:sp>
       <p:sp>
         <p:nvSpPr>
-          <p:cNvPr id="9" name="TextBox 8"/>
+          <p:cNvPr id="6" name="TextBox 5"/>
           <p:cNvSpPr txBox="1"/>
           <p:nvPr/>
         </p:nvSpPr>
@@ -17942,118 +17142,14 @@
       </p:sp>
       <p:sp>
         <p:nvSpPr>
-          <p:cNvPr id="5" name="Rounded Rectangle 4"/>
-          <p:cNvSpPr/>
-          <p:nvPr/>
-        </p:nvSpPr>
-        <p:spPr>
-          <a:xfrm>
-            <a:off x="5797149" y="1573813"/>
-            <a:ext cx="6010497" cy="4057845"/>
-          </a:xfrm>
-          <a:prstGeom prst="roundRect">
-            <a:avLst>
-              <a:gd name="adj" fmla="val 4000"/>
-            </a:avLst>
-          </a:prstGeom>
-          <a:solidFill>
-            <a:srgbClr val="E8EEF4"/>
-          </a:solidFill>
-          <a:ln>
-            <a:noFill/>
-          </a:ln>
-        </p:spPr>
-        <p:style>
-          <a:lnRef idx="1">
-            <a:schemeClr val="accent1"/>
-          </a:lnRef>
-          <a:fillRef idx="3">
-            <a:schemeClr val="accent1"/>
-          </a:fillRef>
-          <a:effectRef idx="2">
-            <a:schemeClr val="accent1"/>
-          </a:effectRef>
-          <a:fontRef idx="minor">
-            <a:schemeClr val="lt1"/>
-          </a:fontRef>
-        </p:style>
-        <p:txBody>
-          <a:bodyPr rtlCol="0" anchor="ctr"/>
-          <a:lstStyle/>
-          <a:p>
-            <a:pPr algn="ctr"/>
-          </a:p>
-        </p:txBody>
-      </p:sp>
-      <p:pic>
-        <p:nvPicPr>
-          <p:cNvPr id="6" name="Picture 5" descr="laptop-browser-code.jpg"/>
-          <p:cNvPicPr>
-            <a:picLocks noChangeAspect="1"/>
-          </p:cNvPicPr>
-          <p:nvPr/>
-        </p:nvPicPr>
-        <p:blipFill>
-          <a:blip r:embed="rId2"/>
-          <a:stretch>
-            <a:fillRect/>
-          </a:stretch>
-        </p:blipFill>
-        <p:spPr>
-          <a:xfrm>
-            <a:off x="5870301" y="1646965"/>
-            <a:ext cx="5864193" cy="3911541"/>
-          </a:xfrm>
-          <a:prstGeom prst="rect">
-            <a:avLst/>
-          </a:prstGeom>
-        </p:spPr>
-      </p:pic>
-      <p:sp>
-        <p:nvSpPr>
-          <p:cNvPr id="7" name="TextBox 6"/>
+          <p:cNvPr id="5" name="TextBox 4"/>
           <p:cNvSpPr txBox="1"/>
           <p:nvPr/>
         </p:nvSpPr>
         <p:spPr>
           <a:xfrm>
-            <a:off x="5870301" y="5961888"/>
-            <a:ext cx="5864193" cy="320040"/>
-          </a:xfrm>
-          <a:prstGeom prst="rect">
-            <a:avLst/>
-          </a:prstGeom>
-          <a:noFill/>
-        </p:spPr>
-        <p:txBody>
-          <a:bodyPr wrap="square">
-            <a:spAutoFit/>
-          </a:bodyPr>
-          <a:lstStyle/>
-          <a:p>
-            <a:pPr algn="ctr"/>
-            <a:r>
-              <a:rPr sz="1100" b="0" i="1">
-                <a:solidFill>
-                  <a:srgbClr val="666666"/>
-                </a:solidFill>
-                <a:latin typeface="Calibri"/>
-              </a:rPr>
-              <a:t>Foto: Markus Spiske · Pexels</a:t>
-            </a:r>
-          </a:p>
-        </p:txBody>
-      </p:sp>
-      <p:sp>
-        <p:nvSpPr>
-          <p:cNvPr id="8" name="TextBox 7"/>
-          <p:cNvSpPr txBox="1"/>
-          <p:nvPr/>
-        </p:nvSpPr>
-        <p:spPr>
-          <a:xfrm>
-            <a:off x="457200" y="1353312"/>
-            <a:ext cx="5093061" cy="5047488"/>
+            <a:off x="457200" y="1170432"/>
+            <a:ext cx="11277295" cy="5230368"/>
           </a:xfrm>
           <a:prstGeom prst="rect">
             <a:avLst/>
@@ -18117,7 +17213,7 @@
       </p:sp>
       <p:sp>
         <p:nvSpPr>
-          <p:cNvPr id="9" name="TextBox 8"/>
+          <p:cNvPr id="6" name="TextBox 5"/>
           <p:cNvSpPr txBox="1"/>
           <p:nvPr/>
         </p:nvSpPr>
@@ -18298,118 +17394,14 @@
       </p:sp>
       <p:sp>
         <p:nvSpPr>
-          <p:cNvPr id="5" name="Rounded Rectangle 4"/>
-          <p:cNvSpPr/>
-          <p:nvPr/>
-        </p:nvSpPr>
-        <p:spPr>
-          <a:xfrm>
-            <a:off x="5797149" y="1573813"/>
-            <a:ext cx="6010497" cy="4057845"/>
-          </a:xfrm>
-          <a:prstGeom prst="roundRect">
-            <a:avLst>
-              <a:gd name="adj" fmla="val 4000"/>
-            </a:avLst>
-          </a:prstGeom>
-          <a:solidFill>
-            <a:srgbClr val="E8EEF4"/>
-          </a:solidFill>
-          <a:ln>
-            <a:noFill/>
-          </a:ln>
-        </p:spPr>
-        <p:style>
-          <a:lnRef idx="1">
-            <a:schemeClr val="accent1"/>
-          </a:lnRef>
-          <a:fillRef idx="3">
-            <a:schemeClr val="accent1"/>
-          </a:fillRef>
-          <a:effectRef idx="2">
-            <a:schemeClr val="accent1"/>
-          </a:effectRef>
-          <a:fontRef idx="minor">
-            <a:schemeClr val="lt1"/>
-          </a:fontRef>
-        </p:style>
-        <p:txBody>
-          <a:bodyPr rtlCol="0" anchor="ctr"/>
-          <a:lstStyle/>
-          <a:p>
-            <a:pPr algn="ctr"/>
-          </a:p>
-        </p:txBody>
-      </p:sp>
-      <p:pic>
-        <p:nvPicPr>
-          <p:cNvPr id="6" name="Picture 5" descr="laptop-code-live-demo.jpg"/>
-          <p:cNvPicPr>
-            <a:picLocks noChangeAspect="1"/>
-          </p:cNvPicPr>
-          <p:nvPr/>
-        </p:nvPicPr>
-        <p:blipFill>
-          <a:blip r:embed="rId2"/>
-          <a:stretch>
-            <a:fillRect/>
-          </a:stretch>
-        </p:blipFill>
-        <p:spPr>
-          <a:xfrm>
-            <a:off x="5870301" y="1646965"/>
-            <a:ext cx="5864193" cy="3911541"/>
-          </a:xfrm>
-          <a:prstGeom prst="rect">
-            <a:avLst/>
-          </a:prstGeom>
-        </p:spPr>
-      </p:pic>
-      <p:sp>
-        <p:nvSpPr>
-          <p:cNvPr id="7" name="TextBox 6"/>
+          <p:cNvPr id="5" name="TextBox 4"/>
           <p:cNvSpPr txBox="1"/>
           <p:nvPr/>
         </p:nvSpPr>
         <p:spPr>
           <a:xfrm>
-            <a:off x="5870301" y="5961888"/>
-            <a:ext cx="5864193" cy="320040"/>
-          </a:xfrm>
-          <a:prstGeom prst="rect">
-            <a:avLst/>
-          </a:prstGeom>
-          <a:noFill/>
-        </p:spPr>
-        <p:txBody>
-          <a:bodyPr wrap="square">
-            <a:spAutoFit/>
-          </a:bodyPr>
-          <a:lstStyle/>
-          <a:p>
-            <a:pPr algn="ctr"/>
-            <a:r>
-              <a:rPr sz="1100" b="0" i="1">
-                <a:solidFill>
-                  <a:srgbClr val="666666"/>
-                </a:solidFill>
-                <a:latin typeface="Calibri"/>
-              </a:rPr>
-              <a:t>Foto: olia danilevich · Pexels</a:t>
-            </a:r>
-          </a:p>
-        </p:txBody>
-      </p:sp>
-      <p:sp>
-        <p:nvSpPr>
-          <p:cNvPr id="8" name="TextBox 7"/>
-          <p:cNvSpPr txBox="1"/>
-          <p:nvPr/>
-        </p:nvSpPr>
-        <p:spPr>
-          <a:xfrm>
-            <a:off x="457200" y="1353312"/>
-            <a:ext cx="5093061" cy="5047488"/>
+            <a:off x="457200" y="1170432"/>
+            <a:ext cx="11277295" cy="5230368"/>
           </a:xfrm>
           <a:prstGeom prst="rect">
             <a:avLst/>
@@ -18529,12 +17521,55 @@
               </a:rPr>
               <a:t>Qué observar:</a:t>
             </a:r>
-          </a:p>
-        </p:txBody>
-      </p:sp>
-      <p:sp>
-        <p:nvSpPr>
-          <p:cNvPr id="9" name="TextBox 8"/>
+            <a:r>
+              <a:rPr sz="2000" b="0" i="0">
+                <a:solidFill>
+                  <a:srgbClr val="333333"/>
+                </a:solidFill>
+                <a:latin typeface="Calibri"/>
+              </a:rPr>
+              <a:t> el plan pasa de Seq Scan a Index Scan using con el nombre del indice, y con la particion la consulta de un ano lee una sola particion.</a:t>
+            </a:r>
+          </a:p>
+          <a:p>
+            <a:pPr>
+              <a:spcAft>
+                <a:spcPts val="800"/>
+              </a:spcAft>
+            </a:pPr>
+            <a:r>
+              <a:rPr sz="2000" b="0" i="0">
+                <a:solidFill>
+                  <a:srgbClr val="333333"/>
+                </a:solidFill>
+                <a:latin typeface="Calibri"/>
+              </a:rPr>
+              <a:t>–   </a:t>
+            </a:r>
+            <a:r>
+              <a:rPr sz="2000" b="1" i="0">
+                <a:solidFill>
+                  <a:srgbClr val="333333"/>
+                </a:solidFill>
+                <a:latin typeface="Calibri"/>
+              </a:rPr>
+              <a:t>Qué observar:</a:t>
+            </a:r>
+            <a:r>
+              <a:rPr sz="2000" b="0" i="0">
+                <a:solidFill>
+                  <a:srgbClr val="333333"/>
+                </a:solidFill>
+                <a:latin typeface="Calibri"/>
+              </a:rPr>
+              <a:t> despues de crear el indice hace falta ANALYZE: sin estadisticas frescas el planeador puede seguir eligiendo el Seq Scan.</a:t>
+            </a:r>
+          </a:p>
+        </p:txBody>
+      </p:sp>
+      <p:sp>
+        <p:nvSpPr>
+          <p:cNvPr id="6" name="TextBox 5"/>
           <p:cNvSpPr txBox="1"/>
           <p:nvPr/>
         </p:nvSpPr>
